--- a/BlueprintPPT/AX_Hackathon_Phase1_Blueprint_FILLED.pptx
+++ b/BlueprintPPT/AX_Hackathon_Phase1_Blueprint_FILLED.pptx
@@ -17,6 +17,11 @@
     <p:sldId id="265" r:id="rId16"/>
     <p:sldId id="266" r:id="rId17"/>
     <p:sldId id="267" r:id="rId18"/>
+    <p:sldId id="268" r:id="rId19"/>
+    <p:sldId id="269" r:id="rId20"/>
+    <p:sldId id="270" r:id="rId21"/>
+    <p:sldId id="271" r:id="rId22"/>
+    <p:sldId id="272" r:id="rId23"/>
   </p:sldIdLst>
   <p:sldSz cx="12191695" cy="6858000" type="screen4x3"/>
   <p:notesSz cx="6858000" cy="9144000"/>
@@ -3258,7 +3263,7 @@
                 </a:solidFill>
                 <a:latin typeface="Calibri"/>
               </a:rPr>
-              <a:t>1 / 12</a:t>
+              <a:t>1 / 17</a:t>
             </a:r>
           </a:p>
         </p:txBody>
@@ -3725,7 +3730,7 @@
                 </a:solidFill>
                 <a:latin typeface="Calibri"/>
               </a:rPr>
-              <a:t>Open Datasets — Used &amp; To Be Published</a:t>
+              <a:t>Phase-1 Empirical — Deployment Latency &amp; Cocktail-Party</a:t>
             </a:r>
           </a:p>
         </p:txBody>
@@ -3803,21 +3808,90 @@
                 </a:solidFill>
                 <a:latin typeface="Calibri"/>
               </a:rPr>
-              <a:t>10 / 12</a:t>
-            </a:r>
-          </a:p>
-        </p:txBody>
-      </p:sp>
-      <p:sp>
-        <p:nvSpPr>
-          <p:cNvPr id="6" name="TextBox 5"/>
-          <p:cNvSpPr txBox="1"/>
-          <p:nvPr/>
-        </p:nvSpPr>
-        <p:spPr>
-          <a:xfrm>
-            <a:off x="457200" y="960120"/>
-            <a:ext cx="11247120" cy="365760"/>
+              <a:t>10 / 17</a:t>
+            </a:r>
+          </a:p>
+        </p:txBody>
+      </p:sp>
+      <p:pic>
+        <p:nvPicPr>
+          <p:cNvPr id="6" name="Picture 5" descr="11_deploy_metrics.png"/>
+          <p:cNvPicPr>
+            <a:picLocks noChangeAspect="1"/>
+          </p:cNvPicPr>
+          <p:nvPr/>
+        </p:nvPicPr>
+        <p:blipFill>
+          <a:blip r:embed="rId2"/>
+          <a:stretch>
+            <a:fillRect/>
+          </a:stretch>
+        </p:blipFill>
+        <p:spPr>
+          <a:xfrm>
+            <a:off x="365760" y="1072422"/>
+            <a:ext cx="6675120" cy="2518595"/>
+          </a:xfrm>
+          <a:prstGeom prst="rect">
+            <a:avLst/>
+          </a:prstGeom>
+        </p:spPr>
+      </p:pic>
+      <p:sp>
+        <p:nvSpPr>
+          <p:cNvPr id="7" name="Rounded Rectangle 6"/>
+          <p:cNvSpPr/>
+          <p:nvPr/>
+        </p:nvSpPr>
+        <p:spPr>
+          <a:xfrm>
+            <a:off x="365760" y="3840480"/>
+            <a:ext cx="6675120" cy="2697480"/>
+          </a:xfrm>
+          <a:prstGeom prst="roundRect">
+            <a:avLst>
+              <a:gd name="adj" fmla="val 6000"/>
+            </a:avLst>
+          </a:prstGeom>
+          <a:solidFill>
+            <a:srgbClr val="ECF2FC"/>
+          </a:solidFill>
+          <a:ln w="9525">
+            <a:solidFill>
+              <a:srgbClr val="144BC4"/>
+            </a:solidFill>
+          </a:ln>
+        </p:spPr>
+        <p:style>
+          <a:lnRef idx="1">
+            <a:schemeClr val="accent1"/>
+          </a:lnRef>
+          <a:fillRef idx="3">
+            <a:schemeClr val="accent1"/>
+          </a:fillRef>
+          <a:effectRef idx="2">
+            <a:schemeClr val="accent1"/>
+          </a:effectRef>
+          <a:fontRef idx="minor">
+            <a:schemeClr val="lt1"/>
+          </a:fontRef>
+        </p:style>
+        <p:txBody>
+          <a:bodyPr rtlCol="0" anchor="ctr"/>
+          <a:lstStyle/>
+          <a:p/>
+        </p:txBody>
+      </p:sp>
+      <p:sp>
+        <p:nvSpPr>
+          <p:cNvPr id="8" name="TextBox 7"/>
+          <p:cNvSpPr txBox="1"/>
+          <p:nvPr/>
+        </p:nvSpPr>
+        <p:spPr>
+          <a:xfrm>
+            <a:off x="548640" y="3886200"/>
+            <a:ext cx="6400800" cy="2651760"/>
           </a:xfrm>
           <a:prstGeom prst="rect">
             <a:avLst/>
@@ -3836,27 +3910,199 @@
               </a:spcAft>
             </a:pPr>
             <a:r>
-              <a:rPr sz="1500" b="1" i="0">
-                <a:solidFill>
-                  <a:srgbClr val="003B8E"/>
-                </a:solidFill>
-                <a:latin typeface="Calibri"/>
-              </a:rPr>
-              <a:t>To be used  (all permissive licences, downloadable)</a:t>
-            </a:r>
-          </a:p>
-        </p:txBody>
-      </p:sp>
-      <p:sp>
-        <p:nvSpPr>
-          <p:cNvPr id="7" name="Rounded Rectangle 6"/>
+              <a:rPr sz="1300" b="1" i="0">
+                <a:solidFill>
+                  <a:srgbClr val="144BC4"/>
+                </a:solidFill>
+                <a:latin typeface="Calibri"/>
+              </a:rPr>
+              <a:t>xRT  ·  comfortable PASS</a:t>
+            </a:r>
+          </a:p>
+          <a:p>
+            <a:pPr algn="l">
+              <a:spcAft>
+                <a:spcPts val="600"/>
+              </a:spcAft>
+            </a:pPr>
+            <a:r>
+              <a:rPr sz="1100" b="0" i="0">
+                <a:solidFill>
+                  <a:srgbClr val="404856"/>
+                </a:solidFill>
+                <a:latin typeface="Calibri"/>
+              </a:rPr>
+              <a:t>Pi 4B INT8: </a:t>
+            </a:r>
+            <a:r>
+              <a:rPr sz="1300" b="1" i="0">
+                <a:solidFill>
+                  <a:srgbClr val="144BC4"/>
+                </a:solidFill>
+                <a:latin typeface="Calibri"/>
+              </a:rPr>
+              <a:t>12 ms</a:t>
+            </a:r>
+            <a:r>
+              <a:rPr sz="1100" b="0" i="0">
+                <a:solidFill>
+                  <a:srgbClr val="404856"/>
+                </a:solidFill>
+                <a:latin typeface="Calibri"/>
+              </a:rPr>
+              <a:t> end-to-end vs </a:t>
+            </a:r>
+            <a:r>
+              <a:rPr sz="1300" b="1" i="0">
+                <a:solidFill>
+                  <a:srgbClr val="144BC4"/>
+                </a:solidFill>
+                <a:latin typeface="Calibri"/>
+              </a:rPr>
+              <a:t>200 ms</a:t>
+            </a:r>
+            <a:r>
+              <a:rPr sz="1100" b="0" i="0">
+                <a:solidFill>
+                  <a:srgbClr val="404856"/>
+                </a:solidFill>
+                <a:latin typeface="Calibri"/>
+              </a:rPr>
+              <a:t> budget — </a:t>
+            </a:r>
+            <a:r>
+              <a:rPr sz="1300" b="1" i="0">
+                <a:solidFill>
+                  <a:srgbClr val="1B7F4F"/>
+                </a:solidFill>
+                <a:latin typeface="Calibri"/>
+              </a:rPr>
+              <a:t>17× headroom</a:t>
+            </a:r>
+            <a:r>
+              <a:rPr sz="1100" b="0" i="0">
+                <a:solidFill>
+                  <a:srgbClr val="404856"/>
+                </a:solidFill>
+                <a:latin typeface="Calibri"/>
+              </a:rPr>
+              <a:t>. Even FP32 at 17 ms clears 12×.</a:t>
+            </a:r>
+          </a:p>
+          <a:p>
+            <a:pPr algn="l">
+              <a:spcAft>
+                <a:spcPts val="300"/>
+              </a:spcAft>
+            </a:pPr>
+            <a:r>
+              <a:rPr sz="1200" b="1" i="0">
+                <a:solidFill>
+                  <a:srgbClr val="0F1B3D"/>
+                </a:solidFill>
+                <a:latin typeface="Calibri"/>
+              </a:rPr>
+              <a:t>Param + size budget</a:t>
+            </a:r>
+          </a:p>
+          <a:p>
+            <a:pPr algn="l">
+              <a:spcAft>
+                <a:spcPts val="600"/>
+              </a:spcAft>
+            </a:pPr>
+            <a:r>
+              <a:rPr sz="1100" b="0" i="0">
+                <a:solidFill>
+                  <a:srgbClr val="404856"/>
+                </a:solidFill>
+                <a:latin typeface="Calibri"/>
+              </a:rPr>
+              <a:t>499.6 K params (17 % of 3 M cap), INT8 ONNX ships at </a:t>
+            </a:r>
+            <a:r>
+              <a:rPr sz="1200" b="1" i="0">
+                <a:solidFill>
+                  <a:srgbClr val="144BC4"/>
+                </a:solidFill>
+                <a:latin typeface="Calibri"/>
+              </a:rPr>
+              <a:t>0.79 MB</a:t>
+            </a:r>
+            <a:r>
+              <a:rPr sz="1100" b="0" i="0">
+                <a:solidFill>
+                  <a:srgbClr val="404856"/>
+                </a:solidFill>
+                <a:latin typeface="Calibri"/>
+              </a:rPr>
+              <a:t> (2.6× shrink from 2.05 MB FP32).</a:t>
+            </a:r>
+          </a:p>
+          <a:p>
+            <a:pPr algn="l">
+              <a:spcAft>
+                <a:spcPts val="300"/>
+              </a:spcAft>
+            </a:pPr>
+            <a:r>
+              <a:rPr sz="1200" b="1" i="0">
+                <a:solidFill>
+                  <a:srgbClr val="0F1B3D"/>
+                </a:solidFill>
+                <a:latin typeface="Calibri"/>
+              </a:rPr>
+              <a:t>Numeric fidelity</a:t>
+            </a:r>
+          </a:p>
+          <a:p>
+            <a:pPr algn="l"/>
+            <a:r>
+              <a:rPr sz="1100" b="0" i="0">
+                <a:solidFill>
+                  <a:srgbClr val="404856"/>
+                </a:solidFill>
+                <a:latin typeface="Calibri"/>
+              </a:rPr>
+              <a:t>FP32 ONNX vs PyTorch max-abs-diff &lt; 3×10⁻⁶ (essentially exact); INT8 drift compensated by QAT (Stage 4).</a:t>
+            </a:r>
+          </a:p>
+        </p:txBody>
+      </p:sp>
+      <p:pic>
+        <p:nvPicPr>
+          <p:cNvPr id="9" name="Picture 8" descr="12_babble_robustness.png"/>
+          <p:cNvPicPr>
+            <a:picLocks noChangeAspect="1"/>
+          </p:cNvPicPr>
+          <p:nvPr/>
+        </p:nvPicPr>
+        <p:blipFill>
+          <a:blip r:embed="rId3"/>
+          <a:stretch>
+            <a:fillRect/>
+          </a:stretch>
+        </p:blipFill>
+        <p:spPr>
+          <a:xfrm>
+            <a:off x="7269480" y="1501494"/>
+            <a:ext cx="4572000" cy="1660451"/>
+          </a:xfrm>
+          <a:prstGeom prst="rect">
+            <a:avLst/>
+          </a:prstGeom>
+        </p:spPr>
+      </p:pic>
+      <p:sp>
+        <p:nvSpPr>
+          <p:cNvPr id="10" name="Rounded Rectangle 9"/>
           <p:cNvSpPr/>
           <p:nvPr/>
         </p:nvSpPr>
         <p:spPr>
           <a:xfrm>
-            <a:off x="457200" y="1371600"/>
-            <a:ext cx="11247120" cy="3383280"/>
+            <a:off x="7269480" y="3840480"/>
+            <a:ext cx="4572000" cy="2697480"/>
           </a:xfrm>
           <a:prstGeom prst="roundRect">
             <a:avLst>
@@ -3864,11 +4110,11 @@
             </a:avLst>
           </a:prstGeom>
           <a:solidFill>
-            <a:srgbClr val="FFFFFF"/>
+            <a:srgbClr val="E7F4EC"/>
           </a:solidFill>
           <a:ln w="9525">
             <a:solidFill>
-              <a:srgbClr val="D9DEE6"/>
+              <a:srgbClr val="1B7F4F"/>
             </a:solidFill>
           </a:ln>
         </p:spPr>
@@ -3894,921 +4140,14 @@
       </p:sp>
       <p:sp>
         <p:nvSpPr>
-          <p:cNvPr id="8" name="Rectangle 7"/>
-          <p:cNvSpPr/>
-          <p:nvPr/>
-        </p:nvSpPr>
-        <p:spPr>
-          <a:xfrm>
-            <a:off x="640080" y="1463040"/>
-            <a:ext cx="10881360" cy="384048"/>
-          </a:xfrm>
-          <a:prstGeom prst="rect">
-            <a:avLst/>
-          </a:prstGeom>
-          <a:solidFill>
-            <a:srgbClr val="144BC4"/>
-          </a:solidFill>
-          <a:ln>
-            <a:noFill/>
-          </a:ln>
-        </p:spPr>
-        <p:style>
-          <a:lnRef idx="1">
-            <a:schemeClr val="accent1"/>
-          </a:lnRef>
-          <a:fillRef idx="3">
-            <a:schemeClr val="accent1"/>
-          </a:fillRef>
-          <a:effectRef idx="2">
-            <a:schemeClr val="accent1"/>
-          </a:effectRef>
-          <a:fontRef idx="minor">
-            <a:schemeClr val="lt1"/>
-          </a:fontRef>
-        </p:style>
-        <p:txBody>
-          <a:bodyPr rtlCol="0" anchor="ctr"/>
-          <a:lstStyle/>
-          <a:p>
-            <a:pPr algn="ctr"/>
-          </a:p>
-        </p:txBody>
-      </p:sp>
-      <p:sp>
-        <p:nvSpPr>
-          <p:cNvPr id="9" name="TextBox 8"/>
-          <p:cNvSpPr txBox="1"/>
-          <p:nvPr/>
-        </p:nvSpPr>
-        <p:spPr>
-          <a:xfrm>
-            <a:off x="731520" y="1463040"/>
-            <a:ext cx="3017520" cy="384048"/>
-          </a:xfrm>
-          <a:prstGeom prst="rect">
-            <a:avLst/>
-          </a:prstGeom>
-          <a:noFill/>
-        </p:spPr>
-        <p:txBody>
-          <a:bodyPr wrap="square" lIns="73152" rIns="73152" tIns="43891" bIns="43891" anchor="ctr">
-            <a:spAutoFit/>
-          </a:bodyPr>
-          <a:lstStyle/>
-          <a:p>
-            <a:pPr algn="l"/>
-            <a:r>
-              <a:rPr sz="1100" b="1" i="0">
-                <a:solidFill>
-                  <a:srgbClr val="FFFFFF"/>
-                </a:solidFill>
-                <a:latin typeface="Calibri"/>
-              </a:rPr>
-              <a:t>Dataset</a:t>
-            </a:r>
-          </a:p>
-        </p:txBody>
-      </p:sp>
-      <p:sp>
-        <p:nvSpPr>
-          <p:cNvPr id="10" name="TextBox 9"/>
-          <p:cNvSpPr txBox="1"/>
-          <p:nvPr/>
-        </p:nvSpPr>
-        <p:spPr>
-          <a:xfrm>
-            <a:off x="3840480" y="1463040"/>
-            <a:ext cx="5943600" cy="384048"/>
-          </a:xfrm>
-          <a:prstGeom prst="rect">
-            <a:avLst/>
-          </a:prstGeom>
-          <a:noFill/>
-        </p:spPr>
-        <p:txBody>
-          <a:bodyPr wrap="square" lIns="73152" rIns="73152" tIns="43891" bIns="43891" anchor="ctr">
-            <a:spAutoFit/>
-          </a:bodyPr>
-          <a:lstStyle/>
-          <a:p>
-            <a:pPr algn="l"/>
-            <a:r>
-              <a:rPr sz="1100" b="1" i="0">
-                <a:solidFill>
-                  <a:srgbClr val="FFFFFF"/>
-                </a:solidFill>
-                <a:latin typeface="Calibri"/>
-              </a:rPr>
-              <a:t>Role</a:t>
-            </a:r>
-          </a:p>
-        </p:txBody>
-      </p:sp>
-      <p:sp>
-        <p:nvSpPr>
           <p:cNvPr id="11" name="TextBox 10"/>
           <p:cNvSpPr txBox="1"/>
           <p:nvPr/>
         </p:nvSpPr>
         <p:spPr>
           <a:xfrm>
-            <a:off x="9875520" y="1463040"/>
-            <a:ext cx="1737360" cy="384048"/>
-          </a:xfrm>
-          <a:prstGeom prst="rect">
-            <a:avLst/>
-          </a:prstGeom>
-          <a:noFill/>
-        </p:spPr>
-        <p:txBody>
-          <a:bodyPr wrap="square" lIns="73152" rIns="73152" tIns="43891" bIns="43891" anchor="ctr">
-            <a:spAutoFit/>
-          </a:bodyPr>
-          <a:lstStyle/>
-          <a:p>
-            <a:pPr algn="l"/>
-            <a:r>
-              <a:rPr sz="1100" b="1" i="0">
-                <a:solidFill>
-                  <a:srgbClr val="FFFFFF"/>
-                </a:solidFill>
-                <a:latin typeface="Calibri"/>
-              </a:rPr>
-              <a:t>Licence</a:t>
-            </a:r>
-          </a:p>
-        </p:txBody>
-      </p:sp>
-      <p:sp>
-        <p:nvSpPr>
-          <p:cNvPr id="12" name="Rectangle 11"/>
-          <p:cNvSpPr/>
-          <p:nvPr/>
-        </p:nvSpPr>
-        <p:spPr>
-          <a:xfrm>
-            <a:off x="640080" y="1874520"/>
-            <a:ext cx="10881360" cy="411480"/>
-          </a:xfrm>
-          <a:prstGeom prst="rect">
-            <a:avLst/>
-          </a:prstGeom>
-          <a:solidFill>
-            <a:srgbClr val="F4F7FB"/>
-          </a:solidFill>
-          <a:ln>
-            <a:noFill/>
-          </a:ln>
-        </p:spPr>
-        <p:style>
-          <a:lnRef idx="1">
-            <a:schemeClr val="accent1"/>
-          </a:lnRef>
-          <a:fillRef idx="3">
-            <a:schemeClr val="accent1"/>
-          </a:fillRef>
-          <a:effectRef idx="2">
-            <a:schemeClr val="accent1"/>
-          </a:effectRef>
-          <a:fontRef idx="minor">
-            <a:schemeClr val="lt1"/>
-          </a:fontRef>
-        </p:style>
-        <p:txBody>
-          <a:bodyPr rtlCol="0" anchor="ctr"/>
-          <a:lstStyle/>
-          <a:p>
-            <a:pPr algn="ctr"/>
-          </a:p>
-        </p:txBody>
-      </p:sp>
-      <p:sp>
-        <p:nvSpPr>
-          <p:cNvPr id="13" name="TextBox 12"/>
-          <p:cNvSpPr txBox="1"/>
-          <p:nvPr/>
-        </p:nvSpPr>
-        <p:spPr>
-          <a:xfrm>
-            <a:off x="731520" y="1874520"/>
-            <a:ext cx="3017520" cy="411480"/>
-          </a:xfrm>
-          <a:prstGeom prst="rect">
-            <a:avLst/>
-          </a:prstGeom>
-          <a:noFill/>
-        </p:spPr>
-        <p:txBody>
-          <a:bodyPr wrap="square" lIns="73152" rIns="73152" tIns="43891" bIns="43891" anchor="ctr">
-            <a:spAutoFit/>
-          </a:bodyPr>
-          <a:lstStyle/>
-          <a:p>
-            <a:pPr algn="l"/>
-            <a:r>
-              <a:rPr sz="1100" b="1" i="0">
-                <a:solidFill>
-                  <a:srgbClr val="0F1B3D"/>
-                </a:solidFill>
-                <a:latin typeface="Calibri"/>
-              </a:rPr>
-              <a:t>Google Speech Commands v0.02</a:t>
-            </a:r>
-          </a:p>
-        </p:txBody>
-      </p:sp>
-      <p:sp>
-        <p:nvSpPr>
-          <p:cNvPr id="14" name="TextBox 13"/>
-          <p:cNvSpPr txBox="1"/>
-          <p:nvPr/>
-        </p:nvSpPr>
-        <p:spPr>
-          <a:xfrm>
-            <a:off x="3840480" y="1874520"/>
-            <a:ext cx="5943600" cy="411480"/>
-          </a:xfrm>
-          <a:prstGeom prst="rect">
-            <a:avLst/>
-          </a:prstGeom>
-          <a:noFill/>
-        </p:spPr>
-        <p:txBody>
-          <a:bodyPr wrap="square" lIns="73152" rIns="73152" tIns="43891" bIns="43891" anchor="ctr">
-            <a:spAutoFit/>
-          </a:bodyPr>
-          <a:lstStyle/>
-          <a:p>
-            <a:pPr algn="l"/>
-            <a:r>
-              <a:rPr sz="1100" b="0" i="0">
-                <a:solidFill>
-                  <a:srgbClr val="404856"/>
-                </a:solidFill>
-                <a:latin typeface="Calibri"/>
-              </a:rPr>
-              <a:t>KWS positives + general negatives</a:t>
-            </a:r>
-          </a:p>
-        </p:txBody>
-      </p:sp>
-      <p:sp>
-        <p:nvSpPr>
-          <p:cNvPr id="15" name="TextBox 14"/>
-          <p:cNvSpPr txBox="1"/>
-          <p:nvPr/>
-        </p:nvSpPr>
-        <p:spPr>
-          <a:xfrm>
-            <a:off x="9875520" y="1874520"/>
-            <a:ext cx="1737360" cy="411480"/>
-          </a:xfrm>
-          <a:prstGeom prst="rect">
-            <a:avLst/>
-          </a:prstGeom>
-          <a:noFill/>
-        </p:spPr>
-        <p:txBody>
-          <a:bodyPr wrap="square" lIns="73152" rIns="73152" tIns="43891" bIns="43891" anchor="ctr">
-            <a:spAutoFit/>
-          </a:bodyPr>
-          <a:lstStyle/>
-          <a:p>
-            <a:pPr algn="l"/>
-            <a:r>
-              <a:rPr sz="1100" b="0" i="0">
-                <a:solidFill>
-                  <a:srgbClr val="404856"/>
-                </a:solidFill>
-                <a:latin typeface="Calibri"/>
-              </a:rPr>
-              <a:t>CC-BY 4.0</a:t>
-            </a:r>
-          </a:p>
-        </p:txBody>
-      </p:sp>
-      <p:sp>
-        <p:nvSpPr>
-          <p:cNvPr id="16" name="TextBox 15"/>
-          <p:cNvSpPr txBox="1"/>
-          <p:nvPr/>
-        </p:nvSpPr>
-        <p:spPr>
-          <a:xfrm>
-            <a:off x="731520" y="2286000"/>
-            <a:ext cx="3017520" cy="411480"/>
-          </a:xfrm>
-          <a:prstGeom prst="rect">
-            <a:avLst/>
-          </a:prstGeom>
-          <a:noFill/>
-        </p:spPr>
-        <p:txBody>
-          <a:bodyPr wrap="square" lIns="73152" rIns="73152" tIns="43891" bIns="43891" anchor="ctr">
-            <a:spAutoFit/>
-          </a:bodyPr>
-          <a:lstStyle/>
-          <a:p>
-            <a:pPr algn="l"/>
-            <a:r>
-              <a:rPr sz="1100" b="1" i="0">
-                <a:solidFill>
-                  <a:srgbClr val="0F1B3D"/>
-                </a:solidFill>
-                <a:latin typeface="Calibri"/>
-              </a:rPr>
-              <a:t>VoxCeleb1</a:t>
-            </a:r>
-          </a:p>
-        </p:txBody>
-      </p:sp>
-      <p:sp>
-        <p:nvSpPr>
-          <p:cNvPr id="17" name="TextBox 16"/>
-          <p:cNvSpPr txBox="1"/>
-          <p:nvPr/>
-        </p:nvSpPr>
-        <p:spPr>
-          <a:xfrm>
-            <a:off x="3840480" y="2286000"/>
-            <a:ext cx="5943600" cy="411480"/>
-          </a:xfrm>
-          <a:prstGeom prst="rect">
-            <a:avLst/>
-          </a:prstGeom>
-          <a:noFill/>
-        </p:spPr>
-        <p:txBody>
-          <a:bodyPr wrap="square" lIns="73152" rIns="73152" tIns="43891" bIns="43891" anchor="ctr">
-            <a:spAutoFit/>
-          </a:bodyPr>
-          <a:lstStyle/>
-          <a:p>
-            <a:pPr algn="l"/>
-            <a:r>
-              <a:rPr sz="1100" b="0" i="0">
-                <a:solidFill>
-                  <a:srgbClr val="404856"/>
-                </a:solidFill>
-                <a:latin typeface="Calibri"/>
-              </a:rPr>
-              <a:t>Speaker verification + impostor pool</a:t>
-            </a:r>
-          </a:p>
-        </p:txBody>
-      </p:sp>
-      <p:sp>
-        <p:nvSpPr>
-          <p:cNvPr id="18" name="TextBox 17"/>
-          <p:cNvSpPr txBox="1"/>
-          <p:nvPr/>
-        </p:nvSpPr>
-        <p:spPr>
-          <a:xfrm>
-            <a:off x="9875520" y="2286000"/>
-            <a:ext cx="1737360" cy="411480"/>
-          </a:xfrm>
-          <a:prstGeom prst="rect">
-            <a:avLst/>
-          </a:prstGeom>
-          <a:noFill/>
-        </p:spPr>
-        <p:txBody>
-          <a:bodyPr wrap="square" lIns="73152" rIns="73152" tIns="43891" bIns="43891" anchor="ctr">
-            <a:spAutoFit/>
-          </a:bodyPr>
-          <a:lstStyle/>
-          <a:p>
-            <a:pPr algn="l"/>
-            <a:r>
-              <a:rPr sz="1100" b="0" i="0">
-                <a:solidFill>
-                  <a:srgbClr val="404856"/>
-                </a:solidFill>
-                <a:latin typeface="Calibri"/>
-              </a:rPr>
-              <a:t>CC-BY 4.0</a:t>
-            </a:r>
-          </a:p>
-        </p:txBody>
-      </p:sp>
-      <p:sp>
-        <p:nvSpPr>
-          <p:cNvPr id="19" name="Rectangle 18"/>
-          <p:cNvSpPr/>
-          <p:nvPr/>
-        </p:nvSpPr>
-        <p:spPr>
-          <a:xfrm>
-            <a:off x="640080" y="2697480"/>
-            <a:ext cx="10881360" cy="411480"/>
-          </a:xfrm>
-          <a:prstGeom prst="rect">
-            <a:avLst/>
-          </a:prstGeom>
-          <a:solidFill>
-            <a:srgbClr val="F4F7FB"/>
-          </a:solidFill>
-          <a:ln>
-            <a:noFill/>
-          </a:ln>
-        </p:spPr>
-        <p:style>
-          <a:lnRef idx="1">
-            <a:schemeClr val="accent1"/>
-          </a:lnRef>
-          <a:fillRef idx="3">
-            <a:schemeClr val="accent1"/>
-          </a:fillRef>
-          <a:effectRef idx="2">
-            <a:schemeClr val="accent1"/>
-          </a:effectRef>
-          <a:fontRef idx="minor">
-            <a:schemeClr val="lt1"/>
-          </a:fontRef>
-        </p:style>
-        <p:txBody>
-          <a:bodyPr rtlCol="0" anchor="ctr"/>
-          <a:lstStyle/>
-          <a:p>
-            <a:pPr algn="ctr"/>
-          </a:p>
-        </p:txBody>
-      </p:sp>
-      <p:sp>
-        <p:nvSpPr>
-          <p:cNvPr id="20" name="TextBox 19"/>
-          <p:cNvSpPr txBox="1"/>
-          <p:nvPr/>
-        </p:nvSpPr>
-        <p:spPr>
-          <a:xfrm>
-            <a:off x="731520" y="2697480"/>
-            <a:ext cx="3017520" cy="411480"/>
-          </a:xfrm>
-          <a:prstGeom prst="rect">
-            <a:avLst/>
-          </a:prstGeom>
-          <a:noFill/>
-        </p:spPr>
-        <p:txBody>
-          <a:bodyPr wrap="square" lIns="73152" rIns="73152" tIns="43891" bIns="43891" anchor="ctr">
-            <a:spAutoFit/>
-          </a:bodyPr>
-          <a:lstStyle/>
-          <a:p>
-            <a:pPr algn="l"/>
-            <a:r>
-              <a:rPr sz="1100" b="1" i="0">
-                <a:solidFill>
-                  <a:srgbClr val="0F1B3D"/>
-                </a:solidFill>
-                <a:latin typeface="Calibri"/>
-              </a:rPr>
-              <a:t>LibriPhrase</a:t>
-            </a:r>
-          </a:p>
-        </p:txBody>
-      </p:sp>
-      <p:sp>
-        <p:nvSpPr>
-          <p:cNvPr id="21" name="TextBox 20"/>
-          <p:cNvSpPr txBox="1"/>
-          <p:nvPr/>
-        </p:nvSpPr>
-        <p:spPr>
-          <a:xfrm>
-            <a:off x="3840480" y="2697480"/>
-            <a:ext cx="5943600" cy="411480"/>
-          </a:xfrm>
-          <a:prstGeom prst="rect">
-            <a:avLst/>
-          </a:prstGeom>
-          <a:noFill/>
-        </p:spPr>
-        <p:txBody>
-          <a:bodyPr wrap="square" lIns="73152" rIns="73152" tIns="43891" bIns="43891" anchor="ctr">
-            <a:spAutoFit/>
-          </a:bodyPr>
-          <a:lstStyle/>
-          <a:p>
-            <a:pPr algn="l"/>
-            <a:r>
-              <a:rPr sz="1100" b="0" i="0">
-                <a:solidFill>
-                  <a:srgbClr val="404856"/>
-                </a:solidFill>
-                <a:latin typeface="Calibri"/>
-              </a:rPr>
-              <a:t>Joint phrase + speaker fine-tuning</a:t>
-            </a:r>
-          </a:p>
-        </p:txBody>
-      </p:sp>
-      <p:sp>
-        <p:nvSpPr>
-          <p:cNvPr id="22" name="TextBox 21"/>
-          <p:cNvSpPr txBox="1"/>
-          <p:nvPr/>
-        </p:nvSpPr>
-        <p:spPr>
-          <a:xfrm>
-            <a:off x="9875520" y="2697480"/>
-            <a:ext cx="1737360" cy="411480"/>
-          </a:xfrm>
-          <a:prstGeom prst="rect">
-            <a:avLst/>
-          </a:prstGeom>
-          <a:noFill/>
-        </p:spPr>
-        <p:txBody>
-          <a:bodyPr wrap="square" lIns="73152" rIns="73152" tIns="43891" bIns="43891" anchor="ctr">
-            <a:spAutoFit/>
-          </a:bodyPr>
-          <a:lstStyle/>
-          <a:p>
-            <a:pPr algn="l"/>
-            <a:r>
-              <a:rPr sz="1100" b="0" i="0">
-                <a:solidFill>
-                  <a:srgbClr val="404856"/>
-                </a:solidFill>
-                <a:latin typeface="Calibri"/>
-              </a:rPr>
-              <a:t>MIT</a:t>
-            </a:r>
-          </a:p>
-        </p:txBody>
-      </p:sp>
-      <p:sp>
-        <p:nvSpPr>
-          <p:cNvPr id="23" name="TextBox 22"/>
-          <p:cNvSpPr txBox="1"/>
-          <p:nvPr/>
-        </p:nvSpPr>
-        <p:spPr>
-          <a:xfrm>
-            <a:off x="731520" y="3108960"/>
-            <a:ext cx="3017520" cy="411480"/>
-          </a:xfrm>
-          <a:prstGeom prst="rect">
-            <a:avLst/>
-          </a:prstGeom>
-          <a:noFill/>
-        </p:spPr>
-        <p:txBody>
-          <a:bodyPr wrap="square" lIns="73152" rIns="73152" tIns="43891" bIns="43891" anchor="ctr">
-            <a:spAutoFit/>
-          </a:bodyPr>
-          <a:lstStyle/>
-          <a:p>
-            <a:pPr algn="l"/>
-            <a:r>
-              <a:rPr sz="1100" b="1" i="0">
-                <a:solidFill>
-                  <a:srgbClr val="0F1B3D"/>
-                </a:solidFill>
-                <a:latin typeface="Calibri"/>
-              </a:rPr>
-              <a:t>MUSAN</a:t>
-            </a:r>
-          </a:p>
-        </p:txBody>
-      </p:sp>
-      <p:sp>
-        <p:nvSpPr>
-          <p:cNvPr id="24" name="TextBox 23"/>
-          <p:cNvSpPr txBox="1"/>
-          <p:nvPr/>
-        </p:nvSpPr>
-        <p:spPr>
-          <a:xfrm>
-            <a:off x="3840480" y="3108960"/>
-            <a:ext cx="5943600" cy="411480"/>
-          </a:xfrm>
-          <a:prstGeom prst="rect">
-            <a:avLst/>
-          </a:prstGeom>
-          <a:noFill/>
-        </p:spPr>
-        <p:txBody>
-          <a:bodyPr wrap="square" lIns="73152" rIns="73152" tIns="43891" bIns="43891" anchor="ctr">
-            <a:spAutoFit/>
-          </a:bodyPr>
-          <a:lstStyle/>
-          <a:p>
-            <a:pPr algn="l"/>
-            <a:r>
-              <a:rPr sz="1100" b="0" i="0">
-                <a:solidFill>
-                  <a:srgbClr val="404856"/>
-                </a:solidFill>
-                <a:latin typeface="Calibri"/>
-              </a:rPr>
-              <a:t>Crowd / babble / traffic noise injection (−5 to 30 dB)</a:t>
-            </a:r>
-          </a:p>
-        </p:txBody>
-      </p:sp>
-      <p:sp>
-        <p:nvSpPr>
-          <p:cNvPr id="25" name="TextBox 24"/>
-          <p:cNvSpPr txBox="1"/>
-          <p:nvPr/>
-        </p:nvSpPr>
-        <p:spPr>
-          <a:xfrm>
-            <a:off x="9875520" y="3108960"/>
-            <a:ext cx="1737360" cy="411480"/>
-          </a:xfrm>
-          <a:prstGeom prst="rect">
-            <a:avLst/>
-          </a:prstGeom>
-          <a:noFill/>
-        </p:spPr>
-        <p:txBody>
-          <a:bodyPr wrap="square" lIns="73152" rIns="73152" tIns="43891" bIns="43891" anchor="ctr">
-            <a:spAutoFit/>
-          </a:bodyPr>
-          <a:lstStyle/>
-          <a:p>
-            <a:pPr algn="l"/>
-            <a:r>
-              <a:rPr sz="1100" b="0" i="0">
-                <a:solidFill>
-                  <a:srgbClr val="404856"/>
-                </a:solidFill>
-                <a:latin typeface="Calibri"/>
-              </a:rPr>
-              <a:t>CC-BY 4.0</a:t>
-            </a:r>
-          </a:p>
-        </p:txBody>
-      </p:sp>
-      <p:sp>
-        <p:nvSpPr>
-          <p:cNvPr id="26" name="Rectangle 25"/>
-          <p:cNvSpPr/>
-          <p:nvPr/>
-        </p:nvSpPr>
-        <p:spPr>
-          <a:xfrm>
-            <a:off x="640080" y="3520440"/>
-            <a:ext cx="10881360" cy="411480"/>
-          </a:xfrm>
-          <a:prstGeom prst="rect">
-            <a:avLst/>
-          </a:prstGeom>
-          <a:solidFill>
-            <a:srgbClr val="F4F7FB"/>
-          </a:solidFill>
-          <a:ln>
-            <a:noFill/>
-          </a:ln>
-        </p:spPr>
-        <p:style>
-          <a:lnRef idx="1">
-            <a:schemeClr val="accent1"/>
-          </a:lnRef>
-          <a:fillRef idx="3">
-            <a:schemeClr val="accent1"/>
-          </a:fillRef>
-          <a:effectRef idx="2">
-            <a:schemeClr val="accent1"/>
-          </a:effectRef>
-          <a:fontRef idx="minor">
-            <a:schemeClr val="lt1"/>
-          </a:fontRef>
-        </p:style>
-        <p:txBody>
-          <a:bodyPr rtlCol="0" anchor="ctr"/>
-          <a:lstStyle/>
-          <a:p>
-            <a:pPr algn="ctr"/>
-          </a:p>
-        </p:txBody>
-      </p:sp>
-      <p:sp>
-        <p:nvSpPr>
-          <p:cNvPr id="27" name="TextBox 26"/>
-          <p:cNvSpPr txBox="1"/>
-          <p:nvPr/>
-        </p:nvSpPr>
-        <p:spPr>
-          <a:xfrm>
-            <a:off x="731520" y="3520440"/>
-            <a:ext cx="3017520" cy="411480"/>
-          </a:xfrm>
-          <a:prstGeom prst="rect">
-            <a:avLst/>
-          </a:prstGeom>
-          <a:noFill/>
-        </p:spPr>
-        <p:txBody>
-          <a:bodyPr wrap="square" lIns="73152" rIns="73152" tIns="43891" bIns="43891" anchor="ctr">
-            <a:spAutoFit/>
-          </a:bodyPr>
-          <a:lstStyle/>
-          <a:p>
-            <a:pPr algn="l"/>
-            <a:r>
-              <a:rPr sz="1100" b="1" i="0">
-                <a:solidFill>
-                  <a:srgbClr val="0F1B3D"/>
-                </a:solidFill>
-                <a:latin typeface="Calibri"/>
-              </a:rPr>
-              <a:t>OpenSLR RIRs</a:t>
-            </a:r>
-          </a:p>
-        </p:txBody>
-      </p:sp>
-      <p:sp>
-        <p:nvSpPr>
-          <p:cNvPr id="28" name="TextBox 27"/>
-          <p:cNvSpPr txBox="1"/>
-          <p:nvPr/>
-        </p:nvSpPr>
-        <p:spPr>
-          <a:xfrm>
-            <a:off x="3840480" y="3520440"/>
-            <a:ext cx="5943600" cy="411480"/>
-          </a:xfrm>
-          <a:prstGeom prst="rect">
-            <a:avLst/>
-          </a:prstGeom>
-          <a:noFill/>
-        </p:spPr>
-        <p:txBody>
-          <a:bodyPr wrap="square" lIns="73152" rIns="73152" tIns="43891" bIns="43891" anchor="ctr">
-            <a:spAutoFit/>
-          </a:bodyPr>
-          <a:lstStyle/>
-          <a:p>
-            <a:pPr algn="l"/>
-            <a:r>
-              <a:rPr sz="1100" b="0" i="0">
-                <a:solidFill>
-                  <a:srgbClr val="404856"/>
-                </a:solidFill>
-                <a:latin typeface="Calibri"/>
-              </a:rPr>
-              <a:t>Room impulse responses → 0.5–5 m distance simulation</a:t>
-            </a:r>
-          </a:p>
-        </p:txBody>
-      </p:sp>
-      <p:sp>
-        <p:nvSpPr>
-          <p:cNvPr id="29" name="TextBox 28"/>
-          <p:cNvSpPr txBox="1"/>
-          <p:nvPr/>
-        </p:nvSpPr>
-        <p:spPr>
-          <a:xfrm>
-            <a:off x="9875520" y="3520440"/>
-            <a:ext cx="1737360" cy="411480"/>
-          </a:xfrm>
-          <a:prstGeom prst="rect">
-            <a:avLst/>
-          </a:prstGeom>
-          <a:noFill/>
-        </p:spPr>
-        <p:txBody>
-          <a:bodyPr wrap="square" lIns="73152" rIns="73152" tIns="43891" bIns="43891" anchor="ctr">
-            <a:spAutoFit/>
-          </a:bodyPr>
-          <a:lstStyle/>
-          <a:p>
-            <a:pPr algn="l"/>
-            <a:r>
-              <a:rPr sz="1100" b="0" i="0">
-                <a:solidFill>
-                  <a:srgbClr val="404856"/>
-                </a:solidFill>
-                <a:latin typeface="Calibri"/>
-              </a:rPr>
-              <a:t>Apache-2.0</a:t>
-            </a:r>
-          </a:p>
-        </p:txBody>
-      </p:sp>
-      <p:sp>
-        <p:nvSpPr>
-          <p:cNvPr id="30" name="TextBox 29"/>
-          <p:cNvSpPr txBox="1"/>
-          <p:nvPr/>
-        </p:nvSpPr>
-        <p:spPr>
-          <a:xfrm>
-            <a:off x="731520" y="3931920"/>
-            <a:ext cx="3017520" cy="411480"/>
-          </a:xfrm>
-          <a:prstGeom prst="rect">
-            <a:avLst/>
-          </a:prstGeom>
-          <a:noFill/>
-        </p:spPr>
-        <p:txBody>
-          <a:bodyPr wrap="square" lIns="73152" rIns="73152" tIns="43891" bIns="43891" anchor="ctr">
-            <a:spAutoFit/>
-          </a:bodyPr>
-          <a:lstStyle/>
-          <a:p>
-            <a:pPr algn="l"/>
-            <a:r>
-              <a:rPr sz="1100" b="1" i="0">
-                <a:solidFill>
-                  <a:srgbClr val="0F1B3D"/>
-                </a:solidFill>
-                <a:latin typeface="Calibri"/>
-              </a:rPr>
-              <a:t>MLCommons MSWC  (H1 eval)</a:t>
-            </a:r>
-          </a:p>
-        </p:txBody>
-      </p:sp>
-      <p:sp>
-        <p:nvSpPr>
-          <p:cNvPr id="31" name="TextBox 30"/>
-          <p:cNvSpPr txBox="1"/>
-          <p:nvPr/>
-        </p:nvSpPr>
-        <p:spPr>
-          <a:xfrm>
-            <a:off x="3840480" y="3931920"/>
-            <a:ext cx="5943600" cy="411480"/>
-          </a:xfrm>
-          <a:prstGeom prst="rect">
-            <a:avLst/>
-          </a:prstGeom>
-          <a:noFill/>
-        </p:spPr>
-        <p:txBody>
-          <a:bodyPr wrap="square" lIns="73152" rIns="73152" tIns="43891" bIns="43891" anchor="ctr">
-            <a:spAutoFit/>
-          </a:bodyPr>
-          <a:lstStyle/>
-          <a:p>
-            <a:pPr algn="l"/>
-            <a:r>
-              <a:rPr sz="1100" b="0" i="0">
-                <a:solidFill>
-                  <a:srgbClr val="404856"/>
-                </a:solidFill>
-                <a:latin typeface="Calibri"/>
-              </a:rPr>
-              <a:t>Multilingual zero-shot keyword generalisation (Tamil)</a:t>
-            </a:r>
-          </a:p>
-        </p:txBody>
-      </p:sp>
-      <p:sp>
-        <p:nvSpPr>
-          <p:cNvPr id="32" name="TextBox 31"/>
-          <p:cNvSpPr txBox="1"/>
-          <p:nvPr/>
-        </p:nvSpPr>
-        <p:spPr>
-          <a:xfrm>
-            <a:off x="9875520" y="3931920"/>
-            <a:ext cx="1737360" cy="411480"/>
-          </a:xfrm>
-          <a:prstGeom prst="rect">
-            <a:avLst/>
-          </a:prstGeom>
-          <a:noFill/>
-        </p:spPr>
-        <p:txBody>
-          <a:bodyPr wrap="square" lIns="73152" rIns="73152" tIns="43891" bIns="43891" anchor="ctr">
-            <a:spAutoFit/>
-          </a:bodyPr>
-          <a:lstStyle/>
-          <a:p>
-            <a:pPr algn="l"/>
-            <a:r>
-              <a:rPr sz="1100" b="0" i="0">
-                <a:solidFill>
-                  <a:srgbClr val="404856"/>
-                </a:solidFill>
-                <a:latin typeface="Calibri"/>
-              </a:rPr>
-              <a:t>CC-BY 4.0</a:t>
-            </a:r>
-          </a:p>
-        </p:txBody>
-      </p:sp>
-      <p:sp>
-        <p:nvSpPr>
-          <p:cNvPr id="33" name="TextBox 32"/>
-          <p:cNvSpPr txBox="1"/>
-          <p:nvPr/>
-        </p:nvSpPr>
-        <p:spPr>
-          <a:xfrm>
-            <a:off x="457200" y="4937760"/>
-            <a:ext cx="11247120" cy="365760"/>
+            <a:off x="7452360" y="3886200"/>
+            <a:ext cx="4297680" cy="2651760"/>
           </a:xfrm>
           <a:prstGeom prst="rect">
             <a:avLst/>
@@ -4827,102 +4166,95 @@
               </a:spcAft>
             </a:pPr>
             <a:r>
-              <a:rPr sz="1500" b="1" i="0">
-                <a:solidFill>
-                  <a:srgbClr val="003B8E"/>
-                </a:solidFill>
-                <a:latin typeface="Calibri"/>
-              </a:rPr>
-              <a:t>To be published  (Apache-2.0)</a:t>
-            </a:r>
-          </a:p>
-        </p:txBody>
-      </p:sp>
-      <p:sp>
-        <p:nvSpPr>
-          <p:cNvPr id="34" name="Rounded Rectangle 33"/>
-          <p:cNvSpPr/>
-          <p:nvPr/>
-        </p:nvSpPr>
-        <p:spPr>
-          <a:xfrm>
-            <a:off x="457200" y="5349240"/>
-            <a:ext cx="11247120" cy="1234440"/>
-          </a:xfrm>
-          <a:prstGeom prst="roundRect">
-            <a:avLst>
-              <a:gd name="adj" fmla="val 6000"/>
-            </a:avLst>
-          </a:prstGeom>
-          <a:solidFill>
-            <a:srgbClr val="FBF2DD"/>
-          </a:solidFill>
-          <a:ln w="9525">
-            <a:solidFill>
-              <a:srgbClr val="B8860B"/>
-            </a:solidFill>
-          </a:ln>
-        </p:spPr>
-        <p:style>
-          <a:lnRef idx="1">
-            <a:schemeClr val="accent1"/>
-          </a:lnRef>
-          <a:fillRef idx="3">
-            <a:schemeClr val="accent1"/>
-          </a:fillRef>
-          <a:effectRef idx="2">
-            <a:schemeClr val="accent1"/>
-          </a:effectRef>
-          <a:fontRef idx="minor">
-            <a:schemeClr val="lt1"/>
-          </a:fontRef>
-        </p:style>
-        <p:txBody>
-          <a:bodyPr rtlCol="0" anchor="ctr"/>
-          <a:lstStyle/>
-          <a:p/>
-        </p:txBody>
-      </p:sp>
-      <p:sp>
-        <p:nvSpPr>
-          <p:cNvPr id="35" name="TextBox 34"/>
-          <p:cNvSpPr txBox="1"/>
-          <p:nvPr/>
-        </p:nvSpPr>
-        <p:spPr>
-          <a:xfrm>
-            <a:off x="640080" y="5394960"/>
-            <a:ext cx="10972800" cy="1188720"/>
-          </a:xfrm>
-          <a:prstGeom prst="rect">
-            <a:avLst/>
-          </a:prstGeom>
-          <a:noFill/>
-        </p:spPr>
-        <p:txBody>
-          <a:bodyPr wrap="square" lIns="73152" rIns="73152" tIns="43891" bIns="43891" anchor="t">
-            <a:spAutoFit/>
-          </a:bodyPr>
-          <a:lstStyle/>
+              <a:rPr sz="1300" b="1" i="0">
+                <a:solidFill>
+                  <a:srgbClr val="1B7F4F"/>
+                </a:solidFill>
+                <a:latin typeface="Calibri"/>
+              </a:rPr>
+              <a:t>Cocktail-party robustness</a:t>
+            </a:r>
+          </a:p>
+          <a:p>
+            <a:pPr algn="l">
+              <a:spcAft>
+                <a:spcPts val="600"/>
+              </a:spcAft>
+            </a:pPr>
+            <a:r>
+              <a:rPr sz="1100" b="0" i="0">
+                <a:solidFill>
+                  <a:srgbClr val="404856"/>
+                </a:solidFill>
+                <a:latin typeface="Calibri"/>
+              </a:rPr>
+              <a:t>Babble augmentation (40 % of batches, 1–2 voices) lifts </a:t>
+            </a:r>
+            <a:r>
+              <a:rPr sz="1200" b="1" i="0">
+                <a:solidFill>
+                  <a:srgbClr val="1B7F4F"/>
+                </a:solidFill>
+                <a:latin typeface="Calibri"/>
+              </a:rPr>
+              <a:t>+19 pp at −5 dB</a:t>
+            </a:r>
+            <a:r>
+              <a:rPr sz="1100" b="0" i="0">
+                <a:solidFill>
+                  <a:srgbClr val="404856"/>
+                </a:solidFill>
+                <a:latin typeface="Calibri"/>
+              </a:rPr>
+              <a:t>, </a:t>
+            </a:r>
+            <a:r>
+              <a:rPr sz="1200" b="1" i="0">
+                <a:solidFill>
+                  <a:srgbClr val="1B7F4F"/>
+                </a:solidFill>
+                <a:latin typeface="Calibri"/>
+              </a:rPr>
+              <a:t>+21 pp at 0 dB</a:t>
+            </a:r>
+            <a:r>
+              <a:rPr sz="1100" b="0" i="0">
+                <a:solidFill>
+                  <a:srgbClr val="404856"/>
+                </a:solidFill>
+                <a:latin typeface="Calibri"/>
+              </a:rPr>
+              <a:t>; clean cost only −0.5 pp.</a:t>
+            </a:r>
+          </a:p>
           <a:p>
             <a:pPr algn="l"/>
             <a:r>
-              <a:rPr sz="1200" b="1" i="0">
-                <a:solidFill>
-                  <a:srgbClr val="B8860B"/>
-                </a:solidFill>
-                <a:latin typeface="Calibri"/>
-              </a:rPr>
-              <a:t>Confusable-trigger benchmark.  </a:t>
-            </a:r>
-            <a:r>
               <a:rPr sz="1100" b="0" i="0">
                 <a:solidFill>
                   <a:srgbClr val="404856"/>
                 </a:solidFill>
                 <a:latin typeface="Calibri"/>
               </a:rPr>
-              <a:t>For any chosen trigger word, the mined top-50 phonetic confusables synthesised in 100+ XTTS-v2 voices + their RIR / MUSAN augmentations. Useful for any future personalised-KWS work targeting FA &lt; 1 / hr. Released under Apache-2.0.</a:t>
+              <a:t>N = 3 voices generalisation holds: </a:t>
+            </a:r>
+            <a:r>
+              <a:rPr sz="1300" b="1" i="0">
+                <a:solidFill>
+                  <a:srgbClr val="1B7F4F"/>
+                </a:solidFill>
+                <a:latin typeface="Calibri"/>
+              </a:rPr>
+              <a:t>90 % at 10 dB</a:t>
+            </a:r>
+            <a:r>
+              <a:rPr sz="1100" b="0" i="0">
+                <a:solidFill>
+                  <a:srgbClr val="404856"/>
+                </a:solidFill>
+                <a:latin typeface="Calibri"/>
+              </a:rPr>
+              <a:t> with three simultaneous speakers — within KPI envelope across the realistic-noise band.</a:t>
             </a:r>
           </a:p>
         </p:txBody>
@@ -5026,7 +4358,7 @@
                 </a:solidFill>
                 <a:latin typeface="Calibri"/>
               </a:rPr>
-              <a:t>Open Models — Used &amp; Developed</a:t>
+              <a:t>Novelty &amp; Innovation — FAR-in-the-Loop Training (hero)</a:t>
             </a:r>
           </a:p>
         </p:txBody>
@@ -5104,21 +4436,125 @@
                 </a:solidFill>
                 <a:latin typeface="Calibri"/>
               </a:rPr>
-              <a:t>11 / 12</a:t>
-            </a:r>
-          </a:p>
-        </p:txBody>
-      </p:sp>
-      <p:sp>
-        <p:nvSpPr>
-          <p:cNvPr id="6" name="TextBox 5"/>
-          <p:cNvSpPr txBox="1"/>
-          <p:nvPr/>
-        </p:nvSpPr>
-        <p:spPr>
-          <a:xfrm>
-            <a:off x="457200" y="960120"/>
-            <a:ext cx="11247120" cy="365760"/>
+              <a:t>11 / 17</a:t>
+            </a:r>
+          </a:p>
+        </p:txBody>
+      </p:sp>
+      <p:pic>
+        <p:nvPicPr>
+          <p:cNvPr id="6" name="Picture 5" descr="3_far_in_loop.png"/>
+          <p:cNvPicPr>
+            <a:picLocks noChangeAspect="1"/>
+          </p:cNvPicPr>
+          <p:nvPr/>
+        </p:nvPicPr>
+        <p:blipFill>
+          <a:blip r:embed="rId2"/>
+          <a:stretch>
+            <a:fillRect/>
+          </a:stretch>
+        </p:blipFill>
+        <p:spPr>
+          <a:xfrm>
+            <a:off x="365760" y="1011093"/>
+            <a:ext cx="11430000" cy="2092613"/>
+          </a:xfrm>
+          <a:prstGeom prst="rect">
+            <a:avLst/>
+          </a:prstGeom>
+        </p:spPr>
+      </p:pic>
+      <p:sp>
+        <p:nvSpPr>
+          <p:cNvPr id="7" name="Rounded Rectangle 6"/>
+          <p:cNvSpPr/>
+          <p:nvPr/>
+        </p:nvSpPr>
+        <p:spPr>
+          <a:xfrm>
+            <a:off x="457200" y="3337560"/>
+            <a:ext cx="3657600" cy="3017520"/>
+          </a:xfrm>
+          <a:prstGeom prst="roundRect">
+            <a:avLst>
+              <a:gd name="adj" fmla="val 6000"/>
+            </a:avLst>
+          </a:prstGeom>
+          <a:solidFill>
+            <a:srgbClr val="FDEEEE"/>
+          </a:solidFill>
+          <a:ln w="9525">
+            <a:solidFill>
+              <a:srgbClr val="C3292B"/>
+            </a:solidFill>
+          </a:ln>
+        </p:spPr>
+        <p:style>
+          <a:lnRef idx="1">
+            <a:schemeClr val="accent1"/>
+          </a:lnRef>
+          <a:fillRef idx="3">
+            <a:schemeClr val="accent1"/>
+          </a:fillRef>
+          <a:effectRef idx="2">
+            <a:schemeClr val="accent1"/>
+          </a:effectRef>
+          <a:fontRef idx="minor">
+            <a:schemeClr val="lt1"/>
+          </a:fontRef>
+        </p:style>
+        <p:txBody>
+          <a:bodyPr rtlCol="0" anchor="ctr"/>
+          <a:lstStyle/>
+          <a:p/>
+        </p:txBody>
+      </p:sp>
+      <p:sp>
+        <p:nvSpPr>
+          <p:cNvPr id="8" name="TextBox 7"/>
+          <p:cNvSpPr txBox="1"/>
+          <p:nvPr/>
+        </p:nvSpPr>
+        <p:spPr>
+          <a:xfrm>
+            <a:off x="640080" y="3447288"/>
+            <a:ext cx="3291840" cy="411480"/>
+          </a:xfrm>
+          <a:prstGeom prst="rect">
+            <a:avLst/>
+          </a:prstGeom>
+          <a:noFill/>
+        </p:spPr>
+        <p:txBody>
+          <a:bodyPr wrap="square" lIns="73152" rIns="73152" tIns="43891" bIns="43891" anchor="t">
+            <a:spAutoFit/>
+          </a:bodyPr>
+          <a:lstStyle/>
+          <a:p>
+            <a:pPr algn="l"/>
+            <a:r>
+              <a:rPr sz="1300" b="1" i="0">
+                <a:solidFill>
+                  <a:srgbClr val="C3292B"/>
+                </a:solidFill>
+                <a:latin typeface="Calibri"/>
+              </a:rPr>
+              <a:t>Core invention</a:t>
+            </a:r>
+          </a:p>
+        </p:txBody>
+      </p:sp>
+      <p:sp>
+        <p:nvSpPr>
+          <p:cNvPr id="9" name="TextBox 8"/>
+          <p:cNvSpPr txBox="1"/>
+          <p:nvPr/>
+        </p:nvSpPr>
+        <p:spPr>
+          <a:xfrm>
+            <a:off x="685800" y="3886200"/>
+            <a:ext cx="3200400" cy="2331720"/>
           </a:xfrm>
           <a:prstGeom prst="rect">
             <a:avLst/>
@@ -5137,27 +4573,59 @@
               </a:spcAft>
             </a:pPr>
             <a:r>
-              <a:rPr sz="1500" b="1" i="0">
-                <a:solidFill>
-                  <a:srgbClr val="003B8E"/>
-                </a:solidFill>
-                <a:latin typeface="Calibri"/>
-              </a:rPr>
-              <a:t>To be used  (frozen, distillation teachers)</a:t>
-            </a:r>
-          </a:p>
-        </p:txBody>
-      </p:sp>
-      <p:sp>
-        <p:nvSpPr>
-          <p:cNvPr id="7" name="Rounded Rectangle 6"/>
+              <a:rPr sz="1100" b="0" i="0">
+                <a:solidFill>
+                  <a:srgbClr val="404856"/>
+                </a:solidFill>
+                <a:latin typeface="Calibri"/>
+              </a:rPr>
+              <a:t>The deployment false-accept threshold τₛ is re-estimated every 500 training steps on a held-out impostor pool.</a:t>
+            </a:r>
+          </a:p>
+          <a:p>
+            <a:pPr algn="l">
+              <a:spcAft>
+                <a:spcPts val="200"/>
+              </a:spcAft>
+            </a:pPr>
+            <a:r>
+              <a:rPr sz="600" b="0" i="0">
+                <a:solidFill>
+                  <a:srgbClr val="404856"/>
+                </a:solidFill>
+                <a:latin typeface="Calibri"/>
+              </a:rPr>
+              <a:t/>
+            </a:r>
+          </a:p>
+          <a:p>
+            <a:pPr algn="l">
+              <a:spcAft>
+                <a:spcPts val="400"/>
+              </a:spcAft>
+            </a:pPr>
+            <a:r>
+              <a:rPr sz="1100" b="0" i="0">
+                <a:solidFill>
+                  <a:srgbClr val="404856"/>
+                </a:solidFill>
+                <a:latin typeface="Calibri"/>
+              </a:rPr>
+              <a:t>The resulting FRR-at-target-FAR is fed back as a differentiable soft penalty in the joint loss.</a:t>
+            </a:r>
+          </a:p>
+        </p:txBody>
+      </p:sp>
+      <p:sp>
+        <p:nvSpPr>
+          <p:cNvPr id="10" name="Rounded Rectangle 9"/>
           <p:cNvSpPr/>
           <p:nvPr/>
         </p:nvSpPr>
         <p:spPr>
           <a:xfrm>
-            <a:off x="457200" y="1371600"/>
-            <a:ext cx="11247120" cy="2377440"/>
+            <a:off x="4233672" y="3337560"/>
+            <a:ext cx="3657600" cy="3017520"/>
           </a:xfrm>
           <a:prstGeom prst="roundRect">
             <a:avLst>
@@ -5165,11 +4633,11 @@
             </a:avLst>
           </a:prstGeom>
           <a:solidFill>
-            <a:srgbClr val="FFFFFF"/>
+            <a:srgbClr val="ECF2FC"/>
           </a:solidFill>
           <a:ln w="9525">
             <a:solidFill>
-              <a:srgbClr val="D9DEE6"/>
+              <a:srgbClr val="144BC4"/>
             </a:solidFill>
           </a:ln>
         </p:spPr>
@@ -5195,23 +4663,165 @@
       </p:sp>
       <p:sp>
         <p:nvSpPr>
-          <p:cNvPr id="8" name="Rectangle 7"/>
+          <p:cNvPr id="11" name="TextBox 10"/>
+          <p:cNvSpPr txBox="1"/>
+          <p:nvPr/>
+        </p:nvSpPr>
+        <p:spPr>
+          <a:xfrm>
+            <a:off x="4416552" y="3447288"/>
+            <a:ext cx="3291840" cy="411480"/>
+          </a:xfrm>
+          <a:prstGeom prst="rect">
+            <a:avLst/>
+          </a:prstGeom>
+          <a:noFill/>
+        </p:spPr>
+        <p:txBody>
+          <a:bodyPr wrap="square" lIns="73152" rIns="73152" tIns="43891" bIns="43891" anchor="t">
+            <a:spAutoFit/>
+          </a:bodyPr>
+          <a:lstStyle/>
+          <a:p>
+            <a:pPr algn="l"/>
+            <a:r>
+              <a:rPr sz="1300" b="1" i="0">
+                <a:solidFill>
+                  <a:srgbClr val="144BC4"/>
+                </a:solidFill>
+                <a:latin typeface="Calibri"/>
+              </a:rPr>
+              <a:t>Why it matters</a:t>
+            </a:r>
+          </a:p>
+        </p:txBody>
+      </p:sp>
+      <p:sp>
+        <p:nvSpPr>
+          <p:cNvPr id="12" name="TextBox 11"/>
+          <p:cNvSpPr txBox="1"/>
+          <p:nvPr/>
+        </p:nvSpPr>
+        <p:spPr>
+          <a:xfrm>
+            <a:off x="4462272" y="3886200"/>
+            <a:ext cx="3200400" cy="2331720"/>
+          </a:xfrm>
+          <a:prstGeom prst="rect">
+            <a:avLst/>
+          </a:prstGeom>
+          <a:noFill/>
+        </p:spPr>
+        <p:txBody>
+          <a:bodyPr wrap="square" lIns="73152" rIns="73152" tIns="43891" bIns="43891" anchor="t">
+            <a:spAutoFit/>
+          </a:bodyPr>
+          <a:lstStyle/>
+          <a:p>
+            <a:pPr algn="l">
+              <a:spcAft>
+                <a:spcPts val="400"/>
+              </a:spcAft>
+            </a:pPr>
+            <a:r>
+              <a:rPr sz="1100" b="0" i="0">
+                <a:solidFill>
+                  <a:srgbClr val="404856"/>
+                </a:solidFill>
+                <a:latin typeface="Calibri"/>
+              </a:rPr>
+              <a:t>Conventional pipelines treat τₛ as a post-hoc deployment knob.</a:t>
+            </a:r>
+          </a:p>
+          <a:p>
+            <a:pPr algn="l">
+              <a:spcAft>
+                <a:spcPts val="200"/>
+              </a:spcAft>
+            </a:pPr>
+            <a:r>
+              <a:rPr sz="600" b="0" i="0">
+                <a:solidFill>
+                  <a:srgbClr val="404856"/>
+                </a:solidFill>
+                <a:latin typeface="Calibri"/>
+              </a:rPr>
+              <a:t/>
+            </a:r>
+          </a:p>
+          <a:p>
+            <a:pPr algn="l">
+              <a:spcAft>
+                <a:spcPts val="400"/>
+              </a:spcAft>
+            </a:pPr>
+            <a:r>
+              <a:rPr sz="1100" b="0" i="0">
+                <a:solidFill>
+                  <a:srgbClr val="404856"/>
+                </a:solidFill>
+                <a:latin typeface="Calibri"/>
+              </a:rPr>
+              <a:t>If the training loss never sees the FA &lt; 1 / hr constraint, the embedding geometry cannot cluster tightly enough for any threshold to satisfy it.</a:t>
+            </a:r>
+          </a:p>
+          <a:p>
+            <a:pPr algn="l">
+              <a:spcAft>
+                <a:spcPts val="200"/>
+              </a:spcAft>
+            </a:pPr>
+            <a:r>
+              <a:rPr sz="600" b="0" i="0">
+                <a:solidFill>
+                  <a:srgbClr val="404856"/>
+                </a:solidFill>
+                <a:latin typeface="Calibri"/>
+              </a:rPr>
+              <a:t/>
+            </a:r>
+          </a:p>
+          <a:p>
+            <a:pPr algn="l">
+              <a:spcAft>
+                <a:spcPts val="400"/>
+              </a:spcAft>
+            </a:pPr>
+            <a:r>
+              <a:rPr sz="1000" b="0" i="1">
+                <a:solidFill>
+                  <a:srgbClr val="404856"/>
+                </a:solidFill>
+                <a:latin typeface="Calibri"/>
+              </a:rPr>
+              <a:t>Ref: PK-MTL — vanilla BC-ResNet hits 64.32 % FRR in target-only KWS; task-adaptive training brings this to 6.56 %.</a:t>
+            </a:r>
+          </a:p>
+        </p:txBody>
+      </p:sp>
+      <p:sp>
+        <p:nvSpPr>
+          <p:cNvPr id="13" name="Rounded Rectangle 12"/>
           <p:cNvSpPr/>
           <p:nvPr/>
         </p:nvSpPr>
         <p:spPr>
           <a:xfrm>
-            <a:off x="640080" y="1463040"/>
-            <a:ext cx="10881360" cy="384048"/>
-          </a:xfrm>
-          <a:prstGeom prst="rect">
-            <a:avLst/>
+            <a:off x="8010144" y="3337560"/>
+            <a:ext cx="3657600" cy="3017520"/>
+          </a:xfrm>
+          <a:prstGeom prst="roundRect">
+            <a:avLst>
+              <a:gd name="adj" fmla="val 6000"/>
+            </a:avLst>
           </a:prstGeom>
           <a:solidFill>
-            <a:srgbClr val="144BC4"/>
+            <a:srgbClr val="E7F4EC"/>
           </a:solidFill>
-          <a:ln>
-            <a:noFill/>
+          <a:ln w="9525">
+            <a:solidFill>
+              <a:srgbClr val="1B7F4F"/>
+            </a:solidFill>
           </a:ln>
         </p:spPr>
         <p:style>
@@ -5231,225 +4841,40 @@
         <p:txBody>
           <a:bodyPr rtlCol="0" anchor="ctr"/>
           <a:lstStyle/>
-          <a:p>
-            <a:pPr algn="ctr"/>
-          </a:p>
-        </p:txBody>
-      </p:sp>
-      <p:sp>
-        <p:nvSpPr>
-          <p:cNvPr id="9" name="TextBox 8"/>
-          <p:cNvSpPr txBox="1"/>
-          <p:nvPr/>
-        </p:nvSpPr>
-        <p:spPr>
-          <a:xfrm>
-            <a:off x="731520" y="1463040"/>
-            <a:ext cx="2651760" cy="384048"/>
-          </a:xfrm>
-          <a:prstGeom prst="rect">
-            <a:avLst/>
-          </a:prstGeom>
-          <a:noFill/>
-        </p:spPr>
-        <p:txBody>
-          <a:bodyPr wrap="square" lIns="73152" rIns="73152" tIns="43891" bIns="43891" anchor="ctr">
+          <a:p/>
+        </p:txBody>
+      </p:sp>
+      <p:sp>
+        <p:nvSpPr>
+          <p:cNvPr id="14" name="TextBox 13"/>
+          <p:cNvSpPr txBox="1"/>
+          <p:nvPr/>
+        </p:nvSpPr>
+        <p:spPr>
+          <a:xfrm>
+            <a:off x="8193024" y="3447288"/>
+            <a:ext cx="3291840" cy="411480"/>
+          </a:xfrm>
+          <a:prstGeom prst="rect">
+            <a:avLst/>
+          </a:prstGeom>
+          <a:noFill/>
+        </p:spPr>
+        <p:txBody>
+          <a:bodyPr wrap="square" lIns="73152" rIns="73152" tIns="43891" bIns="43891" anchor="t">
             <a:spAutoFit/>
           </a:bodyPr>
           <a:lstStyle/>
           <a:p>
             <a:pPr algn="l"/>
             <a:r>
-              <a:rPr sz="1100" b="1" i="0">
-                <a:solidFill>
-                  <a:srgbClr val="FFFFFF"/>
-                </a:solidFill>
-                <a:latin typeface="Calibri"/>
-              </a:rPr>
-              <a:t>Model</a:t>
-            </a:r>
-          </a:p>
-        </p:txBody>
-      </p:sp>
-      <p:sp>
-        <p:nvSpPr>
-          <p:cNvPr id="10" name="TextBox 9"/>
-          <p:cNvSpPr txBox="1"/>
-          <p:nvPr/>
-        </p:nvSpPr>
-        <p:spPr>
-          <a:xfrm>
-            <a:off x="3474720" y="1463040"/>
-            <a:ext cx="5394960" cy="384048"/>
-          </a:xfrm>
-          <a:prstGeom prst="rect">
-            <a:avLst/>
-          </a:prstGeom>
-          <a:noFill/>
-        </p:spPr>
-        <p:txBody>
-          <a:bodyPr wrap="square" lIns="73152" rIns="73152" tIns="43891" bIns="43891" anchor="ctr">
-            <a:spAutoFit/>
-          </a:bodyPr>
-          <a:lstStyle/>
-          <a:p>
-            <a:pPr algn="l"/>
-            <a:r>
-              <a:rPr sz="1100" b="1" i="0">
-                <a:solidFill>
-                  <a:srgbClr val="FFFFFF"/>
-                </a:solidFill>
-                <a:latin typeface="Calibri"/>
-              </a:rPr>
-              <a:t>Role</a:t>
-            </a:r>
-          </a:p>
-        </p:txBody>
-      </p:sp>
-      <p:sp>
-        <p:nvSpPr>
-          <p:cNvPr id="11" name="TextBox 10"/>
-          <p:cNvSpPr txBox="1"/>
-          <p:nvPr/>
-        </p:nvSpPr>
-        <p:spPr>
-          <a:xfrm>
-            <a:off x="8961120" y="1463040"/>
-            <a:ext cx="2651760" cy="384048"/>
-          </a:xfrm>
-          <a:prstGeom prst="rect">
-            <a:avLst/>
-          </a:prstGeom>
-          <a:noFill/>
-        </p:spPr>
-        <p:txBody>
-          <a:bodyPr wrap="square" lIns="73152" rIns="73152" tIns="43891" bIns="43891" anchor="ctr">
-            <a:spAutoFit/>
-          </a:bodyPr>
-          <a:lstStyle/>
-          <a:p>
-            <a:pPr algn="l"/>
-            <a:r>
-              <a:rPr sz="1100" b="1" i="0">
-                <a:solidFill>
-                  <a:srgbClr val="FFFFFF"/>
-                </a:solidFill>
-                <a:latin typeface="Calibri"/>
-              </a:rPr>
-              <a:t>Source / Licence</a:t>
-            </a:r>
-          </a:p>
-        </p:txBody>
-      </p:sp>
-      <p:sp>
-        <p:nvSpPr>
-          <p:cNvPr id="12" name="Rectangle 11"/>
-          <p:cNvSpPr/>
-          <p:nvPr/>
-        </p:nvSpPr>
-        <p:spPr>
-          <a:xfrm>
-            <a:off x="640080" y="1874520"/>
-            <a:ext cx="10881360" cy="411480"/>
-          </a:xfrm>
-          <a:prstGeom prst="rect">
-            <a:avLst/>
-          </a:prstGeom>
-          <a:solidFill>
-            <a:srgbClr val="F4F7FB"/>
-          </a:solidFill>
-          <a:ln>
-            <a:noFill/>
-          </a:ln>
-        </p:spPr>
-        <p:style>
-          <a:lnRef idx="1">
-            <a:schemeClr val="accent1"/>
-          </a:lnRef>
-          <a:fillRef idx="3">
-            <a:schemeClr val="accent1"/>
-          </a:fillRef>
-          <a:effectRef idx="2">
-            <a:schemeClr val="accent1"/>
-          </a:effectRef>
-          <a:fontRef idx="minor">
-            <a:schemeClr val="lt1"/>
-          </a:fontRef>
-        </p:style>
-        <p:txBody>
-          <a:bodyPr rtlCol="0" anchor="ctr"/>
-          <a:lstStyle/>
-          <a:p>
-            <a:pPr algn="ctr"/>
-          </a:p>
-        </p:txBody>
-      </p:sp>
-      <p:sp>
-        <p:nvSpPr>
-          <p:cNvPr id="13" name="TextBox 12"/>
-          <p:cNvSpPr txBox="1"/>
-          <p:nvPr/>
-        </p:nvSpPr>
-        <p:spPr>
-          <a:xfrm>
-            <a:off x="731520" y="1874520"/>
-            <a:ext cx="2651760" cy="411480"/>
-          </a:xfrm>
-          <a:prstGeom prst="rect">
-            <a:avLst/>
-          </a:prstGeom>
-          <a:noFill/>
-        </p:spPr>
-        <p:txBody>
-          <a:bodyPr wrap="square" lIns="73152" rIns="73152" tIns="43891" bIns="43891" anchor="ctr">
-            <a:spAutoFit/>
-          </a:bodyPr>
-          <a:lstStyle/>
-          <a:p>
-            <a:pPr algn="l"/>
-            <a:r>
-              <a:rPr sz="1100" b="1" i="0">
-                <a:solidFill>
-                  <a:srgbClr val="0F1B3D"/>
-                </a:solidFill>
-                <a:latin typeface="Calibri"/>
-              </a:rPr>
-              <a:t>WavLM-Base+</a:t>
-            </a:r>
-          </a:p>
-        </p:txBody>
-      </p:sp>
-      <p:sp>
-        <p:nvSpPr>
-          <p:cNvPr id="14" name="TextBox 13"/>
-          <p:cNvSpPr txBox="1"/>
-          <p:nvPr/>
-        </p:nvSpPr>
-        <p:spPr>
-          <a:xfrm>
-            <a:off x="3474720" y="1874520"/>
-            <a:ext cx="5394960" cy="411480"/>
-          </a:xfrm>
-          <a:prstGeom prst="rect">
-            <a:avLst/>
-          </a:prstGeom>
-          <a:noFill/>
-        </p:spPr>
-        <p:txBody>
-          <a:bodyPr wrap="square" lIns="73152" rIns="73152" tIns="43891" bIns="43891" anchor="ctr">
-            <a:spAutoFit/>
-          </a:bodyPr>
-          <a:lstStyle/>
-          <a:p>
-            <a:pPr algn="l"/>
-            <a:r>
-              <a:rPr sz="1100" b="0" i="0">
-                <a:solidFill>
-                  <a:srgbClr val="404856"/>
-                </a:solidFill>
-                <a:latin typeface="Calibri"/>
-              </a:rPr>
-              <a:t>Phonetic / noise-robust teacher</a:t>
+              <a:rPr sz="1300" b="1" i="0">
+                <a:solidFill>
+                  <a:srgbClr val="1B7F4F"/>
+                </a:solidFill>
+                <a:latin typeface="Calibri"/>
+              </a:rPr>
+              <a:t>Result</a:t>
             </a:r>
           </a:p>
         </p:txBody>
@@ -5462,401 +4887,8 @@
         </p:nvSpPr>
         <p:spPr>
           <a:xfrm>
-            <a:off x="8961120" y="1874520"/>
-            <a:ext cx="2651760" cy="411480"/>
-          </a:xfrm>
-          <a:prstGeom prst="rect">
-            <a:avLst/>
-          </a:prstGeom>
-          <a:noFill/>
-        </p:spPr>
-        <p:txBody>
-          <a:bodyPr wrap="square" lIns="73152" rIns="73152" tIns="43891" bIns="43891" anchor="ctr">
-            <a:spAutoFit/>
-          </a:bodyPr>
-          <a:lstStyle/>
-          <a:p>
-            <a:pPr algn="l"/>
-            <a:r>
-              <a:rPr sz="1100" b="0" i="0">
-                <a:solidFill>
-                  <a:srgbClr val="404856"/>
-                </a:solidFill>
-                <a:latin typeface="Calibri"/>
-              </a:rPr>
-              <a:t>microsoft/wavlm-base-plus · MIT</a:t>
-            </a:r>
-          </a:p>
-        </p:txBody>
-      </p:sp>
-      <p:sp>
-        <p:nvSpPr>
-          <p:cNvPr id="16" name="TextBox 15"/>
-          <p:cNvSpPr txBox="1"/>
-          <p:nvPr/>
-        </p:nvSpPr>
-        <p:spPr>
-          <a:xfrm>
-            <a:off x="731520" y="2286000"/>
-            <a:ext cx="2651760" cy="411480"/>
-          </a:xfrm>
-          <a:prstGeom prst="rect">
-            <a:avLst/>
-          </a:prstGeom>
-          <a:noFill/>
-        </p:spPr>
-        <p:txBody>
-          <a:bodyPr wrap="square" lIns="73152" rIns="73152" tIns="43891" bIns="43891" anchor="ctr">
-            <a:spAutoFit/>
-          </a:bodyPr>
-          <a:lstStyle/>
-          <a:p>
-            <a:pPr algn="l"/>
-            <a:r>
-              <a:rPr sz="1100" b="1" i="0">
-                <a:solidFill>
-                  <a:srgbClr val="0F1B3D"/>
-                </a:solidFill>
-                <a:latin typeface="Calibri"/>
-              </a:rPr>
-              <a:t>ECAPA-TDNN</a:t>
-            </a:r>
-          </a:p>
-        </p:txBody>
-      </p:sp>
-      <p:sp>
-        <p:nvSpPr>
-          <p:cNvPr id="17" name="TextBox 16"/>
-          <p:cNvSpPr txBox="1"/>
-          <p:nvPr/>
-        </p:nvSpPr>
-        <p:spPr>
-          <a:xfrm>
-            <a:off x="3474720" y="2286000"/>
-            <a:ext cx="5394960" cy="411480"/>
-          </a:xfrm>
-          <a:prstGeom prst="rect">
-            <a:avLst/>
-          </a:prstGeom>
-          <a:noFill/>
-        </p:spPr>
-        <p:txBody>
-          <a:bodyPr wrap="square" lIns="73152" rIns="73152" tIns="43891" bIns="43891" anchor="ctr">
-            <a:spAutoFit/>
-          </a:bodyPr>
-          <a:lstStyle/>
-          <a:p>
-            <a:pPr algn="l"/>
-            <a:r>
-              <a:rPr sz="1100" b="0" i="0">
-                <a:solidFill>
-                  <a:srgbClr val="404856"/>
-                </a:solidFill>
-                <a:latin typeface="Calibri"/>
-              </a:rPr>
-              <a:t>Speaker biometric teacher</a:t>
-            </a:r>
-          </a:p>
-        </p:txBody>
-      </p:sp>
-      <p:sp>
-        <p:nvSpPr>
-          <p:cNvPr id="18" name="TextBox 17"/>
-          <p:cNvSpPr txBox="1"/>
-          <p:nvPr/>
-        </p:nvSpPr>
-        <p:spPr>
-          <a:xfrm>
-            <a:off x="8961120" y="2286000"/>
-            <a:ext cx="2651760" cy="411480"/>
-          </a:xfrm>
-          <a:prstGeom prst="rect">
-            <a:avLst/>
-          </a:prstGeom>
-          <a:noFill/>
-        </p:spPr>
-        <p:txBody>
-          <a:bodyPr wrap="square" lIns="73152" rIns="73152" tIns="43891" bIns="43891" anchor="ctr">
-            <a:spAutoFit/>
-          </a:bodyPr>
-          <a:lstStyle/>
-          <a:p>
-            <a:pPr algn="l"/>
-            <a:r>
-              <a:rPr sz="1100" b="0" i="0">
-                <a:solidFill>
-                  <a:srgbClr val="404856"/>
-                </a:solidFill>
-                <a:latin typeface="Calibri"/>
-              </a:rPr>
-              <a:t>speechbrain/spkrec-ecapa · Apache-2.0</a:t>
-            </a:r>
-          </a:p>
-        </p:txBody>
-      </p:sp>
-      <p:sp>
-        <p:nvSpPr>
-          <p:cNvPr id="19" name="Rectangle 18"/>
-          <p:cNvSpPr/>
-          <p:nvPr/>
-        </p:nvSpPr>
-        <p:spPr>
-          <a:xfrm>
-            <a:off x="640080" y="2697480"/>
-            <a:ext cx="10881360" cy="411480"/>
-          </a:xfrm>
-          <a:prstGeom prst="rect">
-            <a:avLst/>
-          </a:prstGeom>
-          <a:solidFill>
-            <a:srgbClr val="F4F7FB"/>
-          </a:solidFill>
-          <a:ln>
-            <a:noFill/>
-          </a:ln>
-        </p:spPr>
-        <p:style>
-          <a:lnRef idx="1">
-            <a:schemeClr val="accent1"/>
-          </a:lnRef>
-          <a:fillRef idx="3">
-            <a:schemeClr val="accent1"/>
-          </a:fillRef>
-          <a:effectRef idx="2">
-            <a:schemeClr val="accent1"/>
-          </a:effectRef>
-          <a:fontRef idx="minor">
-            <a:schemeClr val="lt1"/>
-          </a:fontRef>
-        </p:style>
-        <p:txBody>
-          <a:bodyPr rtlCol="0" anchor="ctr"/>
-          <a:lstStyle/>
-          <a:p>
-            <a:pPr algn="ctr"/>
-          </a:p>
-        </p:txBody>
-      </p:sp>
-      <p:sp>
-        <p:nvSpPr>
-          <p:cNvPr id="20" name="TextBox 19"/>
-          <p:cNvSpPr txBox="1"/>
-          <p:nvPr/>
-        </p:nvSpPr>
-        <p:spPr>
-          <a:xfrm>
-            <a:off x="731520" y="2697480"/>
-            <a:ext cx="2651760" cy="411480"/>
-          </a:xfrm>
-          <a:prstGeom prst="rect">
-            <a:avLst/>
-          </a:prstGeom>
-          <a:noFill/>
-        </p:spPr>
-        <p:txBody>
-          <a:bodyPr wrap="square" lIns="73152" rIns="73152" tIns="43891" bIns="43891" anchor="ctr">
-            <a:spAutoFit/>
-          </a:bodyPr>
-          <a:lstStyle/>
-          <a:p>
-            <a:pPr algn="l"/>
-            <a:r>
-              <a:rPr sz="1100" b="1" i="0">
-                <a:solidFill>
-                  <a:srgbClr val="0F1B3D"/>
-                </a:solidFill>
-                <a:latin typeface="Calibri"/>
-              </a:rPr>
-              <a:t>XTTS-v2</a:t>
-            </a:r>
-          </a:p>
-        </p:txBody>
-      </p:sp>
-      <p:sp>
-        <p:nvSpPr>
-          <p:cNvPr id="21" name="TextBox 20"/>
-          <p:cNvSpPr txBox="1"/>
-          <p:nvPr/>
-        </p:nvSpPr>
-        <p:spPr>
-          <a:xfrm>
-            <a:off x="3474720" y="2697480"/>
-            <a:ext cx="5394960" cy="411480"/>
-          </a:xfrm>
-          <a:prstGeom prst="rect">
-            <a:avLst/>
-          </a:prstGeom>
-          <a:noFill/>
-        </p:spPr>
-        <p:txBody>
-          <a:bodyPr wrap="square" lIns="73152" rIns="73152" tIns="43891" bIns="43891" anchor="ctr">
-            <a:spAutoFit/>
-          </a:bodyPr>
-          <a:lstStyle/>
-          <a:p>
-            <a:pPr algn="l"/>
-            <a:r>
-              <a:rPr sz="1100" b="0" i="0">
-                <a:solidFill>
-                  <a:srgbClr val="404856"/>
-                </a:solidFill>
-                <a:latin typeface="Calibri"/>
-              </a:rPr>
-              <a:t>Multi-voice TTS for trigger augmentation</a:t>
-            </a:r>
-          </a:p>
-        </p:txBody>
-      </p:sp>
-      <p:sp>
-        <p:nvSpPr>
-          <p:cNvPr id="22" name="TextBox 21"/>
-          <p:cNvSpPr txBox="1"/>
-          <p:nvPr/>
-        </p:nvSpPr>
-        <p:spPr>
-          <a:xfrm>
-            <a:off x="8961120" y="2697480"/>
-            <a:ext cx="2651760" cy="411480"/>
-          </a:xfrm>
-          <a:prstGeom prst="rect">
-            <a:avLst/>
-          </a:prstGeom>
-          <a:noFill/>
-        </p:spPr>
-        <p:txBody>
-          <a:bodyPr wrap="square" lIns="73152" rIns="73152" tIns="43891" bIns="43891" anchor="ctr">
-            <a:spAutoFit/>
-          </a:bodyPr>
-          <a:lstStyle/>
-          <a:p>
-            <a:pPr algn="l"/>
-            <a:r>
-              <a:rPr sz="1100" b="0" i="0">
-                <a:solidFill>
-                  <a:srgbClr val="404856"/>
-                </a:solidFill>
-                <a:latin typeface="Calibri"/>
-              </a:rPr>
-              <a:t>coqui/XTTS-v2 · CPML</a:t>
-            </a:r>
-          </a:p>
-        </p:txBody>
-      </p:sp>
-      <p:sp>
-        <p:nvSpPr>
-          <p:cNvPr id="23" name="TextBox 22"/>
-          <p:cNvSpPr txBox="1"/>
-          <p:nvPr/>
-        </p:nvSpPr>
-        <p:spPr>
-          <a:xfrm>
-            <a:off x="731520" y="3108960"/>
-            <a:ext cx="2651760" cy="411480"/>
-          </a:xfrm>
-          <a:prstGeom prst="rect">
-            <a:avLst/>
-          </a:prstGeom>
-          <a:noFill/>
-        </p:spPr>
-        <p:txBody>
-          <a:bodyPr wrap="square" lIns="73152" rIns="73152" tIns="43891" bIns="43891" anchor="ctr">
-            <a:spAutoFit/>
-          </a:bodyPr>
-          <a:lstStyle/>
-          <a:p>
-            <a:pPr algn="l"/>
-            <a:r>
-              <a:rPr sz="1100" b="1" i="0">
-                <a:solidFill>
-                  <a:srgbClr val="0F1B3D"/>
-                </a:solidFill>
-                <a:latin typeface="Calibri"/>
-              </a:rPr>
-              <a:t>g2p-en</a:t>
-            </a:r>
-          </a:p>
-        </p:txBody>
-      </p:sp>
-      <p:sp>
-        <p:nvSpPr>
-          <p:cNvPr id="24" name="TextBox 23"/>
-          <p:cNvSpPr txBox="1"/>
-          <p:nvPr/>
-        </p:nvSpPr>
-        <p:spPr>
-          <a:xfrm>
-            <a:off x="3474720" y="3108960"/>
-            <a:ext cx="5394960" cy="411480"/>
-          </a:xfrm>
-          <a:prstGeom prst="rect">
-            <a:avLst/>
-          </a:prstGeom>
-          <a:noFill/>
-        </p:spPr>
-        <p:txBody>
-          <a:bodyPr wrap="square" lIns="73152" rIns="73152" tIns="43891" bIns="43891" anchor="ctr">
-            <a:spAutoFit/>
-          </a:bodyPr>
-          <a:lstStyle/>
-          <a:p>
-            <a:pPr algn="l"/>
-            <a:r>
-              <a:rPr sz="1100" b="0" i="0">
-                <a:solidFill>
-                  <a:srgbClr val="404856"/>
-                </a:solidFill>
-                <a:latin typeface="Calibri"/>
-              </a:rPr>
-              <a:t>Trigger word → ARPAbet phones</a:t>
-            </a:r>
-          </a:p>
-        </p:txBody>
-      </p:sp>
-      <p:sp>
-        <p:nvSpPr>
-          <p:cNvPr id="25" name="TextBox 24"/>
-          <p:cNvSpPr txBox="1"/>
-          <p:nvPr/>
-        </p:nvSpPr>
-        <p:spPr>
-          <a:xfrm>
-            <a:off x="8961120" y="3108960"/>
-            <a:ext cx="2651760" cy="411480"/>
-          </a:xfrm>
-          <a:prstGeom prst="rect">
-            <a:avLst/>
-          </a:prstGeom>
-          <a:noFill/>
-        </p:spPr>
-        <p:txBody>
-          <a:bodyPr wrap="square" lIns="73152" rIns="73152" tIns="43891" bIns="43891" anchor="ctr">
-            <a:spAutoFit/>
-          </a:bodyPr>
-          <a:lstStyle/>
-          <a:p>
-            <a:pPr algn="l"/>
-            <a:r>
-              <a:rPr sz="1100" b="0" i="0">
-                <a:solidFill>
-                  <a:srgbClr val="404856"/>
-                </a:solidFill>
-                <a:latin typeface="Calibri"/>
-              </a:rPr>
-              <a:t>Apache-2.0</a:t>
-            </a:r>
-          </a:p>
-        </p:txBody>
-      </p:sp>
-      <p:sp>
-        <p:nvSpPr>
-          <p:cNvPr id="26" name="TextBox 25"/>
-          <p:cNvSpPr txBox="1"/>
-          <p:nvPr/>
-        </p:nvSpPr>
-        <p:spPr>
-          <a:xfrm>
-            <a:off x="457200" y="3931920"/>
-            <a:ext cx="11247120" cy="365760"/>
+            <a:off x="8238744" y="3886200"/>
+            <a:ext cx="3200400" cy="2331720"/>
           </a:xfrm>
           <a:prstGeom prst="rect">
             <a:avLst/>
@@ -5875,346 +4907,37 @@
               </a:spcAft>
             </a:pPr>
             <a:r>
-              <a:rPr sz="1500" b="1" i="0">
-                <a:solidFill>
-                  <a:srgbClr val="003B8E"/>
-                </a:solidFill>
-                <a:latin typeface="Calibri"/>
-              </a:rPr>
-              <a:t>To be developed / trained from scratch  (Apache-2.0)</a:t>
-            </a:r>
-          </a:p>
-        </p:txBody>
-      </p:sp>
-      <p:sp>
-        <p:nvSpPr>
-          <p:cNvPr id="27" name="Rounded Rectangle 26"/>
-          <p:cNvSpPr/>
-          <p:nvPr/>
-        </p:nvSpPr>
-        <p:spPr>
-          <a:xfrm>
-            <a:off x="457200" y="4343400"/>
-            <a:ext cx="11247120" cy="2194560"/>
-          </a:xfrm>
-          <a:prstGeom prst="roundRect">
-            <a:avLst>
-              <a:gd name="adj" fmla="val 6000"/>
-            </a:avLst>
-          </a:prstGeom>
-          <a:solidFill>
-            <a:srgbClr val="FFFFFF"/>
-          </a:solidFill>
-          <a:ln w="9525">
-            <a:solidFill>
-              <a:srgbClr val="D9DEE6"/>
-            </a:solidFill>
-          </a:ln>
-        </p:spPr>
-        <p:style>
-          <a:lnRef idx="1">
-            <a:schemeClr val="accent1"/>
-          </a:lnRef>
-          <a:fillRef idx="3">
-            <a:schemeClr val="accent1"/>
-          </a:fillRef>
-          <a:effectRef idx="2">
-            <a:schemeClr val="accent1"/>
-          </a:effectRef>
-          <a:fontRef idx="minor">
-            <a:schemeClr val="lt1"/>
-          </a:fontRef>
-        </p:style>
-        <p:txBody>
-          <a:bodyPr rtlCol="0" anchor="ctr"/>
-          <a:lstStyle/>
-          <a:p/>
-        </p:txBody>
-      </p:sp>
-      <p:sp>
-        <p:nvSpPr>
-          <p:cNvPr id="28" name="Rectangle 27"/>
-          <p:cNvSpPr/>
-          <p:nvPr/>
-        </p:nvSpPr>
-        <p:spPr>
-          <a:xfrm>
-            <a:off x="640080" y="4434840"/>
-            <a:ext cx="10881360" cy="384048"/>
-          </a:xfrm>
-          <a:prstGeom prst="rect">
-            <a:avLst/>
-          </a:prstGeom>
-          <a:solidFill>
-            <a:srgbClr val="1B7F4F"/>
-          </a:solidFill>
-          <a:ln>
-            <a:noFill/>
-          </a:ln>
-        </p:spPr>
-        <p:style>
-          <a:lnRef idx="1">
-            <a:schemeClr val="accent1"/>
-          </a:lnRef>
-          <a:fillRef idx="3">
-            <a:schemeClr val="accent1"/>
-          </a:fillRef>
-          <a:effectRef idx="2">
-            <a:schemeClr val="accent1"/>
-          </a:effectRef>
-          <a:fontRef idx="minor">
-            <a:schemeClr val="lt1"/>
-          </a:fontRef>
-        </p:style>
-        <p:txBody>
-          <a:bodyPr rtlCol="0" anchor="ctr"/>
-          <a:lstStyle/>
-          <a:p>
-            <a:pPr algn="ctr"/>
-          </a:p>
-        </p:txBody>
-      </p:sp>
-      <p:sp>
-        <p:nvSpPr>
-          <p:cNvPr id="29" name="TextBox 28"/>
-          <p:cNvSpPr txBox="1"/>
-          <p:nvPr/>
-        </p:nvSpPr>
-        <p:spPr>
-          <a:xfrm>
-            <a:off x="731520" y="4434840"/>
-            <a:ext cx="3566160" cy="384048"/>
-          </a:xfrm>
-          <a:prstGeom prst="rect">
-            <a:avLst/>
-          </a:prstGeom>
-          <a:noFill/>
-        </p:spPr>
-        <p:txBody>
-          <a:bodyPr wrap="square" lIns="73152" rIns="73152" tIns="43891" bIns="43891" anchor="ctr">
-            <a:spAutoFit/>
-          </a:bodyPr>
-          <a:lstStyle/>
-          <a:p>
-            <a:pPr algn="l"/>
-            <a:r>
-              <a:rPr sz="1100" b="1" i="0">
-                <a:solidFill>
-                  <a:srgbClr val="FFFFFF"/>
-                </a:solidFill>
-                <a:latin typeface="Calibri"/>
-              </a:rPr>
-              <a:t>Model</a:t>
-            </a:r>
-          </a:p>
-        </p:txBody>
-      </p:sp>
-      <p:sp>
-        <p:nvSpPr>
-          <p:cNvPr id="30" name="TextBox 29"/>
-          <p:cNvSpPr txBox="1"/>
-          <p:nvPr/>
-        </p:nvSpPr>
-        <p:spPr>
-          <a:xfrm>
-            <a:off x="4389120" y="4434840"/>
-            <a:ext cx="7132320" cy="384048"/>
-          </a:xfrm>
-          <a:prstGeom prst="rect">
-            <a:avLst/>
-          </a:prstGeom>
-          <a:noFill/>
-        </p:spPr>
-        <p:txBody>
-          <a:bodyPr wrap="square" lIns="73152" rIns="73152" tIns="43891" bIns="43891" anchor="ctr">
-            <a:spAutoFit/>
-          </a:bodyPr>
-          <a:lstStyle/>
-          <a:p>
-            <a:pPr algn="l"/>
-            <a:r>
-              <a:rPr sz="1100" b="1" i="0">
-                <a:solidFill>
-                  <a:srgbClr val="FFFFFF"/>
-                </a:solidFill>
-                <a:latin typeface="Calibri"/>
-              </a:rPr>
-              <a:t>Description</a:t>
-            </a:r>
-          </a:p>
-        </p:txBody>
-      </p:sp>
-      <p:sp>
-        <p:nvSpPr>
-          <p:cNvPr id="31" name="Rectangle 30"/>
-          <p:cNvSpPr/>
-          <p:nvPr/>
-        </p:nvSpPr>
-        <p:spPr>
-          <a:xfrm>
-            <a:off x="640080" y="4846320"/>
-            <a:ext cx="10881360" cy="594360"/>
-          </a:xfrm>
-          <a:prstGeom prst="rect">
-            <a:avLst/>
-          </a:prstGeom>
-          <a:solidFill>
-            <a:srgbClr val="F4F7FB"/>
-          </a:solidFill>
-          <a:ln>
-            <a:noFill/>
-          </a:ln>
-        </p:spPr>
-        <p:style>
-          <a:lnRef idx="1">
-            <a:schemeClr val="accent1"/>
-          </a:lnRef>
-          <a:fillRef idx="3">
-            <a:schemeClr val="accent1"/>
-          </a:fillRef>
-          <a:effectRef idx="2">
-            <a:schemeClr val="accent1"/>
-          </a:effectRef>
-          <a:fontRef idx="minor">
-            <a:schemeClr val="lt1"/>
-          </a:fontRef>
-        </p:style>
-        <p:txBody>
-          <a:bodyPr rtlCol="0" anchor="ctr"/>
-          <a:lstStyle/>
-          <a:p>
-            <a:pPr algn="ctr"/>
-          </a:p>
-        </p:txBody>
-      </p:sp>
-      <p:sp>
-        <p:nvSpPr>
-          <p:cNvPr id="32" name="TextBox 31"/>
-          <p:cNvSpPr txBox="1"/>
-          <p:nvPr/>
-        </p:nvSpPr>
-        <p:spPr>
-          <a:xfrm>
-            <a:off x="731520" y="4846320"/>
-            <a:ext cx="3566160" cy="594360"/>
-          </a:xfrm>
-          <a:prstGeom prst="rect">
-            <a:avLst/>
-          </a:prstGeom>
-          <a:noFill/>
-        </p:spPr>
-        <p:txBody>
-          <a:bodyPr wrap="square" lIns="73152" rIns="73152" tIns="43891" bIns="43891" anchor="ctr">
-            <a:spAutoFit/>
-          </a:bodyPr>
-          <a:lstStyle/>
-          <a:p>
-            <a:pPr algn="l"/>
-            <a:r>
-              <a:rPr sz="1100" b="1" i="0">
-                <a:solidFill>
-                  <a:srgbClr val="0F1B3D"/>
-                </a:solidFill>
-                <a:latin typeface="Calibri"/>
-              </a:rPr>
-              <a:t>BC-ResNet-8 (modified) joint student</a:t>
-            </a:r>
-          </a:p>
-        </p:txBody>
-      </p:sp>
-      <p:sp>
-        <p:nvSpPr>
-          <p:cNvPr id="33" name="TextBox 32"/>
-          <p:cNvSpPr txBox="1"/>
-          <p:nvPr/>
-        </p:nvSpPr>
-        <p:spPr>
-          <a:xfrm>
-            <a:off x="4389120" y="4846320"/>
-            <a:ext cx="7132320" cy="594360"/>
-          </a:xfrm>
-          <a:prstGeom prst="rect">
-            <a:avLst/>
-          </a:prstGeom>
-          <a:noFill/>
-        </p:spPr>
-        <p:txBody>
-          <a:bodyPr wrap="square" lIns="73152" rIns="73152" tIns="43891" bIns="43891" anchor="ctr">
-            <a:spAutoFit/>
-          </a:bodyPr>
-          <a:lstStyle/>
-          <a:p>
-            <a:pPr algn="l"/>
-            <a:r>
               <a:rPr sz="1100" b="0" i="0">
                 <a:solidFill>
                   <a:srgbClr val="404856"/>
                 </a:solidFill>
                 <a:latin typeface="Calibri"/>
               </a:rPr>
-              <a:t>TRM branching, FiLM speaker conditioning, MQMHA SV pooling — joint KWS + SV, ~830 K params</a:t>
-            </a:r>
-          </a:p>
-        </p:txBody>
-      </p:sp>
-      <p:sp>
-        <p:nvSpPr>
-          <p:cNvPr id="34" name="TextBox 33"/>
-          <p:cNvSpPr txBox="1"/>
-          <p:nvPr/>
-        </p:nvSpPr>
-        <p:spPr>
-          <a:xfrm>
-            <a:off x="731520" y="5440680"/>
-            <a:ext cx="3566160" cy="594360"/>
-          </a:xfrm>
-          <a:prstGeom prst="rect">
-            <a:avLst/>
-          </a:prstGeom>
-          <a:noFill/>
-        </p:spPr>
-        <p:txBody>
-          <a:bodyPr wrap="square" lIns="73152" rIns="73152" tIns="43891" bIns="43891" anchor="ctr">
-            <a:spAutoFit/>
-          </a:bodyPr>
-          <a:lstStyle/>
-          <a:p>
-            <a:pPr algn="l"/>
-            <a:r>
-              <a:rPr sz="1100" b="1" i="0">
-                <a:solidFill>
-                  <a:srgbClr val="0F1B3D"/>
-                </a:solidFill>
-                <a:latin typeface="Calibri"/>
-              </a:rPr>
-              <a:t>WavLM → KWS probing head</a:t>
-            </a:r>
-          </a:p>
-        </p:txBody>
-      </p:sp>
-      <p:sp>
-        <p:nvSpPr>
-          <p:cNvPr id="35" name="TextBox 34"/>
-          <p:cNvSpPr txBox="1"/>
-          <p:nvPr/>
-        </p:nvSpPr>
-        <p:spPr>
-          <a:xfrm>
-            <a:off x="4389120" y="5440680"/>
-            <a:ext cx="7132320" cy="594360"/>
-          </a:xfrm>
-          <a:prstGeom prst="rect">
-            <a:avLst/>
-          </a:prstGeom>
-          <a:noFill/>
-        </p:spPr>
-        <p:txBody>
-          <a:bodyPr wrap="square" lIns="73152" rIns="73152" tIns="43891" bIns="43891" anchor="ctr">
-            <a:spAutoFit/>
-          </a:bodyPr>
-          <a:lstStyle/>
-          <a:p>
-            <a:pPr algn="l"/>
+              <a:t>The operating point is baked into the embedding geometry — not tuned around it.</a:t>
+            </a:r>
+          </a:p>
+          <a:p>
+            <a:pPr algn="l">
+              <a:spcAft>
+                <a:spcPts val="200"/>
+              </a:spcAft>
+            </a:pPr>
+            <a:r>
+              <a:rPr sz="600" b="0" i="0">
+                <a:solidFill>
+                  <a:srgbClr val="404856"/>
+                </a:solidFill>
+                <a:latin typeface="Calibri"/>
+              </a:rPr>
+              <a:t/>
+            </a:r>
+          </a:p>
+          <a:p>
+            <a:pPr algn="l">
+              <a:spcAft>
+                <a:spcPts val="400"/>
+              </a:spcAft>
+            </a:pPr>
             <a:r>
               <a:rPr sz="1100" b="0" i="0">
                 <a:solidFill>
@@ -6222,120 +4945,7 @@
                 </a:solidFill>
                 <a:latin typeface="Calibri"/>
               </a:rPr>
-              <a:t>2-layer MLP, ~50 K params, one-time training</a:t>
-            </a:r>
-          </a:p>
-        </p:txBody>
-      </p:sp>
-      <p:sp>
-        <p:nvSpPr>
-          <p:cNvPr id="36" name="Rectangle 35"/>
-          <p:cNvSpPr/>
-          <p:nvPr/>
-        </p:nvSpPr>
-        <p:spPr>
-          <a:xfrm>
-            <a:off x="640080" y="6035040"/>
-            <a:ext cx="10881360" cy="594360"/>
-          </a:xfrm>
-          <a:prstGeom prst="rect">
-            <a:avLst/>
-          </a:prstGeom>
-          <a:solidFill>
-            <a:srgbClr val="F4F7FB"/>
-          </a:solidFill>
-          <a:ln>
-            <a:noFill/>
-          </a:ln>
-        </p:spPr>
-        <p:style>
-          <a:lnRef idx="1">
-            <a:schemeClr val="accent1"/>
-          </a:lnRef>
-          <a:fillRef idx="3">
-            <a:schemeClr val="accent1"/>
-          </a:fillRef>
-          <a:effectRef idx="2">
-            <a:schemeClr val="accent1"/>
-          </a:effectRef>
-          <a:fontRef idx="minor">
-            <a:schemeClr val="lt1"/>
-          </a:fontRef>
-        </p:style>
-        <p:txBody>
-          <a:bodyPr rtlCol="0" anchor="ctr"/>
-          <a:lstStyle/>
-          <a:p>
-            <a:pPr algn="ctr"/>
-          </a:p>
-        </p:txBody>
-      </p:sp>
-      <p:sp>
-        <p:nvSpPr>
-          <p:cNvPr id="37" name="TextBox 36"/>
-          <p:cNvSpPr txBox="1"/>
-          <p:nvPr/>
-        </p:nvSpPr>
-        <p:spPr>
-          <a:xfrm>
-            <a:off x="731520" y="6035040"/>
-            <a:ext cx="3566160" cy="594360"/>
-          </a:xfrm>
-          <a:prstGeom prst="rect">
-            <a:avLst/>
-          </a:prstGeom>
-          <a:noFill/>
-        </p:spPr>
-        <p:txBody>
-          <a:bodyPr wrap="square" lIns="73152" rIns="73152" tIns="43891" bIns="43891" anchor="ctr">
-            <a:spAutoFit/>
-          </a:bodyPr>
-          <a:lstStyle/>
-          <a:p>
-            <a:pPr algn="l"/>
-            <a:r>
-              <a:rPr sz="1100" b="1" i="0">
-                <a:solidFill>
-                  <a:srgbClr val="0F1B3D"/>
-                </a:solidFill>
-                <a:latin typeface="Calibri"/>
-              </a:rPr>
-              <a:t>INT8-quantised ONNX export</a:t>
-            </a:r>
-          </a:p>
-        </p:txBody>
-      </p:sp>
-      <p:sp>
-        <p:nvSpPr>
-          <p:cNvPr id="38" name="TextBox 37"/>
-          <p:cNvSpPr txBox="1"/>
-          <p:nvPr/>
-        </p:nvSpPr>
-        <p:spPr>
-          <a:xfrm>
-            <a:off x="4389120" y="6035040"/>
-            <a:ext cx="7132320" cy="594360"/>
-          </a:xfrm>
-          <a:prstGeom prst="rect">
-            <a:avLst/>
-          </a:prstGeom>
-          <a:noFill/>
-        </p:spPr>
-        <p:txBody>
-          <a:bodyPr wrap="square" lIns="73152" rIns="73152" tIns="43891" bIns="43891" anchor="ctr">
-            <a:spAutoFit/>
-          </a:bodyPr>
-          <a:lstStyle/>
-          <a:p>
-            <a:pPr algn="l"/>
-            <a:r>
-              <a:rPr sz="1100" b="0" i="0">
-                <a:solidFill>
-                  <a:srgbClr val="404856"/>
-                </a:solidFill>
-                <a:latin typeface="Calibri"/>
-              </a:rPr>
-              <a:t>Edge-deployable artefact — 0.79 MB on disk</a:t>
+              <a:t>FA &lt; 1 / hr becomes a property of the trained model, not of a post-hoc threshold sweep.</a:t>
             </a:r>
           </a:p>
         </p:txBody>
@@ -6439,7 +5049,7 @@
                 </a:solidFill>
                 <a:latin typeface="Calibri"/>
               </a:rPr>
-              <a:t>AI / GenAI / Agentic Tools &amp; Best Practices</a:t>
+              <a:t>Novelty &amp; Innovation</a:t>
             </a:r>
           </a:p>
         </p:txBody>
@@ -6517,21 +5127,66 @@
                 </a:solidFill>
                 <a:latin typeface="Calibri"/>
               </a:rPr>
-              <a:t>12 / 12</a:t>
-            </a:r>
-          </a:p>
-        </p:txBody>
-      </p:sp>
-      <p:sp>
-        <p:nvSpPr>
-          <p:cNvPr id="6" name="TextBox 5"/>
-          <p:cNvSpPr txBox="1"/>
+              <a:t>12 / 17</a:t>
+            </a:r>
+          </a:p>
+        </p:txBody>
+      </p:sp>
+      <p:sp>
+        <p:nvSpPr>
+          <p:cNvPr id="6" name="Rounded Rectangle 5"/>
+          <p:cNvSpPr/>
           <p:nvPr/>
         </p:nvSpPr>
         <p:spPr>
           <a:xfrm>
             <a:off x="457200" y="960120"/>
-            <a:ext cx="5486400" cy="365760"/>
+            <a:ext cx="11247120" cy="1783080"/>
+          </a:xfrm>
+          <a:prstGeom prst="roundRect">
+            <a:avLst>
+              <a:gd name="adj" fmla="val 6000"/>
+            </a:avLst>
+          </a:prstGeom>
+          <a:solidFill>
+            <a:srgbClr val="FDEEEE"/>
+          </a:solidFill>
+          <a:ln w="9525">
+            <a:solidFill>
+              <a:srgbClr val="C3292B"/>
+            </a:solidFill>
+          </a:ln>
+        </p:spPr>
+        <p:style>
+          <a:lnRef idx="1">
+            <a:schemeClr val="accent1"/>
+          </a:lnRef>
+          <a:fillRef idx="3">
+            <a:schemeClr val="accent1"/>
+          </a:fillRef>
+          <a:effectRef idx="2">
+            <a:schemeClr val="accent1"/>
+          </a:effectRef>
+          <a:fontRef idx="minor">
+            <a:schemeClr val="lt1"/>
+          </a:fontRef>
+        </p:style>
+        <p:txBody>
+          <a:bodyPr rtlCol="0" anchor="ctr"/>
+          <a:lstStyle/>
+          <a:p/>
+        </p:txBody>
+      </p:sp>
+      <p:sp>
+        <p:nvSpPr>
+          <p:cNvPr id="7" name="TextBox 6"/>
+          <p:cNvSpPr txBox="1"/>
+          <p:nvPr/>
+        </p:nvSpPr>
+        <p:spPr>
+          <a:xfrm>
+            <a:off x="640080" y="1005840"/>
+            <a:ext cx="10972800" cy="1737360"/>
           </a:xfrm>
           <a:prstGeom prst="rect">
             <a:avLst/>
@@ -6543,6 +5198,22 @@
             <a:spAutoFit/>
           </a:bodyPr>
           <a:lstStyle/>
+          <a:p>
+            <a:pPr algn="l">
+              <a:spcAft>
+                <a:spcPts val="600"/>
+              </a:spcAft>
+            </a:pPr>
+            <a:r>
+              <a:rPr sz="1400" b="1" i="0">
+                <a:solidFill>
+                  <a:srgbClr val="C3292B"/>
+                </a:solidFill>
+                <a:latin typeface="Calibri"/>
+              </a:rPr>
+              <a:t>Core novelty  ·  structural false-accept rejection via FiLM-conditioned KWS</a:t>
+            </a:r>
+          </a:p>
           <a:p>
             <a:pPr algn="l">
               <a:spcAft>
@@ -6550,27 +5221,39 @@
               </a:spcAft>
             </a:pPr>
             <a:r>
-              <a:rPr sz="1500" b="1" i="0">
-                <a:solidFill>
-                  <a:srgbClr val="003B8E"/>
-                </a:solidFill>
-                <a:latin typeface="Calibri"/>
-              </a:rPr>
-              <a:t>Tools used</a:t>
-            </a:r>
-          </a:p>
-        </p:txBody>
-      </p:sp>
-      <p:sp>
-        <p:nvSpPr>
-          <p:cNvPr id="7" name="Rounded Rectangle 6"/>
+              <a:rPr sz="1100" b="0" i="0">
+                <a:solidFill>
+                  <a:srgbClr val="404856"/>
+                </a:solidFill>
+                <a:latin typeface="Calibri"/>
+              </a:rPr>
+              <a:t>Conventional personalised wake-word systems run KWS and SV as independent gates and AND the decisions — any leakage between heads or threshold drift breaks the FA &lt; 1 / hr budget.</a:t>
+            </a:r>
+          </a:p>
+          <a:p>
+            <a:pPr algn="l"/>
+            <a:r>
+              <a:rPr sz="1100" b="0" i="0">
+                <a:solidFill>
+                  <a:srgbClr val="404856"/>
+                </a:solidFill>
+                <a:latin typeface="Calibri"/>
+              </a:rPr>
+              <a:t>We instead modulate the KWS classifier's intermediate features with the enrolled user's voice embedding, so the same audio produces different logits for different enrolled users. Impostor rejection becomes a property of the network, not of a tunable threshold.</a:t>
+            </a:r>
+          </a:p>
+        </p:txBody>
+      </p:sp>
+      <p:sp>
+        <p:nvSpPr>
+          <p:cNvPr id="8" name="Rounded Rectangle 7"/>
           <p:cNvSpPr/>
           <p:nvPr/>
         </p:nvSpPr>
         <p:spPr>
           <a:xfrm>
-            <a:off x="457200" y="1371600"/>
-            <a:ext cx="5486400" cy="5029200"/>
+            <a:off x="457200" y="2926080"/>
+            <a:ext cx="5605272" cy="1691640"/>
           </a:xfrm>
           <a:prstGeom prst="roundRect">
             <a:avLst>
@@ -6608,14 +5291,14 @@
       </p:sp>
       <p:sp>
         <p:nvSpPr>
-          <p:cNvPr id="8" name="TextBox 7"/>
-          <p:cNvSpPr txBox="1"/>
-          <p:nvPr/>
-        </p:nvSpPr>
-        <p:spPr>
-          <a:xfrm>
-            <a:off x="640080" y="1463040"/>
-            <a:ext cx="5212080" cy="4892040"/>
+          <p:cNvPr id="9" name="TextBox 8"/>
+          <p:cNvSpPr txBox="1"/>
+          <p:nvPr/>
+        </p:nvSpPr>
+        <p:spPr>
+          <a:xfrm>
+            <a:off x="640080" y="3017520"/>
+            <a:ext cx="5239512" cy="365760"/>
           </a:xfrm>
           <a:prstGeom prst="rect">
             <a:avLst/>
@@ -6628,20 +5311,42 @@
           </a:bodyPr>
           <a:lstStyle/>
           <a:p>
-            <a:pPr algn="l">
-              <a:spcAft>
-                <a:spcPts val="400"/>
-              </a:spcAft>
-            </a:pPr>
+            <a:pPr algn="l"/>
             <a:r>
               <a:rPr sz="1200" b="1" i="0">
                 <a:solidFill>
-                  <a:srgbClr val="144BC4"/>
-                </a:solidFill>
-                <a:latin typeface="Calibri"/>
-              </a:rPr>
-              <a:t>• PyTorch 2.x  </a:t>
-            </a:r>
+                  <a:srgbClr val="0F1B3D"/>
+                </a:solidFill>
+                <a:latin typeface="Calibri"/>
+              </a:rPr>
+              <a:t>Layer-ensemble WavLM distillation</a:t>
+            </a:r>
+          </a:p>
+        </p:txBody>
+      </p:sp>
+      <p:sp>
+        <p:nvSpPr>
+          <p:cNvPr id="10" name="TextBox 9"/>
+          <p:cNvSpPr txBox="1"/>
+          <p:nvPr/>
+        </p:nvSpPr>
+        <p:spPr>
+          <a:xfrm>
+            <a:off x="640080" y="3383280"/>
+            <a:ext cx="5239512" cy="1143000"/>
+          </a:xfrm>
+          <a:prstGeom prst="rect">
+            <a:avLst/>
+          </a:prstGeom>
+          <a:noFill/>
+        </p:spPr>
+        <p:txBody>
+          <a:bodyPr wrap="square" lIns="73152" rIns="73152" tIns="43891" bIns="43891" anchor="t">
+            <a:spAutoFit/>
+          </a:bodyPr>
+          <a:lstStyle/>
+          <a:p>
+            <a:pPr algn="l"/>
             <a:r>
               <a:rPr sz="1100" b="0" i="0">
                 <a:solidFill>
@@ -6649,210 +5354,21 @@
                 </a:solidFill>
                 <a:latin typeface="Calibri"/>
               </a:rPr>
-              <a:t>+ torch.compile(mode="reduce-overhead") for ~15 % Kaggle speedup.</a:t>
-            </a:r>
-          </a:p>
-          <a:p>
-            <a:pPr algn="l">
-              <a:spcAft>
-                <a:spcPts val="400"/>
-              </a:spcAft>
-            </a:pPr>
-            <a:r>
-              <a:rPr sz="1200" b="1" i="0">
-                <a:solidFill>
-                  <a:srgbClr val="144BC4"/>
-                </a:solidFill>
-                <a:latin typeface="Calibri"/>
-              </a:rPr>
-              <a:t>• HuggingFace Transformers / SpeechBrain  </a:t>
-            </a:r>
-            <a:r>
-              <a:rPr sz="1100" b="0" i="0">
-                <a:solidFill>
-                  <a:srgbClr val="404856"/>
-                </a:solidFill>
-                <a:latin typeface="Calibri"/>
-              </a:rPr>
-              <a:t>frozen teacher inference (WavLM, ECAPA).</a:t>
-            </a:r>
-          </a:p>
-          <a:p>
-            <a:pPr algn="l">
-              <a:spcAft>
-                <a:spcPts val="400"/>
-              </a:spcAft>
-            </a:pPr>
-            <a:r>
-              <a:rPr sz="1200" b="1" i="0">
-                <a:solidFill>
-                  <a:srgbClr val="144BC4"/>
-                </a:solidFill>
-                <a:latin typeface="Calibri"/>
-              </a:rPr>
-              <a:t>• Coqui XTTS-v2  </a:t>
-            </a:r>
-            <a:r>
-              <a:rPr sz="1100" b="0" i="0">
-                <a:solidFill>
-                  <a:srgbClr val="404856"/>
-                </a:solidFill>
-                <a:latin typeface="Calibri"/>
-              </a:rPr>
-              <a:t>generative-AI component for synthetic speaker diversity in trigger and confusable data.</a:t>
-            </a:r>
-          </a:p>
-          <a:p>
-            <a:pPr algn="l">
-              <a:spcAft>
-                <a:spcPts val="400"/>
-              </a:spcAft>
-            </a:pPr>
-            <a:r>
-              <a:rPr sz="1200" b="1" i="0">
-                <a:solidFill>
-                  <a:srgbClr val="144BC4"/>
-                </a:solidFill>
-                <a:latin typeface="Calibri"/>
-              </a:rPr>
-              <a:t>• Optuna (TPE sampler)  </a:t>
-            </a:r>
-            <a:r>
-              <a:rPr sz="1100" b="0" i="0">
-                <a:solidFill>
-                  <a:srgbClr val="404856"/>
-                </a:solidFill>
-                <a:latin typeface="Calibri"/>
-              </a:rPr>
-              <a:t>automated multi-task loss-weight + AAM hyperparameter search, scoped to Stage 2.</a:t>
-            </a:r>
-          </a:p>
-          <a:p>
-            <a:pPr algn="l">
-              <a:spcAft>
-                <a:spcPts val="400"/>
-              </a:spcAft>
-            </a:pPr>
-            <a:r>
-              <a:rPr sz="1200" b="1" i="0">
-                <a:solidFill>
-                  <a:srgbClr val="144BC4"/>
-                </a:solidFill>
-                <a:latin typeface="Calibri"/>
-              </a:rPr>
-              <a:t>• ONNX Runtime + Quantization Toolkit  </a:t>
-            </a:r>
-            <a:r>
-              <a:rPr sz="1100" b="0" i="0">
-                <a:solidFill>
-                  <a:srgbClr val="404856"/>
-                </a:solidFill>
-                <a:latin typeface="Calibri"/>
-              </a:rPr>
-              <a:t>INT8 edge export and latency benchmarking.</a:t>
-            </a:r>
-          </a:p>
-          <a:p>
-            <a:pPr algn="l">
-              <a:spcAft>
-                <a:spcPts val="400"/>
-              </a:spcAft>
-            </a:pPr>
-            <a:r>
-              <a:rPr sz="1200" b="1" i="0">
-                <a:solidFill>
-                  <a:srgbClr val="144BC4"/>
-                </a:solidFill>
-                <a:latin typeface="Calibri"/>
-              </a:rPr>
-              <a:t>• Google kws_streaming  </a:t>
-            </a:r>
-            <a:r>
-              <a:rPr sz="1100" b="0" i="0">
-                <a:solidFill>
-                  <a:srgbClr val="404856"/>
-                </a:solidFill>
-                <a:latin typeface="Calibri"/>
-              </a:rPr>
-              <a:t>reference for stateful streaming inference.</a:t>
-            </a:r>
-          </a:p>
-          <a:p>
-            <a:pPr algn="l">
-              <a:spcAft>
-                <a:spcPts val="400"/>
-              </a:spcAft>
-            </a:pPr>
-            <a:r>
-              <a:rPr sz="1200" b="1" i="0">
-                <a:solidFill>
-                  <a:srgbClr val="144BC4"/>
-                </a:solidFill>
-                <a:latin typeface="Calibri"/>
-              </a:rPr>
-              <a:t>• Claude Code (Anthropic CLI)  </a:t>
-            </a:r>
-            <a:r>
-              <a:rPr sz="1100" b="0" i="0">
-                <a:solidFill>
-                  <a:srgbClr val="404856"/>
-                </a:solidFill>
-                <a:latin typeface="Calibri"/>
-              </a:rPr>
-              <a:t>agentic AI pair-programmer used throughout for code generation, blueprint iteration, multilingual eval, and PPTX rendering.</a:t>
-            </a:r>
-          </a:p>
-        </p:txBody>
-      </p:sp>
-      <p:sp>
-        <p:nvSpPr>
-          <p:cNvPr id="9" name="TextBox 8"/>
-          <p:cNvSpPr txBox="1"/>
-          <p:nvPr/>
-        </p:nvSpPr>
-        <p:spPr>
-          <a:xfrm>
-            <a:off x="6217920" y="960120"/>
-            <a:ext cx="5486400" cy="365760"/>
-          </a:xfrm>
-          <a:prstGeom prst="rect">
-            <a:avLst/>
-          </a:prstGeom>
-          <a:noFill/>
-        </p:spPr>
-        <p:txBody>
-          <a:bodyPr wrap="square" lIns="73152" rIns="73152" tIns="43891" bIns="43891" anchor="t">
-            <a:spAutoFit/>
-          </a:bodyPr>
-          <a:lstStyle/>
-          <a:p>
-            <a:pPr algn="l">
-              <a:spcAft>
-                <a:spcPts val="400"/>
-              </a:spcAft>
-            </a:pPr>
-            <a:r>
-              <a:rPr sz="1500" b="1" i="0">
-                <a:solidFill>
-                  <a:srgbClr val="003B8E"/>
-                </a:solidFill>
-                <a:latin typeface="Calibri"/>
-              </a:rPr>
-              <a:t>Best practices uncovered</a:t>
-            </a:r>
-          </a:p>
-        </p:txBody>
-      </p:sp>
-      <p:sp>
-        <p:nvSpPr>
-          <p:cNvPr id="10" name="Rounded Rectangle 9"/>
+              <a:t>Three learnable softmax weights over WavLM layers {4, 8, 11} — beats single-layer choice (SKILL, Interspeech 2024). Phase-1 validated at the final-layer simplest form (+0.7 pp KWS clean).</a:t>
+            </a:r>
+          </a:p>
+        </p:txBody>
+      </p:sp>
+      <p:sp>
+        <p:nvSpPr>
+          <p:cNvPr id="11" name="Rounded Rectangle 10"/>
           <p:cNvSpPr/>
           <p:nvPr/>
         </p:nvSpPr>
         <p:spPr>
           <a:xfrm>
-            <a:off x="6217920" y="1371600"/>
-            <a:ext cx="5486400" cy="5029200"/>
+            <a:off x="6126480" y="2926080"/>
+            <a:ext cx="5605272" cy="1691640"/>
           </a:xfrm>
           <a:prstGeom prst="roundRect">
             <a:avLst>
@@ -6890,6 +5406,4227 @@
       </p:sp>
       <p:sp>
         <p:nvSpPr>
+          <p:cNvPr id="12" name="TextBox 11"/>
+          <p:cNvSpPr txBox="1"/>
+          <p:nvPr/>
+        </p:nvSpPr>
+        <p:spPr>
+          <a:xfrm>
+            <a:off x="6309360" y="3017520"/>
+            <a:ext cx="5239512" cy="365760"/>
+          </a:xfrm>
+          <a:prstGeom prst="rect">
+            <a:avLst/>
+          </a:prstGeom>
+          <a:noFill/>
+        </p:spPr>
+        <p:txBody>
+          <a:bodyPr wrap="square" lIns="73152" rIns="73152" tIns="43891" bIns="43891" anchor="t">
+            <a:spAutoFit/>
+          </a:bodyPr>
+          <a:lstStyle/>
+          <a:p>
+            <a:pPr algn="l"/>
+            <a:r>
+              <a:rPr sz="1200" b="1" i="0">
+                <a:solidFill>
+                  <a:srgbClr val="0F1B3D"/>
+                </a:solidFill>
+                <a:latin typeface="Calibri"/>
+              </a:rPr>
+              <a:t>Multi-level ECAPA distillation</a:t>
+            </a:r>
+          </a:p>
+        </p:txBody>
+      </p:sp>
+      <p:sp>
+        <p:nvSpPr>
+          <p:cNvPr id="13" name="TextBox 12"/>
+          <p:cNvSpPr txBox="1"/>
+          <p:nvPr/>
+        </p:nvSpPr>
+        <p:spPr>
+          <a:xfrm>
+            <a:off x="6309360" y="3383280"/>
+            <a:ext cx="5239512" cy="1143000"/>
+          </a:xfrm>
+          <a:prstGeom prst="rect">
+            <a:avLst/>
+          </a:prstGeom>
+          <a:noFill/>
+        </p:spPr>
+        <p:txBody>
+          <a:bodyPr wrap="square" lIns="73152" rIns="73152" tIns="43891" bIns="43891" anchor="t">
+            <a:spAutoFit/>
+          </a:bodyPr>
+          <a:lstStyle/>
+          <a:p>
+            <a:pPr algn="l"/>
+            <a:r>
+              <a:rPr sz="1100" b="0" i="0">
+                <a:solidFill>
+                  <a:srgbClr val="404856"/>
+                </a:solidFill>
+                <a:latin typeface="Calibri"/>
+              </a:rPr>
+              <a:t>Cosine on final embedding + MSE on block-2 and block-3 features (projected via 1×1 conv) — ~5 % relative EER reduction over final-only KD.</a:t>
+            </a:r>
+          </a:p>
+        </p:txBody>
+      </p:sp>
+      <p:sp>
+        <p:nvSpPr>
+          <p:cNvPr id="14" name="Rounded Rectangle 13"/>
+          <p:cNvSpPr/>
+          <p:nvPr/>
+        </p:nvSpPr>
+        <p:spPr>
+          <a:xfrm>
+            <a:off x="457200" y="4754880"/>
+            <a:ext cx="5605272" cy="1691640"/>
+          </a:xfrm>
+          <a:prstGeom prst="roundRect">
+            <a:avLst>
+              <a:gd name="adj" fmla="val 6000"/>
+            </a:avLst>
+          </a:prstGeom>
+          <a:solidFill>
+            <a:srgbClr val="FFFFFF"/>
+          </a:solidFill>
+          <a:ln w="9525">
+            <a:solidFill>
+              <a:srgbClr val="D9DEE6"/>
+            </a:solidFill>
+          </a:ln>
+        </p:spPr>
+        <p:style>
+          <a:lnRef idx="1">
+            <a:schemeClr val="accent1"/>
+          </a:lnRef>
+          <a:fillRef idx="3">
+            <a:schemeClr val="accent1"/>
+          </a:fillRef>
+          <a:effectRef idx="2">
+            <a:schemeClr val="accent1"/>
+          </a:effectRef>
+          <a:fontRef idx="minor">
+            <a:schemeClr val="lt1"/>
+          </a:fontRef>
+        </p:style>
+        <p:txBody>
+          <a:bodyPr rtlCol="0" anchor="ctr"/>
+          <a:lstStyle/>
+          <a:p/>
+        </p:txBody>
+      </p:sp>
+      <p:sp>
+        <p:nvSpPr>
+          <p:cNvPr id="15" name="TextBox 14"/>
+          <p:cNvSpPr txBox="1"/>
+          <p:nvPr/>
+        </p:nvSpPr>
+        <p:spPr>
+          <a:xfrm>
+            <a:off x="640080" y="4846320"/>
+            <a:ext cx="5239512" cy="365760"/>
+          </a:xfrm>
+          <a:prstGeom prst="rect">
+            <a:avLst/>
+          </a:prstGeom>
+          <a:noFill/>
+        </p:spPr>
+        <p:txBody>
+          <a:bodyPr wrap="square" lIns="73152" rIns="73152" tIns="43891" bIns="43891" anchor="t">
+            <a:spAutoFit/>
+          </a:bodyPr>
+          <a:lstStyle/>
+          <a:p>
+            <a:pPr algn="l"/>
+            <a:r>
+              <a:rPr sz="1200" b="1" i="0">
+                <a:solidFill>
+                  <a:srgbClr val="0F1B3D"/>
+                </a:solidFill>
+                <a:latin typeface="Calibri"/>
+              </a:rPr>
+              <a:t>Phonetic confusable hard-negative mining</a:t>
+            </a:r>
+          </a:p>
+        </p:txBody>
+      </p:sp>
+      <p:sp>
+        <p:nvSpPr>
+          <p:cNvPr id="16" name="TextBox 15"/>
+          <p:cNvSpPr txBox="1"/>
+          <p:nvPr/>
+        </p:nvSpPr>
+        <p:spPr>
+          <a:xfrm>
+            <a:off x="640080" y="5212080"/>
+            <a:ext cx="5239512" cy="1143000"/>
+          </a:xfrm>
+          <a:prstGeom prst="rect">
+            <a:avLst/>
+          </a:prstGeom>
+          <a:noFill/>
+        </p:spPr>
+        <p:txBody>
+          <a:bodyPr wrap="square" lIns="73152" rIns="73152" tIns="43891" bIns="43891" anchor="t">
+            <a:spAutoFit/>
+          </a:bodyPr>
+          <a:lstStyle/>
+          <a:p>
+            <a:pPr algn="l"/>
+            <a:r>
+              <a:rPr sz="1100" b="0" i="0">
+                <a:solidFill>
+                  <a:srgbClr val="404856"/>
+                </a:solidFill>
+                <a:latin typeface="Calibri"/>
+              </a:rPr>
+              <a:t>TIMIT phone-confusion-weighted Levenshtein on G2P output, sampled at 3× during training — directly targets the FA &lt; 1 / hr risk.</a:t>
+            </a:r>
+          </a:p>
+        </p:txBody>
+      </p:sp>
+      <p:sp>
+        <p:nvSpPr>
+          <p:cNvPr id="17" name="Rounded Rectangle 16"/>
+          <p:cNvSpPr/>
+          <p:nvPr/>
+        </p:nvSpPr>
+        <p:spPr>
+          <a:xfrm>
+            <a:off x="6126480" y="4754880"/>
+            <a:ext cx="5605272" cy="1691640"/>
+          </a:xfrm>
+          <a:prstGeom prst="roundRect">
+            <a:avLst>
+              <a:gd name="adj" fmla="val 6000"/>
+            </a:avLst>
+          </a:prstGeom>
+          <a:solidFill>
+            <a:srgbClr val="FFFFFF"/>
+          </a:solidFill>
+          <a:ln w="9525">
+            <a:solidFill>
+              <a:srgbClr val="D9DEE6"/>
+            </a:solidFill>
+          </a:ln>
+        </p:spPr>
+        <p:style>
+          <a:lnRef idx="1">
+            <a:schemeClr val="accent1"/>
+          </a:lnRef>
+          <a:fillRef idx="3">
+            <a:schemeClr val="accent1"/>
+          </a:fillRef>
+          <a:effectRef idx="2">
+            <a:schemeClr val="accent1"/>
+          </a:effectRef>
+          <a:fontRef idx="minor">
+            <a:schemeClr val="lt1"/>
+          </a:fontRef>
+        </p:style>
+        <p:txBody>
+          <a:bodyPr rtlCol="0" anchor="ctr"/>
+          <a:lstStyle/>
+          <a:p/>
+        </p:txBody>
+      </p:sp>
+      <p:sp>
+        <p:nvSpPr>
+          <p:cNvPr id="18" name="TextBox 17"/>
+          <p:cNvSpPr txBox="1"/>
+          <p:nvPr/>
+        </p:nvSpPr>
+        <p:spPr>
+          <a:xfrm>
+            <a:off x="6309360" y="4846320"/>
+            <a:ext cx="5239512" cy="365760"/>
+          </a:xfrm>
+          <a:prstGeom prst="rect">
+            <a:avLst/>
+          </a:prstGeom>
+          <a:noFill/>
+        </p:spPr>
+        <p:txBody>
+          <a:bodyPr wrap="square" lIns="73152" rIns="73152" tIns="43891" bIns="43891" anchor="t">
+            <a:spAutoFit/>
+          </a:bodyPr>
+          <a:lstStyle/>
+          <a:p>
+            <a:pPr algn="l"/>
+            <a:r>
+              <a:rPr sz="1200" b="1" i="0">
+                <a:solidFill>
+                  <a:srgbClr val="0F1B3D"/>
+                </a:solidFill>
+                <a:latin typeface="Calibri"/>
+              </a:rPr>
+              <a:t>Considered &amp; rejected alternatives</a:t>
+            </a:r>
+          </a:p>
+        </p:txBody>
+      </p:sp>
+      <p:sp>
+        <p:nvSpPr>
+          <p:cNvPr id="19" name="TextBox 18"/>
+          <p:cNvSpPr txBox="1"/>
+          <p:nvPr/>
+        </p:nvSpPr>
+        <p:spPr>
+          <a:xfrm>
+            <a:off x="6309360" y="5212080"/>
+            <a:ext cx="5239512" cy="1143000"/>
+          </a:xfrm>
+          <a:prstGeom prst="rect">
+            <a:avLst/>
+          </a:prstGeom>
+          <a:noFill/>
+        </p:spPr>
+        <p:txBody>
+          <a:bodyPr wrap="square" lIns="73152" rIns="73152" tIns="43891" bIns="43891" anchor="t">
+            <a:spAutoFit/>
+          </a:bodyPr>
+          <a:lstStyle/>
+          <a:p>
+            <a:pPr algn="l"/>
+            <a:r>
+              <a:rPr sz="1100" b="0" i="0">
+                <a:solidFill>
+                  <a:srgbClr val="404856"/>
+                </a:solidFill>
+                <a:latin typeface="Calibri"/>
+              </a:rPr>
+              <a:t>Audio Mamba — 5× BC-ResNet params for equal clean acc., deploy immature.  ·  LEAF / SincNet — only PCEN actually trains; already covered.  ·  GRL adversarial — removes the speaker signal we need.  ·  Deep cross-attn — 4× compute, breaks xRT budget.</a:t>
+            </a:r>
+          </a:p>
+        </p:txBody>
+      </p:sp>
+    </p:spTree>
+  </p:cSld>
+  <p:clrMapOvr>
+    <a:masterClrMapping/>
+  </p:clrMapOvr>
+</p:sld>
+</file>
+
+<file path=ppt/slides/slide13.xml><?xml version="1.0" encoding="utf-8"?>
+<p:sld xmlns:a="http://schemas.openxmlformats.org/drawingml/2006/main" xmlns:p="http://schemas.openxmlformats.org/presentationml/2006/main" xmlns:r="http://schemas.openxmlformats.org/officeDocument/2006/relationships">
+  <p:cSld>
+    <p:bg>
+      <p:bgPr>
+        <a:solidFill>
+          <a:srgbClr val="FAFCFF"/>
+        </a:solidFill>
+        <a:effectLst/>
+      </p:bgPr>
+    </p:bg>
+    <p:spTree>
+      <p:nvGrpSpPr>
+        <p:cNvPr id="1" name=""/>
+        <p:cNvGrpSpPr/>
+        <p:nvPr/>
+      </p:nvGrpSpPr>
+      <p:grpSpPr/>
+      <p:sp>
+        <p:nvSpPr>
+          <p:cNvPr id="2" name="Rectangle 1"/>
+          <p:cNvSpPr/>
+          <p:nvPr/>
+        </p:nvSpPr>
+        <p:spPr>
+          <a:xfrm>
+            <a:off x="0" y="0"/>
+            <a:ext cx="12191695" cy="777240"/>
+          </a:xfrm>
+          <a:prstGeom prst="rect">
+            <a:avLst/>
+          </a:prstGeom>
+          <a:solidFill>
+            <a:srgbClr val="003B8E"/>
+          </a:solidFill>
+          <a:ln>
+            <a:noFill/>
+          </a:ln>
+        </p:spPr>
+        <p:style>
+          <a:lnRef idx="1">
+            <a:schemeClr val="accent1"/>
+          </a:lnRef>
+          <a:fillRef idx="3">
+            <a:schemeClr val="accent1"/>
+          </a:fillRef>
+          <a:effectRef idx="2">
+            <a:schemeClr val="accent1"/>
+          </a:effectRef>
+          <a:fontRef idx="minor">
+            <a:schemeClr val="lt1"/>
+          </a:fontRef>
+        </p:style>
+        <p:txBody>
+          <a:bodyPr rtlCol="0" anchor="ctr"/>
+          <a:lstStyle/>
+          <a:p>
+            <a:pPr algn="ctr"/>
+          </a:p>
+        </p:txBody>
+      </p:sp>
+      <p:sp>
+        <p:nvSpPr>
+          <p:cNvPr id="3" name="TextBox 2"/>
+          <p:cNvSpPr txBox="1"/>
+          <p:nvPr/>
+        </p:nvSpPr>
+        <p:spPr>
+          <a:xfrm>
+            <a:off x="365760" y="0"/>
+            <a:ext cx="11460175" cy="777240"/>
+          </a:xfrm>
+          <a:prstGeom prst="rect">
+            <a:avLst/>
+          </a:prstGeom>
+          <a:noFill/>
+        </p:spPr>
+        <p:txBody>
+          <a:bodyPr wrap="square" lIns="73152" rIns="73152" tIns="43891" bIns="43891" anchor="ctr">
+            <a:spAutoFit/>
+          </a:bodyPr>
+          <a:lstStyle/>
+          <a:p>
+            <a:pPr algn="l"/>
+            <a:r>
+              <a:rPr sz="2400" b="1" i="0">
+                <a:solidFill>
+                  <a:srgbClr val="FFFFFF"/>
+                </a:solidFill>
+                <a:latin typeface="Calibri"/>
+              </a:rPr>
+              <a:t>Open Datasets — Used &amp; To Be Published</a:t>
+            </a:r>
+          </a:p>
+        </p:txBody>
+      </p:sp>
+      <p:sp>
+        <p:nvSpPr>
+          <p:cNvPr id="4" name="Rectangle 3"/>
+          <p:cNvSpPr/>
+          <p:nvPr/>
+        </p:nvSpPr>
+        <p:spPr>
+          <a:xfrm>
+            <a:off x="0" y="777240"/>
+            <a:ext cx="12191695" cy="36576"/>
+          </a:xfrm>
+          <a:prstGeom prst="rect">
+            <a:avLst/>
+          </a:prstGeom>
+          <a:solidFill>
+            <a:srgbClr val="B8860B"/>
+          </a:solidFill>
+          <a:ln>
+            <a:noFill/>
+          </a:ln>
+        </p:spPr>
+        <p:style>
+          <a:lnRef idx="1">
+            <a:schemeClr val="accent1"/>
+          </a:lnRef>
+          <a:fillRef idx="3">
+            <a:schemeClr val="accent1"/>
+          </a:fillRef>
+          <a:effectRef idx="2">
+            <a:schemeClr val="accent1"/>
+          </a:effectRef>
+          <a:fontRef idx="minor">
+            <a:schemeClr val="lt1"/>
+          </a:fontRef>
+        </p:style>
+        <p:txBody>
+          <a:bodyPr rtlCol="0" anchor="ctr"/>
+          <a:lstStyle/>
+          <a:p>
+            <a:pPr algn="ctr"/>
+          </a:p>
+        </p:txBody>
+      </p:sp>
+      <p:sp>
+        <p:nvSpPr>
+          <p:cNvPr id="5" name="TextBox 4"/>
+          <p:cNvSpPr txBox="1"/>
+          <p:nvPr/>
+        </p:nvSpPr>
+        <p:spPr>
+          <a:xfrm>
+            <a:off x="10820095" y="6537960"/>
+            <a:ext cx="1188720" cy="274320"/>
+          </a:xfrm>
+          <a:prstGeom prst="rect">
+            <a:avLst/>
+          </a:prstGeom>
+          <a:noFill/>
+        </p:spPr>
+        <p:txBody>
+          <a:bodyPr wrap="square" lIns="73152" rIns="73152" tIns="43891" bIns="43891" anchor="t">
+            <a:spAutoFit/>
+          </a:bodyPr>
+          <a:lstStyle/>
+          <a:p>
+            <a:pPr algn="r"/>
+            <a:r>
+              <a:rPr sz="900" b="0" i="0">
+                <a:solidFill>
+                  <a:srgbClr val="6A7383"/>
+                </a:solidFill>
+                <a:latin typeface="Calibri"/>
+              </a:rPr>
+              <a:t>13 / 17</a:t>
+            </a:r>
+          </a:p>
+        </p:txBody>
+      </p:sp>
+      <p:sp>
+        <p:nvSpPr>
+          <p:cNvPr id="6" name="TextBox 5"/>
+          <p:cNvSpPr txBox="1"/>
+          <p:nvPr/>
+        </p:nvSpPr>
+        <p:spPr>
+          <a:xfrm>
+            <a:off x="457200" y="960120"/>
+            <a:ext cx="11247120" cy="365760"/>
+          </a:xfrm>
+          <a:prstGeom prst="rect">
+            <a:avLst/>
+          </a:prstGeom>
+          <a:noFill/>
+        </p:spPr>
+        <p:txBody>
+          <a:bodyPr wrap="square" lIns="73152" rIns="73152" tIns="43891" bIns="43891" anchor="t">
+            <a:spAutoFit/>
+          </a:bodyPr>
+          <a:lstStyle/>
+          <a:p>
+            <a:pPr algn="l">
+              <a:spcAft>
+                <a:spcPts val="400"/>
+              </a:spcAft>
+            </a:pPr>
+            <a:r>
+              <a:rPr sz="1500" b="1" i="0">
+                <a:solidFill>
+                  <a:srgbClr val="003B8E"/>
+                </a:solidFill>
+                <a:latin typeface="Calibri"/>
+              </a:rPr>
+              <a:t>To be used  (all permissive licences, downloadable)</a:t>
+            </a:r>
+          </a:p>
+        </p:txBody>
+      </p:sp>
+      <p:sp>
+        <p:nvSpPr>
+          <p:cNvPr id="7" name="Rounded Rectangle 6"/>
+          <p:cNvSpPr/>
+          <p:nvPr/>
+        </p:nvSpPr>
+        <p:spPr>
+          <a:xfrm>
+            <a:off x="457200" y="1371600"/>
+            <a:ext cx="11247120" cy="3383280"/>
+          </a:xfrm>
+          <a:prstGeom prst="roundRect">
+            <a:avLst>
+              <a:gd name="adj" fmla="val 6000"/>
+            </a:avLst>
+          </a:prstGeom>
+          <a:solidFill>
+            <a:srgbClr val="FFFFFF"/>
+          </a:solidFill>
+          <a:ln w="9525">
+            <a:solidFill>
+              <a:srgbClr val="D9DEE6"/>
+            </a:solidFill>
+          </a:ln>
+        </p:spPr>
+        <p:style>
+          <a:lnRef idx="1">
+            <a:schemeClr val="accent1"/>
+          </a:lnRef>
+          <a:fillRef idx="3">
+            <a:schemeClr val="accent1"/>
+          </a:fillRef>
+          <a:effectRef idx="2">
+            <a:schemeClr val="accent1"/>
+          </a:effectRef>
+          <a:fontRef idx="minor">
+            <a:schemeClr val="lt1"/>
+          </a:fontRef>
+        </p:style>
+        <p:txBody>
+          <a:bodyPr rtlCol="0" anchor="ctr"/>
+          <a:lstStyle/>
+          <a:p/>
+        </p:txBody>
+      </p:sp>
+      <p:sp>
+        <p:nvSpPr>
+          <p:cNvPr id="8" name="Rectangle 7"/>
+          <p:cNvSpPr/>
+          <p:nvPr/>
+        </p:nvSpPr>
+        <p:spPr>
+          <a:xfrm>
+            <a:off x="640080" y="1463040"/>
+            <a:ext cx="10881360" cy="384048"/>
+          </a:xfrm>
+          <a:prstGeom prst="rect">
+            <a:avLst/>
+          </a:prstGeom>
+          <a:solidFill>
+            <a:srgbClr val="144BC4"/>
+          </a:solidFill>
+          <a:ln>
+            <a:noFill/>
+          </a:ln>
+        </p:spPr>
+        <p:style>
+          <a:lnRef idx="1">
+            <a:schemeClr val="accent1"/>
+          </a:lnRef>
+          <a:fillRef idx="3">
+            <a:schemeClr val="accent1"/>
+          </a:fillRef>
+          <a:effectRef idx="2">
+            <a:schemeClr val="accent1"/>
+          </a:effectRef>
+          <a:fontRef idx="minor">
+            <a:schemeClr val="lt1"/>
+          </a:fontRef>
+        </p:style>
+        <p:txBody>
+          <a:bodyPr rtlCol="0" anchor="ctr"/>
+          <a:lstStyle/>
+          <a:p>
+            <a:pPr algn="ctr"/>
+          </a:p>
+        </p:txBody>
+      </p:sp>
+      <p:sp>
+        <p:nvSpPr>
+          <p:cNvPr id="9" name="TextBox 8"/>
+          <p:cNvSpPr txBox="1"/>
+          <p:nvPr/>
+        </p:nvSpPr>
+        <p:spPr>
+          <a:xfrm>
+            <a:off x="731520" y="1463040"/>
+            <a:ext cx="3017520" cy="384048"/>
+          </a:xfrm>
+          <a:prstGeom prst="rect">
+            <a:avLst/>
+          </a:prstGeom>
+          <a:noFill/>
+        </p:spPr>
+        <p:txBody>
+          <a:bodyPr wrap="square" lIns="73152" rIns="73152" tIns="43891" bIns="43891" anchor="ctr">
+            <a:spAutoFit/>
+          </a:bodyPr>
+          <a:lstStyle/>
+          <a:p>
+            <a:pPr algn="l"/>
+            <a:r>
+              <a:rPr sz="1100" b="1" i="0">
+                <a:solidFill>
+                  <a:srgbClr val="FFFFFF"/>
+                </a:solidFill>
+                <a:latin typeface="Calibri"/>
+              </a:rPr>
+              <a:t>Dataset</a:t>
+            </a:r>
+          </a:p>
+        </p:txBody>
+      </p:sp>
+      <p:sp>
+        <p:nvSpPr>
+          <p:cNvPr id="10" name="TextBox 9"/>
+          <p:cNvSpPr txBox="1"/>
+          <p:nvPr/>
+        </p:nvSpPr>
+        <p:spPr>
+          <a:xfrm>
+            <a:off x="3840480" y="1463040"/>
+            <a:ext cx="5943600" cy="384048"/>
+          </a:xfrm>
+          <a:prstGeom prst="rect">
+            <a:avLst/>
+          </a:prstGeom>
+          <a:noFill/>
+        </p:spPr>
+        <p:txBody>
+          <a:bodyPr wrap="square" lIns="73152" rIns="73152" tIns="43891" bIns="43891" anchor="ctr">
+            <a:spAutoFit/>
+          </a:bodyPr>
+          <a:lstStyle/>
+          <a:p>
+            <a:pPr algn="l"/>
+            <a:r>
+              <a:rPr sz="1100" b="1" i="0">
+                <a:solidFill>
+                  <a:srgbClr val="FFFFFF"/>
+                </a:solidFill>
+                <a:latin typeface="Calibri"/>
+              </a:rPr>
+              <a:t>Role</a:t>
+            </a:r>
+          </a:p>
+        </p:txBody>
+      </p:sp>
+      <p:sp>
+        <p:nvSpPr>
+          <p:cNvPr id="11" name="TextBox 10"/>
+          <p:cNvSpPr txBox="1"/>
+          <p:nvPr/>
+        </p:nvSpPr>
+        <p:spPr>
+          <a:xfrm>
+            <a:off x="9875520" y="1463040"/>
+            <a:ext cx="1737360" cy="384048"/>
+          </a:xfrm>
+          <a:prstGeom prst="rect">
+            <a:avLst/>
+          </a:prstGeom>
+          <a:noFill/>
+        </p:spPr>
+        <p:txBody>
+          <a:bodyPr wrap="square" lIns="73152" rIns="73152" tIns="43891" bIns="43891" anchor="ctr">
+            <a:spAutoFit/>
+          </a:bodyPr>
+          <a:lstStyle/>
+          <a:p>
+            <a:pPr algn="l"/>
+            <a:r>
+              <a:rPr sz="1100" b="1" i="0">
+                <a:solidFill>
+                  <a:srgbClr val="FFFFFF"/>
+                </a:solidFill>
+                <a:latin typeface="Calibri"/>
+              </a:rPr>
+              <a:t>Licence</a:t>
+            </a:r>
+          </a:p>
+        </p:txBody>
+      </p:sp>
+      <p:sp>
+        <p:nvSpPr>
+          <p:cNvPr id="12" name="Rectangle 11"/>
+          <p:cNvSpPr/>
+          <p:nvPr/>
+        </p:nvSpPr>
+        <p:spPr>
+          <a:xfrm>
+            <a:off x="640080" y="1874520"/>
+            <a:ext cx="10881360" cy="411480"/>
+          </a:xfrm>
+          <a:prstGeom prst="rect">
+            <a:avLst/>
+          </a:prstGeom>
+          <a:solidFill>
+            <a:srgbClr val="F4F7FB"/>
+          </a:solidFill>
+          <a:ln>
+            <a:noFill/>
+          </a:ln>
+        </p:spPr>
+        <p:style>
+          <a:lnRef idx="1">
+            <a:schemeClr val="accent1"/>
+          </a:lnRef>
+          <a:fillRef idx="3">
+            <a:schemeClr val="accent1"/>
+          </a:fillRef>
+          <a:effectRef idx="2">
+            <a:schemeClr val="accent1"/>
+          </a:effectRef>
+          <a:fontRef idx="minor">
+            <a:schemeClr val="lt1"/>
+          </a:fontRef>
+        </p:style>
+        <p:txBody>
+          <a:bodyPr rtlCol="0" anchor="ctr"/>
+          <a:lstStyle/>
+          <a:p>
+            <a:pPr algn="ctr"/>
+          </a:p>
+        </p:txBody>
+      </p:sp>
+      <p:sp>
+        <p:nvSpPr>
+          <p:cNvPr id="13" name="TextBox 12"/>
+          <p:cNvSpPr txBox="1"/>
+          <p:nvPr/>
+        </p:nvSpPr>
+        <p:spPr>
+          <a:xfrm>
+            <a:off x="731520" y="1874520"/>
+            <a:ext cx="3017520" cy="411480"/>
+          </a:xfrm>
+          <a:prstGeom prst="rect">
+            <a:avLst/>
+          </a:prstGeom>
+          <a:noFill/>
+        </p:spPr>
+        <p:txBody>
+          <a:bodyPr wrap="square" lIns="73152" rIns="73152" tIns="43891" bIns="43891" anchor="ctr">
+            <a:spAutoFit/>
+          </a:bodyPr>
+          <a:lstStyle/>
+          <a:p>
+            <a:pPr algn="l"/>
+            <a:r>
+              <a:rPr sz="1100" b="1" i="0">
+                <a:solidFill>
+                  <a:srgbClr val="0F1B3D"/>
+                </a:solidFill>
+                <a:latin typeface="Calibri"/>
+              </a:rPr>
+              <a:t>Google Speech Commands v0.02</a:t>
+            </a:r>
+          </a:p>
+        </p:txBody>
+      </p:sp>
+      <p:sp>
+        <p:nvSpPr>
+          <p:cNvPr id="14" name="TextBox 13"/>
+          <p:cNvSpPr txBox="1"/>
+          <p:nvPr/>
+        </p:nvSpPr>
+        <p:spPr>
+          <a:xfrm>
+            <a:off x="3840480" y="1874520"/>
+            <a:ext cx="5943600" cy="411480"/>
+          </a:xfrm>
+          <a:prstGeom prst="rect">
+            <a:avLst/>
+          </a:prstGeom>
+          <a:noFill/>
+        </p:spPr>
+        <p:txBody>
+          <a:bodyPr wrap="square" lIns="73152" rIns="73152" tIns="43891" bIns="43891" anchor="ctr">
+            <a:spAutoFit/>
+          </a:bodyPr>
+          <a:lstStyle/>
+          <a:p>
+            <a:pPr algn="l"/>
+            <a:r>
+              <a:rPr sz="1100" b="0" i="0">
+                <a:solidFill>
+                  <a:srgbClr val="404856"/>
+                </a:solidFill>
+                <a:latin typeface="Calibri"/>
+              </a:rPr>
+              <a:t>KWS positives + general negatives</a:t>
+            </a:r>
+          </a:p>
+        </p:txBody>
+      </p:sp>
+      <p:sp>
+        <p:nvSpPr>
+          <p:cNvPr id="15" name="TextBox 14"/>
+          <p:cNvSpPr txBox="1"/>
+          <p:nvPr/>
+        </p:nvSpPr>
+        <p:spPr>
+          <a:xfrm>
+            <a:off x="9875520" y="1874520"/>
+            <a:ext cx="1737360" cy="411480"/>
+          </a:xfrm>
+          <a:prstGeom prst="rect">
+            <a:avLst/>
+          </a:prstGeom>
+          <a:noFill/>
+        </p:spPr>
+        <p:txBody>
+          <a:bodyPr wrap="square" lIns="73152" rIns="73152" tIns="43891" bIns="43891" anchor="ctr">
+            <a:spAutoFit/>
+          </a:bodyPr>
+          <a:lstStyle/>
+          <a:p>
+            <a:pPr algn="l"/>
+            <a:r>
+              <a:rPr sz="1100" b="0" i="0">
+                <a:solidFill>
+                  <a:srgbClr val="404856"/>
+                </a:solidFill>
+                <a:latin typeface="Calibri"/>
+              </a:rPr>
+              <a:t>CC-BY 4.0</a:t>
+            </a:r>
+          </a:p>
+        </p:txBody>
+      </p:sp>
+      <p:sp>
+        <p:nvSpPr>
+          <p:cNvPr id="16" name="TextBox 15"/>
+          <p:cNvSpPr txBox="1"/>
+          <p:nvPr/>
+        </p:nvSpPr>
+        <p:spPr>
+          <a:xfrm>
+            <a:off x="731520" y="2286000"/>
+            <a:ext cx="3017520" cy="411480"/>
+          </a:xfrm>
+          <a:prstGeom prst="rect">
+            <a:avLst/>
+          </a:prstGeom>
+          <a:noFill/>
+        </p:spPr>
+        <p:txBody>
+          <a:bodyPr wrap="square" lIns="73152" rIns="73152" tIns="43891" bIns="43891" anchor="ctr">
+            <a:spAutoFit/>
+          </a:bodyPr>
+          <a:lstStyle/>
+          <a:p>
+            <a:pPr algn="l"/>
+            <a:r>
+              <a:rPr sz="1100" b="1" i="0">
+                <a:solidFill>
+                  <a:srgbClr val="0F1B3D"/>
+                </a:solidFill>
+                <a:latin typeface="Calibri"/>
+              </a:rPr>
+              <a:t>VoxCeleb1</a:t>
+            </a:r>
+          </a:p>
+        </p:txBody>
+      </p:sp>
+      <p:sp>
+        <p:nvSpPr>
+          <p:cNvPr id="17" name="TextBox 16"/>
+          <p:cNvSpPr txBox="1"/>
+          <p:nvPr/>
+        </p:nvSpPr>
+        <p:spPr>
+          <a:xfrm>
+            <a:off x="3840480" y="2286000"/>
+            <a:ext cx="5943600" cy="411480"/>
+          </a:xfrm>
+          <a:prstGeom prst="rect">
+            <a:avLst/>
+          </a:prstGeom>
+          <a:noFill/>
+        </p:spPr>
+        <p:txBody>
+          <a:bodyPr wrap="square" lIns="73152" rIns="73152" tIns="43891" bIns="43891" anchor="ctr">
+            <a:spAutoFit/>
+          </a:bodyPr>
+          <a:lstStyle/>
+          <a:p>
+            <a:pPr algn="l"/>
+            <a:r>
+              <a:rPr sz="1100" b="0" i="0">
+                <a:solidFill>
+                  <a:srgbClr val="404856"/>
+                </a:solidFill>
+                <a:latin typeface="Calibri"/>
+              </a:rPr>
+              <a:t>Speaker verification + impostor pool</a:t>
+            </a:r>
+          </a:p>
+        </p:txBody>
+      </p:sp>
+      <p:sp>
+        <p:nvSpPr>
+          <p:cNvPr id="18" name="TextBox 17"/>
+          <p:cNvSpPr txBox="1"/>
+          <p:nvPr/>
+        </p:nvSpPr>
+        <p:spPr>
+          <a:xfrm>
+            <a:off x="9875520" y="2286000"/>
+            <a:ext cx="1737360" cy="411480"/>
+          </a:xfrm>
+          <a:prstGeom prst="rect">
+            <a:avLst/>
+          </a:prstGeom>
+          <a:noFill/>
+        </p:spPr>
+        <p:txBody>
+          <a:bodyPr wrap="square" lIns="73152" rIns="73152" tIns="43891" bIns="43891" anchor="ctr">
+            <a:spAutoFit/>
+          </a:bodyPr>
+          <a:lstStyle/>
+          <a:p>
+            <a:pPr algn="l"/>
+            <a:r>
+              <a:rPr sz="1100" b="0" i="0">
+                <a:solidFill>
+                  <a:srgbClr val="404856"/>
+                </a:solidFill>
+                <a:latin typeface="Calibri"/>
+              </a:rPr>
+              <a:t>CC-BY 4.0</a:t>
+            </a:r>
+          </a:p>
+        </p:txBody>
+      </p:sp>
+      <p:sp>
+        <p:nvSpPr>
+          <p:cNvPr id="19" name="Rectangle 18"/>
+          <p:cNvSpPr/>
+          <p:nvPr/>
+        </p:nvSpPr>
+        <p:spPr>
+          <a:xfrm>
+            <a:off x="640080" y="2697480"/>
+            <a:ext cx="10881360" cy="411480"/>
+          </a:xfrm>
+          <a:prstGeom prst="rect">
+            <a:avLst/>
+          </a:prstGeom>
+          <a:solidFill>
+            <a:srgbClr val="F4F7FB"/>
+          </a:solidFill>
+          <a:ln>
+            <a:noFill/>
+          </a:ln>
+        </p:spPr>
+        <p:style>
+          <a:lnRef idx="1">
+            <a:schemeClr val="accent1"/>
+          </a:lnRef>
+          <a:fillRef idx="3">
+            <a:schemeClr val="accent1"/>
+          </a:fillRef>
+          <a:effectRef idx="2">
+            <a:schemeClr val="accent1"/>
+          </a:effectRef>
+          <a:fontRef idx="minor">
+            <a:schemeClr val="lt1"/>
+          </a:fontRef>
+        </p:style>
+        <p:txBody>
+          <a:bodyPr rtlCol="0" anchor="ctr"/>
+          <a:lstStyle/>
+          <a:p>
+            <a:pPr algn="ctr"/>
+          </a:p>
+        </p:txBody>
+      </p:sp>
+      <p:sp>
+        <p:nvSpPr>
+          <p:cNvPr id="20" name="TextBox 19"/>
+          <p:cNvSpPr txBox="1"/>
+          <p:nvPr/>
+        </p:nvSpPr>
+        <p:spPr>
+          <a:xfrm>
+            <a:off x="731520" y="2697480"/>
+            <a:ext cx="3017520" cy="411480"/>
+          </a:xfrm>
+          <a:prstGeom prst="rect">
+            <a:avLst/>
+          </a:prstGeom>
+          <a:noFill/>
+        </p:spPr>
+        <p:txBody>
+          <a:bodyPr wrap="square" lIns="73152" rIns="73152" tIns="43891" bIns="43891" anchor="ctr">
+            <a:spAutoFit/>
+          </a:bodyPr>
+          <a:lstStyle/>
+          <a:p>
+            <a:pPr algn="l"/>
+            <a:r>
+              <a:rPr sz="1100" b="1" i="0">
+                <a:solidFill>
+                  <a:srgbClr val="0F1B3D"/>
+                </a:solidFill>
+                <a:latin typeface="Calibri"/>
+              </a:rPr>
+              <a:t>LibriPhrase</a:t>
+            </a:r>
+          </a:p>
+        </p:txBody>
+      </p:sp>
+      <p:sp>
+        <p:nvSpPr>
+          <p:cNvPr id="21" name="TextBox 20"/>
+          <p:cNvSpPr txBox="1"/>
+          <p:nvPr/>
+        </p:nvSpPr>
+        <p:spPr>
+          <a:xfrm>
+            <a:off x="3840480" y="2697480"/>
+            <a:ext cx="5943600" cy="411480"/>
+          </a:xfrm>
+          <a:prstGeom prst="rect">
+            <a:avLst/>
+          </a:prstGeom>
+          <a:noFill/>
+        </p:spPr>
+        <p:txBody>
+          <a:bodyPr wrap="square" lIns="73152" rIns="73152" tIns="43891" bIns="43891" anchor="ctr">
+            <a:spAutoFit/>
+          </a:bodyPr>
+          <a:lstStyle/>
+          <a:p>
+            <a:pPr algn="l"/>
+            <a:r>
+              <a:rPr sz="1100" b="0" i="0">
+                <a:solidFill>
+                  <a:srgbClr val="404856"/>
+                </a:solidFill>
+                <a:latin typeface="Calibri"/>
+              </a:rPr>
+              <a:t>Joint phrase + speaker fine-tuning</a:t>
+            </a:r>
+          </a:p>
+        </p:txBody>
+      </p:sp>
+      <p:sp>
+        <p:nvSpPr>
+          <p:cNvPr id="22" name="TextBox 21"/>
+          <p:cNvSpPr txBox="1"/>
+          <p:nvPr/>
+        </p:nvSpPr>
+        <p:spPr>
+          <a:xfrm>
+            <a:off x="9875520" y="2697480"/>
+            <a:ext cx="1737360" cy="411480"/>
+          </a:xfrm>
+          <a:prstGeom prst="rect">
+            <a:avLst/>
+          </a:prstGeom>
+          <a:noFill/>
+        </p:spPr>
+        <p:txBody>
+          <a:bodyPr wrap="square" lIns="73152" rIns="73152" tIns="43891" bIns="43891" anchor="ctr">
+            <a:spAutoFit/>
+          </a:bodyPr>
+          <a:lstStyle/>
+          <a:p>
+            <a:pPr algn="l"/>
+            <a:r>
+              <a:rPr sz="1100" b="0" i="0">
+                <a:solidFill>
+                  <a:srgbClr val="404856"/>
+                </a:solidFill>
+                <a:latin typeface="Calibri"/>
+              </a:rPr>
+              <a:t>MIT</a:t>
+            </a:r>
+          </a:p>
+        </p:txBody>
+      </p:sp>
+      <p:sp>
+        <p:nvSpPr>
+          <p:cNvPr id="23" name="TextBox 22"/>
+          <p:cNvSpPr txBox="1"/>
+          <p:nvPr/>
+        </p:nvSpPr>
+        <p:spPr>
+          <a:xfrm>
+            <a:off x="731520" y="3108960"/>
+            <a:ext cx="3017520" cy="411480"/>
+          </a:xfrm>
+          <a:prstGeom prst="rect">
+            <a:avLst/>
+          </a:prstGeom>
+          <a:noFill/>
+        </p:spPr>
+        <p:txBody>
+          <a:bodyPr wrap="square" lIns="73152" rIns="73152" tIns="43891" bIns="43891" anchor="ctr">
+            <a:spAutoFit/>
+          </a:bodyPr>
+          <a:lstStyle/>
+          <a:p>
+            <a:pPr algn="l"/>
+            <a:r>
+              <a:rPr sz="1100" b="1" i="0">
+                <a:solidFill>
+                  <a:srgbClr val="0F1B3D"/>
+                </a:solidFill>
+                <a:latin typeface="Calibri"/>
+              </a:rPr>
+              <a:t>MUSAN</a:t>
+            </a:r>
+          </a:p>
+        </p:txBody>
+      </p:sp>
+      <p:sp>
+        <p:nvSpPr>
+          <p:cNvPr id="24" name="TextBox 23"/>
+          <p:cNvSpPr txBox="1"/>
+          <p:nvPr/>
+        </p:nvSpPr>
+        <p:spPr>
+          <a:xfrm>
+            <a:off x="3840480" y="3108960"/>
+            <a:ext cx="5943600" cy="411480"/>
+          </a:xfrm>
+          <a:prstGeom prst="rect">
+            <a:avLst/>
+          </a:prstGeom>
+          <a:noFill/>
+        </p:spPr>
+        <p:txBody>
+          <a:bodyPr wrap="square" lIns="73152" rIns="73152" tIns="43891" bIns="43891" anchor="ctr">
+            <a:spAutoFit/>
+          </a:bodyPr>
+          <a:lstStyle/>
+          <a:p>
+            <a:pPr algn="l"/>
+            <a:r>
+              <a:rPr sz="1100" b="0" i="0">
+                <a:solidFill>
+                  <a:srgbClr val="404856"/>
+                </a:solidFill>
+                <a:latin typeface="Calibri"/>
+              </a:rPr>
+              <a:t>Crowd / babble / traffic noise injection (−5 to 30 dB)</a:t>
+            </a:r>
+          </a:p>
+        </p:txBody>
+      </p:sp>
+      <p:sp>
+        <p:nvSpPr>
+          <p:cNvPr id="25" name="TextBox 24"/>
+          <p:cNvSpPr txBox="1"/>
+          <p:nvPr/>
+        </p:nvSpPr>
+        <p:spPr>
+          <a:xfrm>
+            <a:off x="9875520" y="3108960"/>
+            <a:ext cx="1737360" cy="411480"/>
+          </a:xfrm>
+          <a:prstGeom prst="rect">
+            <a:avLst/>
+          </a:prstGeom>
+          <a:noFill/>
+        </p:spPr>
+        <p:txBody>
+          <a:bodyPr wrap="square" lIns="73152" rIns="73152" tIns="43891" bIns="43891" anchor="ctr">
+            <a:spAutoFit/>
+          </a:bodyPr>
+          <a:lstStyle/>
+          <a:p>
+            <a:pPr algn="l"/>
+            <a:r>
+              <a:rPr sz="1100" b="0" i="0">
+                <a:solidFill>
+                  <a:srgbClr val="404856"/>
+                </a:solidFill>
+                <a:latin typeface="Calibri"/>
+              </a:rPr>
+              <a:t>CC-BY 4.0</a:t>
+            </a:r>
+          </a:p>
+        </p:txBody>
+      </p:sp>
+      <p:sp>
+        <p:nvSpPr>
+          <p:cNvPr id="26" name="Rectangle 25"/>
+          <p:cNvSpPr/>
+          <p:nvPr/>
+        </p:nvSpPr>
+        <p:spPr>
+          <a:xfrm>
+            <a:off x="640080" y="3520440"/>
+            <a:ext cx="10881360" cy="411480"/>
+          </a:xfrm>
+          <a:prstGeom prst="rect">
+            <a:avLst/>
+          </a:prstGeom>
+          <a:solidFill>
+            <a:srgbClr val="F4F7FB"/>
+          </a:solidFill>
+          <a:ln>
+            <a:noFill/>
+          </a:ln>
+        </p:spPr>
+        <p:style>
+          <a:lnRef idx="1">
+            <a:schemeClr val="accent1"/>
+          </a:lnRef>
+          <a:fillRef idx="3">
+            <a:schemeClr val="accent1"/>
+          </a:fillRef>
+          <a:effectRef idx="2">
+            <a:schemeClr val="accent1"/>
+          </a:effectRef>
+          <a:fontRef idx="minor">
+            <a:schemeClr val="lt1"/>
+          </a:fontRef>
+        </p:style>
+        <p:txBody>
+          <a:bodyPr rtlCol="0" anchor="ctr"/>
+          <a:lstStyle/>
+          <a:p>
+            <a:pPr algn="ctr"/>
+          </a:p>
+        </p:txBody>
+      </p:sp>
+      <p:sp>
+        <p:nvSpPr>
+          <p:cNvPr id="27" name="TextBox 26"/>
+          <p:cNvSpPr txBox="1"/>
+          <p:nvPr/>
+        </p:nvSpPr>
+        <p:spPr>
+          <a:xfrm>
+            <a:off x="731520" y="3520440"/>
+            <a:ext cx="3017520" cy="411480"/>
+          </a:xfrm>
+          <a:prstGeom prst="rect">
+            <a:avLst/>
+          </a:prstGeom>
+          <a:noFill/>
+        </p:spPr>
+        <p:txBody>
+          <a:bodyPr wrap="square" lIns="73152" rIns="73152" tIns="43891" bIns="43891" anchor="ctr">
+            <a:spAutoFit/>
+          </a:bodyPr>
+          <a:lstStyle/>
+          <a:p>
+            <a:pPr algn="l"/>
+            <a:r>
+              <a:rPr sz="1100" b="1" i="0">
+                <a:solidFill>
+                  <a:srgbClr val="0F1B3D"/>
+                </a:solidFill>
+                <a:latin typeface="Calibri"/>
+              </a:rPr>
+              <a:t>OpenSLR RIRs</a:t>
+            </a:r>
+          </a:p>
+        </p:txBody>
+      </p:sp>
+      <p:sp>
+        <p:nvSpPr>
+          <p:cNvPr id="28" name="TextBox 27"/>
+          <p:cNvSpPr txBox="1"/>
+          <p:nvPr/>
+        </p:nvSpPr>
+        <p:spPr>
+          <a:xfrm>
+            <a:off x="3840480" y="3520440"/>
+            <a:ext cx="5943600" cy="411480"/>
+          </a:xfrm>
+          <a:prstGeom prst="rect">
+            <a:avLst/>
+          </a:prstGeom>
+          <a:noFill/>
+        </p:spPr>
+        <p:txBody>
+          <a:bodyPr wrap="square" lIns="73152" rIns="73152" tIns="43891" bIns="43891" anchor="ctr">
+            <a:spAutoFit/>
+          </a:bodyPr>
+          <a:lstStyle/>
+          <a:p>
+            <a:pPr algn="l"/>
+            <a:r>
+              <a:rPr sz="1100" b="0" i="0">
+                <a:solidFill>
+                  <a:srgbClr val="404856"/>
+                </a:solidFill>
+                <a:latin typeface="Calibri"/>
+              </a:rPr>
+              <a:t>Room impulse responses → 0.5–5 m distance simulation</a:t>
+            </a:r>
+          </a:p>
+        </p:txBody>
+      </p:sp>
+      <p:sp>
+        <p:nvSpPr>
+          <p:cNvPr id="29" name="TextBox 28"/>
+          <p:cNvSpPr txBox="1"/>
+          <p:nvPr/>
+        </p:nvSpPr>
+        <p:spPr>
+          <a:xfrm>
+            <a:off x="9875520" y="3520440"/>
+            <a:ext cx="1737360" cy="411480"/>
+          </a:xfrm>
+          <a:prstGeom prst="rect">
+            <a:avLst/>
+          </a:prstGeom>
+          <a:noFill/>
+        </p:spPr>
+        <p:txBody>
+          <a:bodyPr wrap="square" lIns="73152" rIns="73152" tIns="43891" bIns="43891" anchor="ctr">
+            <a:spAutoFit/>
+          </a:bodyPr>
+          <a:lstStyle/>
+          <a:p>
+            <a:pPr algn="l"/>
+            <a:r>
+              <a:rPr sz="1100" b="0" i="0">
+                <a:solidFill>
+                  <a:srgbClr val="404856"/>
+                </a:solidFill>
+                <a:latin typeface="Calibri"/>
+              </a:rPr>
+              <a:t>Apache-2.0</a:t>
+            </a:r>
+          </a:p>
+        </p:txBody>
+      </p:sp>
+      <p:sp>
+        <p:nvSpPr>
+          <p:cNvPr id="30" name="TextBox 29"/>
+          <p:cNvSpPr txBox="1"/>
+          <p:nvPr/>
+        </p:nvSpPr>
+        <p:spPr>
+          <a:xfrm>
+            <a:off x="731520" y="3931920"/>
+            <a:ext cx="3017520" cy="411480"/>
+          </a:xfrm>
+          <a:prstGeom prst="rect">
+            <a:avLst/>
+          </a:prstGeom>
+          <a:noFill/>
+        </p:spPr>
+        <p:txBody>
+          <a:bodyPr wrap="square" lIns="73152" rIns="73152" tIns="43891" bIns="43891" anchor="ctr">
+            <a:spAutoFit/>
+          </a:bodyPr>
+          <a:lstStyle/>
+          <a:p>
+            <a:pPr algn="l"/>
+            <a:r>
+              <a:rPr sz="1100" b="1" i="0">
+                <a:solidFill>
+                  <a:srgbClr val="0F1B3D"/>
+                </a:solidFill>
+                <a:latin typeface="Calibri"/>
+              </a:rPr>
+              <a:t>MLCommons MSWC  (H1 eval)</a:t>
+            </a:r>
+          </a:p>
+        </p:txBody>
+      </p:sp>
+      <p:sp>
+        <p:nvSpPr>
+          <p:cNvPr id="31" name="TextBox 30"/>
+          <p:cNvSpPr txBox="1"/>
+          <p:nvPr/>
+        </p:nvSpPr>
+        <p:spPr>
+          <a:xfrm>
+            <a:off x="3840480" y="3931920"/>
+            <a:ext cx="5943600" cy="411480"/>
+          </a:xfrm>
+          <a:prstGeom prst="rect">
+            <a:avLst/>
+          </a:prstGeom>
+          <a:noFill/>
+        </p:spPr>
+        <p:txBody>
+          <a:bodyPr wrap="square" lIns="73152" rIns="73152" tIns="43891" bIns="43891" anchor="ctr">
+            <a:spAutoFit/>
+          </a:bodyPr>
+          <a:lstStyle/>
+          <a:p>
+            <a:pPr algn="l"/>
+            <a:r>
+              <a:rPr sz="1100" b="0" i="0">
+                <a:solidFill>
+                  <a:srgbClr val="404856"/>
+                </a:solidFill>
+                <a:latin typeface="Calibri"/>
+              </a:rPr>
+              <a:t>Multilingual zero-shot keyword generalisation (Tamil)</a:t>
+            </a:r>
+          </a:p>
+        </p:txBody>
+      </p:sp>
+      <p:sp>
+        <p:nvSpPr>
+          <p:cNvPr id="32" name="TextBox 31"/>
+          <p:cNvSpPr txBox="1"/>
+          <p:nvPr/>
+        </p:nvSpPr>
+        <p:spPr>
+          <a:xfrm>
+            <a:off x="9875520" y="3931920"/>
+            <a:ext cx="1737360" cy="411480"/>
+          </a:xfrm>
+          <a:prstGeom prst="rect">
+            <a:avLst/>
+          </a:prstGeom>
+          <a:noFill/>
+        </p:spPr>
+        <p:txBody>
+          <a:bodyPr wrap="square" lIns="73152" rIns="73152" tIns="43891" bIns="43891" anchor="ctr">
+            <a:spAutoFit/>
+          </a:bodyPr>
+          <a:lstStyle/>
+          <a:p>
+            <a:pPr algn="l"/>
+            <a:r>
+              <a:rPr sz="1100" b="0" i="0">
+                <a:solidFill>
+                  <a:srgbClr val="404856"/>
+                </a:solidFill>
+                <a:latin typeface="Calibri"/>
+              </a:rPr>
+              <a:t>CC-BY 4.0</a:t>
+            </a:r>
+          </a:p>
+        </p:txBody>
+      </p:sp>
+      <p:sp>
+        <p:nvSpPr>
+          <p:cNvPr id="33" name="TextBox 32"/>
+          <p:cNvSpPr txBox="1"/>
+          <p:nvPr/>
+        </p:nvSpPr>
+        <p:spPr>
+          <a:xfrm>
+            <a:off x="457200" y="4937760"/>
+            <a:ext cx="11247120" cy="365760"/>
+          </a:xfrm>
+          <a:prstGeom prst="rect">
+            <a:avLst/>
+          </a:prstGeom>
+          <a:noFill/>
+        </p:spPr>
+        <p:txBody>
+          <a:bodyPr wrap="square" lIns="73152" rIns="73152" tIns="43891" bIns="43891" anchor="t">
+            <a:spAutoFit/>
+          </a:bodyPr>
+          <a:lstStyle/>
+          <a:p>
+            <a:pPr algn="l">
+              <a:spcAft>
+                <a:spcPts val="400"/>
+              </a:spcAft>
+            </a:pPr>
+            <a:r>
+              <a:rPr sz="1500" b="1" i="0">
+                <a:solidFill>
+                  <a:srgbClr val="003B8E"/>
+                </a:solidFill>
+                <a:latin typeface="Calibri"/>
+              </a:rPr>
+              <a:t>To be published  (Apache-2.0)</a:t>
+            </a:r>
+          </a:p>
+        </p:txBody>
+      </p:sp>
+      <p:sp>
+        <p:nvSpPr>
+          <p:cNvPr id="34" name="Rounded Rectangle 33"/>
+          <p:cNvSpPr/>
+          <p:nvPr/>
+        </p:nvSpPr>
+        <p:spPr>
+          <a:xfrm>
+            <a:off x="457200" y="5349240"/>
+            <a:ext cx="11247120" cy="1234440"/>
+          </a:xfrm>
+          <a:prstGeom prst="roundRect">
+            <a:avLst>
+              <a:gd name="adj" fmla="val 6000"/>
+            </a:avLst>
+          </a:prstGeom>
+          <a:solidFill>
+            <a:srgbClr val="FBF2DD"/>
+          </a:solidFill>
+          <a:ln w="9525">
+            <a:solidFill>
+              <a:srgbClr val="B8860B"/>
+            </a:solidFill>
+          </a:ln>
+        </p:spPr>
+        <p:style>
+          <a:lnRef idx="1">
+            <a:schemeClr val="accent1"/>
+          </a:lnRef>
+          <a:fillRef idx="3">
+            <a:schemeClr val="accent1"/>
+          </a:fillRef>
+          <a:effectRef idx="2">
+            <a:schemeClr val="accent1"/>
+          </a:effectRef>
+          <a:fontRef idx="minor">
+            <a:schemeClr val="lt1"/>
+          </a:fontRef>
+        </p:style>
+        <p:txBody>
+          <a:bodyPr rtlCol="0" anchor="ctr"/>
+          <a:lstStyle/>
+          <a:p/>
+        </p:txBody>
+      </p:sp>
+      <p:sp>
+        <p:nvSpPr>
+          <p:cNvPr id="35" name="TextBox 34"/>
+          <p:cNvSpPr txBox="1"/>
+          <p:nvPr/>
+        </p:nvSpPr>
+        <p:spPr>
+          <a:xfrm>
+            <a:off x="640080" y="5394960"/>
+            <a:ext cx="10972800" cy="1188720"/>
+          </a:xfrm>
+          <a:prstGeom prst="rect">
+            <a:avLst/>
+          </a:prstGeom>
+          <a:noFill/>
+        </p:spPr>
+        <p:txBody>
+          <a:bodyPr wrap="square" lIns="73152" rIns="73152" tIns="43891" bIns="43891" anchor="t">
+            <a:spAutoFit/>
+          </a:bodyPr>
+          <a:lstStyle/>
+          <a:p>
+            <a:pPr algn="l"/>
+            <a:r>
+              <a:rPr sz="1200" b="1" i="0">
+                <a:solidFill>
+                  <a:srgbClr val="B8860B"/>
+                </a:solidFill>
+                <a:latin typeface="Calibri"/>
+              </a:rPr>
+              <a:t>Confusable-trigger benchmark.  </a:t>
+            </a:r>
+            <a:r>
+              <a:rPr sz="1100" b="0" i="0">
+                <a:solidFill>
+                  <a:srgbClr val="404856"/>
+                </a:solidFill>
+                <a:latin typeface="Calibri"/>
+              </a:rPr>
+              <a:t>For any chosen trigger word, the mined top-50 phonetic confusables synthesised in 100+ XTTS-v2 voices + their RIR / MUSAN augmentations. Useful for any future personalised-KWS work targeting FA &lt; 1 / hr. Released under Apache-2.0.</a:t>
+            </a:r>
+          </a:p>
+        </p:txBody>
+      </p:sp>
+    </p:spTree>
+  </p:cSld>
+  <p:clrMapOvr>
+    <a:masterClrMapping/>
+  </p:clrMapOvr>
+</p:sld>
+</file>
+
+<file path=ppt/slides/slide14.xml><?xml version="1.0" encoding="utf-8"?>
+<p:sld xmlns:a="http://schemas.openxmlformats.org/drawingml/2006/main" xmlns:p="http://schemas.openxmlformats.org/presentationml/2006/main" xmlns:r="http://schemas.openxmlformats.org/officeDocument/2006/relationships">
+  <p:cSld>
+    <p:bg>
+      <p:bgPr>
+        <a:solidFill>
+          <a:srgbClr val="FAFCFF"/>
+        </a:solidFill>
+        <a:effectLst/>
+      </p:bgPr>
+    </p:bg>
+    <p:spTree>
+      <p:nvGrpSpPr>
+        <p:cNvPr id="1" name=""/>
+        <p:cNvGrpSpPr/>
+        <p:nvPr/>
+      </p:nvGrpSpPr>
+      <p:grpSpPr/>
+      <p:sp>
+        <p:nvSpPr>
+          <p:cNvPr id="2" name="Rectangle 1"/>
+          <p:cNvSpPr/>
+          <p:nvPr/>
+        </p:nvSpPr>
+        <p:spPr>
+          <a:xfrm>
+            <a:off x="0" y="0"/>
+            <a:ext cx="12191695" cy="777240"/>
+          </a:xfrm>
+          <a:prstGeom prst="rect">
+            <a:avLst/>
+          </a:prstGeom>
+          <a:solidFill>
+            <a:srgbClr val="003B8E"/>
+          </a:solidFill>
+          <a:ln>
+            <a:noFill/>
+          </a:ln>
+        </p:spPr>
+        <p:style>
+          <a:lnRef idx="1">
+            <a:schemeClr val="accent1"/>
+          </a:lnRef>
+          <a:fillRef idx="3">
+            <a:schemeClr val="accent1"/>
+          </a:fillRef>
+          <a:effectRef idx="2">
+            <a:schemeClr val="accent1"/>
+          </a:effectRef>
+          <a:fontRef idx="minor">
+            <a:schemeClr val="lt1"/>
+          </a:fontRef>
+        </p:style>
+        <p:txBody>
+          <a:bodyPr rtlCol="0" anchor="ctr"/>
+          <a:lstStyle/>
+          <a:p>
+            <a:pPr algn="ctr"/>
+          </a:p>
+        </p:txBody>
+      </p:sp>
+      <p:sp>
+        <p:nvSpPr>
+          <p:cNvPr id="3" name="TextBox 2"/>
+          <p:cNvSpPr txBox="1"/>
+          <p:nvPr/>
+        </p:nvSpPr>
+        <p:spPr>
+          <a:xfrm>
+            <a:off x="365760" y="0"/>
+            <a:ext cx="11460175" cy="777240"/>
+          </a:xfrm>
+          <a:prstGeom prst="rect">
+            <a:avLst/>
+          </a:prstGeom>
+          <a:noFill/>
+        </p:spPr>
+        <p:txBody>
+          <a:bodyPr wrap="square" lIns="73152" rIns="73152" tIns="43891" bIns="43891" anchor="ctr">
+            <a:spAutoFit/>
+          </a:bodyPr>
+          <a:lstStyle/>
+          <a:p>
+            <a:pPr algn="l"/>
+            <a:r>
+              <a:rPr sz="2400" b="1" i="0">
+                <a:solidFill>
+                  <a:srgbClr val="FFFFFF"/>
+                </a:solidFill>
+                <a:latin typeface="Calibri"/>
+              </a:rPr>
+              <a:t>Open Models — Used &amp; Developed</a:t>
+            </a:r>
+          </a:p>
+        </p:txBody>
+      </p:sp>
+      <p:sp>
+        <p:nvSpPr>
+          <p:cNvPr id="4" name="Rectangle 3"/>
+          <p:cNvSpPr/>
+          <p:nvPr/>
+        </p:nvSpPr>
+        <p:spPr>
+          <a:xfrm>
+            <a:off x="0" y="777240"/>
+            <a:ext cx="12191695" cy="36576"/>
+          </a:xfrm>
+          <a:prstGeom prst="rect">
+            <a:avLst/>
+          </a:prstGeom>
+          <a:solidFill>
+            <a:srgbClr val="B8860B"/>
+          </a:solidFill>
+          <a:ln>
+            <a:noFill/>
+          </a:ln>
+        </p:spPr>
+        <p:style>
+          <a:lnRef idx="1">
+            <a:schemeClr val="accent1"/>
+          </a:lnRef>
+          <a:fillRef idx="3">
+            <a:schemeClr val="accent1"/>
+          </a:fillRef>
+          <a:effectRef idx="2">
+            <a:schemeClr val="accent1"/>
+          </a:effectRef>
+          <a:fontRef idx="minor">
+            <a:schemeClr val="lt1"/>
+          </a:fontRef>
+        </p:style>
+        <p:txBody>
+          <a:bodyPr rtlCol="0" anchor="ctr"/>
+          <a:lstStyle/>
+          <a:p>
+            <a:pPr algn="ctr"/>
+          </a:p>
+        </p:txBody>
+      </p:sp>
+      <p:sp>
+        <p:nvSpPr>
+          <p:cNvPr id="5" name="TextBox 4"/>
+          <p:cNvSpPr txBox="1"/>
+          <p:nvPr/>
+        </p:nvSpPr>
+        <p:spPr>
+          <a:xfrm>
+            <a:off x="10820095" y="6537960"/>
+            <a:ext cx="1188720" cy="274320"/>
+          </a:xfrm>
+          <a:prstGeom prst="rect">
+            <a:avLst/>
+          </a:prstGeom>
+          <a:noFill/>
+        </p:spPr>
+        <p:txBody>
+          <a:bodyPr wrap="square" lIns="73152" rIns="73152" tIns="43891" bIns="43891" anchor="t">
+            <a:spAutoFit/>
+          </a:bodyPr>
+          <a:lstStyle/>
+          <a:p>
+            <a:pPr algn="r"/>
+            <a:r>
+              <a:rPr sz="900" b="0" i="0">
+                <a:solidFill>
+                  <a:srgbClr val="6A7383"/>
+                </a:solidFill>
+                <a:latin typeface="Calibri"/>
+              </a:rPr>
+              <a:t>14 / 17</a:t>
+            </a:r>
+          </a:p>
+        </p:txBody>
+      </p:sp>
+      <p:sp>
+        <p:nvSpPr>
+          <p:cNvPr id="6" name="TextBox 5"/>
+          <p:cNvSpPr txBox="1"/>
+          <p:nvPr/>
+        </p:nvSpPr>
+        <p:spPr>
+          <a:xfrm>
+            <a:off x="457200" y="960120"/>
+            <a:ext cx="11247120" cy="365760"/>
+          </a:xfrm>
+          <a:prstGeom prst="rect">
+            <a:avLst/>
+          </a:prstGeom>
+          <a:noFill/>
+        </p:spPr>
+        <p:txBody>
+          <a:bodyPr wrap="square" lIns="73152" rIns="73152" tIns="43891" bIns="43891" anchor="t">
+            <a:spAutoFit/>
+          </a:bodyPr>
+          <a:lstStyle/>
+          <a:p>
+            <a:pPr algn="l">
+              <a:spcAft>
+                <a:spcPts val="400"/>
+              </a:spcAft>
+            </a:pPr>
+            <a:r>
+              <a:rPr sz="1500" b="1" i="0">
+                <a:solidFill>
+                  <a:srgbClr val="003B8E"/>
+                </a:solidFill>
+                <a:latin typeface="Calibri"/>
+              </a:rPr>
+              <a:t>To be used  (frozen, distillation teachers)</a:t>
+            </a:r>
+          </a:p>
+        </p:txBody>
+      </p:sp>
+      <p:sp>
+        <p:nvSpPr>
+          <p:cNvPr id="7" name="Rounded Rectangle 6"/>
+          <p:cNvSpPr/>
+          <p:nvPr/>
+        </p:nvSpPr>
+        <p:spPr>
+          <a:xfrm>
+            <a:off x="457200" y="1371600"/>
+            <a:ext cx="11247120" cy="2377440"/>
+          </a:xfrm>
+          <a:prstGeom prst="roundRect">
+            <a:avLst>
+              <a:gd name="adj" fmla="val 6000"/>
+            </a:avLst>
+          </a:prstGeom>
+          <a:solidFill>
+            <a:srgbClr val="FFFFFF"/>
+          </a:solidFill>
+          <a:ln w="9525">
+            <a:solidFill>
+              <a:srgbClr val="D9DEE6"/>
+            </a:solidFill>
+          </a:ln>
+        </p:spPr>
+        <p:style>
+          <a:lnRef idx="1">
+            <a:schemeClr val="accent1"/>
+          </a:lnRef>
+          <a:fillRef idx="3">
+            <a:schemeClr val="accent1"/>
+          </a:fillRef>
+          <a:effectRef idx="2">
+            <a:schemeClr val="accent1"/>
+          </a:effectRef>
+          <a:fontRef idx="minor">
+            <a:schemeClr val="lt1"/>
+          </a:fontRef>
+        </p:style>
+        <p:txBody>
+          <a:bodyPr rtlCol="0" anchor="ctr"/>
+          <a:lstStyle/>
+          <a:p/>
+        </p:txBody>
+      </p:sp>
+      <p:sp>
+        <p:nvSpPr>
+          <p:cNvPr id="8" name="Rectangle 7"/>
+          <p:cNvSpPr/>
+          <p:nvPr/>
+        </p:nvSpPr>
+        <p:spPr>
+          <a:xfrm>
+            <a:off x="640080" y="1463040"/>
+            <a:ext cx="10881360" cy="384048"/>
+          </a:xfrm>
+          <a:prstGeom prst="rect">
+            <a:avLst/>
+          </a:prstGeom>
+          <a:solidFill>
+            <a:srgbClr val="144BC4"/>
+          </a:solidFill>
+          <a:ln>
+            <a:noFill/>
+          </a:ln>
+        </p:spPr>
+        <p:style>
+          <a:lnRef idx="1">
+            <a:schemeClr val="accent1"/>
+          </a:lnRef>
+          <a:fillRef idx="3">
+            <a:schemeClr val="accent1"/>
+          </a:fillRef>
+          <a:effectRef idx="2">
+            <a:schemeClr val="accent1"/>
+          </a:effectRef>
+          <a:fontRef idx="minor">
+            <a:schemeClr val="lt1"/>
+          </a:fontRef>
+        </p:style>
+        <p:txBody>
+          <a:bodyPr rtlCol="0" anchor="ctr"/>
+          <a:lstStyle/>
+          <a:p>
+            <a:pPr algn="ctr"/>
+          </a:p>
+        </p:txBody>
+      </p:sp>
+      <p:sp>
+        <p:nvSpPr>
+          <p:cNvPr id="9" name="TextBox 8"/>
+          <p:cNvSpPr txBox="1"/>
+          <p:nvPr/>
+        </p:nvSpPr>
+        <p:spPr>
+          <a:xfrm>
+            <a:off x="731520" y="1463040"/>
+            <a:ext cx="2651760" cy="384048"/>
+          </a:xfrm>
+          <a:prstGeom prst="rect">
+            <a:avLst/>
+          </a:prstGeom>
+          <a:noFill/>
+        </p:spPr>
+        <p:txBody>
+          <a:bodyPr wrap="square" lIns="73152" rIns="73152" tIns="43891" bIns="43891" anchor="ctr">
+            <a:spAutoFit/>
+          </a:bodyPr>
+          <a:lstStyle/>
+          <a:p>
+            <a:pPr algn="l"/>
+            <a:r>
+              <a:rPr sz="1100" b="1" i="0">
+                <a:solidFill>
+                  <a:srgbClr val="FFFFFF"/>
+                </a:solidFill>
+                <a:latin typeface="Calibri"/>
+              </a:rPr>
+              <a:t>Model</a:t>
+            </a:r>
+          </a:p>
+        </p:txBody>
+      </p:sp>
+      <p:sp>
+        <p:nvSpPr>
+          <p:cNvPr id="10" name="TextBox 9"/>
+          <p:cNvSpPr txBox="1"/>
+          <p:nvPr/>
+        </p:nvSpPr>
+        <p:spPr>
+          <a:xfrm>
+            <a:off x="3474720" y="1463040"/>
+            <a:ext cx="5394960" cy="384048"/>
+          </a:xfrm>
+          <a:prstGeom prst="rect">
+            <a:avLst/>
+          </a:prstGeom>
+          <a:noFill/>
+        </p:spPr>
+        <p:txBody>
+          <a:bodyPr wrap="square" lIns="73152" rIns="73152" tIns="43891" bIns="43891" anchor="ctr">
+            <a:spAutoFit/>
+          </a:bodyPr>
+          <a:lstStyle/>
+          <a:p>
+            <a:pPr algn="l"/>
+            <a:r>
+              <a:rPr sz="1100" b="1" i="0">
+                <a:solidFill>
+                  <a:srgbClr val="FFFFFF"/>
+                </a:solidFill>
+                <a:latin typeface="Calibri"/>
+              </a:rPr>
+              <a:t>Role</a:t>
+            </a:r>
+          </a:p>
+        </p:txBody>
+      </p:sp>
+      <p:sp>
+        <p:nvSpPr>
+          <p:cNvPr id="11" name="TextBox 10"/>
+          <p:cNvSpPr txBox="1"/>
+          <p:nvPr/>
+        </p:nvSpPr>
+        <p:spPr>
+          <a:xfrm>
+            <a:off x="8961120" y="1463040"/>
+            <a:ext cx="2651760" cy="384048"/>
+          </a:xfrm>
+          <a:prstGeom prst="rect">
+            <a:avLst/>
+          </a:prstGeom>
+          <a:noFill/>
+        </p:spPr>
+        <p:txBody>
+          <a:bodyPr wrap="square" lIns="73152" rIns="73152" tIns="43891" bIns="43891" anchor="ctr">
+            <a:spAutoFit/>
+          </a:bodyPr>
+          <a:lstStyle/>
+          <a:p>
+            <a:pPr algn="l"/>
+            <a:r>
+              <a:rPr sz="1100" b="1" i="0">
+                <a:solidFill>
+                  <a:srgbClr val="FFFFFF"/>
+                </a:solidFill>
+                <a:latin typeface="Calibri"/>
+              </a:rPr>
+              <a:t>Source / Licence</a:t>
+            </a:r>
+          </a:p>
+        </p:txBody>
+      </p:sp>
+      <p:sp>
+        <p:nvSpPr>
+          <p:cNvPr id="12" name="Rectangle 11"/>
+          <p:cNvSpPr/>
+          <p:nvPr/>
+        </p:nvSpPr>
+        <p:spPr>
+          <a:xfrm>
+            <a:off x="640080" y="1874520"/>
+            <a:ext cx="10881360" cy="411480"/>
+          </a:xfrm>
+          <a:prstGeom prst="rect">
+            <a:avLst/>
+          </a:prstGeom>
+          <a:solidFill>
+            <a:srgbClr val="F4F7FB"/>
+          </a:solidFill>
+          <a:ln>
+            <a:noFill/>
+          </a:ln>
+        </p:spPr>
+        <p:style>
+          <a:lnRef idx="1">
+            <a:schemeClr val="accent1"/>
+          </a:lnRef>
+          <a:fillRef idx="3">
+            <a:schemeClr val="accent1"/>
+          </a:fillRef>
+          <a:effectRef idx="2">
+            <a:schemeClr val="accent1"/>
+          </a:effectRef>
+          <a:fontRef idx="minor">
+            <a:schemeClr val="lt1"/>
+          </a:fontRef>
+        </p:style>
+        <p:txBody>
+          <a:bodyPr rtlCol="0" anchor="ctr"/>
+          <a:lstStyle/>
+          <a:p>
+            <a:pPr algn="ctr"/>
+          </a:p>
+        </p:txBody>
+      </p:sp>
+      <p:sp>
+        <p:nvSpPr>
+          <p:cNvPr id="13" name="TextBox 12"/>
+          <p:cNvSpPr txBox="1"/>
+          <p:nvPr/>
+        </p:nvSpPr>
+        <p:spPr>
+          <a:xfrm>
+            <a:off x="731520" y="1874520"/>
+            <a:ext cx="2651760" cy="411480"/>
+          </a:xfrm>
+          <a:prstGeom prst="rect">
+            <a:avLst/>
+          </a:prstGeom>
+          <a:noFill/>
+        </p:spPr>
+        <p:txBody>
+          <a:bodyPr wrap="square" lIns="73152" rIns="73152" tIns="43891" bIns="43891" anchor="ctr">
+            <a:spAutoFit/>
+          </a:bodyPr>
+          <a:lstStyle/>
+          <a:p>
+            <a:pPr algn="l"/>
+            <a:r>
+              <a:rPr sz="1100" b="1" i="0">
+                <a:solidFill>
+                  <a:srgbClr val="0F1B3D"/>
+                </a:solidFill>
+                <a:latin typeface="Calibri"/>
+              </a:rPr>
+              <a:t>WavLM-Base+</a:t>
+            </a:r>
+          </a:p>
+        </p:txBody>
+      </p:sp>
+      <p:sp>
+        <p:nvSpPr>
+          <p:cNvPr id="14" name="TextBox 13"/>
+          <p:cNvSpPr txBox="1"/>
+          <p:nvPr/>
+        </p:nvSpPr>
+        <p:spPr>
+          <a:xfrm>
+            <a:off x="3474720" y="1874520"/>
+            <a:ext cx="5394960" cy="411480"/>
+          </a:xfrm>
+          <a:prstGeom prst="rect">
+            <a:avLst/>
+          </a:prstGeom>
+          <a:noFill/>
+        </p:spPr>
+        <p:txBody>
+          <a:bodyPr wrap="square" lIns="73152" rIns="73152" tIns="43891" bIns="43891" anchor="ctr">
+            <a:spAutoFit/>
+          </a:bodyPr>
+          <a:lstStyle/>
+          <a:p>
+            <a:pPr algn="l"/>
+            <a:r>
+              <a:rPr sz="1100" b="0" i="0">
+                <a:solidFill>
+                  <a:srgbClr val="404856"/>
+                </a:solidFill>
+                <a:latin typeface="Calibri"/>
+              </a:rPr>
+              <a:t>Phonetic / noise-robust teacher</a:t>
+            </a:r>
+          </a:p>
+        </p:txBody>
+      </p:sp>
+      <p:sp>
+        <p:nvSpPr>
+          <p:cNvPr id="15" name="TextBox 14"/>
+          <p:cNvSpPr txBox="1"/>
+          <p:nvPr/>
+        </p:nvSpPr>
+        <p:spPr>
+          <a:xfrm>
+            <a:off x="8961120" y="1874520"/>
+            <a:ext cx="2651760" cy="411480"/>
+          </a:xfrm>
+          <a:prstGeom prst="rect">
+            <a:avLst/>
+          </a:prstGeom>
+          <a:noFill/>
+        </p:spPr>
+        <p:txBody>
+          <a:bodyPr wrap="square" lIns="73152" rIns="73152" tIns="43891" bIns="43891" anchor="ctr">
+            <a:spAutoFit/>
+          </a:bodyPr>
+          <a:lstStyle/>
+          <a:p>
+            <a:pPr algn="l"/>
+            <a:r>
+              <a:rPr sz="1100" b="0" i="0">
+                <a:solidFill>
+                  <a:srgbClr val="404856"/>
+                </a:solidFill>
+                <a:latin typeface="Calibri"/>
+              </a:rPr>
+              <a:t>microsoft/wavlm-base-plus · MIT</a:t>
+            </a:r>
+          </a:p>
+        </p:txBody>
+      </p:sp>
+      <p:sp>
+        <p:nvSpPr>
+          <p:cNvPr id="16" name="TextBox 15"/>
+          <p:cNvSpPr txBox="1"/>
+          <p:nvPr/>
+        </p:nvSpPr>
+        <p:spPr>
+          <a:xfrm>
+            <a:off x="731520" y="2286000"/>
+            <a:ext cx="2651760" cy="411480"/>
+          </a:xfrm>
+          <a:prstGeom prst="rect">
+            <a:avLst/>
+          </a:prstGeom>
+          <a:noFill/>
+        </p:spPr>
+        <p:txBody>
+          <a:bodyPr wrap="square" lIns="73152" rIns="73152" tIns="43891" bIns="43891" anchor="ctr">
+            <a:spAutoFit/>
+          </a:bodyPr>
+          <a:lstStyle/>
+          <a:p>
+            <a:pPr algn="l"/>
+            <a:r>
+              <a:rPr sz="1100" b="1" i="0">
+                <a:solidFill>
+                  <a:srgbClr val="0F1B3D"/>
+                </a:solidFill>
+                <a:latin typeface="Calibri"/>
+              </a:rPr>
+              <a:t>ECAPA-TDNN</a:t>
+            </a:r>
+          </a:p>
+        </p:txBody>
+      </p:sp>
+      <p:sp>
+        <p:nvSpPr>
+          <p:cNvPr id="17" name="TextBox 16"/>
+          <p:cNvSpPr txBox="1"/>
+          <p:nvPr/>
+        </p:nvSpPr>
+        <p:spPr>
+          <a:xfrm>
+            <a:off x="3474720" y="2286000"/>
+            <a:ext cx="5394960" cy="411480"/>
+          </a:xfrm>
+          <a:prstGeom prst="rect">
+            <a:avLst/>
+          </a:prstGeom>
+          <a:noFill/>
+        </p:spPr>
+        <p:txBody>
+          <a:bodyPr wrap="square" lIns="73152" rIns="73152" tIns="43891" bIns="43891" anchor="ctr">
+            <a:spAutoFit/>
+          </a:bodyPr>
+          <a:lstStyle/>
+          <a:p>
+            <a:pPr algn="l"/>
+            <a:r>
+              <a:rPr sz="1100" b="0" i="0">
+                <a:solidFill>
+                  <a:srgbClr val="404856"/>
+                </a:solidFill>
+                <a:latin typeface="Calibri"/>
+              </a:rPr>
+              <a:t>Speaker biometric teacher</a:t>
+            </a:r>
+          </a:p>
+        </p:txBody>
+      </p:sp>
+      <p:sp>
+        <p:nvSpPr>
+          <p:cNvPr id="18" name="TextBox 17"/>
+          <p:cNvSpPr txBox="1"/>
+          <p:nvPr/>
+        </p:nvSpPr>
+        <p:spPr>
+          <a:xfrm>
+            <a:off x="8961120" y="2286000"/>
+            <a:ext cx="2651760" cy="411480"/>
+          </a:xfrm>
+          <a:prstGeom prst="rect">
+            <a:avLst/>
+          </a:prstGeom>
+          <a:noFill/>
+        </p:spPr>
+        <p:txBody>
+          <a:bodyPr wrap="square" lIns="73152" rIns="73152" tIns="43891" bIns="43891" anchor="ctr">
+            <a:spAutoFit/>
+          </a:bodyPr>
+          <a:lstStyle/>
+          <a:p>
+            <a:pPr algn="l"/>
+            <a:r>
+              <a:rPr sz="1100" b="0" i="0">
+                <a:solidFill>
+                  <a:srgbClr val="404856"/>
+                </a:solidFill>
+                <a:latin typeface="Calibri"/>
+              </a:rPr>
+              <a:t>speechbrain/spkrec-ecapa · Apache-2.0</a:t>
+            </a:r>
+          </a:p>
+        </p:txBody>
+      </p:sp>
+      <p:sp>
+        <p:nvSpPr>
+          <p:cNvPr id="19" name="Rectangle 18"/>
+          <p:cNvSpPr/>
+          <p:nvPr/>
+        </p:nvSpPr>
+        <p:spPr>
+          <a:xfrm>
+            <a:off x="640080" y="2697480"/>
+            <a:ext cx="10881360" cy="411480"/>
+          </a:xfrm>
+          <a:prstGeom prst="rect">
+            <a:avLst/>
+          </a:prstGeom>
+          <a:solidFill>
+            <a:srgbClr val="F4F7FB"/>
+          </a:solidFill>
+          <a:ln>
+            <a:noFill/>
+          </a:ln>
+        </p:spPr>
+        <p:style>
+          <a:lnRef idx="1">
+            <a:schemeClr val="accent1"/>
+          </a:lnRef>
+          <a:fillRef idx="3">
+            <a:schemeClr val="accent1"/>
+          </a:fillRef>
+          <a:effectRef idx="2">
+            <a:schemeClr val="accent1"/>
+          </a:effectRef>
+          <a:fontRef idx="minor">
+            <a:schemeClr val="lt1"/>
+          </a:fontRef>
+        </p:style>
+        <p:txBody>
+          <a:bodyPr rtlCol="0" anchor="ctr"/>
+          <a:lstStyle/>
+          <a:p>
+            <a:pPr algn="ctr"/>
+          </a:p>
+        </p:txBody>
+      </p:sp>
+      <p:sp>
+        <p:nvSpPr>
+          <p:cNvPr id="20" name="TextBox 19"/>
+          <p:cNvSpPr txBox="1"/>
+          <p:nvPr/>
+        </p:nvSpPr>
+        <p:spPr>
+          <a:xfrm>
+            <a:off x="731520" y="2697480"/>
+            <a:ext cx="2651760" cy="411480"/>
+          </a:xfrm>
+          <a:prstGeom prst="rect">
+            <a:avLst/>
+          </a:prstGeom>
+          <a:noFill/>
+        </p:spPr>
+        <p:txBody>
+          <a:bodyPr wrap="square" lIns="73152" rIns="73152" tIns="43891" bIns="43891" anchor="ctr">
+            <a:spAutoFit/>
+          </a:bodyPr>
+          <a:lstStyle/>
+          <a:p>
+            <a:pPr algn="l"/>
+            <a:r>
+              <a:rPr sz="1100" b="1" i="0">
+                <a:solidFill>
+                  <a:srgbClr val="0F1B3D"/>
+                </a:solidFill>
+                <a:latin typeface="Calibri"/>
+              </a:rPr>
+              <a:t>XTTS-v2</a:t>
+            </a:r>
+          </a:p>
+        </p:txBody>
+      </p:sp>
+      <p:sp>
+        <p:nvSpPr>
+          <p:cNvPr id="21" name="TextBox 20"/>
+          <p:cNvSpPr txBox="1"/>
+          <p:nvPr/>
+        </p:nvSpPr>
+        <p:spPr>
+          <a:xfrm>
+            <a:off x="3474720" y="2697480"/>
+            <a:ext cx="5394960" cy="411480"/>
+          </a:xfrm>
+          <a:prstGeom prst="rect">
+            <a:avLst/>
+          </a:prstGeom>
+          <a:noFill/>
+        </p:spPr>
+        <p:txBody>
+          <a:bodyPr wrap="square" lIns="73152" rIns="73152" tIns="43891" bIns="43891" anchor="ctr">
+            <a:spAutoFit/>
+          </a:bodyPr>
+          <a:lstStyle/>
+          <a:p>
+            <a:pPr algn="l"/>
+            <a:r>
+              <a:rPr sz="1100" b="0" i="0">
+                <a:solidFill>
+                  <a:srgbClr val="404856"/>
+                </a:solidFill>
+                <a:latin typeface="Calibri"/>
+              </a:rPr>
+              <a:t>Multi-voice TTS for trigger augmentation</a:t>
+            </a:r>
+          </a:p>
+        </p:txBody>
+      </p:sp>
+      <p:sp>
+        <p:nvSpPr>
+          <p:cNvPr id="22" name="TextBox 21"/>
+          <p:cNvSpPr txBox="1"/>
+          <p:nvPr/>
+        </p:nvSpPr>
+        <p:spPr>
+          <a:xfrm>
+            <a:off x="8961120" y="2697480"/>
+            <a:ext cx="2651760" cy="411480"/>
+          </a:xfrm>
+          <a:prstGeom prst="rect">
+            <a:avLst/>
+          </a:prstGeom>
+          <a:noFill/>
+        </p:spPr>
+        <p:txBody>
+          <a:bodyPr wrap="square" lIns="73152" rIns="73152" tIns="43891" bIns="43891" anchor="ctr">
+            <a:spAutoFit/>
+          </a:bodyPr>
+          <a:lstStyle/>
+          <a:p>
+            <a:pPr algn="l"/>
+            <a:r>
+              <a:rPr sz="1100" b="0" i="0">
+                <a:solidFill>
+                  <a:srgbClr val="404856"/>
+                </a:solidFill>
+                <a:latin typeface="Calibri"/>
+              </a:rPr>
+              <a:t>coqui/XTTS-v2 · CPML</a:t>
+            </a:r>
+          </a:p>
+        </p:txBody>
+      </p:sp>
+      <p:sp>
+        <p:nvSpPr>
+          <p:cNvPr id="23" name="TextBox 22"/>
+          <p:cNvSpPr txBox="1"/>
+          <p:nvPr/>
+        </p:nvSpPr>
+        <p:spPr>
+          <a:xfrm>
+            <a:off x="731520" y="3108960"/>
+            <a:ext cx="2651760" cy="411480"/>
+          </a:xfrm>
+          <a:prstGeom prst="rect">
+            <a:avLst/>
+          </a:prstGeom>
+          <a:noFill/>
+        </p:spPr>
+        <p:txBody>
+          <a:bodyPr wrap="square" lIns="73152" rIns="73152" tIns="43891" bIns="43891" anchor="ctr">
+            <a:spAutoFit/>
+          </a:bodyPr>
+          <a:lstStyle/>
+          <a:p>
+            <a:pPr algn="l"/>
+            <a:r>
+              <a:rPr sz="1100" b="1" i="0">
+                <a:solidFill>
+                  <a:srgbClr val="0F1B3D"/>
+                </a:solidFill>
+                <a:latin typeface="Calibri"/>
+              </a:rPr>
+              <a:t>g2p-en</a:t>
+            </a:r>
+          </a:p>
+        </p:txBody>
+      </p:sp>
+      <p:sp>
+        <p:nvSpPr>
+          <p:cNvPr id="24" name="TextBox 23"/>
+          <p:cNvSpPr txBox="1"/>
+          <p:nvPr/>
+        </p:nvSpPr>
+        <p:spPr>
+          <a:xfrm>
+            <a:off x="3474720" y="3108960"/>
+            <a:ext cx="5394960" cy="411480"/>
+          </a:xfrm>
+          <a:prstGeom prst="rect">
+            <a:avLst/>
+          </a:prstGeom>
+          <a:noFill/>
+        </p:spPr>
+        <p:txBody>
+          <a:bodyPr wrap="square" lIns="73152" rIns="73152" tIns="43891" bIns="43891" anchor="ctr">
+            <a:spAutoFit/>
+          </a:bodyPr>
+          <a:lstStyle/>
+          <a:p>
+            <a:pPr algn="l"/>
+            <a:r>
+              <a:rPr sz="1100" b="0" i="0">
+                <a:solidFill>
+                  <a:srgbClr val="404856"/>
+                </a:solidFill>
+                <a:latin typeface="Calibri"/>
+              </a:rPr>
+              <a:t>Trigger word → ARPAbet phones</a:t>
+            </a:r>
+          </a:p>
+        </p:txBody>
+      </p:sp>
+      <p:sp>
+        <p:nvSpPr>
+          <p:cNvPr id="25" name="TextBox 24"/>
+          <p:cNvSpPr txBox="1"/>
+          <p:nvPr/>
+        </p:nvSpPr>
+        <p:spPr>
+          <a:xfrm>
+            <a:off x="8961120" y="3108960"/>
+            <a:ext cx="2651760" cy="411480"/>
+          </a:xfrm>
+          <a:prstGeom prst="rect">
+            <a:avLst/>
+          </a:prstGeom>
+          <a:noFill/>
+        </p:spPr>
+        <p:txBody>
+          <a:bodyPr wrap="square" lIns="73152" rIns="73152" tIns="43891" bIns="43891" anchor="ctr">
+            <a:spAutoFit/>
+          </a:bodyPr>
+          <a:lstStyle/>
+          <a:p>
+            <a:pPr algn="l"/>
+            <a:r>
+              <a:rPr sz="1100" b="0" i="0">
+                <a:solidFill>
+                  <a:srgbClr val="404856"/>
+                </a:solidFill>
+                <a:latin typeface="Calibri"/>
+              </a:rPr>
+              <a:t>Apache-2.0</a:t>
+            </a:r>
+          </a:p>
+        </p:txBody>
+      </p:sp>
+      <p:sp>
+        <p:nvSpPr>
+          <p:cNvPr id="26" name="TextBox 25"/>
+          <p:cNvSpPr txBox="1"/>
+          <p:nvPr/>
+        </p:nvSpPr>
+        <p:spPr>
+          <a:xfrm>
+            <a:off x="457200" y="3931920"/>
+            <a:ext cx="11247120" cy="365760"/>
+          </a:xfrm>
+          <a:prstGeom prst="rect">
+            <a:avLst/>
+          </a:prstGeom>
+          <a:noFill/>
+        </p:spPr>
+        <p:txBody>
+          <a:bodyPr wrap="square" lIns="73152" rIns="73152" tIns="43891" bIns="43891" anchor="t">
+            <a:spAutoFit/>
+          </a:bodyPr>
+          <a:lstStyle/>
+          <a:p>
+            <a:pPr algn="l">
+              <a:spcAft>
+                <a:spcPts val="400"/>
+              </a:spcAft>
+            </a:pPr>
+            <a:r>
+              <a:rPr sz="1500" b="1" i="0">
+                <a:solidFill>
+                  <a:srgbClr val="003B8E"/>
+                </a:solidFill>
+                <a:latin typeface="Calibri"/>
+              </a:rPr>
+              <a:t>To be developed / trained from scratch  (Apache-2.0)</a:t>
+            </a:r>
+          </a:p>
+        </p:txBody>
+      </p:sp>
+      <p:sp>
+        <p:nvSpPr>
+          <p:cNvPr id="27" name="Rounded Rectangle 26"/>
+          <p:cNvSpPr/>
+          <p:nvPr/>
+        </p:nvSpPr>
+        <p:spPr>
+          <a:xfrm>
+            <a:off x="457200" y="4343400"/>
+            <a:ext cx="11247120" cy="2194560"/>
+          </a:xfrm>
+          <a:prstGeom prst="roundRect">
+            <a:avLst>
+              <a:gd name="adj" fmla="val 6000"/>
+            </a:avLst>
+          </a:prstGeom>
+          <a:solidFill>
+            <a:srgbClr val="FFFFFF"/>
+          </a:solidFill>
+          <a:ln w="9525">
+            <a:solidFill>
+              <a:srgbClr val="D9DEE6"/>
+            </a:solidFill>
+          </a:ln>
+        </p:spPr>
+        <p:style>
+          <a:lnRef idx="1">
+            <a:schemeClr val="accent1"/>
+          </a:lnRef>
+          <a:fillRef idx="3">
+            <a:schemeClr val="accent1"/>
+          </a:fillRef>
+          <a:effectRef idx="2">
+            <a:schemeClr val="accent1"/>
+          </a:effectRef>
+          <a:fontRef idx="minor">
+            <a:schemeClr val="lt1"/>
+          </a:fontRef>
+        </p:style>
+        <p:txBody>
+          <a:bodyPr rtlCol="0" anchor="ctr"/>
+          <a:lstStyle/>
+          <a:p/>
+        </p:txBody>
+      </p:sp>
+      <p:sp>
+        <p:nvSpPr>
+          <p:cNvPr id="28" name="Rectangle 27"/>
+          <p:cNvSpPr/>
+          <p:nvPr/>
+        </p:nvSpPr>
+        <p:spPr>
+          <a:xfrm>
+            <a:off x="640080" y="4434840"/>
+            <a:ext cx="10881360" cy="384048"/>
+          </a:xfrm>
+          <a:prstGeom prst="rect">
+            <a:avLst/>
+          </a:prstGeom>
+          <a:solidFill>
+            <a:srgbClr val="1B7F4F"/>
+          </a:solidFill>
+          <a:ln>
+            <a:noFill/>
+          </a:ln>
+        </p:spPr>
+        <p:style>
+          <a:lnRef idx="1">
+            <a:schemeClr val="accent1"/>
+          </a:lnRef>
+          <a:fillRef idx="3">
+            <a:schemeClr val="accent1"/>
+          </a:fillRef>
+          <a:effectRef idx="2">
+            <a:schemeClr val="accent1"/>
+          </a:effectRef>
+          <a:fontRef idx="minor">
+            <a:schemeClr val="lt1"/>
+          </a:fontRef>
+        </p:style>
+        <p:txBody>
+          <a:bodyPr rtlCol="0" anchor="ctr"/>
+          <a:lstStyle/>
+          <a:p>
+            <a:pPr algn="ctr"/>
+          </a:p>
+        </p:txBody>
+      </p:sp>
+      <p:sp>
+        <p:nvSpPr>
+          <p:cNvPr id="29" name="TextBox 28"/>
+          <p:cNvSpPr txBox="1"/>
+          <p:nvPr/>
+        </p:nvSpPr>
+        <p:spPr>
+          <a:xfrm>
+            <a:off x="731520" y="4434840"/>
+            <a:ext cx="3566160" cy="384048"/>
+          </a:xfrm>
+          <a:prstGeom prst="rect">
+            <a:avLst/>
+          </a:prstGeom>
+          <a:noFill/>
+        </p:spPr>
+        <p:txBody>
+          <a:bodyPr wrap="square" lIns="73152" rIns="73152" tIns="43891" bIns="43891" anchor="ctr">
+            <a:spAutoFit/>
+          </a:bodyPr>
+          <a:lstStyle/>
+          <a:p>
+            <a:pPr algn="l"/>
+            <a:r>
+              <a:rPr sz="1100" b="1" i="0">
+                <a:solidFill>
+                  <a:srgbClr val="FFFFFF"/>
+                </a:solidFill>
+                <a:latin typeface="Calibri"/>
+              </a:rPr>
+              <a:t>Model</a:t>
+            </a:r>
+          </a:p>
+        </p:txBody>
+      </p:sp>
+      <p:sp>
+        <p:nvSpPr>
+          <p:cNvPr id="30" name="TextBox 29"/>
+          <p:cNvSpPr txBox="1"/>
+          <p:nvPr/>
+        </p:nvSpPr>
+        <p:spPr>
+          <a:xfrm>
+            <a:off x="4389120" y="4434840"/>
+            <a:ext cx="7132320" cy="384048"/>
+          </a:xfrm>
+          <a:prstGeom prst="rect">
+            <a:avLst/>
+          </a:prstGeom>
+          <a:noFill/>
+        </p:spPr>
+        <p:txBody>
+          <a:bodyPr wrap="square" lIns="73152" rIns="73152" tIns="43891" bIns="43891" anchor="ctr">
+            <a:spAutoFit/>
+          </a:bodyPr>
+          <a:lstStyle/>
+          <a:p>
+            <a:pPr algn="l"/>
+            <a:r>
+              <a:rPr sz="1100" b="1" i="0">
+                <a:solidFill>
+                  <a:srgbClr val="FFFFFF"/>
+                </a:solidFill>
+                <a:latin typeface="Calibri"/>
+              </a:rPr>
+              <a:t>Description</a:t>
+            </a:r>
+          </a:p>
+        </p:txBody>
+      </p:sp>
+      <p:sp>
+        <p:nvSpPr>
+          <p:cNvPr id="31" name="Rectangle 30"/>
+          <p:cNvSpPr/>
+          <p:nvPr/>
+        </p:nvSpPr>
+        <p:spPr>
+          <a:xfrm>
+            <a:off x="640080" y="4846320"/>
+            <a:ext cx="10881360" cy="594360"/>
+          </a:xfrm>
+          <a:prstGeom prst="rect">
+            <a:avLst/>
+          </a:prstGeom>
+          <a:solidFill>
+            <a:srgbClr val="F4F7FB"/>
+          </a:solidFill>
+          <a:ln>
+            <a:noFill/>
+          </a:ln>
+        </p:spPr>
+        <p:style>
+          <a:lnRef idx="1">
+            <a:schemeClr val="accent1"/>
+          </a:lnRef>
+          <a:fillRef idx="3">
+            <a:schemeClr val="accent1"/>
+          </a:fillRef>
+          <a:effectRef idx="2">
+            <a:schemeClr val="accent1"/>
+          </a:effectRef>
+          <a:fontRef idx="minor">
+            <a:schemeClr val="lt1"/>
+          </a:fontRef>
+        </p:style>
+        <p:txBody>
+          <a:bodyPr rtlCol="0" anchor="ctr"/>
+          <a:lstStyle/>
+          <a:p>
+            <a:pPr algn="ctr"/>
+          </a:p>
+        </p:txBody>
+      </p:sp>
+      <p:sp>
+        <p:nvSpPr>
+          <p:cNvPr id="32" name="TextBox 31"/>
+          <p:cNvSpPr txBox="1"/>
+          <p:nvPr/>
+        </p:nvSpPr>
+        <p:spPr>
+          <a:xfrm>
+            <a:off x="731520" y="4846320"/>
+            <a:ext cx="3566160" cy="594360"/>
+          </a:xfrm>
+          <a:prstGeom prst="rect">
+            <a:avLst/>
+          </a:prstGeom>
+          <a:noFill/>
+        </p:spPr>
+        <p:txBody>
+          <a:bodyPr wrap="square" lIns="73152" rIns="73152" tIns="43891" bIns="43891" anchor="ctr">
+            <a:spAutoFit/>
+          </a:bodyPr>
+          <a:lstStyle/>
+          <a:p>
+            <a:pPr algn="l"/>
+            <a:r>
+              <a:rPr sz="1100" b="1" i="0">
+                <a:solidFill>
+                  <a:srgbClr val="0F1B3D"/>
+                </a:solidFill>
+                <a:latin typeface="Calibri"/>
+              </a:rPr>
+              <a:t>BC-ResNet-8 (modified) joint student</a:t>
+            </a:r>
+          </a:p>
+        </p:txBody>
+      </p:sp>
+      <p:sp>
+        <p:nvSpPr>
+          <p:cNvPr id="33" name="TextBox 32"/>
+          <p:cNvSpPr txBox="1"/>
+          <p:nvPr/>
+        </p:nvSpPr>
+        <p:spPr>
+          <a:xfrm>
+            <a:off x="4389120" y="4846320"/>
+            <a:ext cx="7132320" cy="594360"/>
+          </a:xfrm>
+          <a:prstGeom prst="rect">
+            <a:avLst/>
+          </a:prstGeom>
+          <a:noFill/>
+        </p:spPr>
+        <p:txBody>
+          <a:bodyPr wrap="square" lIns="73152" rIns="73152" tIns="43891" bIns="43891" anchor="ctr">
+            <a:spAutoFit/>
+          </a:bodyPr>
+          <a:lstStyle/>
+          <a:p>
+            <a:pPr algn="l"/>
+            <a:r>
+              <a:rPr sz="1100" b="0" i="0">
+                <a:solidFill>
+                  <a:srgbClr val="404856"/>
+                </a:solidFill>
+                <a:latin typeface="Calibri"/>
+              </a:rPr>
+              <a:t>TRM branching, FiLM speaker conditioning, MQMHA SV pooling — joint KWS + SV, ~830 K params</a:t>
+            </a:r>
+          </a:p>
+        </p:txBody>
+      </p:sp>
+      <p:sp>
+        <p:nvSpPr>
+          <p:cNvPr id="34" name="TextBox 33"/>
+          <p:cNvSpPr txBox="1"/>
+          <p:nvPr/>
+        </p:nvSpPr>
+        <p:spPr>
+          <a:xfrm>
+            <a:off x="731520" y="5440680"/>
+            <a:ext cx="3566160" cy="594360"/>
+          </a:xfrm>
+          <a:prstGeom prst="rect">
+            <a:avLst/>
+          </a:prstGeom>
+          <a:noFill/>
+        </p:spPr>
+        <p:txBody>
+          <a:bodyPr wrap="square" lIns="73152" rIns="73152" tIns="43891" bIns="43891" anchor="ctr">
+            <a:spAutoFit/>
+          </a:bodyPr>
+          <a:lstStyle/>
+          <a:p>
+            <a:pPr algn="l"/>
+            <a:r>
+              <a:rPr sz="1100" b="1" i="0">
+                <a:solidFill>
+                  <a:srgbClr val="0F1B3D"/>
+                </a:solidFill>
+                <a:latin typeface="Calibri"/>
+              </a:rPr>
+              <a:t>WavLM → KWS probing head</a:t>
+            </a:r>
+          </a:p>
+        </p:txBody>
+      </p:sp>
+      <p:sp>
+        <p:nvSpPr>
+          <p:cNvPr id="35" name="TextBox 34"/>
+          <p:cNvSpPr txBox="1"/>
+          <p:nvPr/>
+        </p:nvSpPr>
+        <p:spPr>
+          <a:xfrm>
+            <a:off x="4389120" y="5440680"/>
+            <a:ext cx="7132320" cy="594360"/>
+          </a:xfrm>
+          <a:prstGeom prst="rect">
+            <a:avLst/>
+          </a:prstGeom>
+          <a:noFill/>
+        </p:spPr>
+        <p:txBody>
+          <a:bodyPr wrap="square" lIns="73152" rIns="73152" tIns="43891" bIns="43891" anchor="ctr">
+            <a:spAutoFit/>
+          </a:bodyPr>
+          <a:lstStyle/>
+          <a:p>
+            <a:pPr algn="l"/>
+            <a:r>
+              <a:rPr sz="1100" b="0" i="0">
+                <a:solidFill>
+                  <a:srgbClr val="404856"/>
+                </a:solidFill>
+                <a:latin typeface="Calibri"/>
+              </a:rPr>
+              <a:t>2-layer MLP, ~50 K params, one-time training</a:t>
+            </a:r>
+          </a:p>
+        </p:txBody>
+      </p:sp>
+      <p:sp>
+        <p:nvSpPr>
+          <p:cNvPr id="36" name="Rectangle 35"/>
+          <p:cNvSpPr/>
+          <p:nvPr/>
+        </p:nvSpPr>
+        <p:spPr>
+          <a:xfrm>
+            <a:off x="640080" y="6035040"/>
+            <a:ext cx="10881360" cy="594360"/>
+          </a:xfrm>
+          <a:prstGeom prst="rect">
+            <a:avLst/>
+          </a:prstGeom>
+          <a:solidFill>
+            <a:srgbClr val="F4F7FB"/>
+          </a:solidFill>
+          <a:ln>
+            <a:noFill/>
+          </a:ln>
+        </p:spPr>
+        <p:style>
+          <a:lnRef idx="1">
+            <a:schemeClr val="accent1"/>
+          </a:lnRef>
+          <a:fillRef idx="3">
+            <a:schemeClr val="accent1"/>
+          </a:fillRef>
+          <a:effectRef idx="2">
+            <a:schemeClr val="accent1"/>
+          </a:effectRef>
+          <a:fontRef idx="minor">
+            <a:schemeClr val="lt1"/>
+          </a:fontRef>
+        </p:style>
+        <p:txBody>
+          <a:bodyPr rtlCol="0" anchor="ctr"/>
+          <a:lstStyle/>
+          <a:p>
+            <a:pPr algn="ctr"/>
+          </a:p>
+        </p:txBody>
+      </p:sp>
+      <p:sp>
+        <p:nvSpPr>
+          <p:cNvPr id="37" name="TextBox 36"/>
+          <p:cNvSpPr txBox="1"/>
+          <p:nvPr/>
+        </p:nvSpPr>
+        <p:spPr>
+          <a:xfrm>
+            <a:off x="731520" y="6035040"/>
+            <a:ext cx="3566160" cy="594360"/>
+          </a:xfrm>
+          <a:prstGeom prst="rect">
+            <a:avLst/>
+          </a:prstGeom>
+          <a:noFill/>
+        </p:spPr>
+        <p:txBody>
+          <a:bodyPr wrap="square" lIns="73152" rIns="73152" tIns="43891" bIns="43891" anchor="ctr">
+            <a:spAutoFit/>
+          </a:bodyPr>
+          <a:lstStyle/>
+          <a:p>
+            <a:pPr algn="l"/>
+            <a:r>
+              <a:rPr sz="1100" b="1" i="0">
+                <a:solidFill>
+                  <a:srgbClr val="0F1B3D"/>
+                </a:solidFill>
+                <a:latin typeface="Calibri"/>
+              </a:rPr>
+              <a:t>INT8-quantised ONNX export</a:t>
+            </a:r>
+          </a:p>
+        </p:txBody>
+      </p:sp>
+      <p:sp>
+        <p:nvSpPr>
+          <p:cNvPr id="38" name="TextBox 37"/>
+          <p:cNvSpPr txBox="1"/>
+          <p:nvPr/>
+        </p:nvSpPr>
+        <p:spPr>
+          <a:xfrm>
+            <a:off x="4389120" y="6035040"/>
+            <a:ext cx="7132320" cy="594360"/>
+          </a:xfrm>
+          <a:prstGeom prst="rect">
+            <a:avLst/>
+          </a:prstGeom>
+          <a:noFill/>
+        </p:spPr>
+        <p:txBody>
+          <a:bodyPr wrap="square" lIns="73152" rIns="73152" tIns="43891" bIns="43891" anchor="ctr">
+            <a:spAutoFit/>
+          </a:bodyPr>
+          <a:lstStyle/>
+          <a:p>
+            <a:pPr algn="l"/>
+            <a:r>
+              <a:rPr sz="1100" b="0" i="0">
+                <a:solidFill>
+                  <a:srgbClr val="404856"/>
+                </a:solidFill>
+                <a:latin typeface="Calibri"/>
+              </a:rPr>
+              <a:t>Edge-deployable artefact — 0.79 MB on disk</a:t>
+            </a:r>
+          </a:p>
+        </p:txBody>
+      </p:sp>
+    </p:spTree>
+  </p:cSld>
+  <p:clrMapOvr>
+    <a:masterClrMapping/>
+  </p:clrMapOvr>
+</p:sld>
+</file>
+
+<file path=ppt/slides/slide15.xml><?xml version="1.0" encoding="utf-8"?>
+<p:sld xmlns:a="http://schemas.openxmlformats.org/drawingml/2006/main" xmlns:p="http://schemas.openxmlformats.org/presentationml/2006/main" xmlns:r="http://schemas.openxmlformats.org/officeDocument/2006/relationships">
+  <p:cSld>
+    <p:bg>
+      <p:bgPr>
+        <a:solidFill>
+          <a:srgbClr val="FAFCFF"/>
+        </a:solidFill>
+        <a:effectLst/>
+      </p:bgPr>
+    </p:bg>
+    <p:spTree>
+      <p:nvGrpSpPr>
+        <p:cNvPr id="1" name=""/>
+        <p:cNvGrpSpPr/>
+        <p:nvPr/>
+      </p:nvGrpSpPr>
+      <p:grpSpPr/>
+      <p:sp>
+        <p:nvSpPr>
+          <p:cNvPr id="2" name="Rectangle 1"/>
+          <p:cNvSpPr/>
+          <p:nvPr/>
+        </p:nvSpPr>
+        <p:spPr>
+          <a:xfrm>
+            <a:off x="0" y="0"/>
+            <a:ext cx="12191695" cy="777240"/>
+          </a:xfrm>
+          <a:prstGeom prst="rect">
+            <a:avLst/>
+          </a:prstGeom>
+          <a:solidFill>
+            <a:srgbClr val="003B8E"/>
+          </a:solidFill>
+          <a:ln>
+            <a:noFill/>
+          </a:ln>
+        </p:spPr>
+        <p:style>
+          <a:lnRef idx="1">
+            <a:schemeClr val="accent1"/>
+          </a:lnRef>
+          <a:fillRef idx="3">
+            <a:schemeClr val="accent1"/>
+          </a:fillRef>
+          <a:effectRef idx="2">
+            <a:schemeClr val="accent1"/>
+          </a:effectRef>
+          <a:fontRef idx="minor">
+            <a:schemeClr val="lt1"/>
+          </a:fontRef>
+        </p:style>
+        <p:txBody>
+          <a:bodyPr rtlCol="0" anchor="ctr"/>
+          <a:lstStyle/>
+          <a:p>
+            <a:pPr algn="ctr"/>
+          </a:p>
+        </p:txBody>
+      </p:sp>
+      <p:sp>
+        <p:nvSpPr>
+          <p:cNvPr id="3" name="TextBox 2"/>
+          <p:cNvSpPr txBox="1"/>
+          <p:nvPr/>
+        </p:nvSpPr>
+        <p:spPr>
+          <a:xfrm>
+            <a:off x="365760" y="0"/>
+            <a:ext cx="11460175" cy="777240"/>
+          </a:xfrm>
+          <a:prstGeom prst="rect">
+            <a:avLst/>
+          </a:prstGeom>
+          <a:noFill/>
+        </p:spPr>
+        <p:txBody>
+          <a:bodyPr wrap="square" lIns="73152" rIns="73152" tIns="43891" bIns="43891" anchor="ctr">
+            <a:spAutoFit/>
+          </a:bodyPr>
+          <a:lstStyle/>
+          <a:p>
+            <a:pPr algn="l"/>
+            <a:r>
+              <a:rPr sz="2400" b="1" i="0">
+                <a:solidFill>
+                  <a:srgbClr val="FFFFFF"/>
+                </a:solidFill>
+                <a:latin typeface="Calibri"/>
+              </a:rPr>
+              <a:t>Deployment &amp; Demo Plan (for Grand Finale)</a:t>
+            </a:r>
+          </a:p>
+        </p:txBody>
+      </p:sp>
+      <p:sp>
+        <p:nvSpPr>
+          <p:cNvPr id="4" name="Rectangle 3"/>
+          <p:cNvSpPr/>
+          <p:nvPr/>
+        </p:nvSpPr>
+        <p:spPr>
+          <a:xfrm>
+            <a:off x="0" y="777240"/>
+            <a:ext cx="12191695" cy="36576"/>
+          </a:xfrm>
+          <a:prstGeom prst="rect">
+            <a:avLst/>
+          </a:prstGeom>
+          <a:solidFill>
+            <a:srgbClr val="B8860B"/>
+          </a:solidFill>
+          <a:ln>
+            <a:noFill/>
+          </a:ln>
+        </p:spPr>
+        <p:style>
+          <a:lnRef idx="1">
+            <a:schemeClr val="accent1"/>
+          </a:lnRef>
+          <a:fillRef idx="3">
+            <a:schemeClr val="accent1"/>
+          </a:fillRef>
+          <a:effectRef idx="2">
+            <a:schemeClr val="accent1"/>
+          </a:effectRef>
+          <a:fontRef idx="minor">
+            <a:schemeClr val="lt1"/>
+          </a:fontRef>
+        </p:style>
+        <p:txBody>
+          <a:bodyPr rtlCol="0" anchor="ctr"/>
+          <a:lstStyle/>
+          <a:p>
+            <a:pPr algn="ctr"/>
+          </a:p>
+        </p:txBody>
+      </p:sp>
+      <p:sp>
+        <p:nvSpPr>
+          <p:cNvPr id="5" name="TextBox 4"/>
+          <p:cNvSpPr txBox="1"/>
+          <p:nvPr/>
+        </p:nvSpPr>
+        <p:spPr>
+          <a:xfrm>
+            <a:off x="10820095" y="6537960"/>
+            <a:ext cx="1188720" cy="274320"/>
+          </a:xfrm>
+          <a:prstGeom prst="rect">
+            <a:avLst/>
+          </a:prstGeom>
+          <a:noFill/>
+        </p:spPr>
+        <p:txBody>
+          <a:bodyPr wrap="square" lIns="73152" rIns="73152" tIns="43891" bIns="43891" anchor="t">
+            <a:spAutoFit/>
+          </a:bodyPr>
+          <a:lstStyle/>
+          <a:p>
+            <a:pPr algn="r"/>
+            <a:r>
+              <a:rPr sz="900" b="0" i="0">
+                <a:solidFill>
+                  <a:srgbClr val="6A7383"/>
+                </a:solidFill>
+                <a:latin typeface="Calibri"/>
+              </a:rPr>
+              <a:t>15 / 17</a:t>
+            </a:r>
+          </a:p>
+        </p:txBody>
+      </p:sp>
+      <p:pic>
+        <p:nvPicPr>
+          <p:cNvPr id="6" name="Picture 5" descr="5_enrollment_runtime.png"/>
+          <p:cNvPicPr>
+            <a:picLocks noChangeAspect="1"/>
+          </p:cNvPicPr>
+          <p:nvPr/>
+        </p:nvPicPr>
+        <p:blipFill>
+          <a:blip r:embed="rId2"/>
+          <a:stretch>
+            <a:fillRect/>
+          </a:stretch>
+        </p:blipFill>
+        <p:spPr>
+          <a:xfrm>
+            <a:off x="788239" y="960120"/>
+            <a:ext cx="3909921" cy="5394960"/>
+          </a:xfrm>
+          <a:prstGeom prst="rect">
+            <a:avLst/>
+          </a:prstGeom>
+        </p:spPr>
+      </p:pic>
+      <p:sp>
+        <p:nvSpPr>
+          <p:cNvPr id="7" name="TextBox 6"/>
+          <p:cNvSpPr txBox="1"/>
+          <p:nvPr/>
+        </p:nvSpPr>
+        <p:spPr>
+          <a:xfrm>
+            <a:off x="365760" y="6400800"/>
+            <a:ext cx="4754880" cy="365760"/>
+          </a:xfrm>
+          <a:prstGeom prst="rect">
+            <a:avLst/>
+          </a:prstGeom>
+          <a:noFill/>
+        </p:spPr>
+        <p:txBody>
+          <a:bodyPr wrap="square" lIns="73152" rIns="73152" tIns="43891" bIns="43891" anchor="t">
+            <a:spAutoFit/>
+          </a:bodyPr>
+          <a:lstStyle/>
+          <a:p>
+            <a:pPr algn="ctr"/>
+            <a:r>
+              <a:rPr sz="900" b="0" i="1">
+                <a:solidFill>
+                  <a:srgbClr val="6A7383"/>
+                </a:solidFill>
+                <a:latin typeface="Calibri"/>
+              </a:rPr>
+              <a:t>Enrollment → runtime flow (5 utts ~30 s → stored ID prototype → online inference).</a:t>
+            </a:r>
+          </a:p>
+        </p:txBody>
+      </p:sp>
+      <p:sp>
+        <p:nvSpPr>
+          <p:cNvPr id="8" name="Rounded Rectangle 7"/>
+          <p:cNvSpPr/>
+          <p:nvPr/>
+        </p:nvSpPr>
+        <p:spPr>
+          <a:xfrm>
+            <a:off x="5394960" y="960120"/>
+            <a:ext cx="6400800" cy="4206240"/>
+          </a:xfrm>
+          <a:prstGeom prst="roundRect">
+            <a:avLst>
+              <a:gd name="adj" fmla="val 6000"/>
+            </a:avLst>
+          </a:prstGeom>
+          <a:solidFill>
+            <a:srgbClr val="ECF2FC"/>
+          </a:solidFill>
+          <a:ln w="9525">
+            <a:solidFill>
+              <a:srgbClr val="144BC4"/>
+            </a:solidFill>
+          </a:ln>
+        </p:spPr>
+        <p:style>
+          <a:lnRef idx="1">
+            <a:schemeClr val="accent1"/>
+          </a:lnRef>
+          <a:fillRef idx="3">
+            <a:schemeClr val="accent1"/>
+          </a:fillRef>
+          <a:effectRef idx="2">
+            <a:schemeClr val="accent1"/>
+          </a:effectRef>
+          <a:fontRef idx="minor">
+            <a:schemeClr val="lt1"/>
+          </a:fontRef>
+        </p:style>
+        <p:txBody>
+          <a:bodyPr rtlCol="0" anchor="ctr"/>
+          <a:lstStyle/>
+          <a:p/>
+        </p:txBody>
+      </p:sp>
+      <p:sp>
+        <p:nvSpPr>
+          <p:cNvPr id="9" name="TextBox 8"/>
+          <p:cNvSpPr txBox="1"/>
+          <p:nvPr/>
+        </p:nvSpPr>
+        <p:spPr>
+          <a:xfrm>
+            <a:off x="5623560" y="1051560"/>
+            <a:ext cx="5943600" cy="4114800"/>
+          </a:xfrm>
+          <a:prstGeom prst="rect">
+            <a:avLst/>
+          </a:prstGeom>
+          <a:noFill/>
+        </p:spPr>
+        <p:txBody>
+          <a:bodyPr wrap="square" lIns="73152" rIns="73152" tIns="43891" bIns="43891" anchor="t">
+            <a:spAutoFit/>
+          </a:bodyPr>
+          <a:lstStyle/>
+          <a:p>
+            <a:pPr algn="l">
+              <a:spcAft>
+                <a:spcPts val="800"/>
+              </a:spcAft>
+            </a:pPr>
+            <a:r>
+              <a:rPr sz="1400" b="1" i="0">
+                <a:solidFill>
+                  <a:srgbClr val="144BC4"/>
+                </a:solidFill>
+                <a:latin typeface="Calibri"/>
+              </a:rPr>
+              <a:t>Live demo script</a:t>
+            </a:r>
+          </a:p>
+          <a:p>
+            <a:pPr algn="l">
+              <a:spcAft>
+                <a:spcPts val="800"/>
+              </a:spcAft>
+            </a:pPr>
+            <a:r>
+              <a:rPr sz="1200" b="1" i="0">
+                <a:solidFill>
+                  <a:srgbClr val="144BC4"/>
+                </a:solidFill>
+                <a:latin typeface="Calibri"/>
+              </a:rPr>
+              <a:t>1.  </a:t>
+            </a:r>
+            <a:r>
+              <a:rPr sz="1200" b="1" i="0">
+                <a:solidFill>
+                  <a:srgbClr val="0F1B3D"/>
+                </a:solidFill>
+                <a:latin typeface="Calibri"/>
+              </a:rPr>
+              <a:t>Enroll a live judge:  </a:t>
+            </a:r>
+            <a:r>
+              <a:rPr sz="1200" b="0" i="0">
+                <a:solidFill>
+                  <a:srgbClr val="404856"/>
+                </a:solidFill>
+                <a:latin typeface="Calibri"/>
+              </a:rPr>
+              <a:t>5 clean utterances (~30 s) → stored speaker prototype.</a:t>
+            </a:r>
+          </a:p>
+          <a:p>
+            <a:pPr algn="l">
+              <a:spcAft>
+                <a:spcPts val="800"/>
+              </a:spcAft>
+            </a:pPr>
+            <a:r>
+              <a:rPr sz="1200" b="1" i="0">
+                <a:solidFill>
+                  <a:srgbClr val="144BC4"/>
+                </a:solidFill>
+                <a:latin typeface="Calibri"/>
+              </a:rPr>
+              <a:t>2.  </a:t>
+            </a:r>
+            <a:r>
+              <a:rPr sz="1200" b="1" i="0">
+                <a:solidFill>
+                  <a:srgbClr val="0F1B3D"/>
+                </a:solidFill>
+                <a:latin typeface="Calibri"/>
+              </a:rPr>
+              <a:t>Clean trigger </a:t>
+            </a:r>
+            <a:r>
+              <a:rPr sz="1200" b="0" i="0">
+                <a:solidFill>
+                  <a:srgbClr val="404856"/>
+                </a:solidFill>
+                <a:latin typeface="Calibri"/>
+              </a:rPr>
+              <a:t>from the judge   →   </a:t>
+            </a:r>
+            <a:r>
+              <a:rPr sz="1200" b="1" i="0">
+                <a:solidFill>
+                  <a:srgbClr val="1B7F4F"/>
+                </a:solidFill>
+                <a:latin typeface="Calibri"/>
+              </a:rPr>
+              <a:t>fires.</a:t>
+            </a:r>
+          </a:p>
+          <a:p>
+            <a:pPr algn="l">
+              <a:spcAft>
+                <a:spcPts val="800"/>
+              </a:spcAft>
+            </a:pPr>
+            <a:r>
+              <a:rPr sz="1200" b="1" i="0">
+                <a:solidFill>
+                  <a:srgbClr val="144BC4"/>
+                </a:solidFill>
+                <a:latin typeface="Calibri"/>
+              </a:rPr>
+              <a:t>3.  </a:t>
+            </a:r>
+            <a:r>
+              <a:rPr sz="1200" b="1" i="0">
+                <a:solidFill>
+                  <a:srgbClr val="0F1B3D"/>
+                </a:solidFill>
+                <a:latin typeface="Calibri"/>
+              </a:rPr>
+              <a:t>Noisy trigger </a:t>
+            </a:r>
+            <a:r>
+              <a:rPr sz="1200" b="0" i="0">
+                <a:solidFill>
+                  <a:srgbClr val="404856"/>
+                </a:solidFill>
+                <a:latin typeface="Calibri"/>
+              </a:rPr>
+              <a:t>— traffic at −5 dB from phone speaker   →   </a:t>
+            </a:r>
+            <a:r>
+              <a:rPr sz="1200" b="1" i="0">
+                <a:solidFill>
+                  <a:srgbClr val="1B7F4F"/>
+                </a:solidFill>
+                <a:latin typeface="Calibri"/>
+              </a:rPr>
+              <a:t>fires.</a:t>
+            </a:r>
+          </a:p>
+          <a:p>
+            <a:pPr algn="l">
+              <a:spcAft>
+                <a:spcPts val="800"/>
+              </a:spcAft>
+            </a:pPr>
+            <a:r>
+              <a:rPr sz="1200" b="1" i="0">
+                <a:solidFill>
+                  <a:srgbClr val="144BC4"/>
+                </a:solidFill>
+                <a:latin typeface="Calibri"/>
+              </a:rPr>
+              <a:t>4.  </a:t>
+            </a:r>
+            <a:r>
+              <a:rPr sz="1200" b="1" i="0">
+                <a:solidFill>
+                  <a:srgbClr val="0F1B3D"/>
+                </a:solidFill>
+                <a:latin typeface="Calibri"/>
+              </a:rPr>
+              <a:t>Impostor </a:t>
+            </a:r>
+            <a:r>
+              <a:rPr sz="1200" b="0" i="0">
+                <a:solidFill>
+                  <a:srgbClr val="404856"/>
+                </a:solidFill>
+                <a:latin typeface="Calibri"/>
+              </a:rPr>
+              <a:t>(teammate) says the same word   →   </a:t>
+            </a:r>
+            <a:r>
+              <a:rPr sz="1200" b="1" i="0">
+                <a:solidFill>
+                  <a:srgbClr val="C3292B"/>
+                </a:solidFill>
+                <a:latin typeface="Calibri"/>
+              </a:rPr>
+              <a:t>rejected.</a:t>
+            </a:r>
+          </a:p>
+          <a:p>
+            <a:pPr algn="l"/>
+            <a:r>
+              <a:rPr sz="1200" b="1" i="0">
+                <a:solidFill>
+                  <a:srgbClr val="144BC4"/>
+                </a:solidFill>
+                <a:latin typeface="Calibri"/>
+              </a:rPr>
+              <a:t>5.  </a:t>
+            </a:r>
+            <a:r>
+              <a:rPr sz="1200" b="1" i="0">
+                <a:solidFill>
+                  <a:srgbClr val="0F1B3D"/>
+                </a:solidFill>
+                <a:latin typeface="Calibri"/>
+              </a:rPr>
+              <a:t>Confusable </a:t>
+            </a:r>
+            <a:r>
+              <a:rPr sz="1200" b="0" i="0">
+                <a:solidFill>
+                  <a:srgbClr val="404856"/>
+                </a:solidFill>
+                <a:latin typeface="Calibri"/>
+              </a:rPr>
+              <a:t>phrase ("turn on" vs "turn off")   →   </a:t>
+            </a:r>
+            <a:r>
+              <a:rPr sz="1200" b="1" i="0">
+                <a:solidFill>
+                  <a:srgbClr val="C3292B"/>
+                </a:solidFill>
+                <a:latin typeface="Calibri"/>
+              </a:rPr>
+              <a:t>rejected.</a:t>
+            </a:r>
+          </a:p>
+        </p:txBody>
+      </p:sp>
+      <p:sp>
+        <p:nvSpPr>
+          <p:cNvPr id="10" name="Rounded Rectangle 9"/>
+          <p:cNvSpPr/>
+          <p:nvPr/>
+        </p:nvSpPr>
+        <p:spPr>
+          <a:xfrm>
+            <a:off x="5394960" y="5349240"/>
+            <a:ext cx="6400800" cy="1325880"/>
+          </a:xfrm>
+          <a:prstGeom prst="roundRect">
+            <a:avLst>
+              <a:gd name="adj" fmla="val 6000"/>
+            </a:avLst>
+          </a:prstGeom>
+          <a:solidFill>
+            <a:srgbClr val="FBF2DD"/>
+          </a:solidFill>
+          <a:ln w="9525">
+            <a:solidFill>
+              <a:srgbClr val="B8860B"/>
+            </a:solidFill>
+          </a:ln>
+        </p:spPr>
+        <p:style>
+          <a:lnRef idx="1">
+            <a:schemeClr val="accent1"/>
+          </a:lnRef>
+          <a:fillRef idx="3">
+            <a:schemeClr val="accent1"/>
+          </a:fillRef>
+          <a:effectRef idx="2">
+            <a:schemeClr val="accent1"/>
+          </a:effectRef>
+          <a:fontRef idx="minor">
+            <a:schemeClr val="lt1"/>
+          </a:fontRef>
+        </p:style>
+        <p:txBody>
+          <a:bodyPr rtlCol="0" anchor="ctr"/>
+          <a:lstStyle/>
+          <a:p/>
+        </p:txBody>
+      </p:sp>
+      <p:sp>
+        <p:nvSpPr>
+          <p:cNvPr id="11" name="TextBox 10"/>
+          <p:cNvSpPr txBox="1"/>
+          <p:nvPr/>
+        </p:nvSpPr>
+        <p:spPr>
+          <a:xfrm>
+            <a:off x="5623560" y="5440680"/>
+            <a:ext cx="5943600" cy="1234440"/>
+          </a:xfrm>
+          <a:prstGeom prst="rect">
+            <a:avLst/>
+          </a:prstGeom>
+          <a:noFill/>
+        </p:spPr>
+        <p:txBody>
+          <a:bodyPr wrap="square" lIns="73152" rIns="73152" tIns="43891" bIns="43891" anchor="t">
+            <a:spAutoFit/>
+          </a:bodyPr>
+          <a:lstStyle/>
+          <a:p>
+            <a:pPr algn="l">
+              <a:spcAft>
+                <a:spcPts val="400"/>
+              </a:spcAft>
+            </a:pPr>
+            <a:r>
+              <a:rPr sz="1300" b="1" i="0">
+                <a:solidFill>
+                  <a:srgbClr val="B8860B"/>
+                </a:solidFill>
+                <a:latin typeface="Calibri"/>
+              </a:rPr>
+              <a:t>Hardware</a:t>
+            </a:r>
+          </a:p>
+          <a:p>
+            <a:pPr algn="l"/>
+            <a:r>
+              <a:rPr sz="1200" b="1" i="0">
+                <a:solidFill>
+                  <a:srgbClr val="0F1B3D"/>
+                </a:solidFill>
+                <a:latin typeface="Calibri"/>
+              </a:rPr>
+              <a:t>Raspberry Pi 4B </a:t>
+            </a:r>
+            <a:r>
+              <a:rPr sz="1100" b="0" i="0">
+                <a:solidFill>
+                  <a:srgbClr val="404856"/>
+                </a:solidFill>
+                <a:latin typeface="Calibri"/>
+              </a:rPr>
+              <a:t>(conservative spec) </a:t>
+            </a:r>
+            <a:r>
+              <a:rPr sz="1200" b="0" i="0">
+                <a:solidFill>
+                  <a:srgbClr val="404856"/>
+                </a:solidFill>
+                <a:latin typeface="Calibri"/>
+              </a:rPr>
+              <a:t>or </a:t>
+            </a:r>
+            <a:r>
+              <a:rPr sz="1200" b="1" i="0">
+                <a:solidFill>
+                  <a:srgbClr val="0F1B3D"/>
+                </a:solidFill>
+                <a:latin typeface="Calibri"/>
+              </a:rPr>
+              <a:t>Galaxy-class NPU via QNN</a:t>
+            </a:r>
+            <a:r>
+              <a:rPr sz="1100" b="0" i="0">
+                <a:solidFill>
+                  <a:srgbClr val="404856"/>
+                </a:solidFill>
+                <a:latin typeface="Calibri"/>
+              </a:rPr>
+              <a:t>.  No network connection during demo — entirely on-device.</a:t>
+            </a:r>
+          </a:p>
+        </p:txBody>
+      </p:sp>
+    </p:spTree>
+  </p:cSld>
+  <p:clrMapOvr>
+    <a:masterClrMapping/>
+  </p:clrMapOvr>
+</p:sld>
+</file>
+
+<file path=ppt/slides/slide16.xml><?xml version="1.0" encoding="utf-8"?>
+<p:sld xmlns:a="http://schemas.openxmlformats.org/drawingml/2006/main" xmlns:p="http://schemas.openxmlformats.org/presentationml/2006/main" xmlns:r="http://schemas.openxmlformats.org/officeDocument/2006/relationships">
+  <p:cSld>
+    <p:bg>
+      <p:bgPr>
+        <a:solidFill>
+          <a:srgbClr val="FAFCFF"/>
+        </a:solidFill>
+        <a:effectLst/>
+      </p:bgPr>
+    </p:bg>
+    <p:spTree>
+      <p:nvGrpSpPr>
+        <p:cNvPr id="1" name=""/>
+        <p:cNvGrpSpPr/>
+        <p:nvPr/>
+      </p:nvGrpSpPr>
+      <p:grpSpPr/>
+      <p:sp>
+        <p:nvSpPr>
+          <p:cNvPr id="2" name="Rectangle 1"/>
+          <p:cNvSpPr/>
+          <p:nvPr/>
+        </p:nvSpPr>
+        <p:spPr>
+          <a:xfrm>
+            <a:off x="0" y="0"/>
+            <a:ext cx="12191695" cy="777240"/>
+          </a:xfrm>
+          <a:prstGeom prst="rect">
+            <a:avLst/>
+          </a:prstGeom>
+          <a:solidFill>
+            <a:srgbClr val="003B8E"/>
+          </a:solidFill>
+          <a:ln>
+            <a:noFill/>
+          </a:ln>
+        </p:spPr>
+        <p:style>
+          <a:lnRef idx="1">
+            <a:schemeClr val="accent1"/>
+          </a:lnRef>
+          <a:fillRef idx="3">
+            <a:schemeClr val="accent1"/>
+          </a:fillRef>
+          <a:effectRef idx="2">
+            <a:schemeClr val="accent1"/>
+          </a:effectRef>
+          <a:fontRef idx="minor">
+            <a:schemeClr val="lt1"/>
+          </a:fontRef>
+        </p:style>
+        <p:txBody>
+          <a:bodyPr rtlCol="0" anchor="ctr"/>
+          <a:lstStyle/>
+          <a:p>
+            <a:pPr algn="ctr"/>
+          </a:p>
+        </p:txBody>
+      </p:sp>
+      <p:sp>
+        <p:nvSpPr>
+          <p:cNvPr id="3" name="TextBox 2"/>
+          <p:cNvSpPr txBox="1"/>
+          <p:nvPr/>
+        </p:nvSpPr>
+        <p:spPr>
+          <a:xfrm>
+            <a:off x="365760" y="0"/>
+            <a:ext cx="11460175" cy="777240"/>
+          </a:xfrm>
+          <a:prstGeom prst="rect">
+            <a:avLst/>
+          </a:prstGeom>
+          <a:noFill/>
+        </p:spPr>
+        <p:txBody>
+          <a:bodyPr wrap="square" lIns="73152" rIns="73152" tIns="43891" bIns="43891" anchor="ctr">
+            <a:spAutoFit/>
+          </a:bodyPr>
+          <a:lstStyle/>
+          <a:p>
+            <a:pPr algn="l"/>
+            <a:r>
+              <a:rPr sz="2400" b="1" i="0">
+                <a:solidFill>
+                  <a:srgbClr val="FFFFFF"/>
+                </a:solidFill>
+                <a:latin typeface="Calibri"/>
+              </a:rPr>
+              <a:t>AI / GenAI / Agentic Tools &amp; Best Practices</a:t>
+            </a:r>
+          </a:p>
+        </p:txBody>
+      </p:sp>
+      <p:sp>
+        <p:nvSpPr>
+          <p:cNvPr id="4" name="Rectangle 3"/>
+          <p:cNvSpPr/>
+          <p:nvPr/>
+        </p:nvSpPr>
+        <p:spPr>
+          <a:xfrm>
+            <a:off x="0" y="777240"/>
+            <a:ext cx="12191695" cy="36576"/>
+          </a:xfrm>
+          <a:prstGeom prst="rect">
+            <a:avLst/>
+          </a:prstGeom>
+          <a:solidFill>
+            <a:srgbClr val="B8860B"/>
+          </a:solidFill>
+          <a:ln>
+            <a:noFill/>
+          </a:ln>
+        </p:spPr>
+        <p:style>
+          <a:lnRef idx="1">
+            <a:schemeClr val="accent1"/>
+          </a:lnRef>
+          <a:fillRef idx="3">
+            <a:schemeClr val="accent1"/>
+          </a:fillRef>
+          <a:effectRef idx="2">
+            <a:schemeClr val="accent1"/>
+          </a:effectRef>
+          <a:fontRef idx="minor">
+            <a:schemeClr val="lt1"/>
+          </a:fontRef>
+        </p:style>
+        <p:txBody>
+          <a:bodyPr rtlCol="0" anchor="ctr"/>
+          <a:lstStyle/>
+          <a:p>
+            <a:pPr algn="ctr"/>
+          </a:p>
+        </p:txBody>
+      </p:sp>
+      <p:sp>
+        <p:nvSpPr>
+          <p:cNvPr id="5" name="TextBox 4"/>
+          <p:cNvSpPr txBox="1"/>
+          <p:nvPr/>
+        </p:nvSpPr>
+        <p:spPr>
+          <a:xfrm>
+            <a:off x="10820095" y="6537960"/>
+            <a:ext cx="1188720" cy="274320"/>
+          </a:xfrm>
+          <a:prstGeom prst="rect">
+            <a:avLst/>
+          </a:prstGeom>
+          <a:noFill/>
+        </p:spPr>
+        <p:txBody>
+          <a:bodyPr wrap="square" lIns="73152" rIns="73152" tIns="43891" bIns="43891" anchor="t">
+            <a:spAutoFit/>
+          </a:bodyPr>
+          <a:lstStyle/>
+          <a:p>
+            <a:pPr algn="r"/>
+            <a:r>
+              <a:rPr sz="900" b="0" i="0">
+                <a:solidFill>
+                  <a:srgbClr val="6A7383"/>
+                </a:solidFill>
+                <a:latin typeface="Calibri"/>
+              </a:rPr>
+              <a:t>16 / 17</a:t>
+            </a:r>
+          </a:p>
+        </p:txBody>
+      </p:sp>
+      <p:sp>
+        <p:nvSpPr>
+          <p:cNvPr id="6" name="TextBox 5"/>
+          <p:cNvSpPr txBox="1"/>
+          <p:nvPr/>
+        </p:nvSpPr>
+        <p:spPr>
+          <a:xfrm>
+            <a:off x="457200" y="960120"/>
+            <a:ext cx="5486400" cy="365760"/>
+          </a:xfrm>
+          <a:prstGeom prst="rect">
+            <a:avLst/>
+          </a:prstGeom>
+          <a:noFill/>
+        </p:spPr>
+        <p:txBody>
+          <a:bodyPr wrap="square" lIns="73152" rIns="73152" tIns="43891" bIns="43891" anchor="t">
+            <a:spAutoFit/>
+          </a:bodyPr>
+          <a:lstStyle/>
+          <a:p>
+            <a:pPr algn="l">
+              <a:spcAft>
+                <a:spcPts val="400"/>
+              </a:spcAft>
+            </a:pPr>
+            <a:r>
+              <a:rPr sz="1500" b="1" i="0">
+                <a:solidFill>
+                  <a:srgbClr val="003B8E"/>
+                </a:solidFill>
+                <a:latin typeface="Calibri"/>
+              </a:rPr>
+              <a:t>Tools used</a:t>
+            </a:r>
+          </a:p>
+        </p:txBody>
+      </p:sp>
+      <p:sp>
+        <p:nvSpPr>
+          <p:cNvPr id="7" name="Rounded Rectangle 6"/>
+          <p:cNvSpPr/>
+          <p:nvPr/>
+        </p:nvSpPr>
+        <p:spPr>
+          <a:xfrm>
+            <a:off x="457200" y="1371600"/>
+            <a:ext cx="5486400" cy="5029200"/>
+          </a:xfrm>
+          <a:prstGeom prst="roundRect">
+            <a:avLst>
+              <a:gd name="adj" fmla="val 6000"/>
+            </a:avLst>
+          </a:prstGeom>
+          <a:solidFill>
+            <a:srgbClr val="FFFFFF"/>
+          </a:solidFill>
+          <a:ln w="9525">
+            <a:solidFill>
+              <a:srgbClr val="D9DEE6"/>
+            </a:solidFill>
+          </a:ln>
+        </p:spPr>
+        <p:style>
+          <a:lnRef idx="1">
+            <a:schemeClr val="accent1"/>
+          </a:lnRef>
+          <a:fillRef idx="3">
+            <a:schemeClr val="accent1"/>
+          </a:fillRef>
+          <a:effectRef idx="2">
+            <a:schemeClr val="accent1"/>
+          </a:effectRef>
+          <a:fontRef idx="minor">
+            <a:schemeClr val="lt1"/>
+          </a:fontRef>
+        </p:style>
+        <p:txBody>
+          <a:bodyPr rtlCol="0" anchor="ctr"/>
+          <a:lstStyle/>
+          <a:p/>
+        </p:txBody>
+      </p:sp>
+      <p:sp>
+        <p:nvSpPr>
+          <p:cNvPr id="8" name="TextBox 7"/>
+          <p:cNvSpPr txBox="1"/>
+          <p:nvPr/>
+        </p:nvSpPr>
+        <p:spPr>
+          <a:xfrm>
+            <a:off x="640080" y="1463040"/>
+            <a:ext cx="5212080" cy="4892040"/>
+          </a:xfrm>
+          <a:prstGeom prst="rect">
+            <a:avLst/>
+          </a:prstGeom>
+          <a:noFill/>
+        </p:spPr>
+        <p:txBody>
+          <a:bodyPr wrap="square" lIns="73152" rIns="73152" tIns="43891" bIns="43891" anchor="t">
+            <a:spAutoFit/>
+          </a:bodyPr>
+          <a:lstStyle/>
+          <a:p>
+            <a:pPr algn="l">
+              <a:spcAft>
+                <a:spcPts val="400"/>
+              </a:spcAft>
+            </a:pPr>
+            <a:r>
+              <a:rPr sz="1200" b="1" i="0">
+                <a:solidFill>
+                  <a:srgbClr val="144BC4"/>
+                </a:solidFill>
+                <a:latin typeface="Calibri"/>
+              </a:rPr>
+              <a:t>• PyTorch 2.x  </a:t>
+            </a:r>
+            <a:r>
+              <a:rPr sz="1100" b="0" i="0">
+                <a:solidFill>
+                  <a:srgbClr val="404856"/>
+                </a:solidFill>
+                <a:latin typeface="Calibri"/>
+              </a:rPr>
+              <a:t>+ torch.compile(mode="reduce-overhead") for ~15 % Kaggle speedup.</a:t>
+            </a:r>
+          </a:p>
+          <a:p>
+            <a:pPr algn="l">
+              <a:spcAft>
+                <a:spcPts val="400"/>
+              </a:spcAft>
+            </a:pPr>
+            <a:r>
+              <a:rPr sz="1200" b="1" i="0">
+                <a:solidFill>
+                  <a:srgbClr val="144BC4"/>
+                </a:solidFill>
+                <a:latin typeface="Calibri"/>
+              </a:rPr>
+              <a:t>• HuggingFace Transformers / SpeechBrain  </a:t>
+            </a:r>
+            <a:r>
+              <a:rPr sz="1100" b="0" i="0">
+                <a:solidFill>
+                  <a:srgbClr val="404856"/>
+                </a:solidFill>
+                <a:latin typeface="Calibri"/>
+              </a:rPr>
+              <a:t>frozen teacher inference (WavLM, ECAPA).</a:t>
+            </a:r>
+          </a:p>
+          <a:p>
+            <a:pPr algn="l">
+              <a:spcAft>
+                <a:spcPts val="400"/>
+              </a:spcAft>
+            </a:pPr>
+            <a:r>
+              <a:rPr sz="1200" b="1" i="0">
+                <a:solidFill>
+                  <a:srgbClr val="144BC4"/>
+                </a:solidFill>
+                <a:latin typeface="Calibri"/>
+              </a:rPr>
+              <a:t>• Coqui XTTS-v2  </a:t>
+            </a:r>
+            <a:r>
+              <a:rPr sz="1100" b="0" i="0">
+                <a:solidFill>
+                  <a:srgbClr val="404856"/>
+                </a:solidFill>
+                <a:latin typeface="Calibri"/>
+              </a:rPr>
+              <a:t>generative-AI component for synthetic speaker diversity in trigger and confusable data.</a:t>
+            </a:r>
+          </a:p>
+          <a:p>
+            <a:pPr algn="l">
+              <a:spcAft>
+                <a:spcPts val="400"/>
+              </a:spcAft>
+            </a:pPr>
+            <a:r>
+              <a:rPr sz="1200" b="1" i="0">
+                <a:solidFill>
+                  <a:srgbClr val="144BC4"/>
+                </a:solidFill>
+                <a:latin typeface="Calibri"/>
+              </a:rPr>
+              <a:t>• Optuna (TPE sampler)  </a:t>
+            </a:r>
+            <a:r>
+              <a:rPr sz="1100" b="0" i="0">
+                <a:solidFill>
+                  <a:srgbClr val="404856"/>
+                </a:solidFill>
+                <a:latin typeface="Calibri"/>
+              </a:rPr>
+              <a:t>automated multi-task loss-weight + AAM hyperparameter search, scoped to Stage 2.</a:t>
+            </a:r>
+          </a:p>
+          <a:p>
+            <a:pPr algn="l">
+              <a:spcAft>
+                <a:spcPts val="400"/>
+              </a:spcAft>
+            </a:pPr>
+            <a:r>
+              <a:rPr sz="1200" b="1" i="0">
+                <a:solidFill>
+                  <a:srgbClr val="144BC4"/>
+                </a:solidFill>
+                <a:latin typeface="Calibri"/>
+              </a:rPr>
+              <a:t>• ONNX Runtime + Quantization Toolkit  </a:t>
+            </a:r>
+            <a:r>
+              <a:rPr sz="1100" b="0" i="0">
+                <a:solidFill>
+                  <a:srgbClr val="404856"/>
+                </a:solidFill>
+                <a:latin typeface="Calibri"/>
+              </a:rPr>
+              <a:t>INT8 edge export and latency benchmarking.</a:t>
+            </a:r>
+          </a:p>
+          <a:p>
+            <a:pPr algn="l">
+              <a:spcAft>
+                <a:spcPts val="400"/>
+              </a:spcAft>
+            </a:pPr>
+            <a:r>
+              <a:rPr sz="1200" b="1" i="0">
+                <a:solidFill>
+                  <a:srgbClr val="144BC4"/>
+                </a:solidFill>
+                <a:latin typeface="Calibri"/>
+              </a:rPr>
+              <a:t>• Google kws_streaming  </a:t>
+            </a:r>
+            <a:r>
+              <a:rPr sz="1100" b="0" i="0">
+                <a:solidFill>
+                  <a:srgbClr val="404856"/>
+                </a:solidFill>
+                <a:latin typeface="Calibri"/>
+              </a:rPr>
+              <a:t>reference for stateful streaming inference.</a:t>
+            </a:r>
+          </a:p>
+          <a:p>
+            <a:pPr algn="l">
+              <a:spcAft>
+                <a:spcPts val="400"/>
+              </a:spcAft>
+            </a:pPr>
+            <a:r>
+              <a:rPr sz="1200" b="1" i="0">
+                <a:solidFill>
+                  <a:srgbClr val="144BC4"/>
+                </a:solidFill>
+                <a:latin typeface="Calibri"/>
+              </a:rPr>
+              <a:t>• Claude Code (Anthropic CLI)  </a:t>
+            </a:r>
+            <a:r>
+              <a:rPr sz="1100" b="0" i="0">
+                <a:solidFill>
+                  <a:srgbClr val="404856"/>
+                </a:solidFill>
+                <a:latin typeface="Calibri"/>
+              </a:rPr>
+              <a:t>agentic AI pair-programmer used throughout for code generation, blueprint iteration, multilingual eval, and PPTX rendering.</a:t>
+            </a:r>
+          </a:p>
+        </p:txBody>
+      </p:sp>
+      <p:sp>
+        <p:nvSpPr>
+          <p:cNvPr id="9" name="TextBox 8"/>
+          <p:cNvSpPr txBox="1"/>
+          <p:nvPr/>
+        </p:nvSpPr>
+        <p:spPr>
+          <a:xfrm>
+            <a:off x="6217920" y="960120"/>
+            <a:ext cx="5486400" cy="365760"/>
+          </a:xfrm>
+          <a:prstGeom prst="rect">
+            <a:avLst/>
+          </a:prstGeom>
+          <a:noFill/>
+        </p:spPr>
+        <p:txBody>
+          <a:bodyPr wrap="square" lIns="73152" rIns="73152" tIns="43891" bIns="43891" anchor="t">
+            <a:spAutoFit/>
+          </a:bodyPr>
+          <a:lstStyle/>
+          <a:p>
+            <a:pPr algn="l">
+              <a:spcAft>
+                <a:spcPts val="400"/>
+              </a:spcAft>
+            </a:pPr>
+            <a:r>
+              <a:rPr sz="1500" b="1" i="0">
+                <a:solidFill>
+                  <a:srgbClr val="003B8E"/>
+                </a:solidFill>
+                <a:latin typeface="Calibri"/>
+              </a:rPr>
+              <a:t>Best practices uncovered</a:t>
+            </a:r>
+          </a:p>
+        </p:txBody>
+      </p:sp>
+      <p:sp>
+        <p:nvSpPr>
+          <p:cNvPr id="10" name="Rounded Rectangle 9"/>
+          <p:cNvSpPr/>
+          <p:nvPr/>
+        </p:nvSpPr>
+        <p:spPr>
+          <a:xfrm>
+            <a:off x="6217920" y="1371600"/>
+            <a:ext cx="5486400" cy="5029200"/>
+          </a:xfrm>
+          <a:prstGeom prst="roundRect">
+            <a:avLst>
+              <a:gd name="adj" fmla="val 6000"/>
+            </a:avLst>
+          </a:prstGeom>
+          <a:solidFill>
+            <a:srgbClr val="FFFFFF"/>
+          </a:solidFill>
+          <a:ln w="9525">
+            <a:solidFill>
+              <a:srgbClr val="D9DEE6"/>
+            </a:solidFill>
+          </a:ln>
+        </p:spPr>
+        <p:style>
+          <a:lnRef idx="1">
+            <a:schemeClr val="accent1"/>
+          </a:lnRef>
+          <a:fillRef idx="3">
+            <a:schemeClr val="accent1"/>
+          </a:fillRef>
+          <a:effectRef idx="2">
+            <a:schemeClr val="accent1"/>
+          </a:effectRef>
+          <a:fontRef idx="minor">
+            <a:schemeClr val="lt1"/>
+          </a:fontRef>
+        </p:style>
+        <p:txBody>
+          <a:bodyPr rtlCol="0" anchor="ctr"/>
+          <a:lstStyle/>
+          <a:p/>
+        </p:txBody>
+      </p:sp>
+      <p:sp>
+        <p:nvSpPr>
           <p:cNvPr id="11" name="TextBox 10"/>
           <p:cNvSpPr txBox="1"/>
           <p:nvPr/>
@@ -7102,6 +9839,332 @@
                 <a:latin typeface="Calibri"/>
               </a:rPr>
               <a:t>all code, weights, and the published benchmark released under Apache-2.0, per hackathon rules.</a:t>
+            </a:r>
+          </a:p>
+        </p:txBody>
+      </p:sp>
+    </p:spTree>
+  </p:cSld>
+  <p:clrMapOvr>
+    <a:masterClrMapping/>
+  </p:clrMapOvr>
+</p:sld>
+</file>
+
+<file path=ppt/slides/slide17.xml><?xml version="1.0" encoding="utf-8"?>
+<p:sld xmlns:a="http://schemas.openxmlformats.org/drawingml/2006/main" xmlns:p="http://schemas.openxmlformats.org/presentationml/2006/main" xmlns:r="http://schemas.openxmlformats.org/officeDocument/2006/relationships">
+  <p:cSld>
+    <p:bg>
+      <p:bgPr>
+        <a:solidFill>
+          <a:srgbClr val="0F1B3D"/>
+        </a:solidFill>
+        <a:effectLst/>
+      </p:bgPr>
+    </p:bg>
+    <p:spTree>
+      <p:nvGrpSpPr>
+        <p:cNvPr id="1" name=""/>
+        <p:cNvGrpSpPr/>
+        <p:nvPr/>
+      </p:nvGrpSpPr>
+      <p:grpSpPr/>
+      <p:sp>
+        <p:nvSpPr>
+          <p:cNvPr id="2" name="Rectangle 1"/>
+          <p:cNvSpPr/>
+          <p:nvPr/>
+        </p:nvSpPr>
+        <p:spPr>
+          <a:xfrm>
+            <a:off x="0" y="2377440"/>
+            <a:ext cx="12191695" cy="73152"/>
+          </a:xfrm>
+          <a:prstGeom prst="rect">
+            <a:avLst/>
+          </a:prstGeom>
+          <a:solidFill>
+            <a:srgbClr val="B8860B"/>
+          </a:solidFill>
+          <a:ln>
+            <a:noFill/>
+          </a:ln>
+        </p:spPr>
+        <p:style>
+          <a:lnRef idx="1">
+            <a:schemeClr val="accent1"/>
+          </a:lnRef>
+          <a:fillRef idx="3">
+            <a:schemeClr val="accent1"/>
+          </a:fillRef>
+          <a:effectRef idx="2">
+            <a:schemeClr val="accent1"/>
+          </a:effectRef>
+          <a:fontRef idx="minor">
+            <a:schemeClr val="lt1"/>
+          </a:fontRef>
+        </p:style>
+        <p:txBody>
+          <a:bodyPr rtlCol="0" anchor="ctr"/>
+          <a:lstStyle/>
+          <a:p>
+            <a:pPr algn="ctr"/>
+          </a:p>
+        </p:txBody>
+      </p:sp>
+      <p:sp>
+        <p:nvSpPr>
+          <p:cNvPr id="3" name="TextBox 2"/>
+          <p:cNvSpPr txBox="1"/>
+          <p:nvPr/>
+        </p:nvSpPr>
+        <p:spPr>
+          <a:xfrm>
+            <a:off x="731520" y="914400"/>
+            <a:ext cx="10728655" cy="1371600"/>
+          </a:xfrm>
+          <a:prstGeom prst="rect">
+            <a:avLst/>
+          </a:prstGeom>
+          <a:noFill/>
+        </p:spPr>
+        <p:txBody>
+          <a:bodyPr wrap="square" lIns="73152" rIns="73152" tIns="43891" bIns="43891" anchor="ctr">
+            <a:spAutoFit/>
+          </a:bodyPr>
+          <a:lstStyle/>
+          <a:p>
+            <a:pPr algn="ctr"/>
+            <a:r>
+              <a:rPr sz="3600" b="1" i="0">
+                <a:solidFill>
+                  <a:srgbClr val="FFFFFF"/>
+                </a:solidFill>
+                <a:latin typeface="Calibri"/>
+              </a:rPr>
+              <a:t>Closing the FA &lt; 1 / hr gap on &lt; 3 M params</a:t>
+            </a:r>
+          </a:p>
+        </p:txBody>
+      </p:sp>
+      <p:sp>
+        <p:nvSpPr>
+          <p:cNvPr id="4" name="TextBox 3"/>
+          <p:cNvSpPr txBox="1"/>
+          <p:nvPr/>
+        </p:nvSpPr>
+        <p:spPr>
+          <a:xfrm>
+            <a:off x="731520" y="2743200"/>
+            <a:ext cx="10728655" cy="548640"/>
+          </a:xfrm>
+          <a:prstGeom prst="rect">
+            <a:avLst/>
+          </a:prstGeom>
+          <a:noFill/>
+        </p:spPr>
+        <p:txBody>
+          <a:bodyPr wrap="square" lIns="73152" rIns="73152" tIns="43891" bIns="43891" anchor="t">
+            <a:spAutoFit/>
+          </a:bodyPr>
+          <a:lstStyle/>
+          <a:p>
+            <a:pPr algn="ctr"/>
+            <a:r>
+              <a:rPr sz="1800" b="1" i="0">
+                <a:solidFill>
+                  <a:srgbClr val="FFFFFF"/>
+                </a:solidFill>
+                <a:latin typeface="Calibri"/>
+              </a:rPr>
+              <a:t>FAR-in-the-Loop training</a:t>
+            </a:r>
+            <a:r>
+              <a:rPr sz="1800" b="0" i="0">
+                <a:solidFill>
+                  <a:srgbClr val="B8860B"/>
+                </a:solidFill>
+                <a:latin typeface="Calibri"/>
+              </a:rPr>
+              <a:t>    ·    </a:t>
+            </a:r>
+            <a:r>
+              <a:rPr sz="1800" b="1" i="0">
+                <a:solidFill>
+                  <a:srgbClr val="FFFFFF"/>
+                </a:solidFill>
+                <a:latin typeface="Calibri"/>
+              </a:rPr>
+              <a:t>FiLM-conditioned KWS</a:t>
+            </a:r>
+            <a:r>
+              <a:rPr sz="1800" b="0" i="0">
+                <a:solidFill>
+                  <a:srgbClr val="B8860B"/>
+                </a:solidFill>
+                <a:latin typeface="Calibri"/>
+              </a:rPr>
+              <a:t>    ·    </a:t>
+            </a:r>
+            <a:r>
+              <a:rPr sz="1800" b="1" i="0">
+                <a:solidFill>
+                  <a:srgbClr val="FFFFFF"/>
+                </a:solidFill>
+                <a:latin typeface="Calibri"/>
+              </a:rPr>
+              <a:t>Multi-teacher distillation</a:t>
+            </a:r>
+          </a:p>
+        </p:txBody>
+      </p:sp>
+      <p:sp>
+        <p:nvSpPr>
+          <p:cNvPr id="5" name="TextBox 4"/>
+          <p:cNvSpPr txBox="1"/>
+          <p:nvPr/>
+        </p:nvSpPr>
+        <p:spPr>
+          <a:xfrm>
+            <a:off x="731520" y="3657600"/>
+            <a:ext cx="10728655" cy="1463040"/>
+          </a:xfrm>
+          <a:prstGeom prst="rect">
+            <a:avLst/>
+          </a:prstGeom>
+          <a:noFill/>
+        </p:spPr>
+        <p:txBody>
+          <a:bodyPr wrap="square" lIns="73152" rIns="73152" tIns="43891" bIns="43891" anchor="t">
+            <a:spAutoFit/>
+          </a:bodyPr>
+          <a:lstStyle/>
+          <a:p>
+            <a:pPr algn="ctr"/>
+            <a:r>
+              <a:rPr sz="1400" b="0" i="1">
+                <a:solidFill>
+                  <a:srgbClr val="CCD3E0"/>
+                </a:solidFill>
+                <a:latin typeface="Calibri"/>
+              </a:rPr>
+              <a:t>Phase-1 measured  ·  </a:t>
+            </a:r>
+            <a:r>
+              <a:rPr sz="1600" b="1" i="0">
+                <a:solidFill>
+                  <a:srgbClr val="B8860B"/>
+                </a:solidFill>
+                <a:latin typeface="Calibri"/>
+              </a:rPr>
+              <a:t>KWS clean 98.3 %</a:t>
+            </a:r>
+            <a:r>
+              <a:rPr sz="1400" b="0" i="0">
+                <a:solidFill>
+                  <a:srgbClr val="CCD3E0"/>
+                </a:solidFill>
+                <a:latin typeface="Calibri"/>
+              </a:rPr>
+              <a:t>  ·  </a:t>
+            </a:r>
+            <a:r>
+              <a:rPr sz="1600" b="1" i="0">
+                <a:solidFill>
+                  <a:srgbClr val="B8860B"/>
+                </a:solidFill>
+                <a:latin typeface="Calibri"/>
+              </a:rPr>
+              <a:t>English EER 12.4 %</a:t>
+            </a:r>
+            <a:r>
+              <a:rPr sz="1400" b="0" i="0">
+                <a:solidFill>
+                  <a:srgbClr val="CCD3E0"/>
+                </a:solidFill>
+                <a:latin typeface="Calibri"/>
+              </a:rPr>
+              <a:t>  ·  </a:t>
+            </a:r>
+            <a:r>
+              <a:rPr sz="1600" b="1" i="0">
+                <a:solidFill>
+                  <a:srgbClr val="B8860B"/>
+                </a:solidFill>
+                <a:latin typeface="Calibri"/>
+              </a:rPr>
+              <a:t>Tamil zero-shot 14.7 %</a:t>
+            </a:r>
+            <a:r>
+              <a:rPr sz="1400" b="0" i="0">
+                <a:solidFill>
+                  <a:srgbClr val="CCD3E0"/>
+                </a:solidFill>
+                <a:latin typeface="Calibri"/>
+              </a:rPr>
+              <a:t>  ·  </a:t>
+            </a:r>
+            <a:r>
+              <a:rPr sz="1600" b="1" i="0">
+                <a:solidFill>
+                  <a:srgbClr val="B8860B"/>
+                </a:solidFill>
+                <a:latin typeface="Calibri"/>
+              </a:rPr>
+              <a:t>Pi 4B INT8 12 ms</a:t>
+            </a:r>
+            <a:r>
+              <a:rPr sz="1400" b="0" i="0">
+                <a:solidFill>
+                  <a:srgbClr val="CCD3E0"/>
+                </a:solidFill>
+                <a:latin typeface="Calibri"/>
+              </a:rPr>
+              <a:t>  ·  </a:t>
+            </a:r>
+            <a:r>
+              <a:rPr sz="1600" b="1" i="0">
+                <a:solidFill>
+                  <a:srgbClr val="B8860B"/>
+                </a:solidFill>
+                <a:latin typeface="Calibri"/>
+              </a:rPr>
+              <a:t>499 K params (17 % cap)</a:t>
+            </a:r>
+          </a:p>
+        </p:txBody>
+      </p:sp>
+      <p:sp>
+        <p:nvSpPr>
+          <p:cNvPr id="6" name="TextBox 5"/>
+          <p:cNvSpPr txBox="1"/>
+          <p:nvPr/>
+        </p:nvSpPr>
+        <p:spPr>
+          <a:xfrm>
+            <a:off x="731520" y="6035040"/>
+            <a:ext cx="10728655" cy="457200"/>
+          </a:xfrm>
+          <a:prstGeom prst="rect">
+            <a:avLst/>
+          </a:prstGeom>
+          <a:noFill/>
+        </p:spPr>
+        <p:txBody>
+          <a:bodyPr wrap="square" lIns="73152" rIns="73152" tIns="43891" bIns="43891" anchor="t">
+            <a:spAutoFit/>
+          </a:bodyPr>
+          <a:lstStyle/>
+          <a:p>
+            <a:pPr algn="ctr"/>
+            <a:r>
+              <a:rPr sz="1300" b="0" i="1">
+                <a:solidFill>
+                  <a:srgbClr val="CCD3E0"/>
+                </a:solidFill>
+                <a:latin typeface="Calibri"/>
+              </a:rPr>
+              <a:t>Team MalayM09  ·  Malay Mishra  ·  BITS Pilani  ·  Problem PS04  ·  Apache-2.0</a:t>
             </a:r>
           </a:p>
         </p:txBody>
@@ -7283,7 +10346,7 @@
                 </a:solidFill>
                 <a:latin typeface="Calibri"/>
               </a:rPr>
-              <a:t>2 / 12</a:t>
+              <a:t>2 / 17</a:t>
             </a:r>
           </a:p>
         </p:txBody>
@@ -8239,7 +11302,7 @@
                 </a:solidFill>
                 <a:latin typeface="Calibri"/>
               </a:rPr>
-              <a:t>3 / 12</a:t>
+              <a:t>3 / 17</a:t>
             </a:r>
           </a:p>
         </p:txBody>
@@ -9089,7 +12152,7 @@
                 </a:solidFill>
                 <a:latin typeface="Calibri"/>
               </a:rPr>
-              <a:t>4 / 12</a:t>
+              <a:t>4 / 17</a:t>
             </a:r>
           </a:p>
         </p:txBody>
@@ -9796,7 +12859,7 @@
                 </a:solidFill>
                 <a:latin typeface="Calibri"/>
               </a:rPr>
-              <a:t>5 / 12</a:t>
+              <a:t>5 / 17</a:t>
             </a:r>
           </a:p>
         </p:txBody>
@@ -10216,7 +13279,7 @@
                 </a:solidFill>
                 <a:latin typeface="Calibri"/>
               </a:rPr>
-              <a:t>6 / 12</a:t>
+              <a:t>6 / 17</a:t>
             </a:r>
           </a:p>
         </p:txBody>
@@ -11348,7 +14411,7 @@
                 </a:solidFill>
                 <a:latin typeface="Calibri"/>
               </a:rPr>
-              <a:t>7 / 12</a:t>
+              <a:t>7 / 17</a:t>
             </a:r>
           </a:p>
         </p:txBody>
@@ -12077,7 +15140,7 @@
                 </a:solidFill>
                 <a:latin typeface="Calibri"/>
               </a:rPr>
-              <a:t>Phase-1 Empirical — Deployment Latency &amp; Cocktail-Party</a:t>
+              <a:t>Phase-1 Empirical — SV Branch POC</a:t>
             </a:r>
           </a:p>
         </p:txBody>
@@ -12155,14 +15218,14 @@
                 </a:solidFill>
                 <a:latin typeface="Calibri"/>
               </a:rPr>
-              <a:t>8 / 12</a:t>
+              <a:t>8 / 17</a:t>
             </a:r>
           </a:p>
         </p:txBody>
       </p:sp>
       <p:pic>
         <p:nvPicPr>
-          <p:cNvPr id="6" name="Picture 5" descr="11_deploy_metrics.png"/>
+          <p:cNvPr id="6" name="Picture 5" descr="8_sv_progression.png"/>
           <p:cNvPicPr>
             <a:picLocks noChangeAspect="1"/>
           </p:cNvPicPr>
@@ -12176,8 +15239,8 @@
         </p:blipFill>
         <p:spPr>
           <a:xfrm>
-            <a:off x="365760" y="1072422"/>
-            <a:ext cx="6675120" cy="2518595"/>
+            <a:off x="365760" y="1484017"/>
+            <a:ext cx="6766560" cy="3067005"/>
           </a:xfrm>
           <a:prstGeom prst="rect">
             <a:avLst/>
@@ -12186,14 +15249,49 @@
       </p:pic>
       <p:sp>
         <p:nvSpPr>
-          <p:cNvPr id="7" name="Rounded Rectangle 6"/>
+          <p:cNvPr id="7" name="TextBox 6"/>
+          <p:cNvSpPr txBox="1"/>
+          <p:nvPr/>
+        </p:nvSpPr>
+        <p:spPr>
+          <a:xfrm>
+            <a:off x="365760" y="5212080"/>
+            <a:ext cx="6766560" cy="1280160"/>
+          </a:xfrm>
+          <a:prstGeom prst="rect">
+            <a:avLst/>
+          </a:prstGeom>
+          <a:noFill/>
+        </p:spPr>
+        <p:txBody>
+          <a:bodyPr wrap="square" lIns="73152" rIns="73152" tIns="43891" bIns="43891" anchor="t">
+            <a:spAutoFit/>
+          </a:bodyPr>
+          <a:lstStyle/>
+          <a:p>
+            <a:pPr algn="l"/>
+            <a:r>
+              <a:rPr sz="1000" b="0" i="1">
+                <a:solidFill>
+                  <a:srgbClr val="6A7383"/>
+                </a:solidFill>
+                <a:latin typeface="Calibri"/>
+              </a:rPr>
+              <a:t>Trained on VoxCeleb1 dev (1 211 speakers, 24 K utterances), evaluated on the canonical VoxCeleb1-O trial list (37 720 same / different pairs). Student is a 384 K-param BC-ResNet trunk + attentive-stat pooling + 256-dim projection. Teacher: pretrained resemblyzer (GE2E-LSTM).</a:t>
+            </a:r>
+          </a:p>
+        </p:txBody>
+      </p:sp>
+      <p:sp>
+        <p:nvSpPr>
+          <p:cNvPr id="8" name="Rounded Rectangle 7"/>
           <p:cNvSpPr/>
           <p:nvPr/>
         </p:nvSpPr>
         <p:spPr>
           <a:xfrm>
-            <a:off x="365760" y="3840480"/>
-            <a:ext cx="6675120" cy="2697480"/>
+            <a:off x="7315200" y="960120"/>
+            <a:ext cx="4526280" cy="1508760"/>
           </a:xfrm>
           <a:prstGeom prst="roundRect">
             <a:avLst>
@@ -12231,14 +15329,14 @@
       </p:sp>
       <p:sp>
         <p:nvSpPr>
-          <p:cNvPr id="8" name="TextBox 7"/>
-          <p:cNvSpPr txBox="1"/>
-          <p:nvPr/>
-        </p:nvSpPr>
-        <p:spPr>
-          <a:xfrm>
-            <a:off x="548640" y="3886200"/>
-            <a:ext cx="6400800" cy="2651760"/>
+          <p:cNvPr id="9" name="TextBox 8"/>
+          <p:cNvSpPr txBox="1"/>
+          <p:nvPr/>
+        </p:nvSpPr>
+        <p:spPr>
+          <a:xfrm>
+            <a:off x="7498080" y="1005840"/>
+            <a:ext cx="4160520" cy="1463040"/>
           </a:xfrm>
           <a:prstGeom prst="rect">
             <a:avLst/>
@@ -12263,15 +15361,20 @@
                 </a:solidFill>
                 <a:latin typeface="Calibri"/>
               </a:rPr>
-              <a:t>xRT  ·  comfortable PASS</a:t>
-            </a:r>
-          </a:p>
-          <a:p>
-            <a:pPr algn="l">
-              <a:spcAft>
-                <a:spcPts val="600"/>
-              </a:spcAft>
-            </a:pPr>
+              <a:t>Current state</a:t>
+            </a:r>
+          </a:p>
+          <a:p>
+            <a:pPr algn="l"/>
+            <a:r>
+              <a:rPr sz="1400" b="1" i="0">
+                <a:solidFill>
+                  <a:srgbClr val="144BC4"/>
+                </a:solidFill>
+                <a:latin typeface="Calibri"/>
+              </a:rPr>
+              <a:t>10.64 % EER</a:t>
+            </a:r>
             <a:r>
               <a:rPr sz="1100" b="0" i="0">
                 <a:solidFill>
@@ -12279,167 +15382,11 @@
                 </a:solidFill>
                 <a:latin typeface="Calibri"/>
               </a:rPr>
-              <a:t>Pi 4B INT8: </a:t>
-            </a:r>
-            <a:r>
-              <a:rPr sz="1300" b="1" i="0">
-                <a:solidFill>
-                  <a:srgbClr val="144BC4"/>
-                </a:solidFill>
-                <a:latin typeface="Calibri"/>
-              </a:rPr>
-              <a:t>12 ms</a:t>
-            </a:r>
-            <a:r>
-              <a:rPr sz="1100" b="0" i="0">
-                <a:solidFill>
-                  <a:srgbClr val="404856"/>
-                </a:solidFill>
-                <a:latin typeface="Calibri"/>
-              </a:rPr>
-              <a:t> end-to-end vs </a:t>
-            </a:r>
-            <a:r>
-              <a:rPr sz="1300" b="1" i="0">
-                <a:solidFill>
-                  <a:srgbClr val="144BC4"/>
-                </a:solidFill>
-                <a:latin typeface="Calibri"/>
-              </a:rPr>
-              <a:t>200 ms</a:t>
-            </a:r>
-            <a:r>
-              <a:rPr sz="1100" b="0" i="0">
-                <a:solidFill>
-                  <a:srgbClr val="404856"/>
-                </a:solidFill>
-                <a:latin typeface="Calibri"/>
-              </a:rPr>
-              <a:t> budget — </a:t>
-            </a:r>
-            <a:r>
-              <a:rPr sz="1300" b="1" i="0">
-                <a:solidFill>
-                  <a:srgbClr val="1B7F4F"/>
-                </a:solidFill>
-                <a:latin typeface="Calibri"/>
-              </a:rPr>
-              <a:t>17× headroom</a:t>
-            </a:r>
-            <a:r>
-              <a:rPr sz="1100" b="0" i="0">
-                <a:solidFill>
-                  <a:srgbClr val="404856"/>
-                </a:solidFill>
-                <a:latin typeface="Calibri"/>
-              </a:rPr>
-              <a:t>. Even FP32 at 17 ms clears 12×.</a:t>
-            </a:r>
-          </a:p>
-          <a:p>
-            <a:pPr algn="l">
-              <a:spcAft>
-                <a:spcPts val="300"/>
-              </a:spcAft>
-            </a:pPr>
-            <a:r>
-              <a:rPr sz="1200" b="1" i="0">
-                <a:solidFill>
-                  <a:srgbClr val="0F1B3D"/>
-                </a:solidFill>
-                <a:latin typeface="Calibri"/>
-              </a:rPr>
-              <a:t>Param + size budget</a:t>
-            </a:r>
-          </a:p>
-          <a:p>
-            <a:pPr algn="l">
-              <a:spcAft>
-                <a:spcPts val="600"/>
-              </a:spcAft>
-            </a:pPr>
-            <a:r>
-              <a:rPr sz="1100" b="0" i="0">
-                <a:solidFill>
-                  <a:srgbClr val="404856"/>
-                </a:solidFill>
-                <a:latin typeface="Calibri"/>
-              </a:rPr>
-              <a:t>499.6 K params (17 % of 3 M cap), INT8 ONNX ships at </a:t>
-            </a:r>
-            <a:r>
-              <a:rPr sz="1200" b="1" i="0">
-                <a:solidFill>
-                  <a:srgbClr val="144BC4"/>
-                </a:solidFill>
-                <a:latin typeface="Calibri"/>
-              </a:rPr>
-              <a:t>0.79 MB</a:t>
-            </a:r>
-            <a:r>
-              <a:rPr sz="1100" b="0" i="0">
-                <a:solidFill>
-                  <a:srgbClr val="404856"/>
-                </a:solidFill>
-                <a:latin typeface="Calibri"/>
-              </a:rPr>
-              <a:t> (2.6× shrink from 2.05 MB FP32).</a:t>
-            </a:r>
-          </a:p>
-          <a:p>
-            <a:pPr algn="l">
-              <a:spcAft>
-                <a:spcPts val="300"/>
-              </a:spcAft>
-            </a:pPr>
-            <a:r>
-              <a:rPr sz="1200" b="1" i="0">
-                <a:solidFill>
-                  <a:srgbClr val="0F1B3D"/>
-                </a:solidFill>
-                <a:latin typeface="Calibri"/>
-              </a:rPr>
-              <a:t>Numeric fidelity</a:t>
-            </a:r>
-          </a:p>
-          <a:p>
-            <a:pPr algn="l"/>
-            <a:r>
-              <a:rPr sz="1100" b="0" i="0">
-                <a:solidFill>
-                  <a:srgbClr val="404856"/>
-                </a:solidFill>
-                <a:latin typeface="Calibri"/>
-              </a:rPr>
-              <a:t>FP32 ONNX vs PyTorch max-abs-diff &lt; 3×10⁻⁶ (essentially exact); INT8 drift compensated by QAT (Stage 4).</a:t>
-            </a:r>
-          </a:p>
-        </p:txBody>
-      </p:sp>
-      <p:pic>
-        <p:nvPicPr>
-          <p:cNvPr id="9" name="Picture 8" descr="12_babble_robustness.png"/>
-          <p:cNvPicPr>
-            <a:picLocks noChangeAspect="1"/>
-          </p:cNvPicPr>
-          <p:nvPr/>
-        </p:nvPicPr>
-        <p:blipFill>
-          <a:blip r:embed="rId3"/>
-          <a:stretch>
-            <a:fillRect/>
-          </a:stretch>
-        </p:blipFill>
-        <p:spPr>
-          <a:xfrm>
-            <a:off x="7269480" y="1501494"/>
-            <a:ext cx="4572000" cy="1660451"/>
-          </a:xfrm>
-          <a:prstGeom prst="rect">
-            <a:avLst/>
-          </a:prstGeom>
-        </p:spPr>
-      </p:pic>
+              <a:t> on VoxCeleb1-O after 40 epochs joint distillation + Sub-center AAM-Softmax. Student is 384 K params — within budget for the joint student.</a:t>
+            </a:r>
+          </a:p>
+        </p:txBody>
+      </p:sp>
       <p:sp>
         <p:nvSpPr>
           <p:cNvPr id="10" name="Rounded Rectangle 9"/>
@@ -12448,8 +15395,8 @@
         </p:nvSpPr>
         <p:spPr>
           <a:xfrm>
-            <a:off x="7269480" y="3840480"/>
-            <a:ext cx="4572000" cy="2697480"/>
+            <a:off x="7315200" y="2606040"/>
+            <a:ext cx="4526280" cy="2286000"/>
           </a:xfrm>
           <a:prstGeom prst="roundRect">
             <a:avLst>
@@ -12457,11 +15404,11 @@
             </a:avLst>
           </a:prstGeom>
           <a:solidFill>
-            <a:srgbClr val="E7F4EC"/>
+            <a:srgbClr val="FDEEEE"/>
           </a:solidFill>
           <a:ln w="9525">
             <a:solidFill>
-              <a:srgbClr val="1B7F4F"/>
+              <a:srgbClr val="C3292B"/>
             </a:solidFill>
           </a:ln>
         </p:spPr>
@@ -12493,8 +15440,8 @@
         </p:nvSpPr>
         <p:spPr>
           <a:xfrm>
-            <a:off x="7452360" y="3886200"/>
-            <a:ext cx="4297680" cy="2651760"/>
+            <a:off x="7498080" y="2651760"/>
+            <a:ext cx="4160520" cy="2240280"/>
           </a:xfrm>
           <a:prstGeom prst="rect">
             <a:avLst/>
@@ -12515,17 +15462,17 @@
             <a:r>
               <a:rPr sz="1300" b="1" i="0">
                 <a:solidFill>
-                  <a:srgbClr val="1B7F4F"/>
-                </a:solidFill>
-                <a:latin typeface="Calibri"/>
-              </a:rPr>
-              <a:t>Cocktail-party robustness</a:t>
+                  <a:srgbClr val="C3292B"/>
+                </a:solidFill>
+                <a:latin typeface="Calibri"/>
+              </a:rPr>
+              <a:t>Why v1 collapsed at 28.67 %</a:t>
             </a:r>
           </a:p>
           <a:p>
             <a:pPr algn="l">
               <a:spcAft>
-                <a:spcPts val="600"/>
+                <a:spcPts val="400"/>
               </a:spcAft>
             </a:pPr>
             <a:r>
@@ -12535,16 +15482,37 @@
                 </a:solidFill>
                 <a:latin typeface="Calibri"/>
               </a:rPr>
-              <a:t>Babble augmentation (40 % of batches, 1–2 voices) lifts </a:t>
+              <a:t>Pure cosine distillation with no classification signal — embeddings cluster at a single point, no angular discrimination.</a:t>
+            </a:r>
+          </a:p>
+          <a:p>
+            <a:pPr algn="l"/>
+            <a:r>
+              <a:rPr sz="1100" b="0" i="0">
+                <a:solidFill>
+                  <a:srgbClr val="404856"/>
+                </a:solidFill>
+                <a:latin typeface="Calibri"/>
+              </a:rPr>
+              <a:t>Sub-center AAM with margin m = 0.2 </a:t>
+            </a:r>
+            <a:r>
+              <a:rPr sz="1100" b="0" i="0">
+                <a:solidFill>
+                  <a:srgbClr val="404856"/>
+                </a:solidFill>
+                <a:latin typeface="Calibri"/>
+              </a:rPr>
+              <a:t>forces speakers into separate angular cones; </a:t>
             </a:r>
             <a:r>
               <a:rPr sz="1200" b="1" i="0">
                 <a:solidFill>
-                  <a:srgbClr val="1B7F4F"/>
-                </a:solidFill>
-                <a:latin typeface="Calibri"/>
-              </a:rPr>
-              <a:t>+19 pp at −5 dB</a:t>
+                  <a:srgbClr val="C3292B"/>
+                </a:solidFill>
+                <a:latin typeface="Calibri"/>
+              </a:rPr>
+              <a:t>+18 pp gain</a:t>
             </a:r>
             <a:r>
               <a:rPr sz="1100" b="0" i="0">
@@ -12553,17 +15521,95 @@
                 </a:solidFill>
                 <a:latin typeface="Calibri"/>
               </a:rPr>
-              <a:t>, </a:t>
-            </a:r>
-            <a:r>
-              <a:rPr sz="1200" b="1" i="0">
-                <a:solidFill>
-                  <a:srgbClr val="1B7F4F"/>
-                </a:solidFill>
-                <a:latin typeface="Calibri"/>
-              </a:rPr>
-              <a:t>+21 pp at 0 dB</a:t>
-            </a:r>
+              <a:t> from the loss change alone.</a:t>
+            </a:r>
+          </a:p>
+        </p:txBody>
+      </p:sp>
+      <p:sp>
+        <p:nvSpPr>
+          <p:cNvPr id="12" name="Rounded Rectangle 11"/>
+          <p:cNvSpPr/>
+          <p:nvPr/>
+        </p:nvSpPr>
+        <p:spPr>
+          <a:xfrm>
+            <a:off x="7315200" y="5029200"/>
+            <a:ext cx="4526280" cy="1417320"/>
+          </a:xfrm>
+          <a:prstGeom prst="roundRect">
+            <a:avLst>
+              <a:gd name="adj" fmla="val 6000"/>
+            </a:avLst>
+          </a:prstGeom>
+          <a:solidFill>
+            <a:srgbClr val="FBF2DD"/>
+          </a:solidFill>
+          <a:ln w="9525">
+            <a:solidFill>
+              <a:srgbClr val="B8860B"/>
+            </a:solidFill>
+          </a:ln>
+        </p:spPr>
+        <p:style>
+          <a:lnRef idx="1">
+            <a:schemeClr val="accent1"/>
+          </a:lnRef>
+          <a:fillRef idx="3">
+            <a:schemeClr val="accent1"/>
+          </a:fillRef>
+          <a:effectRef idx="2">
+            <a:schemeClr val="accent1"/>
+          </a:effectRef>
+          <a:fontRef idx="minor">
+            <a:schemeClr val="lt1"/>
+          </a:fontRef>
+        </p:style>
+        <p:txBody>
+          <a:bodyPr rtlCol="0" anchor="ctr"/>
+          <a:lstStyle/>
+          <a:p/>
+        </p:txBody>
+      </p:sp>
+      <p:sp>
+        <p:nvSpPr>
+          <p:cNvPr id="13" name="TextBox 12"/>
+          <p:cNvSpPr txBox="1"/>
+          <p:nvPr/>
+        </p:nvSpPr>
+        <p:spPr>
+          <a:xfrm>
+            <a:off x="7498080" y="5074920"/>
+            <a:ext cx="4160520" cy="1371600"/>
+          </a:xfrm>
+          <a:prstGeom prst="rect">
+            <a:avLst/>
+          </a:prstGeom>
+          <a:noFill/>
+        </p:spPr>
+        <p:txBody>
+          <a:bodyPr wrap="square" lIns="73152" rIns="73152" tIns="43891" bIns="43891" anchor="t">
+            <a:spAutoFit/>
+          </a:bodyPr>
+          <a:lstStyle/>
+          <a:p>
+            <a:pPr algn="l">
+              <a:spcAft>
+                <a:spcPts val="400"/>
+              </a:spcAft>
+            </a:pPr>
+            <a:r>
+              <a:rPr sz="1300" b="1" i="0">
+                <a:solidFill>
+                  <a:srgbClr val="B8860B"/>
+                </a:solidFill>
+                <a:latin typeface="Calibri"/>
+              </a:rPr>
+              <a:t>Path to ≤ 5 % (v3)</a:t>
+            </a:r>
+          </a:p>
+          <a:p>
+            <a:pPr algn="l"/>
             <a:r>
               <a:rPr sz="1100" b="0" i="0">
                 <a:solidFill>
@@ -12571,37 +15617,7 @@
                 </a:solidFill>
                 <a:latin typeface="Calibri"/>
               </a:rPr>
-              <a:t>; clean cost only −0.5 pp.</a:t>
-            </a:r>
-          </a:p>
-          <a:p>
-            <a:pPr algn="l"/>
-            <a:r>
-              <a:rPr sz="1100" b="0" i="0">
-                <a:solidFill>
-                  <a:srgbClr val="404856"/>
-                </a:solidFill>
-                <a:latin typeface="Calibri"/>
-              </a:rPr>
-              <a:t>N = 3 voices generalisation holds: </a:t>
-            </a:r>
-            <a:r>
-              <a:rPr sz="1300" b="1" i="0">
-                <a:solidFill>
-                  <a:srgbClr val="1B7F4F"/>
-                </a:solidFill>
-                <a:latin typeface="Calibri"/>
-              </a:rPr>
-              <a:t>90 % at 10 dB</a:t>
-            </a:r>
-            <a:r>
-              <a:rPr sz="1100" b="0" i="0">
-                <a:solidFill>
-                  <a:srgbClr val="404856"/>
-                </a:solidFill>
-                <a:latin typeface="Calibri"/>
-              </a:rPr>
-              <a:t> with three simultaneous speakers — within KPI envelope across the realistic-noise band.</a:t>
+              <a:t>(i) Swap teacher to ECAPA-TDNN (1 % EER vs 4 %); (ii) tune λ_distill down; (iii) train on full VoxCeleb1 (~150 K utts) for 80 epochs.  Projected v3 EER: 4–5 %  —  competitive with x-vector at ~10× smaller.</a:t>
             </a:r>
           </a:p>
         </p:txBody>
@@ -12705,7 +15721,7 @@
                 </a:solidFill>
                 <a:latin typeface="Calibri"/>
               </a:rPr>
-              <a:t>Novelty &amp; Innovation</a:t>
+              <a:t>Phase-1 Empirical — FiLM Rejection Trade-off</a:t>
             </a:r>
           </a:p>
         </p:txBody>
@@ -12783,21 +15799,219 @@
                 </a:solidFill>
                 <a:latin typeface="Calibri"/>
               </a:rPr>
-              <a:t>9 / 12</a:t>
-            </a:r>
-          </a:p>
-        </p:txBody>
-      </p:sp>
-      <p:sp>
-        <p:nvSpPr>
-          <p:cNvPr id="6" name="Rounded Rectangle 5"/>
+              <a:t>9 / 17</a:t>
+            </a:r>
+          </a:p>
+        </p:txBody>
+      </p:sp>
+      <p:pic>
+        <p:nvPicPr>
+          <p:cNvPr id="6" name="Picture 5" descr="9_film_tradeoff.png"/>
+          <p:cNvPicPr>
+            <a:picLocks noChangeAspect="1"/>
+          </p:cNvPicPr>
+          <p:nvPr/>
+        </p:nvPicPr>
+        <p:blipFill>
+          <a:blip r:embed="rId2"/>
+          <a:stretch>
+            <a:fillRect/>
+          </a:stretch>
+        </p:blipFill>
+        <p:spPr>
+          <a:xfrm>
+            <a:off x="365760" y="1713068"/>
+            <a:ext cx="6766560" cy="2517463"/>
+          </a:xfrm>
+          <a:prstGeom prst="rect">
+            <a:avLst/>
+          </a:prstGeom>
+        </p:spPr>
+      </p:pic>
+      <p:sp>
+        <p:nvSpPr>
+          <p:cNvPr id="7" name="TextBox 6"/>
+          <p:cNvSpPr txBox="1"/>
+          <p:nvPr/>
+        </p:nvSpPr>
+        <p:spPr>
+          <a:xfrm>
+            <a:off x="365760" y="5120640"/>
+            <a:ext cx="6766560" cy="1371600"/>
+          </a:xfrm>
+          <a:prstGeom prst="rect">
+            <a:avLst/>
+          </a:prstGeom>
+          <a:noFill/>
+        </p:spPr>
+        <p:txBody>
+          <a:bodyPr wrap="square" lIns="73152" rIns="73152" tIns="43891" bIns="43891" anchor="t">
+            <a:spAutoFit/>
+          </a:bodyPr>
+          <a:lstStyle/>
+          <a:p>
+            <a:pPr algn="l"/>
+            <a:r>
+              <a:rPr sz="1000" b="0" i="1">
+                <a:solidFill>
+                  <a:srgbClr val="6A7383"/>
+                </a:solidFill>
+                <a:latin typeface="Calibri"/>
+              </a:rPr>
+              <a:t>Joint KWS + SV + FiLM model (500 K params, 400 train speakers, 8 K utts, 30 epochs). Eval on 28 held-out speakers × 10 test items each, with 5-clip enrollment averaging. Genuine = enrolled speaker says keyword; impostor = different speaker enrolled, keyword spoken by another. Collapse ratio = mean P(true_kw)_impostor / mean P(true_kw)_genuine.</a:t>
+            </a:r>
+          </a:p>
+        </p:txBody>
+      </p:sp>
+      <p:sp>
+        <p:nvSpPr>
+          <p:cNvPr id="8" name="Rounded Rectangle 7"/>
           <p:cNvSpPr/>
           <p:nvPr/>
         </p:nvSpPr>
         <p:spPr>
           <a:xfrm>
-            <a:off x="457200" y="960120"/>
-            <a:ext cx="11247120" cy="1783080"/>
+            <a:off x="7315200" y="960120"/>
+            <a:ext cx="4526280" cy="1874519"/>
+          </a:xfrm>
+          <a:prstGeom prst="roundRect">
+            <a:avLst>
+              <a:gd name="adj" fmla="val 6000"/>
+            </a:avLst>
+          </a:prstGeom>
+          <a:solidFill>
+            <a:srgbClr val="ECF2FC"/>
+          </a:solidFill>
+          <a:ln w="9525">
+            <a:solidFill>
+              <a:srgbClr val="144BC4"/>
+            </a:solidFill>
+          </a:ln>
+        </p:spPr>
+        <p:style>
+          <a:lnRef idx="1">
+            <a:schemeClr val="accent1"/>
+          </a:lnRef>
+          <a:fillRef idx="3">
+            <a:schemeClr val="accent1"/>
+          </a:fillRef>
+          <a:effectRef idx="2">
+            <a:schemeClr val="accent1"/>
+          </a:effectRef>
+          <a:fontRef idx="minor">
+            <a:schemeClr val="lt1"/>
+          </a:fontRef>
+        </p:style>
+        <p:txBody>
+          <a:bodyPr rtlCol="0" anchor="ctr"/>
+          <a:lstStyle/>
+          <a:p/>
+        </p:txBody>
+      </p:sp>
+      <p:sp>
+        <p:nvSpPr>
+          <p:cNvPr id="9" name="TextBox 8"/>
+          <p:cNvSpPr txBox="1"/>
+          <p:nvPr/>
+        </p:nvSpPr>
+        <p:spPr>
+          <a:xfrm>
+            <a:off x="7498080" y="1005840"/>
+            <a:ext cx="4160520" cy="1828800"/>
+          </a:xfrm>
+          <a:prstGeom prst="rect">
+            <a:avLst/>
+          </a:prstGeom>
+          <a:noFill/>
+        </p:spPr>
+        <p:txBody>
+          <a:bodyPr wrap="square" lIns="73152" rIns="73152" tIns="43891" bIns="43891" anchor="t">
+            <a:spAutoFit/>
+          </a:bodyPr>
+          <a:lstStyle/>
+          <a:p>
+            <a:pPr algn="l">
+              <a:spcAft>
+                <a:spcPts val="400"/>
+              </a:spcAft>
+            </a:pPr>
+            <a:r>
+              <a:rPr sz="1300" b="1" i="0">
+                <a:solidFill>
+                  <a:srgbClr val="144BC4"/>
+                </a:solidFill>
+                <a:latin typeface="Calibri"/>
+              </a:rPr>
+              <a:t>Mechanism validated</a:t>
+            </a:r>
+          </a:p>
+          <a:p>
+            <a:pPr algn="l">
+              <a:spcAft>
+                <a:spcPts val="400"/>
+              </a:spcAft>
+            </a:pPr>
+            <a:r>
+              <a:rPr sz="1300" b="1" i="0">
+                <a:solidFill>
+                  <a:srgbClr val="144BC4"/>
+                </a:solidFill>
+                <a:latin typeface="Calibri"/>
+              </a:rPr>
+              <a:t>95 % TAR + 86 % impostor-rejection</a:t>
+            </a:r>
+            <a:r>
+              <a:rPr sz="1100" b="0" i="0">
+                <a:solidFill>
+                  <a:srgbClr val="404856"/>
+                </a:solidFill>
+                <a:latin typeface="Calibri"/>
+              </a:rPr>
+              <a:t> at 14 % FAR when train + eval embedding distributions are matched (v2 own-audio diagnostic).</a:t>
+            </a:r>
+          </a:p>
+          <a:p>
+            <a:pPr algn="l"/>
+            <a:r>
+              <a:rPr sz="1100" b="0" i="0">
+                <a:solidFill>
+                  <a:srgbClr val="404856"/>
+                </a:solidFill>
+                <a:latin typeface="Calibri"/>
+              </a:rPr>
+              <a:t>Probability collapse ratio </a:t>
+            </a:r>
+            <a:r>
+              <a:rPr sz="1300" b="1" i="0">
+                <a:solidFill>
+                  <a:srgbClr val="144BC4"/>
+                </a:solidFill>
+                <a:latin typeface="Calibri"/>
+              </a:rPr>
+              <a:t>0.20</a:t>
+            </a:r>
+            <a:r>
+              <a:rPr sz="1100" b="0" i="0">
+                <a:solidFill>
+                  <a:srgbClr val="404856"/>
+                </a:solidFill>
+                <a:latin typeface="Calibri"/>
+              </a:rPr>
+              <a:t>  —  impostors get ~5× less keyword confidence than genuine.</a:t>
+            </a:r>
+          </a:p>
+        </p:txBody>
+      </p:sp>
+      <p:sp>
+        <p:nvSpPr>
+          <p:cNvPr id="10" name="Rounded Rectangle 9"/>
+          <p:cNvSpPr/>
+          <p:nvPr/>
+        </p:nvSpPr>
+        <p:spPr>
+          <a:xfrm>
+            <a:off x="7315200" y="2971800"/>
+            <a:ext cx="4526280" cy="1920240"/>
           </a:xfrm>
           <a:prstGeom prst="roundRect">
             <a:avLst>
@@ -12835,14 +16049,14 @@
       </p:sp>
       <p:sp>
         <p:nvSpPr>
-          <p:cNvPr id="7" name="TextBox 6"/>
-          <p:cNvSpPr txBox="1"/>
-          <p:nvPr/>
-        </p:nvSpPr>
-        <p:spPr>
-          <a:xfrm>
-            <a:off x="640080" y="1005840"/>
-            <a:ext cx="10972800" cy="1737360"/>
+          <p:cNvPr id="11" name="TextBox 10"/>
+          <p:cNvSpPr txBox="1"/>
+          <p:nvPr/>
+        </p:nvSpPr>
+        <p:spPr>
+          <a:xfrm>
+            <a:off x="7498080" y="3017520"/>
+            <a:ext cx="4160520" cy="1874519"/>
           </a:xfrm>
           <a:prstGeom prst="rect">
             <a:avLst/>
@@ -12854,22 +16068,6 @@
             <a:spAutoFit/>
           </a:bodyPr>
           <a:lstStyle/>
-          <a:p>
-            <a:pPr algn="l">
-              <a:spcAft>
-                <a:spcPts val="600"/>
-              </a:spcAft>
-            </a:pPr>
-            <a:r>
-              <a:rPr sz="1400" b="1" i="0">
-                <a:solidFill>
-                  <a:srgbClr val="C3292B"/>
-                </a:solidFill>
-                <a:latin typeface="Calibri"/>
-              </a:rPr>
-              <a:t>Core novelty  ·  structural false-accept rejection via FiLM-conditioned KWS</a:t>
-            </a:r>
-          </a:p>
           <a:p>
             <a:pPr algn="l">
               <a:spcAft>
@@ -12877,17 +16075,35 @@
               </a:spcAft>
             </a:pPr>
             <a:r>
+              <a:rPr sz="1300" b="1" i="0">
+                <a:solidFill>
+                  <a:srgbClr val="C3292B"/>
+                </a:solidFill>
+                <a:latin typeface="Calibri"/>
+              </a:rPr>
+              <a:t>Trade-off characterised</a:t>
+            </a:r>
+          </a:p>
+          <a:p>
+            <a:pPr algn="l"/>
+            <a:r>
               <a:rPr sz="1100" b="0" i="0">
                 <a:solidFill>
                   <a:srgbClr val="404856"/>
                 </a:solidFill>
                 <a:latin typeface="Calibri"/>
               </a:rPr>
-              <a:t>Conventional personalised wake-word systems run KWS and SV as independent gates and AND the decisions — any leakage between heads or threshold drift breaks the FA &lt; 1 / hr budget.</a:t>
-            </a:r>
-          </a:p>
-          <a:p>
-            <a:pPr algn="l"/>
+              <a:t>Closing the train / eval gap (v3 paired enrollment) lifts TAR to 92 % but loosens rejection — FAR jumps to </a:t>
+            </a:r>
+            <a:r>
+              <a:rPr sz="1300" b="1" i="0">
+                <a:solidFill>
+                  <a:srgbClr val="C3292B"/>
+                </a:solidFill>
+                <a:latin typeface="Calibri"/>
+              </a:rPr>
+              <a:t>48 %</a:t>
+            </a:r>
             <a:r>
               <a:rPr sz="1100" b="0" i="0">
                 <a:solidFill>
@@ -12895,21 +16111,21 @@
                 </a:solidFill>
                 <a:latin typeface="Calibri"/>
               </a:rPr>
-              <a:t>We instead modulate the KWS classifier's intermediate features with the enrolled user's voice embedding, so the same audio produces different logits for different enrolled users. Impostor rejection becomes a property of the network, not of a tunable threshold.</a:t>
-            </a:r>
-          </a:p>
-        </p:txBody>
-      </p:sp>
-      <p:sp>
-        <p:nvSpPr>
-          <p:cNvPr id="8" name="Rounded Rectangle 7"/>
+              <a:t>.  The system has a tunable TAR / FAR knob via impostor-loss weighting and hard-negative mining.</a:t>
+            </a:r>
+          </a:p>
+        </p:txBody>
+      </p:sp>
+      <p:sp>
+        <p:nvSpPr>
+          <p:cNvPr id="12" name="Rounded Rectangle 11"/>
           <p:cNvSpPr/>
           <p:nvPr/>
         </p:nvSpPr>
         <p:spPr>
           <a:xfrm>
-            <a:off x="457200" y="2926080"/>
-            <a:ext cx="5605272" cy="1691640"/>
+            <a:off x="7315200" y="5029200"/>
+            <a:ext cx="4526280" cy="1417320"/>
           </a:xfrm>
           <a:prstGeom prst="roundRect">
             <a:avLst>
@@ -12917,11 +16133,11 @@
             </a:avLst>
           </a:prstGeom>
           <a:solidFill>
-            <a:srgbClr val="FFFFFF"/>
+            <a:srgbClr val="FBF2DD"/>
           </a:solidFill>
           <a:ln w="9525">
             <a:solidFill>
-              <a:srgbClr val="D9DEE6"/>
+              <a:srgbClr val="B8860B"/>
             </a:solidFill>
           </a:ln>
         </p:spPr>
@@ -12947,14 +16163,14 @@
       </p:sp>
       <p:sp>
         <p:nvSpPr>
-          <p:cNvPr id="9" name="TextBox 8"/>
-          <p:cNvSpPr txBox="1"/>
-          <p:nvPr/>
-        </p:nvSpPr>
-        <p:spPr>
-          <a:xfrm>
-            <a:off x="640080" y="3017520"/>
-            <a:ext cx="5239512" cy="365760"/>
+          <p:cNvPr id="13" name="TextBox 12"/>
+          <p:cNvSpPr txBox="1"/>
+          <p:nvPr/>
+        </p:nvSpPr>
+        <p:spPr>
+          <a:xfrm>
+            <a:off x="7498080" y="5074920"/>
+            <a:ext cx="4160520" cy="1371600"/>
           </a:xfrm>
           <a:prstGeom prst="rect">
             <a:avLst/>
@@ -12967,395 +16183,31 @@
           </a:bodyPr>
           <a:lstStyle/>
           <a:p>
+            <a:pPr algn="l">
+              <a:spcAft>
+                <a:spcPts val="400"/>
+              </a:spcAft>
+            </a:pPr>
+            <a:r>
+              <a:rPr sz="1300" b="1" i="0">
+                <a:solidFill>
+                  <a:srgbClr val="B8860B"/>
+                </a:solidFill>
+                <a:latin typeface="Calibri"/>
+              </a:rPr>
+              <a:t>Path to deployment (v4)</a:t>
+            </a:r>
+          </a:p>
+          <a:p>
             <a:pPr algn="l"/>
             <a:r>
-              <a:rPr sz="1200" b="1" i="0">
-                <a:solidFill>
-                  <a:srgbClr val="0F1B3D"/>
-                </a:solidFill>
-                <a:latin typeface="Calibri"/>
-              </a:rPr>
-              <a:t>Online τₛ calibration during training</a:t>
-            </a:r>
-          </a:p>
-        </p:txBody>
-      </p:sp>
-      <p:sp>
-        <p:nvSpPr>
-          <p:cNvPr id="10" name="TextBox 9"/>
-          <p:cNvSpPr txBox="1"/>
-          <p:nvPr/>
-        </p:nvSpPr>
-        <p:spPr>
-          <a:xfrm>
-            <a:off x="640080" y="3383280"/>
-            <a:ext cx="5239512" cy="1143000"/>
-          </a:xfrm>
-          <a:prstGeom prst="rect">
-            <a:avLst/>
-          </a:prstGeom>
-          <a:noFill/>
-        </p:spPr>
-        <p:txBody>
-          <a:bodyPr wrap="square" lIns="73152" rIns="73152" tIns="43891" bIns="43891" anchor="t">
-            <a:spAutoFit/>
-          </a:bodyPr>
-          <a:lstStyle/>
-          <a:p>
-            <a:pPr algn="l"/>
-            <a:r>
               <a:rPr sz="1100" b="0" i="0">
                 <a:solidFill>
                   <a:srgbClr val="404856"/>
                 </a:solidFill>
                 <a:latin typeface="Calibri"/>
               </a:rPr>
-              <a:t>Every 500 steps we re-estimate the deployment threshold on a held-out impostor pool and feed FRR-at-target-FAR back as a soft penalty. Bakes the FA &lt; 1 / hr operating point into the embedding geometry.</a:t>
-            </a:r>
-          </a:p>
-        </p:txBody>
-      </p:sp>
-      <p:sp>
-        <p:nvSpPr>
-          <p:cNvPr id="11" name="Rounded Rectangle 10"/>
-          <p:cNvSpPr/>
-          <p:nvPr/>
-        </p:nvSpPr>
-        <p:spPr>
-          <a:xfrm>
-            <a:off x="6126480" y="2926080"/>
-            <a:ext cx="5605272" cy="1691640"/>
-          </a:xfrm>
-          <a:prstGeom prst="roundRect">
-            <a:avLst>
-              <a:gd name="adj" fmla="val 6000"/>
-            </a:avLst>
-          </a:prstGeom>
-          <a:solidFill>
-            <a:srgbClr val="FFFFFF"/>
-          </a:solidFill>
-          <a:ln w="9525">
-            <a:solidFill>
-              <a:srgbClr val="D9DEE6"/>
-            </a:solidFill>
-          </a:ln>
-        </p:spPr>
-        <p:style>
-          <a:lnRef idx="1">
-            <a:schemeClr val="accent1"/>
-          </a:lnRef>
-          <a:fillRef idx="3">
-            <a:schemeClr val="accent1"/>
-          </a:fillRef>
-          <a:effectRef idx="2">
-            <a:schemeClr val="accent1"/>
-          </a:effectRef>
-          <a:fontRef idx="minor">
-            <a:schemeClr val="lt1"/>
-          </a:fontRef>
-        </p:style>
-        <p:txBody>
-          <a:bodyPr rtlCol="0" anchor="ctr"/>
-          <a:lstStyle/>
-          <a:p/>
-        </p:txBody>
-      </p:sp>
-      <p:sp>
-        <p:nvSpPr>
-          <p:cNvPr id="12" name="TextBox 11"/>
-          <p:cNvSpPr txBox="1"/>
-          <p:nvPr/>
-        </p:nvSpPr>
-        <p:spPr>
-          <a:xfrm>
-            <a:off x="6309360" y="3017520"/>
-            <a:ext cx="5239512" cy="365760"/>
-          </a:xfrm>
-          <a:prstGeom prst="rect">
-            <a:avLst/>
-          </a:prstGeom>
-          <a:noFill/>
-        </p:spPr>
-        <p:txBody>
-          <a:bodyPr wrap="square" lIns="73152" rIns="73152" tIns="43891" bIns="43891" anchor="t">
-            <a:spAutoFit/>
-          </a:bodyPr>
-          <a:lstStyle/>
-          <a:p>
-            <a:pPr algn="l"/>
-            <a:r>
-              <a:rPr sz="1200" b="1" i="0">
-                <a:solidFill>
-                  <a:srgbClr val="0F1B3D"/>
-                </a:solidFill>
-                <a:latin typeface="Calibri"/>
-              </a:rPr>
-              <a:t>Layer-ensemble WavLM distillation</a:t>
-            </a:r>
-          </a:p>
-        </p:txBody>
-      </p:sp>
-      <p:sp>
-        <p:nvSpPr>
-          <p:cNvPr id="13" name="TextBox 12"/>
-          <p:cNvSpPr txBox="1"/>
-          <p:nvPr/>
-        </p:nvSpPr>
-        <p:spPr>
-          <a:xfrm>
-            <a:off x="6309360" y="3383280"/>
-            <a:ext cx="5239512" cy="1143000"/>
-          </a:xfrm>
-          <a:prstGeom prst="rect">
-            <a:avLst/>
-          </a:prstGeom>
-          <a:noFill/>
-        </p:spPr>
-        <p:txBody>
-          <a:bodyPr wrap="square" lIns="73152" rIns="73152" tIns="43891" bIns="43891" anchor="t">
-            <a:spAutoFit/>
-          </a:bodyPr>
-          <a:lstStyle/>
-          <a:p>
-            <a:pPr algn="l"/>
-            <a:r>
-              <a:rPr sz="1100" b="0" i="0">
-                <a:solidFill>
-                  <a:srgbClr val="404856"/>
-                </a:solidFill>
-                <a:latin typeface="Calibri"/>
-              </a:rPr>
-              <a:t>Three learnable softmax weights over layers {4, 8, 11} — beats single-layer choice (SKILL, 2024). Phase-1 validated at the final-layer simplest form (+0.7 pp KWS clean).</a:t>
-            </a:r>
-          </a:p>
-        </p:txBody>
-      </p:sp>
-      <p:sp>
-        <p:nvSpPr>
-          <p:cNvPr id="14" name="Rounded Rectangle 13"/>
-          <p:cNvSpPr/>
-          <p:nvPr/>
-        </p:nvSpPr>
-        <p:spPr>
-          <a:xfrm>
-            <a:off x="457200" y="4754880"/>
-            <a:ext cx="5605272" cy="1691640"/>
-          </a:xfrm>
-          <a:prstGeom prst="roundRect">
-            <a:avLst>
-              <a:gd name="adj" fmla="val 6000"/>
-            </a:avLst>
-          </a:prstGeom>
-          <a:solidFill>
-            <a:srgbClr val="FFFFFF"/>
-          </a:solidFill>
-          <a:ln w="9525">
-            <a:solidFill>
-              <a:srgbClr val="D9DEE6"/>
-            </a:solidFill>
-          </a:ln>
-        </p:spPr>
-        <p:style>
-          <a:lnRef idx="1">
-            <a:schemeClr val="accent1"/>
-          </a:lnRef>
-          <a:fillRef idx="3">
-            <a:schemeClr val="accent1"/>
-          </a:fillRef>
-          <a:effectRef idx="2">
-            <a:schemeClr val="accent1"/>
-          </a:effectRef>
-          <a:fontRef idx="minor">
-            <a:schemeClr val="lt1"/>
-          </a:fontRef>
-        </p:style>
-        <p:txBody>
-          <a:bodyPr rtlCol="0" anchor="ctr"/>
-          <a:lstStyle/>
-          <a:p/>
-        </p:txBody>
-      </p:sp>
-      <p:sp>
-        <p:nvSpPr>
-          <p:cNvPr id="15" name="TextBox 14"/>
-          <p:cNvSpPr txBox="1"/>
-          <p:nvPr/>
-        </p:nvSpPr>
-        <p:spPr>
-          <a:xfrm>
-            <a:off x="640080" y="4846320"/>
-            <a:ext cx="5239512" cy="365760"/>
-          </a:xfrm>
-          <a:prstGeom prst="rect">
-            <a:avLst/>
-          </a:prstGeom>
-          <a:noFill/>
-        </p:spPr>
-        <p:txBody>
-          <a:bodyPr wrap="square" lIns="73152" rIns="73152" tIns="43891" bIns="43891" anchor="t">
-            <a:spAutoFit/>
-          </a:bodyPr>
-          <a:lstStyle/>
-          <a:p>
-            <a:pPr algn="l"/>
-            <a:r>
-              <a:rPr sz="1200" b="1" i="0">
-                <a:solidFill>
-                  <a:srgbClr val="0F1B3D"/>
-                </a:solidFill>
-                <a:latin typeface="Calibri"/>
-              </a:rPr>
-              <a:t>Multi-level ECAPA distillation</a:t>
-            </a:r>
-          </a:p>
-        </p:txBody>
-      </p:sp>
-      <p:sp>
-        <p:nvSpPr>
-          <p:cNvPr id="16" name="TextBox 15"/>
-          <p:cNvSpPr txBox="1"/>
-          <p:nvPr/>
-        </p:nvSpPr>
-        <p:spPr>
-          <a:xfrm>
-            <a:off x="640080" y="5212080"/>
-            <a:ext cx="5239512" cy="1143000"/>
-          </a:xfrm>
-          <a:prstGeom prst="rect">
-            <a:avLst/>
-          </a:prstGeom>
-          <a:noFill/>
-        </p:spPr>
-        <p:txBody>
-          <a:bodyPr wrap="square" lIns="73152" rIns="73152" tIns="43891" bIns="43891" anchor="t">
-            <a:spAutoFit/>
-          </a:bodyPr>
-          <a:lstStyle/>
-          <a:p>
-            <a:pPr algn="l"/>
-            <a:r>
-              <a:rPr sz="1100" b="0" i="0">
-                <a:solidFill>
-                  <a:srgbClr val="404856"/>
-                </a:solidFill>
-                <a:latin typeface="Calibri"/>
-              </a:rPr>
-              <a:t>Block-2 + block-3 + final embedding — ~5 % relative EER reduction over final-only KD.</a:t>
-            </a:r>
-          </a:p>
-        </p:txBody>
-      </p:sp>
-      <p:sp>
-        <p:nvSpPr>
-          <p:cNvPr id="17" name="Rounded Rectangle 16"/>
-          <p:cNvSpPr/>
-          <p:nvPr/>
-        </p:nvSpPr>
-        <p:spPr>
-          <a:xfrm>
-            <a:off x="6126480" y="4754880"/>
-            <a:ext cx="5605272" cy="1691640"/>
-          </a:xfrm>
-          <a:prstGeom prst="roundRect">
-            <a:avLst>
-              <a:gd name="adj" fmla="val 6000"/>
-            </a:avLst>
-          </a:prstGeom>
-          <a:solidFill>
-            <a:srgbClr val="FFFFFF"/>
-          </a:solidFill>
-          <a:ln w="9525">
-            <a:solidFill>
-              <a:srgbClr val="D9DEE6"/>
-            </a:solidFill>
-          </a:ln>
-        </p:spPr>
-        <p:style>
-          <a:lnRef idx="1">
-            <a:schemeClr val="accent1"/>
-          </a:lnRef>
-          <a:fillRef idx="3">
-            <a:schemeClr val="accent1"/>
-          </a:fillRef>
-          <a:effectRef idx="2">
-            <a:schemeClr val="accent1"/>
-          </a:effectRef>
-          <a:fontRef idx="minor">
-            <a:schemeClr val="lt1"/>
-          </a:fontRef>
-        </p:style>
-        <p:txBody>
-          <a:bodyPr rtlCol="0" anchor="ctr"/>
-          <a:lstStyle/>
-          <a:p/>
-        </p:txBody>
-      </p:sp>
-      <p:sp>
-        <p:nvSpPr>
-          <p:cNvPr id="18" name="TextBox 17"/>
-          <p:cNvSpPr txBox="1"/>
-          <p:nvPr/>
-        </p:nvSpPr>
-        <p:spPr>
-          <a:xfrm>
-            <a:off x="6309360" y="4846320"/>
-            <a:ext cx="5239512" cy="365760"/>
-          </a:xfrm>
-          <a:prstGeom prst="rect">
-            <a:avLst/>
-          </a:prstGeom>
-          <a:noFill/>
-        </p:spPr>
-        <p:txBody>
-          <a:bodyPr wrap="square" lIns="73152" rIns="73152" tIns="43891" bIns="43891" anchor="t">
-            <a:spAutoFit/>
-          </a:bodyPr>
-          <a:lstStyle/>
-          <a:p>
-            <a:pPr algn="l"/>
-            <a:r>
-              <a:rPr sz="1200" b="1" i="0">
-                <a:solidFill>
-                  <a:srgbClr val="0F1B3D"/>
-                </a:solidFill>
-                <a:latin typeface="Calibri"/>
-              </a:rPr>
-              <a:t>Phonetic confusable hard-negative mining</a:t>
-            </a:r>
-          </a:p>
-        </p:txBody>
-      </p:sp>
-      <p:sp>
-        <p:nvSpPr>
-          <p:cNvPr id="19" name="TextBox 18"/>
-          <p:cNvSpPr txBox="1"/>
-          <p:nvPr/>
-        </p:nvSpPr>
-        <p:spPr>
-          <a:xfrm>
-            <a:off x="6309360" y="5212080"/>
-            <a:ext cx="5239512" cy="1143000"/>
-          </a:xfrm>
-          <a:prstGeom prst="rect">
-            <a:avLst/>
-          </a:prstGeom>
-          <a:noFill/>
-        </p:spPr>
-        <p:txBody>
-          <a:bodyPr wrap="square" lIns="73152" rIns="73152" tIns="43891" bIns="43891" anchor="t">
-            <a:spAutoFit/>
-          </a:bodyPr>
-          <a:lstStyle/>
-          <a:p>
-            <a:pPr algn="l"/>
-            <a:r>
-              <a:rPr sz="1100" b="0" i="0">
-                <a:solidFill>
-                  <a:srgbClr val="404856"/>
-                </a:solidFill>
-                <a:latin typeface="Calibri"/>
-              </a:rPr>
-              <a:t>TIMIT phone-confusion-weighted Levenshtein on G2P output, sampled at 3× during training — directly targets the FA &lt; 1 / hr risk.</a:t>
+              <a:t>Hard-negative mining + λ_imp = 2 + max-impostor-ratio 0.7.  Target: ≥ 85 % TAR + ≤ 25 % FAR + ≥ 70 % REJ at the production operating point.</a:t>
             </a:r>
           </a:p>
         </p:txBody>

--- a/BlueprintPPT/AX_Hackathon_Phase1_Blueprint_FILLED.pptx
+++ b/BlueprintPPT/AX_Hackathon_Phase1_Blueprint_FILLED.pptx
@@ -22,6 +22,7 @@
     <p:sldId id="270" r:id="rId21"/>
     <p:sldId id="271" r:id="rId22"/>
     <p:sldId id="272" r:id="rId23"/>
+    <p:sldId id="273" r:id="rId24"/>
   </p:sldIdLst>
   <p:sldSz cx="12191695" cy="6858000" type="screen4x3"/>
   <p:notesSz cx="6858000" cy="9144000"/>
@@ -3263,7 +3264,7 @@
                 </a:solidFill>
                 <a:latin typeface="Calibri"/>
               </a:rPr>
-              <a:t>1 / 17</a:t>
+              <a:t>1 / 18</a:t>
             </a:r>
           </a:p>
         </p:txBody>
@@ -3555,7 +3556,7 @@
                 </a:solidFill>
                 <a:latin typeface="Calibri"/>
               </a:rPr>
-              <a:t>Electronics &amp; Communication / CS dual</a:t>
+              <a:t>Computer Science</a:t>
             </a:r>
           </a:p>
           <a:p>
@@ -3580,7 +3581,7 @@
                 </a:solidFill>
                 <a:latin typeface="Calibri"/>
               </a:rPr>
-              <a:t>Pre-final year</a:t>
+              <a:t>Final year</a:t>
             </a:r>
           </a:p>
           <a:p>
@@ -3605,28 +3606,7 @@
                 </a:solidFill>
                 <a:latin typeface="Calibri"/>
               </a:rPr>
-              <a:t>—  (filled at submission)</a:t>
-            </a:r>
-          </a:p>
-          <a:p>
-            <a:pPr algn="l"/>
-            <a:r>
-              <a:rPr sz="1300" b="1" i="0">
-                <a:solidFill>
-                  <a:srgbClr val="003B8E"/>
-                </a:solidFill>
-                <a:latin typeface="Calibri"/>
-              </a:rPr>
-              <a:t>GitHub  </a:t>
-            </a:r>
-            <a:r>
-              <a:rPr sz="1300" b="0" i="0">
-                <a:solidFill>
-                  <a:srgbClr val="404856"/>
-                </a:solidFill>
-                <a:latin typeface="Calibri"/>
-              </a:rPr>
-              <a:t>github.com/MalayM09/SRIB</a:t>
+              <a:t>f20220116@pilani.bits-pilani.ac.in</a:t>
             </a:r>
           </a:p>
         </p:txBody>
@@ -3808,7 +3788,7 @@
                 </a:solidFill>
                 <a:latin typeface="Calibri"/>
               </a:rPr>
-              <a:t>10 / 17</a:t>
+              <a:t>10 / 18</a:t>
             </a:r>
           </a:p>
         </p:txBody>
@@ -4436,7 +4416,7 @@
                 </a:solidFill>
                 <a:latin typeface="Calibri"/>
               </a:rPr>
-              <a:t>11 / 17</a:t>
+              <a:t>11 / 18</a:t>
             </a:r>
           </a:p>
         </p:txBody>
@@ -5127,7 +5107,7 @@
                 </a:solidFill>
                 <a:latin typeface="Calibri"/>
               </a:rPr>
-              <a:t>12 / 17</a:t>
+              <a:t>12 / 18</a:t>
             </a:r>
           </a:p>
         </p:txBody>
@@ -5881,7 +5861,7 @@
                 </a:solidFill>
                 <a:latin typeface="Calibri"/>
               </a:rPr>
-              <a:t>13 / 17</a:t>
+              <a:t>13 / 18</a:t>
             </a:r>
           </a:p>
         </p:txBody>
@@ -7182,7 +7162,7 @@
                 </a:solidFill>
                 <a:latin typeface="Calibri"/>
               </a:rPr>
-              <a:t>14 / 17</a:t>
+              <a:t>14 / 18</a:t>
             </a:r>
           </a:p>
         </p:txBody>
@@ -8595,7 +8575,7 @@
                 </a:solidFill>
                 <a:latin typeface="Calibri"/>
               </a:rPr>
-              <a:t>15 / 17</a:t>
+              <a:t>15 / 18</a:t>
             </a:r>
           </a:p>
         </p:txBody>
@@ -9254,7 +9234,7 @@
                 </a:solidFill>
                 <a:latin typeface="Calibri"/>
               </a:rPr>
-              <a:t>16 / 17</a:t>
+              <a:t>16 / 18</a:t>
             </a:r>
           </a:p>
         </p:txBody>
@@ -9536,7 +9516,7 @@
                 </a:solidFill>
                 <a:latin typeface="Calibri"/>
               </a:rPr>
-              <a:t>agentic AI pair-programmer used throughout for code generation, blueprint iteration, multilingual eval, and PPTX rendering.</a:t>
+              <a:t>Agentic AI helper and companion</a:t>
             </a:r>
           </a:p>
         </p:txBody>
@@ -10177,6 +10157,1991 @@
 </p:sld>
 </file>
 
+<file path=ppt/slides/slide18.xml><?xml version="1.0" encoding="utf-8"?>
+<p:sld xmlns:a="http://schemas.openxmlformats.org/drawingml/2006/main" xmlns:p="http://schemas.openxmlformats.org/presentationml/2006/main" xmlns:r="http://schemas.openxmlformats.org/officeDocument/2006/relationships">
+  <p:cSld>
+    <p:bg>
+      <p:bgPr>
+        <a:solidFill>
+          <a:srgbClr val="FAFCFF"/>
+        </a:solidFill>
+        <a:effectLst/>
+      </p:bgPr>
+    </p:bg>
+    <p:spTree>
+      <p:nvGrpSpPr>
+        <p:cNvPr id="1" name=""/>
+        <p:cNvGrpSpPr/>
+        <p:nvPr/>
+      </p:nvGrpSpPr>
+      <p:grpSpPr/>
+      <p:sp>
+        <p:nvSpPr>
+          <p:cNvPr id="2" name="Rectangle 1"/>
+          <p:cNvSpPr/>
+          <p:nvPr/>
+        </p:nvSpPr>
+        <p:spPr>
+          <a:xfrm>
+            <a:off x="0" y="0"/>
+            <a:ext cx="12191695" cy="777240"/>
+          </a:xfrm>
+          <a:prstGeom prst="rect">
+            <a:avLst/>
+          </a:prstGeom>
+          <a:solidFill>
+            <a:srgbClr val="003B8E"/>
+          </a:solidFill>
+          <a:ln>
+            <a:noFill/>
+          </a:ln>
+        </p:spPr>
+        <p:style>
+          <a:lnRef idx="1">
+            <a:schemeClr val="accent1"/>
+          </a:lnRef>
+          <a:fillRef idx="3">
+            <a:schemeClr val="accent1"/>
+          </a:fillRef>
+          <a:effectRef idx="2">
+            <a:schemeClr val="accent1"/>
+          </a:effectRef>
+          <a:fontRef idx="minor">
+            <a:schemeClr val="lt1"/>
+          </a:fontRef>
+        </p:style>
+        <p:txBody>
+          <a:bodyPr rtlCol="0" anchor="ctr"/>
+          <a:lstStyle/>
+          <a:p>
+            <a:pPr algn="ctr"/>
+          </a:p>
+        </p:txBody>
+      </p:sp>
+      <p:sp>
+        <p:nvSpPr>
+          <p:cNvPr id="3" name="TextBox 2"/>
+          <p:cNvSpPr txBox="1"/>
+          <p:nvPr/>
+        </p:nvSpPr>
+        <p:spPr>
+          <a:xfrm>
+            <a:off x="365760" y="0"/>
+            <a:ext cx="11460175" cy="777240"/>
+          </a:xfrm>
+          <a:prstGeom prst="rect">
+            <a:avLst/>
+          </a:prstGeom>
+          <a:noFill/>
+        </p:spPr>
+        <p:txBody>
+          <a:bodyPr wrap="square" lIns="73152" rIns="73152" tIns="43891" bIns="43891" anchor="ctr">
+            <a:spAutoFit/>
+          </a:bodyPr>
+          <a:lstStyle/>
+          <a:p>
+            <a:pPr algn="l"/>
+            <a:r>
+              <a:rPr sz="2400" b="1" i="0">
+                <a:solidFill>
+                  <a:srgbClr val="FFFFFF"/>
+                </a:solidFill>
+                <a:latin typeface="Calibri"/>
+              </a:rPr>
+              <a:t>Appendix — Glossary</a:t>
+            </a:r>
+          </a:p>
+        </p:txBody>
+      </p:sp>
+      <p:sp>
+        <p:nvSpPr>
+          <p:cNvPr id="4" name="Rectangle 3"/>
+          <p:cNvSpPr/>
+          <p:nvPr/>
+        </p:nvSpPr>
+        <p:spPr>
+          <a:xfrm>
+            <a:off x="0" y="777240"/>
+            <a:ext cx="12191695" cy="36576"/>
+          </a:xfrm>
+          <a:prstGeom prst="rect">
+            <a:avLst/>
+          </a:prstGeom>
+          <a:solidFill>
+            <a:srgbClr val="B8860B"/>
+          </a:solidFill>
+          <a:ln>
+            <a:noFill/>
+          </a:ln>
+        </p:spPr>
+        <p:style>
+          <a:lnRef idx="1">
+            <a:schemeClr val="accent1"/>
+          </a:lnRef>
+          <a:fillRef idx="3">
+            <a:schemeClr val="accent1"/>
+          </a:fillRef>
+          <a:effectRef idx="2">
+            <a:schemeClr val="accent1"/>
+          </a:effectRef>
+          <a:fontRef idx="minor">
+            <a:schemeClr val="lt1"/>
+          </a:fontRef>
+        </p:style>
+        <p:txBody>
+          <a:bodyPr rtlCol="0" anchor="ctr"/>
+          <a:lstStyle/>
+          <a:p>
+            <a:pPr algn="ctr"/>
+          </a:p>
+        </p:txBody>
+      </p:sp>
+      <p:sp>
+        <p:nvSpPr>
+          <p:cNvPr id="5" name="TextBox 4"/>
+          <p:cNvSpPr txBox="1"/>
+          <p:nvPr/>
+        </p:nvSpPr>
+        <p:spPr>
+          <a:xfrm>
+            <a:off x="10820095" y="6537960"/>
+            <a:ext cx="1188720" cy="274320"/>
+          </a:xfrm>
+          <a:prstGeom prst="rect">
+            <a:avLst/>
+          </a:prstGeom>
+          <a:noFill/>
+        </p:spPr>
+        <p:txBody>
+          <a:bodyPr wrap="square" lIns="73152" rIns="73152" tIns="43891" bIns="43891" anchor="t">
+            <a:spAutoFit/>
+          </a:bodyPr>
+          <a:lstStyle/>
+          <a:p>
+            <a:pPr algn="r"/>
+            <a:r>
+              <a:rPr sz="900" b="0" i="0">
+                <a:solidFill>
+                  <a:srgbClr val="6A7383"/>
+                </a:solidFill>
+                <a:latin typeface="Calibri"/>
+              </a:rPr>
+              <a:t>18 / 18</a:t>
+            </a:r>
+          </a:p>
+        </p:txBody>
+      </p:sp>
+      <p:sp>
+        <p:nvSpPr>
+          <p:cNvPr id="6" name="Rounded Rectangle 5"/>
+          <p:cNvSpPr/>
+          <p:nvPr/>
+        </p:nvSpPr>
+        <p:spPr>
+          <a:xfrm>
+            <a:off x="411480" y="960120"/>
+            <a:ext cx="3749039" cy="2697480"/>
+          </a:xfrm>
+          <a:prstGeom prst="roundRect">
+            <a:avLst>
+              <a:gd name="adj" fmla="val 6000"/>
+            </a:avLst>
+          </a:prstGeom>
+          <a:solidFill>
+            <a:srgbClr val="ECF2FC"/>
+          </a:solidFill>
+          <a:ln w="9525">
+            <a:solidFill>
+              <a:srgbClr val="144BC4"/>
+            </a:solidFill>
+          </a:ln>
+        </p:spPr>
+        <p:style>
+          <a:lnRef idx="1">
+            <a:schemeClr val="accent1"/>
+          </a:lnRef>
+          <a:fillRef idx="3">
+            <a:schemeClr val="accent1"/>
+          </a:fillRef>
+          <a:effectRef idx="2">
+            <a:schemeClr val="accent1"/>
+          </a:effectRef>
+          <a:fontRef idx="minor">
+            <a:schemeClr val="lt1"/>
+          </a:fontRef>
+        </p:style>
+        <p:txBody>
+          <a:bodyPr rtlCol="0" anchor="ctr"/>
+          <a:lstStyle/>
+          <a:p/>
+        </p:txBody>
+      </p:sp>
+      <p:sp>
+        <p:nvSpPr>
+          <p:cNvPr id="7" name="TextBox 6"/>
+          <p:cNvSpPr txBox="1"/>
+          <p:nvPr/>
+        </p:nvSpPr>
+        <p:spPr>
+          <a:xfrm>
+            <a:off x="576072" y="1033272"/>
+            <a:ext cx="3419855" cy="292608"/>
+          </a:xfrm>
+          <a:prstGeom prst="rect">
+            <a:avLst/>
+          </a:prstGeom>
+          <a:noFill/>
+        </p:spPr>
+        <p:txBody>
+          <a:bodyPr wrap="square" lIns="73152" rIns="73152" tIns="43891" bIns="43891" anchor="t">
+            <a:spAutoFit/>
+          </a:bodyPr>
+          <a:lstStyle/>
+          <a:p>
+            <a:pPr algn="l"/>
+            <a:r>
+              <a:rPr sz="1200" b="1" i="0">
+                <a:solidFill>
+                  <a:srgbClr val="144BC4"/>
+                </a:solidFill>
+                <a:latin typeface="Calibri"/>
+              </a:rPr>
+              <a:t>Frontend &amp; Architecture</a:t>
+            </a:r>
+          </a:p>
+        </p:txBody>
+      </p:sp>
+      <p:sp>
+        <p:nvSpPr>
+          <p:cNvPr id="8" name="TextBox 7"/>
+          <p:cNvSpPr txBox="1"/>
+          <p:nvPr/>
+        </p:nvSpPr>
+        <p:spPr>
+          <a:xfrm>
+            <a:off x="594360" y="1362456"/>
+            <a:ext cx="3383279" cy="2194560"/>
+          </a:xfrm>
+          <a:prstGeom prst="rect">
+            <a:avLst/>
+          </a:prstGeom>
+          <a:noFill/>
+        </p:spPr>
+        <p:txBody>
+          <a:bodyPr wrap="square" lIns="36576" rIns="36576" tIns="21945" bIns="21945" anchor="t">
+            <a:spAutoFit/>
+          </a:bodyPr>
+          <a:lstStyle/>
+          <a:p>
+            <a:pPr algn="l">
+              <a:spcAft>
+                <a:spcPts val="200"/>
+              </a:spcAft>
+            </a:pPr>
+            <a:r>
+              <a:rPr sz="950" b="1" i="0">
+                <a:solidFill>
+                  <a:srgbClr val="0F1B3D"/>
+                </a:solidFill>
+                <a:latin typeface="Calibri"/>
+              </a:rPr>
+              <a:t>PCEN</a:t>
+            </a:r>
+            <a:r>
+              <a:rPr sz="900" b="0" i="0">
+                <a:solidFill>
+                  <a:srgbClr val="404856"/>
+                </a:solidFill>
+                <a:latin typeface="Calibri"/>
+              </a:rPr>
+              <a:t>   Per-Channel Energy Normalization — learnable frontend</a:t>
+            </a:r>
+          </a:p>
+          <a:p>
+            <a:pPr algn="l">
+              <a:spcAft>
+                <a:spcPts val="200"/>
+              </a:spcAft>
+            </a:pPr>
+            <a:r>
+              <a:rPr sz="950" b="1" i="0">
+                <a:solidFill>
+                  <a:srgbClr val="0F1B3D"/>
+                </a:solidFill>
+                <a:latin typeface="Calibri"/>
+              </a:rPr>
+              <a:t>LEAF</a:t>
+            </a:r>
+            <a:r>
+              <a:rPr sz="900" b="0" i="0">
+                <a:solidFill>
+                  <a:srgbClr val="404856"/>
+                </a:solidFill>
+                <a:latin typeface="Calibri"/>
+              </a:rPr>
+              <a:t>   Learnable Auditory Frontend</a:t>
+            </a:r>
+          </a:p>
+          <a:p>
+            <a:pPr algn="l">
+              <a:spcAft>
+                <a:spcPts val="200"/>
+              </a:spcAft>
+            </a:pPr>
+            <a:r>
+              <a:rPr sz="950" b="1" i="0">
+                <a:solidFill>
+                  <a:srgbClr val="0F1B3D"/>
+                </a:solidFill>
+                <a:latin typeface="Calibri"/>
+              </a:rPr>
+              <a:t>BC-ResNet</a:t>
+            </a:r>
+            <a:r>
+              <a:rPr sz="900" b="0" i="0">
+                <a:solidFill>
+                  <a:srgbClr val="404856"/>
+                </a:solidFill>
+                <a:latin typeface="Calibri"/>
+              </a:rPr>
+              <a:t>   Broadcast Residual Network — compact CNN for KWS</a:t>
+            </a:r>
+          </a:p>
+          <a:p>
+            <a:pPr algn="l">
+              <a:spcAft>
+                <a:spcPts val="200"/>
+              </a:spcAft>
+            </a:pPr>
+            <a:r>
+              <a:rPr sz="950" b="1" i="0">
+                <a:solidFill>
+                  <a:srgbClr val="0F1B3D"/>
+                </a:solidFill>
+                <a:latin typeface="Calibri"/>
+              </a:rPr>
+              <a:t>TRM</a:t>
+            </a:r>
+            <a:r>
+              <a:rPr sz="900" b="0" i="0">
+                <a:solidFill>
+                  <a:srgbClr val="404856"/>
+                </a:solidFill>
+                <a:latin typeface="Calibri"/>
+              </a:rPr>
+              <a:t>   Task Representation Module — branch decoupler</a:t>
+            </a:r>
+          </a:p>
+          <a:p>
+            <a:pPr algn="l">
+              <a:spcAft>
+                <a:spcPts val="200"/>
+              </a:spcAft>
+            </a:pPr>
+            <a:r>
+              <a:rPr sz="950" b="1" i="0">
+                <a:solidFill>
+                  <a:srgbClr val="0F1B3D"/>
+                </a:solidFill>
+                <a:latin typeface="Calibri"/>
+              </a:rPr>
+              <a:t>MQMHA</a:t>
+            </a:r>
+            <a:r>
+              <a:rPr sz="900" b="0" i="0">
+                <a:solidFill>
+                  <a:srgbClr val="404856"/>
+                </a:solidFill>
+                <a:latin typeface="Calibri"/>
+              </a:rPr>
+              <a:t>   Multi-Query Multi-Head Attention pooling</a:t>
+            </a:r>
+          </a:p>
+          <a:p>
+            <a:pPr algn="l">
+              <a:spcAft>
+                <a:spcPts val="200"/>
+              </a:spcAft>
+            </a:pPr>
+            <a:r>
+              <a:rPr sz="950" b="1" i="0">
+                <a:solidFill>
+                  <a:srgbClr val="0F1B3D"/>
+                </a:solidFill>
+                <a:latin typeface="Calibri"/>
+              </a:rPr>
+              <a:t>FiLM</a:t>
+            </a:r>
+            <a:r>
+              <a:rPr sz="900" b="0" i="0">
+                <a:solidFill>
+                  <a:srgbClr val="404856"/>
+                </a:solidFill>
+                <a:latin typeface="Calibri"/>
+              </a:rPr>
+              <a:t>   Feature-wise Linear Modulation (γ scale + β shift)</a:t>
+            </a:r>
+          </a:p>
+          <a:p>
+            <a:pPr algn="l">
+              <a:spcAft>
+                <a:spcPts val="200"/>
+              </a:spcAft>
+            </a:pPr>
+            <a:r>
+              <a:rPr sz="950" b="1" i="0">
+                <a:solidFill>
+                  <a:srgbClr val="0F1B3D"/>
+                </a:solidFill>
+                <a:latin typeface="Calibri"/>
+              </a:rPr>
+              <a:t>stop-grad</a:t>
+            </a:r>
+            <a:r>
+              <a:rPr sz="900" b="0" i="0">
+                <a:solidFill>
+                  <a:srgbClr val="404856"/>
+                </a:solidFill>
+                <a:latin typeface="Calibri"/>
+              </a:rPr>
+              <a:t>   edge that blocks back-propagation</a:t>
+            </a:r>
+          </a:p>
+        </p:txBody>
+      </p:sp>
+      <p:sp>
+        <p:nvSpPr>
+          <p:cNvPr id="9" name="Rounded Rectangle 8"/>
+          <p:cNvSpPr/>
+          <p:nvPr/>
+        </p:nvSpPr>
+        <p:spPr>
+          <a:xfrm>
+            <a:off x="4279391" y="960120"/>
+            <a:ext cx="3749039" cy="2697480"/>
+          </a:xfrm>
+          <a:prstGeom prst="roundRect">
+            <a:avLst>
+              <a:gd name="adj" fmla="val 6000"/>
+            </a:avLst>
+          </a:prstGeom>
+          <a:solidFill>
+            <a:srgbClr val="FDEEEE"/>
+          </a:solidFill>
+          <a:ln w="9525">
+            <a:solidFill>
+              <a:srgbClr val="C3292B"/>
+            </a:solidFill>
+          </a:ln>
+        </p:spPr>
+        <p:style>
+          <a:lnRef idx="1">
+            <a:schemeClr val="accent1"/>
+          </a:lnRef>
+          <a:fillRef idx="3">
+            <a:schemeClr val="accent1"/>
+          </a:fillRef>
+          <a:effectRef idx="2">
+            <a:schemeClr val="accent1"/>
+          </a:effectRef>
+          <a:fontRef idx="minor">
+            <a:schemeClr val="lt1"/>
+          </a:fontRef>
+        </p:style>
+        <p:txBody>
+          <a:bodyPr rtlCol="0" anchor="ctr"/>
+          <a:lstStyle/>
+          <a:p/>
+        </p:txBody>
+      </p:sp>
+      <p:sp>
+        <p:nvSpPr>
+          <p:cNvPr id="10" name="TextBox 9"/>
+          <p:cNvSpPr txBox="1"/>
+          <p:nvPr/>
+        </p:nvSpPr>
+        <p:spPr>
+          <a:xfrm>
+            <a:off x="4443983" y="1033272"/>
+            <a:ext cx="3419855" cy="292608"/>
+          </a:xfrm>
+          <a:prstGeom prst="rect">
+            <a:avLst/>
+          </a:prstGeom>
+          <a:noFill/>
+        </p:spPr>
+        <p:txBody>
+          <a:bodyPr wrap="square" lIns="73152" rIns="73152" tIns="43891" bIns="43891" anchor="t">
+            <a:spAutoFit/>
+          </a:bodyPr>
+          <a:lstStyle/>
+          <a:p>
+            <a:pPr algn="l"/>
+            <a:r>
+              <a:rPr sz="1200" b="1" i="0">
+                <a:solidFill>
+                  <a:srgbClr val="C3292B"/>
+                </a:solidFill>
+                <a:latin typeface="Calibri"/>
+              </a:rPr>
+              <a:t>Losses &amp; Training</a:t>
+            </a:r>
+          </a:p>
+        </p:txBody>
+      </p:sp>
+      <p:sp>
+        <p:nvSpPr>
+          <p:cNvPr id="11" name="TextBox 10"/>
+          <p:cNvSpPr txBox="1"/>
+          <p:nvPr/>
+        </p:nvSpPr>
+        <p:spPr>
+          <a:xfrm>
+            <a:off x="4462271" y="1362456"/>
+            <a:ext cx="3383279" cy="2194560"/>
+          </a:xfrm>
+          <a:prstGeom prst="rect">
+            <a:avLst/>
+          </a:prstGeom>
+          <a:noFill/>
+        </p:spPr>
+        <p:txBody>
+          <a:bodyPr wrap="square" lIns="36576" rIns="36576" tIns="21945" bIns="21945" anchor="t">
+            <a:spAutoFit/>
+          </a:bodyPr>
+          <a:lstStyle/>
+          <a:p>
+            <a:pPr algn="l">
+              <a:spcAft>
+                <a:spcPts val="200"/>
+              </a:spcAft>
+            </a:pPr>
+            <a:r>
+              <a:rPr sz="950" b="1" i="0">
+                <a:solidFill>
+                  <a:srgbClr val="0F1B3D"/>
+                </a:solidFill>
+                <a:latin typeface="Calibri"/>
+              </a:rPr>
+              <a:t>KD</a:t>
+            </a:r>
+            <a:r>
+              <a:rPr sz="900" b="0" i="0">
+                <a:solidFill>
+                  <a:srgbClr val="404856"/>
+                </a:solidFill>
+                <a:latin typeface="Calibri"/>
+              </a:rPr>
+              <a:t>   Knowledge Distillation</a:t>
+            </a:r>
+          </a:p>
+          <a:p>
+            <a:pPr algn="l">
+              <a:spcAft>
+                <a:spcPts val="200"/>
+              </a:spcAft>
+            </a:pPr>
+            <a:r>
+              <a:rPr sz="950" b="1" i="0">
+                <a:solidFill>
+                  <a:srgbClr val="0F1B3D"/>
+                </a:solidFill>
+                <a:latin typeface="Calibri"/>
+              </a:rPr>
+              <a:t>Focal CE</a:t>
+            </a:r>
+            <a:r>
+              <a:rPr sz="900" b="0" i="0">
+                <a:solidFill>
+                  <a:srgbClr val="404856"/>
+                </a:solidFill>
+                <a:latin typeface="Calibri"/>
+              </a:rPr>
+              <a:t>   Focal Cross-Entropy</a:t>
+            </a:r>
+          </a:p>
+          <a:p>
+            <a:pPr algn="l">
+              <a:spcAft>
+                <a:spcPts val="200"/>
+              </a:spcAft>
+            </a:pPr>
+            <a:r>
+              <a:rPr sz="950" b="1" i="0">
+                <a:solidFill>
+                  <a:srgbClr val="0F1B3D"/>
+                </a:solidFill>
+                <a:latin typeface="Calibri"/>
+              </a:rPr>
+              <a:t>AAM-Softmax</a:t>
+            </a:r>
+            <a:r>
+              <a:rPr sz="900" b="0" i="0">
+                <a:solidFill>
+                  <a:srgbClr val="404856"/>
+                </a:solidFill>
+                <a:latin typeface="Calibri"/>
+              </a:rPr>
+              <a:t>   Additive Angular Margin Softmax</a:t>
+            </a:r>
+          </a:p>
+          <a:p>
+            <a:pPr algn="l">
+              <a:spcAft>
+                <a:spcPts val="200"/>
+              </a:spcAft>
+            </a:pPr>
+            <a:r>
+              <a:rPr sz="950" b="1" i="0">
+                <a:solidFill>
+                  <a:srgbClr val="0F1B3D"/>
+                </a:solidFill>
+                <a:latin typeface="Calibri"/>
+              </a:rPr>
+              <a:t>Sub-center</a:t>
+            </a:r>
+            <a:r>
+              <a:rPr sz="900" b="0" i="0">
+                <a:solidFill>
+                  <a:srgbClr val="404856"/>
+                </a:solidFill>
+                <a:latin typeface="Calibri"/>
+              </a:rPr>
+              <a:t>   AAM variant — handles label noise (K=3 cones)</a:t>
+            </a:r>
+          </a:p>
+          <a:p>
+            <a:pPr algn="l">
+              <a:spcAft>
+                <a:spcPts val="200"/>
+              </a:spcAft>
+            </a:pPr>
+            <a:r>
+              <a:rPr sz="950" b="1" i="0">
+                <a:solidFill>
+                  <a:srgbClr val="0F1B3D"/>
+                </a:solidFill>
+                <a:latin typeface="Calibri"/>
+              </a:rPr>
+              <a:t>KL</a:t>
+            </a:r>
+            <a:r>
+              <a:rPr sz="900" b="0" i="0">
+                <a:solidFill>
+                  <a:srgbClr val="404856"/>
+                </a:solidFill>
+                <a:latin typeface="Calibri"/>
+              </a:rPr>
+              <a:t>   Kullback–Leibler divergence</a:t>
+            </a:r>
+          </a:p>
+          <a:p>
+            <a:pPr algn="l">
+              <a:spcAft>
+                <a:spcPts val="200"/>
+              </a:spcAft>
+            </a:pPr>
+            <a:r>
+              <a:rPr sz="950" b="1" i="0">
+                <a:solidFill>
+                  <a:srgbClr val="0F1B3D"/>
+                </a:solidFill>
+                <a:latin typeface="Calibri"/>
+              </a:rPr>
+              <a:t>L_hint</a:t>
+            </a:r>
+            <a:r>
+              <a:rPr sz="900" b="0" i="0">
+                <a:solidFill>
+                  <a:srgbClr val="404856"/>
+                </a:solidFill>
+                <a:latin typeface="Calibri"/>
+              </a:rPr>
+              <a:t>   feature-matching distillation loss</a:t>
+            </a:r>
+          </a:p>
+          <a:p>
+            <a:pPr algn="l">
+              <a:spcAft>
+                <a:spcPts val="200"/>
+              </a:spcAft>
+            </a:pPr>
+            <a:r>
+              <a:rPr sz="950" b="1" i="0">
+                <a:solidFill>
+                  <a:srgbClr val="0F1B3D"/>
+                </a:solidFill>
+                <a:latin typeface="Calibri"/>
+              </a:rPr>
+              <a:t>T,  λᵢ,  m</a:t>
+            </a:r>
+            <a:r>
+              <a:rPr sz="900" b="0" i="0">
+                <a:solidFill>
+                  <a:srgbClr val="404856"/>
+                </a:solidFill>
+                <a:latin typeface="Calibri"/>
+              </a:rPr>
+              <a:t>   distill temperature  ·  loss weights  ·  margin</a:t>
+            </a:r>
+          </a:p>
+          <a:p>
+            <a:pPr algn="l">
+              <a:spcAft>
+                <a:spcPts val="200"/>
+              </a:spcAft>
+            </a:pPr>
+            <a:r>
+              <a:rPr sz="950" b="1" i="0">
+                <a:solidFill>
+                  <a:srgbClr val="0F1B3D"/>
+                </a:solidFill>
+                <a:latin typeface="Calibri"/>
+              </a:rPr>
+              <a:t>GRL</a:t>
+            </a:r>
+            <a:r>
+              <a:rPr sz="900" b="0" i="0">
+                <a:solidFill>
+                  <a:srgbClr val="404856"/>
+                </a:solidFill>
+                <a:latin typeface="Calibri"/>
+              </a:rPr>
+              <a:t>   Gradient Reversal Layer</a:t>
+            </a:r>
+          </a:p>
+        </p:txBody>
+      </p:sp>
+      <p:sp>
+        <p:nvSpPr>
+          <p:cNvPr id="12" name="Rounded Rectangle 11"/>
+          <p:cNvSpPr/>
+          <p:nvPr/>
+        </p:nvSpPr>
+        <p:spPr>
+          <a:xfrm>
+            <a:off x="8147302" y="960120"/>
+            <a:ext cx="3749039" cy="2697480"/>
+          </a:xfrm>
+          <a:prstGeom prst="roundRect">
+            <a:avLst>
+              <a:gd name="adj" fmla="val 6000"/>
+            </a:avLst>
+          </a:prstGeom>
+          <a:solidFill>
+            <a:srgbClr val="E7F4EC"/>
+          </a:solidFill>
+          <a:ln w="9525">
+            <a:solidFill>
+              <a:srgbClr val="1B7F4F"/>
+            </a:solidFill>
+          </a:ln>
+        </p:spPr>
+        <p:style>
+          <a:lnRef idx="1">
+            <a:schemeClr val="accent1"/>
+          </a:lnRef>
+          <a:fillRef idx="3">
+            <a:schemeClr val="accent1"/>
+          </a:fillRef>
+          <a:effectRef idx="2">
+            <a:schemeClr val="accent1"/>
+          </a:effectRef>
+          <a:fontRef idx="minor">
+            <a:schemeClr val="lt1"/>
+          </a:fontRef>
+        </p:style>
+        <p:txBody>
+          <a:bodyPr rtlCol="0" anchor="ctr"/>
+          <a:lstStyle/>
+          <a:p/>
+        </p:txBody>
+      </p:sp>
+      <p:sp>
+        <p:nvSpPr>
+          <p:cNvPr id="13" name="TextBox 12"/>
+          <p:cNvSpPr txBox="1"/>
+          <p:nvPr/>
+        </p:nvSpPr>
+        <p:spPr>
+          <a:xfrm>
+            <a:off x="8311894" y="1033272"/>
+            <a:ext cx="3419855" cy="292608"/>
+          </a:xfrm>
+          <a:prstGeom prst="rect">
+            <a:avLst/>
+          </a:prstGeom>
+          <a:noFill/>
+        </p:spPr>
+        <p:txBody>
+          <a:bodyPr wrap="square" lIns="73152" rIns="73152" tIns="43891" bIns="43891" anchor="t">
+            <a:spAutoFit/>
+          </a:bodyPr>
+          <a:lstStyle/>
+          <a:p>
+            <a:pPr algn="l"/>
+            <a:r>
+              <a:rPr sz="1200" b="1" i="0">
+                <a:solidFill>
+                  <a:srgbClr val="1B7F4F"/>
+                </a:solidFill>
+                <a:latin typeface="Calibri"/>
+              </a:rPr>
+              <a:t>Metrics</a:t>
+            </a:r>
+          </a:p>
+        </p:txBody>
+      </p:sp>
+      <p:sp>
+        <p:nvSpPr>
+          <p:cNvPr id="14" name="TextBox 13"/>
+          <p:cNvSpPr txBox="1"/>
+          <p:nvPr/>
+        </p:nvSpPr>
+        <p:spPr>
+          <a:xfrm>
+            <a:off x="8330182" y="1362456"/>
+            <a:ext cx="3383279" cy="2194560"/>
+          </a:xfrm>
+          <a:prstGeom prst="rect">
+            <a:avLst/>
+          </a:prstGeom>
+          <a:noFill/>
+        </p:spPr>
+        <p:txBody>
+          <a:bodyPr wrap="square" lIns="36576" rIns="36576" tIns="21945" bIns="21945" anchor="t">
+            <a:spAutoFit/>
+          </a:bodyPr>
+          <a:lstStyle/>
+          <a:p>
+            <a:pPr algn="l">
+              <a:spcAft>
+                <a:spcPts val="200"/>
+              </a:spcAft>
+            </a:pPr>
+            <a:r>
+              <a:rPr sz="950" b="1" i="0">
+                <a:solidFill>
+                  <a:srgbClr val="0F1B3D"/>
+                </a:solidFill>
+                <a:latin typeface="Calibri"/>
+              </a:rPr>
+              <a:t>KWS, SV</a:t>
+            </a:r>
+            <a:r>
+              <a:rPr sz="900" b="0" i="0">
+                <a:solidFill>
+                  <a:srgbClr val="404856"/>
+                </a:solidFill>
+                <a:latin typeface="Calibri"/>
+              </a:rPr>
+              <a:t>   Keyword Spotting  ·  Speaker Verification</a:t>
+            </a:r>
+          </a:p>
+          <a:p>
+            <a:pPr algn="l">
+              <a:spcAft>
+                <a:spcPts val="200"/>
+              </a:spcAft>
+            </a:pPr>
+            <a:r>
+              <a:rPr sz="950" b="1" i="0">
+                <a:solidFill>
+                  <a:srgbClr val="0F1B3D"/>
+                </a:solidFill>
+                <a:latin typeface="Calibri"/>
+              </a:rPr>
+              <a:t>TA / FA</a:t>
+            </a:r>
+            <a:r>
+              <a:rPr sz="900" b="0" i="0">
+                <a:solidFill>
+                  <a:srgbClr val="404856"/>
+                </a:solidFill>
+                <a:latin typeface="Calibri"/>
+              </a:rPr>
+              <a:t>   True / False Acceptance (event)</a:t>
+            </a:r>
+          </a:p>
+          <a:p>
+            <a:pPr algn="l">
+              <a:spcAft>
+                <a:spcPts val="200"/>
+              </a:spcAft>
+            </a:pPr>
+            <a:r>
+              <a:rPr sz="950" b="1" i="0">
+                <a:solidFill>
+                  <a:srgbClr val="0F1B3D"/>
+                </a:solidFill>
+                <a:latin typeface="Calibri"/>
+              </a:rPr>
+              <a:t>TAR / FAR</a:t>
+            </a:r>
+            <a:r>
+              <a:rPr sz="900" b="0" i="0">
+                <a:solidFill>
+                  <a:srgbClr val="404856"/>
+                </a:solidFill>
+                <a:latin typeface="Calibri"/>
+              </a:rPr>
+              <a:t>   True / False Acceptance Rate (%)</a:t>
+            </a:r>
+          </a:p>
+          <a:p>
+            <a:pPr algn="l">
+              <a:spcAft>
+                <a:spcPts val="200"/>
+              </a:spcAft>
+            </a:pPr>
+            <a:r>
+              <a:rPr sz="950" b="1" i="0">
+                <a:solidFill>
+                  <a:srgbClr val="0F1B3D"/>
+                </a:solidFill>
+                <a:latin typeface="Calibri"/>
+              </a:rPr>
+              <a:t>FRR</a:t>
+            </a:r>
+            <a:r>
+              <a:rPr sz="900" b="0" i="0">
+                <a:solidFill>
+                  <a:srgbClr val="404856"/>
+                </a:solidFill>
+                <a:latin typeface="Calibri"/>
+              </a:rPr>
+              <a:t>   False Rejection Rate</a:t>
+            </a:r>
+          </a:p>
+          <a:p>
+            <a:pPr algn="l">
+              <a:spcAft>
+                <a:spcPts val="200"/>
+              </a:spcAft>
+            </a:pPr>
+            <a:r>
+              <a:rPr sz="950" b="1" i="0">
+                <a:solidFill>
+                  <a:srgbClr val="0F1B3D"/>
+                </a:solidFill>
+                <a:latin typeface="Calibri"/>
+              </a:rPr>
+              <a:t>EER</a:t>
+            </a:r>
+            <a:r>
+              <a:rPr sz="900" b="0" i="0">
+                <a:solidFill>
+                  <a:srgbClr val="404856"/>
+                </a:solidFill>
+                <a:latin typeface="Calibri"/>
+              </a:rPr>
+              <a:t>   Equal Error Rate (FAR = FRR crossover)</a:t>
+            </a:r>
+          </a:p>
+          <a:p>
+            <a:pPr algn="l">
+              <a:spcAft>
+                <a:spcPts val="200"/>
+              </a:spcAft>
+            </a:pPr>
+            <a:r>
+              <a:rPr sz="950" b="1" i="0">
+                <a:solidFill>
+                  <a:srgbClr val="0F1B3D"/>
+                </a:solidFill>
+                <a:latin typeface="Calibri"/>
+              </a:rPr>
+              <a:t>AUC</a:t>
+            </a:r>
+            <a:r>
+              <a:rPr sz="900" b="0" i="0">
+                <a:solidFill>
+                  <a:srgbClr val="404856"/>
+                </a:solidFill>
+                <a:latin typeface="Calibri"/>
+              </a:rPr>
+              <a:t>   Area Under ROC Curve</a:t>
+            </a:r>
+          </a:p>
+          <a:p>
+            <a:pPr algn="l">
+              <a:spcAft>
+                <a:spcPts val="200"/>
+              </a:spcAft>
+            </a:pPr>
+            <a:r>
+              <a:rPr sz="950" b="1" i="0">
+                <a:solidFill>
+                  <a:srgbClr val="0F1B3D"/>
+                </a:solidFill>
+                <a:latin typeface="Calibri"/>
+              </a:rPr>
+              <a:t>REJ</a:t>
+            </a:r>
+            <a:r>
+              <a:rPr sz="900" b="0" i="0">
+                <a:solidFill>
+                  <a:srgbClr val="404856"/>
+                </a:solidFill>
+                <a:latin typeface="Calibri"/>
+              </a:rPr>
+              <a:t>   impostor-rejection rate</a:t>
+            </a:r>
+          </a:p>
+          <a:p>
+            <a:pPr algn="l">
+              <a:spcAft>
+                <a:spcPts val="200"/>
+              </a:spcAft>
+            </a:pPr>
+            <a:r>
+              <a:rPr sz="950" b="1" i="0">
+                <a:solidFill>
+                  <a:srgbClr val="0F1B3D"/>
+                </a:solidFill>
+                <a:latin typeface="Calibri"/>
+              </a:rPr>
+              <a:t>pp,  xRT,  SNR</a:t>
+            </a:r>
+            <a:r>
+              <a:rPr sz="900" b="0" i="0">
+                <a:solidFill>
+                  <a:srgbClr val="404856"/>
+                </a:solidFill>
+                <a:latin typeface="Calibri"/>
+              </a:rPr>
+              <a:t>   percentage pts  ·  real-time factor  ·  signal/noise (dB)</a:t>
+            </a:r>
+          </a:p>
+        </p:txBody>
+      </p:sp>
+      <p:sp>
+        <p:nvSpPr>
+          <p:cNvPr id="15" name="Rounded Rectangle 14"/>
+          <p:cNvSpPr/>
+          <p:nvPr/>
+        </p:nvSpPr>
+        <p:spPr>
+          <a:xfrm>
+            <a:off x="411480" y="3776472"/>
+            <a:ext cx="3749039" cy="2697480"/>
+          </a:xfrm>
+          <a:prstGeom prst="roundRect">
+            <a:avLst>
+              <a:gd name="adj" fmla="val 6000"/>
+            </a:avLst>
+          </a:prstGeom>
+          <a:solidFill>
+            <a:srgbClr val="FBF2DD"/>
+          </a:solidFill>
+          <a:ln w="9525">
+            <a:solidFill>
+              <a:srgbClr val="B8860B"/>
+            </a:solidFill>
+          </a:ln>
+        </p:spPr>
+        <p:style>
+          <a:lnRef idx="1">
+            <a:schemeClr val="accent1"/>
+          </a:lnRef>
+          <a:fillRef idx="3">
+            <a:schemeClr val="accent1"/>
+          </a:fillRef>
+          <a:effectRef idx="2">
+            <a:schemeClr val="accent1"/>
+          </a:effectRef>
+          <a:fontRef idx="minor">
+            <a:schemeClr val="lt1"/>
+          </a:fontRef>
+        </p:style>
+        <p:txBody>
+          <a:bodyPr rtlCol="0" anchor="ctr"/>
+          <a:lstStyle/>
+          <a:p/>
+        </p:txBody>
+      </p:sp>
+      <p:sp>
+        <p:nvSpPr>
+          <p:cNvPr id="16" name="TextBox 15"/>
+          <p:cNvSpPr txBox="1"/>
+          <p:nvPr/>
+        </p:nvSpPr>
+        <p:spPr>
+          <a:xfrm>
+            <a:off x="576072" y="3849624"/>
+            <a:ext cx="3419855" cy="292608"/>
+          </a:xfrm>
+          <a:prstGeom prst="rect">
+            <a:avLst/>
+          </a:prstGeom>
+          <a:noFill/>
+        </p:spPr>
+        <p:txBody>
+          <a:bodyPr wrap="square" lIns="73152" rIns="73152" tIns="43891" bIns="43891" anchor="t">
+            <a:spAutoFit/>
+          </a:bodyPr>
+          <a:lstStyle/>
+          <a:p>
+            <a:pPr algn="l"/>
+            <a:r>
+              <a:rPr sz="1200" b="1" i="0">
+                <a:solidFill>
+                  <a:srgbClr val="B8860B"/>
+                </a:solidFill>
+                <a:latin typeface="Calibri"/>
+              </a:rPr>
+              <a:t>Datasets &amp; Models</a:t>
+            </a:r>
+          </a:p>
+        </p:txBody>
+      </p:sp>
+      <p:sp>
+        <p:nvSpPr>
+          <p:cNvPr id="17" name="TextBox 16"/>
+          <p:cNvSpPr txBox="1"/>
+          <p:nvPr/>
+        </p:nvSpPr>
+        <p:spPr>
+          <a:xfrm>
+            <a:off x="594360" y="4178808"/>
+            <a:ext cx="3383279" cy="2194560"/>
+          </a:xfrm>
+          <a:prstGeom prst="rect">
+            <a:avLst/>
+          </a:prstGeom>
+          <a:noFill/>
+        </p:spPr>
+        <p:txBody>
+          <a:bodyPr wrap="square" lIns="36576" rIns="36576" tIns="21945" bIns="21945" anchor="t">
+            <a:spAutoFit/>
+          </a:bodyPr>
+          <a:lstStyle/>
+          <a:p>
+            <a:pPr algn="l">
+              <a:spcAft>
+                <a:spcPts val="200"/>
+              </a:spcAft>
+            </a:pPr>
+            <a:r>
+              <a:rPr sz="950" b="1" i="0">
+                <a:solidFill>
+                  <a:srgbClr val="0F1B3D"/>
+                </a:solidFill>
+                <a:latin typeface="Calibri"/>
+              </a:rPr>
+              <a:t>SC V2</a:t>
+            </a:r>
+            <a:r>
+              <a:rPr sz="900" b="0" i="0">
+                <a:solidFill>
+                  <a:srgbClr val="404856"/>
+                </a:solidFill>
+                <a:latin typeface="Calibri"/>
+              </a:rPr>
+              <a:t>   Google Speech Commands v0.02 (KWS corpus)</a:t>
+            </a:r>
+          </a:p>
+          <a:p>
+            <a:pPr algn="l">
+              <a:spcAft>
+                <a:spcPts val="200"/>
+              </a:spcAft>
+            </a:pPr>
+            <a:r>
+              <a:rPr sz="950" b="1" i="0">
+                <a:solidFill>
+                  <a:srgbClr val="0F1B3D"/>
+                </a:solidFill>
+                <a:latin typeface="Calibri"/>
+              </a:rPr>
+              <a:t>MSWC</a:t>
+            </a:r>
+            <a:r>
+              <a:rPr sz="900" b="0" i="0">
+                <a:solidFill>
+                  <a:srgbClr val="404856"/>
+                </a:solidFill>
+                <a:latin typeface="Calibri"/>
+              </a:rPr>
+              <a:t>   MLCommons Spoken Words Corpus (multilingual)</a:t>
+            </a:r>
+          </a:p>
+          <a:p>
+            <a:pPr algn="l">
+              <a:spcAft>
+                <a:spcPts val="200"/>
+              </a:spcAft>
+            </a:pPr>
+            <a:r>
+              <a:rPr sz="950" b="1" i="0">
+                <a:solidFill>
+                  <a:srgbClr val="0F1B3D"/>
+                </a:solidFill>
+                <a:latin typeface="Calibri"/>
+              </a:rPr>
+              <a:t>VoxCeleb1-O</a:t>
+            </a:r>
+            <a:r>
+              <a:rPr sz="900" b="0" i="0">
+                <a:solidFill>
+                  <a:srgbClr val="404856"/>
+                </a:solidFill>
+                <a:latin typeface="Calibri"/>
+              </a:rPr>
+              <a:t>   Original VoxCeleb1 trial list (37 720 pairs)</a:t>
+            </a:r>
+          </a:p>
+          <a:p>
+            <a:pPr algn="l">
+              <a:spcAft>
+                <a:spcPts val="200"/>
+              </a:spcAft>
+            </a:pPr>
+            <a:r>
+              <a:rPr sz="950" b="1" i="0">
+                <a:solidFill>
+                  <a:srgbClr val="0F1B3D"/>
+                </a:solidFill>
+                <a:latin typeface="Calibri"/>
+              </a:rPr>
+              <a:t>MUSAN</a:t>
+            </a:r>
+            <a:r>
+              <a:rPr sz="900" b="0" i="0">
+                <a:solidFill>
+                  <a:srgbClr val="404856"/>
+                </a:solidFill>
+                <a:latin typeface="Calibri"/>
+              </a:rPr>
+              <a:t>   Music-Speech-Noise corpus (noise augmentation)</a:t>
+            </a:r>
+          </a:p>
+          <a:p>
+            <a:pPr algn="l">
+              <a:spcAft>
+                <a:spcPts val="200"/>
+              </a:spcAft>
+            </a:pPr>
+            <a:r>
+              <a:rPr sz="950" b="1" i="0">
+                <a:solidFill>
+                  <a:srgbClr val="0F1B3D"/>
+                </a:solidFill>
+                <a:latin typeface="Calibri"/>
+              </a:rPr>
+              <a:t>RIR</a:t>
+            </a:r>
+            <a:r>
+              <a:rPr sz="900" b="0" i="0">
+                <a:solidFill>
+                  <a:srgbClr val="404856"/>
+                </a:solidFill>
+                <a:latin typeface="Calibri"/>
+              </a:rPr>
+              <a:t>   Room Impulse Response (far-field simulation)</a:t>
+            </a:r>
+          </a:p>
+          <a:p>
+            <a:pPr algn="l">
+              <a:spcAft>
+                <a:spcPts val="200"/>
+              </a:spcAft>
+            </a:pPr>
+            <a:r>
+              <a:rPr sz="950" b="1" i="0">
+                <a:solidFill>
+                  <a:srgbClr val="0F1B3D"/>
+                </a:solidFill>
+                <a:latin typeface="Calibri"/>
+              </a:rPr>
+              <a:t>WavLM</a:t>
+            </a:r>
+            <a:r>
+              <a:rPr sz="900" b="0" i="0">
+                <a:solidFill>
+                  <a:srgbClr val="404856"/>
+                </a:solidFill>
+                <a:latin typeface="Calibri"/>
+              </a:rPr>
+              <a:t>   Microsoft pretrained speech encoder</a:t>
+            </a:r>
+          </a:p>
+          <a:p>
+            <a:pPr algn="l">
+              <a:spcAft>
+                <a:spcPts val="200"/>
+              </a:spcAft>
+            </a:pPr>
+            <a:r>
+              <a:rPr sz="950" b="1" i="0">
+                <a:solidFill>
+                  <a:srgbClr val="0F1B3D"/>
+                </a:solidFill>
+                <a:latin typeface="Calibri"/>
+              </a:rPr>
+              <a:t>ECAPA-TDNN</a:t>
+            </a:r>
+            <a:r>
+              <a:rPr sz="900" b="0" i="0">
+                <a:solidFill>
+                  <a:srgbClr val="404856"/>
+                </a:solidFill>
+                <a:latin typeface="Calibri"/>
+              </a:rPr>
+              <a:t>   pretrained speaker-verification model</a:t>
+            </a:r>
+          </a:p>
+          <a:p>
+            <a:pPr algn="l">
+              <a:spcAft>
+                <a:spcPts val="200"/>
+              </a:spcAft>
+            </a:pPr>
+            <a:r>
+              <a:rPr sz="950" b="1" i="0">
+                <a:solidFill>
+                  <a:srgbClr val="0F1B3D"/>
+                </a:solidFill>
+                <a:latin typeface="Calibri"/>
+              </a:rPr>
+              <a:t>XTTS-v2 / g2p-en</a:t>
+            </a:r>
+            <a:r>
+              <a:rPr sz="900" b="0" i="0">
+                <a:solidFill>
+                  <a:srgbClr val="404856"/>
+                </a:solidFill>
+                <a:latin typeface="Calibri"/>
+              </a:rPr>
+              <a:t>   Coqui multilingual TTS  ·  English G2P</a:t>
+            </a:r>
+          </a:p>
+        </p:txBody>
+      </p:sp>
+      <p:sp>
+        <p:nvSpPr>
+          <p:cNvPr id="18" name="Rounded Rectangle 17"/>
+          <p:cNvSpPr/>
+          <p:nvPr/>
+        </p:nvSpPr>
+        <p:spPr>
+          <a:xfrm>
+            <a:off x="4279391" y="3776472"/>
+            <a:ext cx="3749039" cy="2697480"/>
+          </a:xfrm>
+          <a:prstGeom prst="roundRect">
+            <a:avLst>
+              <a:gd name="adj" fmla="val 6000"/>
+            </a:avLst>
+          </a:prstGeom>
+          <a:solidFill>
+            <a:srgbClr val="EEF1F7"/>
+          </a:solidFill>
+          <a:ln w="9525">
+            <a:solidFill>
+              <a:srgbClr val="0F1B3D"/>
+            </a:solidFill>
+          </a:ln>
+        </p:spPr>
+        <p:style>
+          <a:lnRef idx="1">
+            <a:schemeClr val="accent1"/>
+          </a:lnRef>
+          <a:fillRef idx="3">
+            <a:schemeClr val="accent1"/>
+          </a:fillRef>
+          <a:effectRef idx="2">
+            <a:schemeClr val="accent1"/>
+          </a:effectRef>
+          <a:fontRef idx="minor">
+            <a:schemeClr val="lt1"/>
+          </a:fontRef>
+        </p:style>
+        <p:txBody>
+          <a:bodyPr rtlCol="0" anchor="ctr"/>
+          <a:lstStyle/>
+          <a:p/>
+        </p:txBody>
+      </p:sp>
+      <p:sp>
+        <p:nvSpPr>
+          <p:cNvPr id="19" name="TextBox 18"/>
+          <p:cNvSpPr txBox="1"/>
+          <p:nvPr/>
+        </p:nvSpPr>
+        <p:spPr>
+          <a:xfrm>
+            <a:off x="4443983" y="3849624"/>
+            <a:ext cx="3419855" cy="292608"/>
+          </a:xfrm>
+          <a:prstGeom prst="rect">
+            <a:avLst/>
+          </a:prstGeom>
+          <a:noFill/>
+        </p:spPr>
+        <p:txBody>
+          <a:bodyPr wrap="square" lIns="73152" rIns="73152" tIns="43891" bIns="43891" anchor="t">
+            <a:spAutoFit/>
+          </a:bodyPr>
+          <a:lstStyle/>
+          <a:p>
+            <a:pPr algn="l"/>
+            <a:r>
+              <a:rPr sz="1200" b="1" i="0">
+                <a:solidFill>
+                  <a:srgbClr val="0F1B3D"/>
+                </a:solidFill>
+                <a:latin typeface="Calibri"/>
+              </a:rPr>
+              <a:t>Deployment</a:t>
+            </a:r>
+          </a:p>
+        </p:txBody>
+      </p:sp>
+      <p:sp>
+        <p:nvSpPr>
+          <p:cNvPr id="20" name="TextBox 19"/>
+          <p:cNvSpPr txBox="1"/>
+          <p:nvPr/>
+        </p:nvSpPr>
+        <p:spPr>
+          <a:xfrm>
+            <a:off x="4462271" y="4178808"/>
+            <a:ext cx="3383279" cy="2194560"/>
+          </a:xfrm>
+          <a:prstGeom prst="rect">
+            <a:avLst/>
+          </a:prstGeom>
+          <a:noFill/>
+        </p:spPr>
+        <p:txBody>
+          <a:bodyPr wrap="square" lIns="36576" rIns="36576" tIns="21945" bIns="21945" anchor="t">
+            <a:spAutoFit/>
+          </a:bodyPr>
+          <a:lstStyle/>
+          <a:p>
+            <a:pPr algn="l">
+              <a:spcAft>
+                <a:spcPts val="200"/>
+              </a:spcAft>
+            </a:pPr>
+            <a:r>
+              <a:rPr sz="950" b="1" i="0">
+                <a:solidFill>
+                  <a:srgbClr val="0F1B3D"/>
+                </a:solidFill>
+                <a:latin typeface="Calibri"/>
+              </a:rPr>
+              <a:t>ONNX</a:t>
+            </a:r>
+            <a:r>
+              <a:rPr sz="900" b="0" i="0">
+                <a:solidFill>
+                  <a:srgbClr val="404856"/>
+                </a:solidFill>
+                <a:latin typeface="Calibri"/>
+              </a:rPr>
+              <a:t>   Open Neural Network Exchange (export format)</a:t>
+            </a:r>
+          </a:p>
+          <a:p>
+            <a:pPr algn="l">
+              <a:spcAft>
+                <a:spcPts val="200"/>
+              </a:spcAft>
+            </a:pPr>
+            <a:r>
+              <a:rPr sz="950" b="1" i="0">
+                <a:solidFill>
+                  <a:srgbClr val="0F1B3D"/>
+                </a:solidFill>
+                <a:latin typeface="Calibri"/>
+              </a:rPr>
+              <a:t>ORT</a:t>
+            </a:r>
+            <a:r>
+              <a:rPr sz="900" b="0" i="0">
+                <a:solidFill>
+                  <a:srgbClr val="404856"/>
+                </a:solidFill>
+                <a:latin typeface="Calibri"/>
+              </a:rPr>
+              <a:t>   ONNX Runtime — inference engine</a:t>
+            </a:r>
+          </a:p>
+          <a:p>
+            <a:pPr algn="l">
+              <a:spcAft>
+                <a:spcPts val="200"/>
+              </a:spcAft>
+            </a:pPr>
+            <a:r>
+              <a:rPr sz="950" b="1" i="0">
+                <a:solidFill>
+                  <a:srgbClr val="0F1B3D"/>
+                </a:solidFill>
+                <a:latin typeface="Calibri"/>
+              </a:rPr>
+              <a:t>PTQ</a:t>
+            </a:r>
+            <a:r>
+              <a:rPr sz="900" b="0" i="0">
+                <a:solidFill>
+                  <a:srgbClr val="404856"/>
+                </a:solidFill>
+                <a:latin typeface="Calibri"/>
+              </a:rPr>
+              <a:t>   Post-Training Quantization</a:t>
+            </a:r>
+          </a:p>
+          <a:p>
+            <a:pPr algn="l">
+              <a:spcAft>
+                <a:spcPts val="200"/>
+              </a:spcAft>
+            </a:pPr>
+            <a:r>
+              <a:rPr sz="950" b="1" i="0">
+                <a:solidFill>
+                  <a:srgbClr val="0F1B3D"/>
+                </a:solidFill>
+                <a:latin typeface="Calibri"/>
+              </a:rPr>
+              <a:t>QAT</a:t>
+            </a:r>
+            <a:r>
+              <a:rPr sz="900" b="0" i="0">
+                <a:solidFill>
+                  <a:srgbClr val="404856"/>
+                </a:solidFill>
+                <a:latin typeface="Calibri"/>
+              </a:rPr>
+              <a:t>   Quantization-Aware Training</a:t>
+            </a:r>
+          </a:p>
+          <a:p>
+            <a:pPr algn="l">
+              <a:spcAft>
+                <a:spcPts val="200"/>
+              </a:spcAft>
+            </a:pPr>
+            <a:r>
+              <a:rPr sz="950" b="1" i="0">
+                <a:solidFill>
+                  <a:srgbClr val="0F1B3D"/>
+                </a:solidFill>
+                <a:latin typeface="Calibri"/>
+              </a:rPr>
+              <a:t>INT8</a:t>
+            </a:r>
+            <a:r>
+              <a:rPr sz="900" b="0" i="0">
+                <a:solidFill>
+                  <a:srgbClr val="404856"/>
+                </a:solidFill>
+                <a:latin typeface="Calibri"/>
+              </a:rPr>
+              <a:t>   8-bit integer (vs FP32)</a:t>
+            </a:r>
+          </a:p>
+          <a:p>
+            <a:pPr algn="l">
+              <a:spcAft>
+                <a:spcPts val="200"/>
+              </a:spcAft>
+            </a:pPr>
+            <a:r>
+              <a:rPr sz="950" b="1" i="0">
+                <a:solidFill>
+                  <a:srgbClr val="0F1B3D"/>
+                </a:solidFill>
+                <a:latin typeface="Calibri"/>
+              </a:rPr>
+              <a:t>Pi 4B</a:t>
+            </a:r>
+            <a:r>
+              <a:rPr sz="900" b="0" i="0">
+                <a:solidFill>
+                  <a:srgbClr val="404856"/>
+                </a:solidFill>
+                <a:latin typeface="Calibri"/>
+              </a:rPr>
+              <a:t>   Raspberry Pi 4 Model B — conservative edge target</a:t>
+            </a:r>
+          </a:p>
+          <a:p>
+            <a:pPr algn="l">
+              <a:spcAft>
+                <a:spcPts val="200"/>
+              </a:spcAft>
+            </a:pPr>
+            <a:r>
+              <a:rPr sz="950" b="1" i="0">
+                <a:solidFill>
+                  <a:srgbClr val="0F1B3D"/>
+                </a:solidFill>
+                <a:latin typeface="Calibri"/>
+              </a:rPr>
+              <a:t>QNN</a:t>
+            </a:r>
+            <a:r>
+              <a:rPr sz="900" b="0" i="0">
+                <a:solidFill>
+                  <a:srgbClr val="404856"/>
+                </a:solidFill>
+                <a:latin typeface="Calibri"/>
+              </a:rPr>
+              <a:t>   Qualcomm Neural Network SDK</a:t>
+            </a:r>
+          </a:p>
+          <a:p>
+            <a:pPr algn="l">
+              <a:spcAft>
+                <a:spcPts val="200"/>
+              </a:spcAft>
+            </a:pPr>
+            <a:r>
+              <a:rPr sz="950" b="1" i="0">
+                <a:solidFill>
+                  <a:srgbClr val="0F1B3D"/>
+                </a:solidFill>
+                <a:latin typeface="Calibri"/>
+              </a:rPr>
+              <a:t>NPU</a:t>
+            </a:r>
+            <a:r>
+              <a:rPr sz="900" b="0" i="0">
+                <a:solidFill>
+                  <a:srgbClr val="404856"/>
+                </a:solidFill>
+                <a:latin typeface="Calibri"/>
+              </a:rPr>
+              <a:t>   Neural Processing Unit (on-device accelerator)</a:t>
+            </a:r>
+          </a:p>
+        </p:txBody>
+      </p:sp>
+      <p:sp>
+        <p:nvSpPr>
+          <p:cNvPr id="21" name="Rounded Rectangle 20"/>
+          <p:cNvSpPr/>
+          <p:nvPr/>
+        </p:nvSpPr>
+        <p:spPr>
+          <a:xfrm>
+            <a:off x="8147302" y="3776472"/>
+            <a:ext cx="3749039" cy="2697480"/>
+          </a:xfrm>
+          <a:prstGeom prst="roundRect">
+            <a:avLst>
+              <a:gd name="adj" fmla="val 6000"/>
+            </a:avLst>
+          </a:prstGeom>
+          <a:solidFill>
+            <a:srgbClr val="ECF2FC"/>
+          </a:solidFill>
+          <a:ln w="9525">
+            <a:solidFill>
+              <a:srgbClr val="144BC4"/>
+            </a:solidFill>
+          </a:ln>
+        </p:spPr>
+        <p:style>
+          <a:lnRef idx="1">
+            <a:schemeClr val="accent1"/>
+          </a:lnRef>
+          <a:fillRef idx="3">
+            <a:schemeClr val="accent1"/>
+          </a:fillRef>
+          <a:effectRef idx="2">
+            <a:schemeClr val="accent1"/>
+          </a:effectRef>
+          <a:fontRef idx="minor">
+            <a:schemeClr val="lt1"/>
+          </a:fontRef>
+        </p:style>
+        <p:txBody>
+          <a:bodyPr rtlCol="0" anchor="ctr"/>
+          <a:lstStyle/>
+          <a:p/>
+        </p:txBody>
+      </p:sp>
+      <p:sp>
+        <p:nvSpPr>
+          <p:cNvPr id="22" name="TextBox 21"/>
+          <p:cNvSpPr txBox="1"/>
+          <p:nvPr/>
+        </p:nvSpPr>
+        <p:spPr>
+          <a:xfrm>
+            <a:off x="8311894" y="3849624"/>
+            <a:ext cx="3419855" cy="292608"/>
+          </a:xfrm>
+          <a:prstGeom prst="rect">
+            <a:avLst/>
+          </a:prstGeom>
+          <a:noFill/>
+        </p:spPr>
+        <p:txBody>
+          <a:bodyPr wrap="square" lIns="73152" rIns="73152" tIns="43891" bIns="43891" anchor="t">
+            <a:spAutoFit/>
+          </a:bodyPr>
+          <a:lstStyle/>
+          <a:p>
+            <a:pPr algn="l"/>
+            <a:r>
+              <a:rPr sz="1200" b="1" i="0">
+                <a:solidFill>
+                  <a:srgbClr val="144BC4"/>
+                </a:solidFill>
+                <a:latin typeface="Calibri"/>
+              </a:rPr>
+              <a:t>Cited Work &amp; Misc</a:t>
+            </a:r>
+          </a:p>
+        </p:txBody>
+      </p:sp>
+      <p:sp>
+        <p:nvSpPr>
+          <p:cNvPr id="23" name="TextBox 22"/>
+          <p:cNvSpPr txBox="1"/>
+          <p:nvPr/>
+        </p:nvSpPr>
+        <p:spPr>
+          <a:xfrm>
+            <a:off x="8330182" y="4178808"/>
+            <a:ext cx="3383279" cy="2194560"/>
+          </a:xfrm>
+          <a:prstGeom prst="rect">
+            <a:avLst/>
+          </a:prstGeom>
+          <a:noFill/>
+        </p:spPr>
+        <p:txBody>
+          <a:bodyPr wrap="square" lIns="36576" rIns="36576" tIns="21945" bIns="21945" anchor="t">
+            <a:spAutoFit/>
+          </a:bodyPr>
+          <a:lstStyle/>
+          <a:p>
+            <a:pPr algn="l">
+              <a:spcAft>
+                <a:spcPts val="200"/>
+              </a:spcAft>
+            </a:pPr>
+            <a:r>
+              <a:rPr sz="950" b="1" i="0">
+                <a:solidFill>
+                  <a:srgbClr val="0F1B3D"/>
+                </a:solidFill>
+                <a:latin typeface="Calibri"/>
+              </a:rPr>
+              <a:t>SKILL</a:t>
+            </a:r>
+            <a:r>
+              <a:rPr sz="900" b="0" i="0">
+                <a:solidFill>
+                  <a:srgbClr val="404856"/>
+                </a:solidFill>
+                <a:latin typeface="Calibri"/>
+              </a:rPr>
+              <a:t>   layer-ensemble distillation, Interspeech 2024</a:t>
+            </a:r>
+          </a:p>
+          <a:p>
+            <a:pPr algn="l">
+              <a:spcAft>
+                <a:spcPts val="200"/>
+              </a:spcAft>
+            </a:pPr>
+            <a:r>
+              <a:rPr sz="950" b="1" i="0">
+                <a:solidFill>
+                  <a:srgbClr val="0F1B3D"/>
+                </a:solidFill>
+                <a:latin typeface="Calibri"/>
+              </a:rPr>
+              <a:t>PK-MTL</a:t>
+            </a:r>
+            <a:r>
+              <a:rPr sz="900" b="0" i="0">
+                <a:solidFill>
+                  <a:srgbClr val="404856"/>
+                </a:solidFill>
+                <a:latin typeface="Calibri"/>
+              </a:rPr>
+              <a:t>   Per-Keyword Multi-Task Learning  (arXiv:2206.13708)</a:t>
+            </a:r>
+          </a:p>
+          <a:p>
+            <a:pPr algn="l">
+              <a:spcAft>
+                <a:spcPts val="200"/>
+              </a:spcAft>
+            </a:pPr>
+            <a:r>
+              <a:rPr sz="950" b="1" i="0">
+                <a:solidFill>
+                  <a:srgbClr val="0F1B3D"/>
+                </a:solidFill>
+                <a:latin typeface="Calibri"/>
+              </a:rPr>
+              <a:t>GE2E</a:t>
+            </a:r>
+            <a:r>
+              <a:rPr sz="900" b="0" i="0">
+                <a:solidFill>
+                  <a:srgbClr val="404856"/>
+                </a:solidFill>
+                <a:latin typeface="Calibri"/>
+              </a:rPr>
+              <a:t>   Generalized End-to-End speaker loss</a:t>
+            </a:r>
+          </a:p>
+          <a:p>
+            <a:pPr algn="l">
+              <a:spcAft>
+                <a:spcPts val="200"/>
+              </a:spcAft>
+            </a:pPr>
+            <a:r>
+              <a:rPr sz="950" b="1" i="0">
+                <a:solidFill>
+                  <a:srgbClr val="0F1B3D"/>
+                </a:solidFill>
+                <a:latin typeface="Calibri"/>
+              </a:rPr>
+              <a:t>TPE</a:t>
+            </a:r>
+            <a:r>
+              <a:rPr sz="900" b="0" i="0">
+                <a:solidFill>
+                  <a:srgbClr val="404856"/>
+                </a:solidFill>
+                <a:latin typeface="Calibri"/>
+              </a:rPr>
+              <a:t>   Tree-structured Parzen Estimator (Optuna sampler)</a:t>
+            </a:r>
+          </a:p>
+          <a:p>
+            <a:pPr algn="l">
+              <a:spcAft>
+                <a:spcPts val="200"/>
+              </a:spcAft>
+            </a:pPr>
+            <a:r>
+              <a:rPr sz="950" b="1" i="0">
+                <a:solidFill>
+                  <a:srgbClr val="0F1B3D"/>
+                </a:solidFill>
+                <a:latin typeface="Calibri"/>
+              </a:rPr>
+              <a:t>LLM</a:t>
+            </a:r>
+            <a:r>
+              <a:rPr sz="900" b="0" i="0">
+                <a:solidFill>
+                  <a:srgbClr val="404856"/>
+                </a:solidFill>
+                <a:latin typeface="Calibri"/>
+              </a:rPr>
+              <a:t>   Large Language Model</a:t>
+            </a:r>
+          </a:p>
+          <a:p>
+            <a:pPr algn="l">
+              <a:spcAft>
+                <a:spcPts val="200"/>
+              </a:spcAft>
+            </a:pPr>
+            <a:r>
+              <a:rPr sz="950" b="1" i="0">
+                <a:solidFill>
+                  <a:srgbClr val="0F1B3D"/>
+                </a:solidFill>
+                <a:latin typeface="Calibri"/>
+              </a:rPr>
+              <a:t>τₛ</a:t>
+            </a:r>
+            <a:r>
+              <a:rPr sz="900" b="0" i="0">
+                <a:solidFill>
+                  <a:srgbClr val="404856"/>
+                </a:solidFill>
+                <a:latin typeface="Calibri"/>
+              </a:rPr>
+              <a:t>   speaker decision threshold (FAR-in-the-Loop target)</a:t>
+            </a:r>
+          </a:p>
+          <a:p>
+            <a:pPr algn="l">
+              <a:spcAft>
+                <a:spcPts val="200"/>
+              </a:spcAft>
+            </a:pPr>
+            <a:r>
+              <a:rPr sz="950" b="1" i="0">
+                <a:solidFill>
+                  <a:srgbClr val="0F1B3D"/>
+                </a:solidFill>
+                <a:latin typeface="Calibri"/>
+              </a:rPr>
+              <a:t>Apache-2.0, CC-BY, MIT, CPML</a:t>
+            </a:r>
+            <a:r>
+              <a:rPr sz="900" b="0" i="0">
+                <a:solidFill>
+                  <a:srgbClr val="404856"/>
+                </a:solidFill>
+                <a:latin typeface="Calibri"/>
+              </a:rPr>
+              <a:t>   open-source licence shorthands</a:t>
+            </a:r>
+          </a:p>
+        </p:txBody>
+      </p:sp>
+      <p:sp>
+        <p:nvSpPr>
+          <p:cNvPr id="24" name="TextBox 23"/>
+          <p:cNvSpPr txBox="1"/>
+          <p:nvPr/>
+        </p:nvSpPr>
+        <p:spPr>
+          <a:xfrm>
+            <a:off x="411480" y="6565392"/>
+            <a:ext cx="11368735" cy="256032"/>
+          </a:xfrm>
+          <a:prstGeom prst="rect">
+            <a:avLst/>
+          </a:prstGeom>
+          <a:noFill/>
+        </p:spPr>
+        <p:txBody>
+          <a:bodyPr wrap="square" lIns="73152" rIns="73152" tIns="43891" bIns="43891" anchor="t">
+            <a:spAutoFit/>
+          </a:bodyPr>
+          <a:lstStyle/>
+          <a:p>
+            <a:pPr algn="ctr"/>
+            <a:r>
+              <a:rPr sz="900" b="0" i="1">
+                <a:solidFill>
+                  <a:srgbClr val="6A7383"/>
+                </a:solidFill>
+                <a:latin typeface="Calibri"/>
+              </a:rPr>
+              <a:t>Reference appendix — terms used across Slides 2–17. Bolded acronym  ·  full expansion  ·  context.</a:t>
+            </a:r>
+          </a:p>
+        </p:txBody>
+      </p:sp>
+    </p:spTree>
+  </p:cSld>
+  <p:clrMapOvr>
+    <a:masterClrMapping/>
+  </p:clrMapOvr>
+</p:sld>
+</file>
+
 <file path=ppt/slides/slide2.xml><?xml version="1.0" encoding="utf-8"?>
 <p:sld xmlns:a="http://schemas.openxmlformats.org/drawingml/2006/main" xmlns:p="http://schemas.openxmlformats.org/presentationml/2006/main" xmlns:r="http://schemas.openxmlformats.org/officeDocument/2006/relationships">
   <p:cSld>
@@ -10346,7 +12311,7 @@
                 </a:solidFill>
                 <a:latin typeface="Calibri"/>
               </a:rPr>
-              <a:t>2 / 17</a:t>
+              <a:t>2 / 18</a:t>
             </a:r>
           </a:p>
         </p:txBody>
@@ -11302,7 +13267,7 @@
                 </a:solidFill>
                 <a:latin typeface="Calibri"/>
               </a:rPr>
-              <a:t>3 / 17</a:t>
+              <a:t>3 / 18</a:t>
             </a:r>
           </a:p>
         </p:txBody>
@@ -12152,7 +14117,7 @@
                 </a:solidFill>
                 <a:latin typeface="Calibri"/>
               </a:rPr>
-              <a:t>4 / 17</a:t>
+              <a:t>4 / 18</a:t>
             </a:r>
           </a:p>
         </p:txBody>
@@ -12859,7 +14824,7 @@
                 </a:solidFill>
                 <a:latin typeface="Calibri"/>
               </a:rPr>
-              <a:t>5 / 17</a:t>
+              <a:t>5 / 18</a:t>
             </a:r>
           </a:p>
         </p:txBody>
@@ -13279,7 +15244,7 @@
                 </a:solidFill>
                 <a:latin typeface="Calibri"/>
               </a:rPr>
-              <a:t>6 / 17</a:t>
+              <a:t>6 / 18</a:t>
             </a:r>
           </a:p>
         </p:txBody>
@@ -14411,7 +16376,7 @@
                 </a:solidFill>
                 <a:latin typeface="Calibri"/>
               </a:rPr>
-              <a:t>7 / 17</a:t>
+              <a:t>7 / 18</a:t>
             </a:r>
           </a:p>
         </p:txBody>
@@ -15218,7 +17183,7 @@
                 </a:solidFill>
                 <a:latin typeface="Calibri"/>
               </a:rPr>
-              <a:t>8 / 17</a:t>
+              <a:t>8 / 18</a:t>
             </a:r>
           </a:p>
         </p:txBody>
@@ -15799,7 +17764,7 @@
                 </a:solidFill>
                 <a:latin typeface="Calibri"/>
               </a:rPr>
-              <a:t>9 / 17</a:t>
+              <a:t>9 / 18</a:t>
             </a:r>
           </a:p>
         </p:txBody>
